--- a/retail/INFORME_RETAIL_SKELETON.pptx
+++ b/retail/INFORME_RETAIL_SKELETON.pptx
@@ -1048,7 +1048,7 @@
       </p:grpSpPr>
       <p:pic>
         <p:nvPicPr>
-          <p:cNvPr id="2" name="Image 0" descr="C:\01_Repositorios\13_Presentaciones\dash\retail\ppt_slides\sk_00_Formacion.png">    </p:cNvPr>
+          <p:cNvPr id="2" name="Image 0" descr="C:\01_Repositorios\13_Presentaciones\dash\retail\ppt_slides\sk_00_main.png">    </p:cNvPr>
           <p:cNvPicPr>
             <a:picLocks noChangeAspect="1"/>
           </p:cNvPicPr>
@@ -1078,24 +1078,258 @@
         </p:nvSpPr>
         <p:spPr>
           <a:xfrm>
-            <a:off x="571486" y="5808166"/>
-            <a:ext cx="11380185" cy="551548"/>
-          </a:xfrm>
-          <a:prstGeom prst="rect">
-            <a:avLst/>
-          </a:prstGeom>
-          <a:noFill/>
-          <a:ln/>
-        </p:spPr>
-        <p:txBody>
-          <a:bodyPr wrap="square" lIns="114300" tIns="171450" rIns="171450" bIns="114300" rtlCol="0" anchor="t"/>
+            <a:off x="876278" y="5931991"/>
+            <a:ext cx="11143249" cy="295396"/>
+          </a:xfrm>
+          <a:prstGeom prst="rect">
+            <a:avLst/>
+          </a:prstGeom>
+          <a:noFill/>
+          <a:ln/>
+        </p:spPr>
+        <p:txBody>
+          <a:bodyPr wrap="square" lIns="0" tIns="0" rIns="0" bIns="0" rtlCol="0" anchor="t"/>
           <a:lstStyle/>
           <a:p>
             <a:pPr algn="l" indent="0" marL="0">
               <a:buNone/>
             </a:pPr>
             <a:r>
-              <a:rPr lang="en-US" sz="960" b="1" dirty="0">
+              <a:rPr lang="en-US" sz="864" b="1" dirty="0">
+                <a:solidFill>
+                  <a:srgbClr val="333333"/>
+                </a:solidFill>
+                <a:latin typeface="Raleway" pitchFamily="34" charset="0"/>
+                <a:ea typeface="Raleway" pitchFamily="34" charset="-122"/>
+                <a:cs typeface="Raleway" pitchFamily="34" charset="-120"/>
+              </a:rPr>
+              <a:t>Logro Semestral: La reestructuración estratégica de zonas y canales de Retail (empalme con Tradicional) concentró la operación en puntos de mayor valor. Como resultado, a pesar del menor número de visitas, las ventas efectivas por PDV subieron +137% (de 17,5 a 41,5 pólizas/PDV entre ene y jun), demostrando una alta eficiencia comercial y un canal más enfocado y productivo.</a:t>
+            </a:r>
+            <a:endParaRPr lang="en-US" sz="864" dirty="0"/>
+          </a:p>
+        </p:txBody>
+      </p:sp>
+      <p:sp>
+        <p:nvSpPr>
+          <p:cNvPr id="4" name="Text 1"/>
+          <p:cNvSpPr/>
+          <p:nvPr/>
+        </p:nvSpPr>
+        <p:spPr>
+          <a:xfrm>
+            <a:off x="723882" y="5132040"/>
+            <a:ext cx="4825364" cy="128016"/>
+          </a:xfrm>
+          <a:prstGeom prst="rect">
+            <a:avLst/>
+          </a:prstGeom>
+          <a:noFill/>
+          <a:ln/>
+        </p:spPr>
+        <p:txBody>
+          <a:bodyPr wrap="square" lIns="0" tIns="0" rIns="0" bIns="0" rtlCol="0" anchor="t"/>
+          <a:lstStyle/>
+          <a:p>
+            <a:pPr algn="l" indent="0" marL="0">
+              <a:buNone/>
+            </a:pPr>
+            <a:r>
+              <a:rPr lang="en-US" sz="696" dirty="0">
+                <a:solidFill>
+                  <a:srgbClr val="9098B0"/>
+                </a:solidFill>
+                <a:latin typeface="Raleway" pitchFamily="34" charset="0"/>
+                <a:ea typeface="Raleway" pitchFamily="34" charset="-122"/>
+                <a:cs typeface="Raleway" pitchFamily="34" charset="-120"/>
+              </a:rPr>
+              <a:t>* Planta = gestores comerciales con actividad transaccional registrados en el "Como vamos" (cierres mensuales).</a:t>
+            </a:r>
+            <a:endParaRPr lang="en-US" sz="696" dirty="0"/>
+          </a:p>
+        </p:txBody>
+      </p:sp>
+      <p:sp>
+        <p:nvSpPr>
+          <p:cNvPr id="5" name="Text 2"/>
+          <p:cNvSpPr/>
+          <p:nvPr/>
+        </p:nvSpPr>
+        <p:spPr>
+          <a:xfrm>
+            <a:off x="6314917" y="5132040"/>
+            <a:ext cx="2628484" cy="128016"/>
+          </a:xfrm>
+          <a:prstGeom prst="rect">
+            <a:avLst/>
+          </a:prstGeom>
+          <a:noFill/>
+          <a:ln/>
+        </p:spPr>
+        <p:txBody>
+          <a:bodyPr wrap="square" lIns="0" tIns="0" rIns="0" bIns="0" rtlCol="0" anchor="t"/>
+          <a:lstStyle/>
+          <a:p>
+            <a:pPr algn="l" indent="0" marL="0">
+              <a:buNone/>
+            </a:pPr>
+            <a:r>
+              <a:rPr lang="en-US" sz="696" dirty="0">
+                <a:solidFill>
+                  <a:srgbClr val="9098B0"/>
+                </a:solidFill>
+                <a:latin typeface="Raleway" pitchFamily="34" charset="0"/>
+                <a:ea typeface="Raleway" pitchFamily="34" charset="-122"/>
+                <a:cs typeface="Raleway" pitchFamily="34" charset="-120"/>
+              </a:rPr>
+              <a:t>La concentración de visitas potencia la efectividad del canal.</a:t>
+            </a:r>
+            <a:endParaRPr lang="en-US" sz="696" dirty="0"/>
+          </a:p>
+        </p:txBody>
+      </p:sp>
+      <p:sp>
+        <p:nvSpPr>
+          <p:cNvPr id="6" name="Text 3"/>
+          <p:cNvSpPr/>
+          <p:nvPr/>
+        </p:nvSpPr>
+        <p:spPr>
+          <a:xfrm>
+            <a:off x="781030" y="1421160"/>
+            <a:ext cx="2074925" cy="128016"/>
+          </a:xfrm>
+          <a:prstGeom prst="rect">
+            <a:avLst/>
+          </a:prstGeom>
+          <a:noFill/>
+          <a:ln/>
+        </p:spPr>
+        <p:txBody>
+          <a:bodyPr wrap="square" lIns="0" tIns="0" rIns="0" bIns="0" rtlCol="0" anchor="t"/>
+          <a:lstStyle/>
+          <a:p>
+            <a:pPr algn="l" indent="0" marL="0">
+              <a:buNone/>
+            </a:pPr>
+            <a:r>
+              <a:rPr lang="en-US" sz="696" dirty="0">
+                <a:solidFill>
+                  <a:srgbClr val="9098B0"/>
+                </a:solidFill>
+                <a:latin typeface="Raleway" pitchFamily="34" charset="0"/>
+                <a:ea typeface="Raleway" pitchFamily="34" charset="-122"/>
+                <a:cs typeface="Raleway" pitchFamily="34" charset="-120"/>
+              </a:rPr>
+              <a:t>Total de formación acumulada (Ene - Jun 2026)</a:t>
+            </a:r>
+            <a:endParaRPr lang="en-US" sz="696" dirty="0"/>
+          </a:p>
+        </p:txBody>
+      </p:sp>
+      <p:sp>
+        <p:nvSpPr>
+          <p:cNvPr id="7" name="Text 4"/>
+          <p:cNvSpPr/>
+          <p:nvPr/>
+        </p:nvSpPr>
+        <p:spPr>
+          <a:xfrm>
+            <a:off x="571486" y="209550"/>
+            <a:ext cx="3817317" cy="196215"/>
+          </a:xfrm>
+          <a:prstGeom prst="rect">
+            <a:avLst/>
+          </a:prstGeom>
+          <a:noFill/>
+          <a:ln/>
+        </p:spPr>
+        <p:txBody>
+          <a:bodyPr wrap="square" lIns="0" tIns="0" rIns="0" bIns="0" rtlCol="0" anchor="t"/>
+          <a:lstStyle/>
+          <a:p>
+            <a:pPr algn="l" indent="0" marL="0">
+              <a:buNone/>
+            </a:pPr>
+            <a:r>
+              <a:rPr lang="en-US" sz="1260" b="1" dirty="0">
+                <a:solidFill>
+                  <a:srgbClr val="FFFFFF"/>
+                </a:solidFill>
+                <a:latin typeface="Raleway" pitchFamily="34" charset="0"/>
+                <a:ea typeface="Raleway" pitchFamily="34" charset="-122"/>
+                <a:cs typeface="Raleway" pitchFamily="34" charset="-120"/>
+              </a:rPr>
+              <a:t>Ejecución de Visitas de Formación · 1S 2026</a:t>
+            </a:r>
+            <a:endParaRPr lang="en-US" sz="1260" dirty="0"/>
+          </a:p>
+        </p:txBody>
+      </p:sp>
+      <p:sp>
+        <p:nvSpPr>
+          <p:cNvPr id="8" name="Text 5"/>
+          <p:cNvSpPr/>
+          <p:nvPr/>
+        </p:nvSpPr>
+        <p:spPr>
+          <a:xfrm>
+            <a:off x="6362541" y="1421160"/>
+            <a:ext cx="1590621" cy="128016"/>
+          </a:xfrm>
+          <a:prstGeom prst="rect">
+            <a:avLst/>
+          </a:prstGeom>
+          <a:noFill/>
+          <a:ln/>
+        </p:spPr>
+        <p:txBody>
+          <a:bodyPr wrap="square" lIns="0" tIns="0" rIns="0" bIns="0" rtlCol="0" anchor="t"/>
+          <a:lstStyle/>
+          <a:p>
+            <a:pPr algn="l" indent="0" marL="0">
+              <a:buNone/>
+            </a:pPr>
+            <a:r>
+              <a:rPr lang="en-US" sz="696" dirty="0">
+                <a:solidFill>
+                  <a:srgbClr val="9098B0"/>
+                </a:solidFill>
+                <a:latin typeface="Raleway" pitchFamily="34" charset="0"/>
+                <a:ea typeface="Raleway" pitchFamily="34" charset="-122"/>
+                <a:cs typeface="Raleway" pitchFamily="34" charset="-120"/>
+              </a:rPr>
+              <a:t>De 17.7 a 42.0 pólizas por PDV activo</a:t>
+            </a:r>
+            <a:endParaRPr lang="en-US" sz="696" dirty="0"/>
+          </a:p>
+        </p:txBody>
+      </p:sp>
+      <p:sp>
+        <p:nvSpPr>
+          <p:cNvPr id="9" name="Text 6"/>
+          <p:cNvSpPr/>
+          <p:nvPr/>
+        </p:nvSpPr>
+        <p:spPr>
+          <a:xfrm>
+            <a:off x="876278" y="2049810"/>
+            <a:ext cx="2316920" cy="147161"/>
+          </a:xfrm>
+          <a:prstGeom prst="rect">
+            <a:avLst/>
+          </a:prstGeom>
+          <a:noFill/>
+          <a:ln/>
+        </p:spPr>
+        <p:txBody>
+          <a:bodyPr wrap="square" lIns="0" tIns="0" rIns="0" bIns="0" rtlCol="0" anchor="t"/>
+          <a:lstStyle/>
+          <a:p>
+            <a:pPr algn="l" indent="0" marL="0">
+              <a:buNone/>
+            </a:pPr>
+            <a:r>
+              <a:rPr lang="en-US" sz="936" b="1" dirty="0">
                 <a:solidFill>
                   <a:srgbClr val="120180"/>
                 </a:solidFill>
@@ -1103,22 +1337,22 @@
                 <a:ea typeface="Raleway" pitchFamily="34" charset="-122"/>
                 <a:cs typeface="Raleway" pitchFamily="34" charset="-120"/>
               </a:rPr>
-              <a:t>Logro Semestral: La reestructuración estratégica de zonas y canales de Retail (empalme con Tradicional) concentró la operación en puntos de mayor valor. Como resultado, a pesar del menor número de visitas, las ventas efectivas por PDV subieron +137% (de 17,5 a 41,5 pólizas/PDV entre ene y jun), demostrando una alta eficiencia comercial y un canal más enfocado y productivo.</a:t>
-            </a:r>
-            <a:endParaRPr lang="en-US" sz="960" dirty="0"/>
-          </a:p>
-        </p:txBody>
-      </p:sp>
-      <p:sp>
-        <p:nvSpPr>
-          <p:cNvPr id="4" name="Text 1"/>
-          <p:cNvSpPr/>
-          <p:nvPr/>
-        </p:nvSpPr>
-        <p:spPr>
-          <a:xfrm>
-            <a:off x="723882" y="5132040"/>
-            <a:ext cx="5307483" cy="128016"/>
+              <a:t>Planta activa vs. formaciones por mes</a:t>
+            </a:r>
+            <a:endParaRPr lang="en-US" sz="936" dirty="0"/>
+          </a:p>
+        </p:txBody>
+      </p:sp>
+      <p:sp>
+        <p:nvSpPr>
+          <p:cNvPr id="10" name="Text 7"/>
+          <p:cNvSpPr/>
+          <p:nvPr/>
+        </p:nvSpPr>
+        <p:spPr>
+          <a:xfrm>
+            <a:off x="6467313" y="2049810"/>
+            <a:ext cx="1750583" cy="147161"/>
           </a:xfrm>
           <a:prstGeom prst="rect">
             <a:avLst/>
@@ -1134,7 +1368,46 @@
               <a:buNone/>
             </a:pPr>
             <a:r>
-              <a:rPr lang="en-US" sz="696" dirty="0">
+              <a:rPr lang="en-US" sz="936" b="1" dirty="0">
+                <a:solidFill>
+                  <a:srgbClr val="120180"/>
+                </a:solidFill>
+                <a:latin typeface="Raleway" pitchFamily="34" charset="0"/>
+                <a:ea typeface="Raleway" pitchFamily="34" charset="-122"/>
+                <a:cs typeface="Raleway" pitchFamily="34" charset="-120"/>
+              </a:rPr>
+              <a:t>Evolución de visitas por mes</a:t>
+            </a:r>
+            <a:endParaRPr lang="en-US" sz="936" dirty="0"/>
+          </a:p>
+        </p:txBody>
+      </p:sp>
+      <p:sp>
+        <p:nvSpPr>
+          <p:cNvPr id="11" name="Text 8"/>
+          <p:cNvSpPr/>
+          <p:nvPr/>
+        </p:nvSpPr>
+        <p:spPr>
+          <a:xfrm>
+            <a:off x="6362541" y="1009650"/>
+            <a:ext cx="1615073" cy="128016"/>
+          </a:xfrm>
+          <a:prstGeom prst="rect">
+            <a:avLst/>
+          </a:prstGeom>
+          <a:noFill/>
+          <a:ln/>
+        </p:spPr>
+        <p:txBody>
+          <a:bodyPr wrap="square" lIns="0" tIns="0" rIns="0" bIns="0" rtlCol="0" anchor="t"/>
+          <a:lstStyle/>
+          <a:p>
+            <a:pPr algn="l" indent="0" marL="0">
+              <a:buNone/>
+            </a:pPr>
+            <a:r>
+              <a:rPr lang="en-US" sz="780" b="1" dirty="0">
                 <a:solidFill>
                   <a:srgbClr val="9098B0"/>
                 </a:solidFill>
@@ -1142,22 +1415,22 @@
                 <a:ea typeface="Raleway" pitchFamily="34" charset="-122"/>
                 <a:cs typeface="Raleway" pitchFamily="34" charset="-120"/>
               </a:rPr>
-              <a:t>* Planta = gestores comerciales con actividad transaccional registrados en el "Como vamos" (cierres mensuales).</a:t>
-            </a:r>
-            <a:endParaRPr lang="en-US" sz="696" dirty="0"/>
-          </a:p>
-        </p:txBody>
-      </p:sp>
-      <p:sp>
-        <p:nvSpPr>
-          <p:cNvPr id="5" name="Text 2"/>
-          <p:cNvSpPr/>
-          <p:nvPr/>
-        </p:nvSpPr>
-        <p:spPr>
-          <a:xfrm>
-            <a:off x="6314917" y="5132040"/>
-            <a:ext cx="5307483" cy="128016"/>
+              <a:t>Eficiencia por PDV Activo</a:t>
+            </a:r>
+            <a:endParaRPr lang="en-US" sz="780" dirty="0"/>
+          </a:p>
+        </p:txBody>
+      </p:sp>
+      <p:sp>
+        <p:nvSpPr>
+          <p:cNvPr id="12" name="Text 9"/>
+          <p:cNvSpPr/>
+          <p:nvPr/>
+        </p:nvSpPr>
+        <p:spPr>
+          <a:xfrm>
+            <a:off x="781030" y="1009650"/>
+            <a:ext cx="1337268" cy="128016"/>
           </a:xfrm>
           <a:prstGeom prst="rect">
             <a:avLst/>
@@ -1173,7 +1446,7 @@
               <a:buNone/>
             </a:pPr>
             <a:r>
-              <a:rPr lang="en-US" sz="696" dirty="0">
+              <a:rPr lang="en-US" sz="780" b="1" dirty="0">
                 <a:solidFill>
                   <a:srgbClr val="9098B0"/>
                 </a:solidFill>
@@ -1181,77 +1454,38 @@
                 <a:ea typeface="Raleway" pitchFamily="34" charset="-122"/>
                 <a:cs typeface="Raleway" pitchFamily="34" charset="-120"/>
               </a:rPr>
-              <a:t>La concentración de visitas potencia la efectividad del canal.</a:t>
-            </a:r>
-            <a:endParaRPr lang="en-US" sz="696" dirty="0"/>
-          </a:p>
-        </p:txBody>
-      </p:sp>
-      <p:sp>
-        <p:nvSpPr>
-          <p:cNvPr id="6" name="Text 3"/>
-          <p:cNvSpPr/>
-          <p:nvPr/>
-        </p:nvSpPr>
-        <p:spPr>
-          <a:xfrm>
-            <a:off x="781030" y="1421160"/>
-            <a:ext cx="5238810" cy="128016"/>
-          </a:xfrm>
-          <a:prstGeom prst="rect">
-            <a:avLst/>
-          </a:prstGeom>
-          <a:noFill/>
-          <a:ln/>
-        </p:spPr>
-        <p:txBody>
-          <a:bodyPr wrap="square" lIns="0" tIns="0" rIns="0" bIns="0" rtlCol="0" anchor="t"/>
-          <a:lstStyle/>
-          <a:p>
-            <a:pPr algn="l" indent="0" marL="0">
-              <a:buNone/>
-            </a:pPr>
-            <a:r>
-              <a:rPr lang="en-US" sz="696" dirty="0">
-                <a:solidFill>
-                  <a:srgbClr val="9098B0"/>
-                </a:solidFill>
-                <a:latin typeface="Raleway" pitchFamily="34" charset="0"/>
-                <a:ea typeface="Raleway" pitchFamily="34" charset="-122"/>
-                <a:cs typeface="Raleway" pitchFamily="34" charset="-120"/>
-              </a:rPr>
-              <a:t>Total de formación acumulada (Ene - Jun 2026)</a:t>
-            </a:r>
-            <a:endParaRPr lang="en-US" sz="696" dirty="0"/>
-          </a:p>
-        </p:txBody>
-      </p:sp>
-      <p:sp>
-        <p:nvSpPr>
-          <p:cNvPr id="7" name="Text 4"/>
-          <p:cNvSpPr/>
-          <p:nvPr/>
-        </p:nvSpPr>
-        <p:spPr>
-          <a:xfrm>
-            <a:off x="571486" y="209550"/>
-            <a:ext cx="3691509" cy="196215"/>
-          </a:xfrm>
-          <a:prstGeom prst="rect">
-            <a:avLst/>
-          </a:prstGeom>
-          <a:noFill/>
-          <a:ln/>
-        </p:spPr>
-        <p:txBody>
-          <a:bodyPr wrap="square" lIns="0" tIns="0" rIns="0" bIns="0" rtlCol="0" anchor="t"/>
-          <a:lstStyle/>
-          <a:p>
-            <a:pPr algn="l" indent="0" marL="0">
-              <a:buNone/>
-            </a:pPr>
-            <a:r>
-              <a:rPr lang="en-US" sz="1260" b="1" dirty="0">
+              <a:t>Visitas Realizadas 1S</a:t>
+            </a:r>
+            <a:endParaRPr lang="en-US" sz="780" dirty="0"/>
+          </a:p>
+        </p:txBody>
+      </p:sp>
+      <p:sp>
+        <p:nvSpPr>
+          <p:cNvPr id="13" name="Text 10"/>
+          <p:cNvSpPr/>
+          <p:nvPr/>
+        </p:nvSpPr>
+        <p:spPr>
+          <a:xfrm>
+            <a:off x="1363517" y="2302245"/>
+            <a:ext cx="1262489" cy="228600"/>
+          </a:xfrm>
+          <a:prstGeom prst="rect">
+            <a:avLst/>
+          </a:prstGeom>
+          <a:noFill/>
+          <a:ln/>
+        </p:spPr>
+        <p:txBody>
+          <a:bodyPr wrap="square" lIns="47625" tIns="114300" rIns="114300" bIns="47625" rtlCol="0" anchor="ctr"/>
+          <a:lstStyle/>
+          <a:p>
+            <a:pPr algn="r" indent="0" marL="0">
+              <a:buNone/>
+            </a:pPr>
+            <a:r>
+              <a:rPr lang="en-US" sz="888" b="1" dirty="0">
                 <a:solidFill>
                   <a:srgbClr val="FFFFFF"/>
                 </a:solidFill>
@@ -1259,217 +1493,22 @@
                 <a:ea typeface="Raleway" pitchFamily="34" charset="-122"/>
                 <a:cs typeface="Raleway" pitchFamily="34" charset="-120"/>
               </a:rPr>
-              <a:t>Ejecución de Visitas de Formación · 1S 2026</a:t>
-            </a:r>
-            <a:endParaRPr lang="en-US" sz="1260" dirty="0"/>
-          </a:p>
-        </p:txBody>
-      </p:sp>
-      <p:sp>
-        <p:nvSpPr>
-          <p:cNvPr id="8" name="Text 5"/>
-          <p:cNvSpPr/>
-          <p:nvPr/>
-        </p:nvSpPr>
-        <p:spPr>
-          <a:xfrm>
-            <a:off x="6362541" y="1421160"/>
-            <a:ext cx="5238810" cy="128016"/>
-          </a:xfrm>
-          <a:prstGeom prst="rect">
-            <a:avLst/>
-          </a:prstGeom>
-          <a:noFill/>
-          <a:ln/>
-        </p:spPr>
-        <p:txBody>
-          <a:bodyPr wrap="square" lIns="0" tIns="0" rIns="0" bIns="0" rtlCol="0" anchor="t"/>
-          <a:lstStyle/>
-          <a:p>
-            <a:pPr algn="l" indent="0" marL="0">
-              <a:buNone/>
-            </a:pPr>
-            <a:r>
-              <a:rPr lang="en-US" sz="696" dirty="0">
-                <a:solidFill>
-                  <a:srgbClr val="9098B0"/>
-                </a:solidFill>
-                <a:latin typeface="Raleway" pitchFamily="34" charset="0"/>
-                <a:ea typeface="Raleway" pitchFamily="34" charset="-122"/>
-                <a:cs typeface="Raleway" pitchFamily="34" charset="-120"/>
-              </a:rPr>
-              <a:t>De 17.7 a 42.0 pólizas por PDV activo</a:t>
-            </a:r>
-            <a:endParaRPr lang="en-US" sz="696" dirty="0"/>
-          </a:p>
-        </p:txBody>
-      </p:sp>
-      <p:sp>
-        <p:nvSpPr>
-          <p:cNvPr id="9" name="Text 6"/>
-          <p:cNvSpPr/>
-          <p:nvPr/>
-        </p:nvSpPr>
-        <p:spPr>
-          <a:xfrm>
-            <a:off x="723882" y="2040285"/>
-            <a:ext cx="5307483" cy="206026"/>
-          </a:xfrm>
-          <a:prstGeom prst="rect">
-            <a:avLst/>
-          </a:prstGeom>
-          <a:noFill/>
-          <a:ln/>
-        </p:spPr>
-        <p:txBody>
-          <a:bodyPr wrap="square" lIns="0" tIns="0" rIns="0" bIns="38100" rtlCol="0" anchor="t"/>
-          <a:lstStyle/>
-          <a:p>
-            <a:pPr algn="l" indent="0" marL="0">
-              <a:buNone/>
-            </a:pPr>
-            <a:r>
-              <a:rPr lang="en-US" sz="936" b="1" dirty="0">
-                <a:solidFill>
-                  <a:srgbClr val="120180"/>
-                </a:solidFill>
-                <a:latin typeface="Raleway" pitchFamily="34" charset="0"/>
-                <a:ea typeface="Raleway" pitchFamily="34" charset="-122"/>
-                <a:cs typeface="Raleway" pitchFamily="34" charset="-120"/>
-              </a:rPr>
-              <a:t>Planta activa vs. formaciones por mes</a:t>
-            </a:r>
-            <a:endParaRPr lang="en-US" sz="936" dirty="0"/>
-          </a:p>
-        </p:txBody>
-      </p:sp>
-      <p:sp>
-        <p:nvSpPr>
-          <p:cNvPr id="10" name="Text 7"/>
-          <p:cNvSpPr/>
-          <p:nvPr/>
-        </p:nvSpPr>
-        <p:spPr>
-          <a:xfrm>
-            <a:off x="6314917" y="2040285"/>
-            <a:ext cx="5307483" cy="206026"/>
-          </a:xfrm>
-          <a:prstGeom prst="rect">
-            <a:avLst/>
-          </a:prstGeom>
-          <a:noFill/>
-          <a:ln/>
-        </p:spPr>
-        <p:txBody>
-          <a:bodyPr wrap="square" lIns="0" tIns="0" rIns="0" bIns="38100" rtlCol="0" anchor="t"/>
-          <a:lstStyle/>
-          <a:p>
-            <a:pPr algn="l" indent="0" marL="0">
-              <a:buNone/>
-            </a:pPr>
-            <a:r>
-              <a:rPr lang="en-US" sz="936" b="1" dirty="0">
-                <a:solidFill>
-                  <a:srgbClr val="120180"/>
-                </a:solidFill>
-                <a:latin typeface="Raleway" pitchFamily="34" charset="0"/>
-                <a:ea typeface="Raleway" pitchFamily="34" charset="-122"/>
-                <a:cs typeface="Raleway" pitchFamily="34" charset="-120"/>
-              </a:rPr>
-              <a:t>Evolución de visitas por mes</a:t>
-            </a:r>
-            <a:endParaRPr lang="en-US" sz="936" dirty="0"/>
-          </a:p>
-        </p:txBody>
-      </p:sp>
-      <p:sp>
-        <p:nvSpPr>
-          <p:cNvPr id="11" name="Text 8"/>
-          <p:cNvSpPr/>
-          <p:nvPr/>
-        </p:nvSpPr>
-        <p:spPr>
-          <a:xfrm>
-            <a:off x="6362541" y="1009650"/>
-            <a:ext cx="5238810" cy="128016"/>
-          </a:xfrm>
-          <a:prstGeom prst="rect">
-            <a:avLst/>
-          </a:prstGeom>
-          <a:noFill/>
-          <a:ln/>
-        </p:spPr>
-        <p:txBody>
-          <a:bodyPr wrap="square" lIns="0" tIns="0" rIns="0" bIns="0" rtlCol="0" anchor="t"/>
-          <a:lstStyle/>
-          <a:p>
-            <a:pPr algn="l" indent="0" marL="0">
-              <a:buNone/>
-            </a:pPr>
-            <a:r>
-              <a:rPr lang="en-US" sz="780" b="1" dirty="0">
-                <a:solidFill>
-                  <a:srgbClr val="9098B0"/>
-                </a:solidFill>
-                <a:latin typeface="Raleway" pitchFamily="34" charset="0"/>
-                <a:ea typeface="Raleway" pitchFamily="34" charset="-122"/>
-                <a:cs typeface="Raleway" pitchFamily="34" charset="-120"/>
-              </a:rPr>
-              <a:t>Eficiencia por PDV Activo</a:t>
-            </a:r>
-            <a:endParaRPr lang="en-US" sz="780" dirty="0"/>
-          </a:p>
-        </p:txBody>
-      </p:sp>
-      <p:sp>
-        <p:nvSpPr>
-          <p:cNvPr id="12" name="Text 9"/>
-          <p:cNvSpPr/>
-          <p:nvPr/>
-        </p:nvSpPr>
-        <p:spPr>
-          <a:xfrm>
-            <a:off x="781030" y="1009650"/>
-            <a:ext cx="5238810" cy="128016"/>
-          </a:xfrm>
-          <a:prstGeom prst="rect">
-            <a:avLst/>
-          </a:prstGeom>
-          <a:noFill/>
-          <a:ln/>
-        </p:spPr>
-        <p:txBody>
-          <a:bodyPr wrap="square" lIns="0" tIns="0" rIns="0" bIns="0" rtlCol="0" anchor="t"/>
-          <a:lstStyle/>
-          <a:p>
-            <a:pPr algn="l" indent="0" marL="0">
-              <a:buNone/>
-            </a:pPr>
-            <a:r>
-              <a:rPr lang="en-US" sz="780" b="1" dirty="0">
-                <a:solidFill>
-                  <a:srgbClr val="9098B0"/>
-                </a:solidFill>
-                <a:latin typeface="Raleway" pitchFamily="34" charset="0"/>
-                <a:ea typeface="Raleway" pitchFamily="34" charset="-122"/>
-                <a:cs typeface="Raleway" pitchFamily="34" charset="-120"/>
-              </a:rPr>
-              <a:t>Visitas Realizadas 1S</a:t>
-            </a:r>
-            <a:endParaRPr lang="en-US" sz="780" dirty="0"/>
-          </a:p>
-        </p:txBody>
-      </p:sp>
-      <p:sp>
-        <p:nvSpPr>
-          <p:cNvPr id="13" name="Text 10"/>
-          <p:cNvSpPr/>
-          <p:nvPr/>
-        </p:nvSpPr>
-        <p:spPr>
-          <a:xfrm>
-            <a:off x="1400289" y="2302245"/>
-            <a:ext cx="1262489" cy="228600"/>
+              <a:t>Planta Gestores</a:t>
+            </a:r>
+            <a:endParaRPr lang="en-US" sz="888" dirty="0"/>
+          </a:p>
+        </p:txBody>
+      </p:sp>
+      <p:sp>
+        <p:nvSpPr>
+          <p:cNvPr id="14" name="Text 11"/>
+          <p:cNvSpPr/>
+          <p:nvPr/>
+        </p:nvSpPr>
+        <p:spPr>
+          <a:xfrm>
+            <a:off x="3606634" y="2302245"/>
+            <a:ext cx="1123303" cy="228600"/>
           </a:xfrm>
           <a:prstGeom prst="rect">
             <a:avLst/>
@@ -1493,22 +1532,22 @@
                 <a:ea typeface="Raleway" pitchFamily="34" charset="-122"/>
                 <a:cs typeface="Raleway" pitchFamily="34" charset="-120"/>
               </a:rPr>
-              <a:t>Planta Gestores</a:t>
-            </a:r>
-            <a:endParaRPr lang="en-US" sz="888" dirty="0"/>
-          </a:p>
-        </p:txBody>
-      </p:sp>
-      <p:sp>
-        <p:nvSpPr>
-          <p:cNvPr id="14" name="Text 11"/>
-          <p:cNvSpPr/>
-          <p:nvPr/>
-        </p:nvSpPr>
-        <p:spPr>
-          <a:xfrm>
-            <a:off x="3639352" y="2302245"/>
-            <a:ext cx="1123303" cy="228600"/>
+              <a:t>PDV Visitados</a:t>
+            </a:r>
+            <a:endParaRPr lang="en-US" sz="888" dirty="0"/>
+          </a:p>
+        </p:txBody>
+      </p:sp>
+      <p:sp>
+        <p:nvSpPr>
+          <p:cNvPr id="15" name="Text 12"/>
+          <p:cNvSpPr/>
+          <p:nvPr/>
+        </p:nvSpPr>
+        <p:spPr>
+          <a:xfrm>
+            <a:off x="4695532" y="2302245"/>
+            <a:ext cx="1181246" cy="228600"/>
           </a:xfrm>
           <a:prstGeom prst="rect">
             <a:avLst/>
@@ -1532,45 +1571,6 @@
                 <a:ea typeface="Raleway" pitchFamily="34" charset="-122"/>
                 <a:cs typeface="Raleway" pitchFamily="34" charset="-120"/>
               </a:rPr>
-              <a:t>PDV Visitados</a:t>
-            </a:r>
-            <a:endParaRPr lang="en-US" sz="888" dirty="0"/>
-          </a:p>
-        </p:txBody>
-      </p:sp>
-      <p:sp>
-        <p:nvSpPr>
-          <p:cNvPr id="15" name="Text 12"/>
-          <p:cNvSpPr/>
-          <p:nvPr/>
-        </p:nvSpPr>
-        <p:spPr>
-          <a:xfrm>
-            <a:off x="4729937" y="2302245"/>
-            <a:ext cx="1181246" cy="228600"/>
-          </a:xfrm>
-          <a:prstGeom prst="rect">
-            <a:avLst/>
-          </a:prstGeom>
-          <a:noFill/>
-          <a:ln/>
-        </p:spPr>
-        <p:txBody>
-          <a:bodyPr wrap="square" lIns="47625" tIns="114300" rIns="114300" bIns="47625" rtlCol="0" anchor="ctr"/>
-          <a:lstStyle/>
-          <a:p>
-            <a:pPr algn="r" indent="0" marL="0">
-              <a:buNone/>
-            </a:pPr>
-            <a:r>
-              <a:rPr lang="en-US" sz="888" b="1" dirty="0">
-                <a:solidFill>
-                  <a:srgbClr val="FFFFFF"/>
-                </a:solidFill>
-                <a:latin typeface="Raleway" pitchFamily="34" charset="0"/>
-                <a:ea typeface="Raleway" pitchFamily="34" charset="-122"/>
-                <a:cs typeface="Raleway" pitchFamily="34" charset="-120"/>
-              </a:rPr>
               <a:t>% Capacitados</a:t>
             </a:r>
             <a:endParaRPr lang="en-US" sz="888" dirty="0"/>
@@ -1585,7 +1585,7 @@
         </p:nvSpPr>
         <p:spPr>
           <a:xfrm>
-            <a:off x="2626007" y="2302245"/>
+            <a:off x="2595606" y="2302245"/>
             <a:ext cx="1043746" cy="228600"/>
           </a:xfrm>
           <a:prstGeom prst="rect">
@@ -1663,8 +1663,8 @@
         </p:nvSpPr>
         <p:spPr>
           <a:xfrm>
-            <a:off x="6362541" y="1162050"/>
-            <a:ext cx="5238810" cy="227640"/>
+            <a:off x="6362541" y="1143000"/>
+            <a:ext cx="752948" cy="264890"/>
           </a:xfrm>
           <a:prstGeom prst="rect">
             <a:avLst/>
@@ -1780,7 +1780,7 @@
         </p:nvSpPr>
         <p:spPr>
           <a:xfrm>
-            <a:off x="1400289" y="2530845"/>
+            <a:off x="1363517" y="2530845"/>
             <a:ext cx="1262489" cy="242888"/>
           </a:xfrm>
           <a:prstGeom prst="rect">
@@ -1819,7 +1819,7 @@
         </p:nvSpPr>
         <p:spPr>
           <a:xfrm>
-            <a:off x="4729937" y="2530845"/>
+            <a:off x="4695532" y="2530845"/>
             <a:ext cx="1181246" cy="242888"/>
           </a:xfrm>
           <a:prstGeom prst="rect">
@@ -1836,9 +1836,9 @@
               <a:buNone/>
             </a:pPr>
             <a:r>
-              <a:rPr lang="en-US" sz="864" dirty="0">
-                <a:solidFill>
-                  <a:srgbClr val="333333"/>
+              <a:rPr lang="en-US" sz="816" b="1" dirty="0">
+                <a:solidFill>
+                  <a:srgbClr val="008060"/>
                 </a:solidFill>
                 <a:latin typeface="Raleway" pitchFamily="34" charset="0"/>
                 <a:ea typeface="Raleway" pitchFamily="34" charset="-122"/>
@@ -1846,7 +1846,7 @@
               </a:rPr>
               <a:t>48%</a:t>
             </a:r>
-            <a:endParaRPr lang="en-US" sz="864" dirty="0"/>
+            <a:endParaRPr lang="en-US" sz="816" dirty="0"/>
           </a:p>
         </p:txBody>
       </p:sp>
@@ -1897,7 +1897,7 @@
         </p:nvSpPr>
         <p:spPr>
           <a:xfrm>
-            <a:off x="1400289" y="2773733"/>
+            <a:off x="1363517" y="2773733"/>
             <a:ext cx="1262489" cy="247650"/>
           </a:xfrm>
           <a:prstGeom prst="rect">
@@ -1936,7 +1936,7 @@
         </p:nvSpPr>
         <p:spPr>
           <a:xfrm>
-            <a:off x="4729937" y="2773733"/>
+            <a:off x="4695532" y="2773733"/>
             <a:ext cx="1181246" cy="247650"/>
           </a:xfrm>
           <a:prstGeom prst="rect">
@@ -1953,9 +1953,9 @@
               <a:buNone/>
             </a:pPr>
             <a:r>
-              <a:rPr lang="en-US" sz="864" dirty="0">
-                <a:solidFill>
-                  <a:srgbClr val="333333"/>
+              <a:rPr lang="en-US" sz="816" b="1" dirty="0">
+                <a:solidFill>
+                  <a:srgbClr val="8A6200"/>
                 </a:solidFill>
                 <a:latin typeface="Raleway" pitchFamily="34" charset="0"/>
                 <a:ea typeface="Raleway" pitchFamily="34" charset="-122"/>
@@ -1963,7 +1963,7 @@
               </a:rPr>
               <a:t>45%</a:t>
             </a:r>
-            <a:endParaRPr lang="en-US" sz="864" dirty="0"/>
+            <a:endParaRPr lang="en-US" sz="816" dirty="0"/>
           </a:p>
         </p:txBody>
       </p:sp>
@@ -2014,7 +2014,7 @@
         </p:nvSpPr>
         <p:spPr>
           <a:xfrm>
-            <a:off x="1400289" y="3021383"/>
+            <a:off x="1363517" y="3021383"/>
             <a:ext cx="1262489" cy="247650"/>
           </a:xfrm>
           <a:prstGeom prst="rect">
@@ -2053,7 +2053,7 @@
         </p:nvSpPr>
         <p:spPr>
           <a:xfrm>
-            <a:off x="4729937" y="3021383"/>
+            <a:off x="4695532" y="3021383"/>
             <a:ext cx="1181246" cy="247650"/>
           </a:xfrm>
           <a:prstGeom prst="rect">
@@ -2070,9 +2070,9 @@
               <a:buNone/>
             </a:pPr>
             <a:r>
-              <a:rPr lang="en-US" sz="864" dirty="0">
-                <a:solidFill>
-                  <a:srgbClr val="333333"/>
+              <a:rPr lang="en-US" sz="816" b="1" dirty="0">
+                <a:solidFill>
+                  <a:srgbClr val="008060"/>
                 </a:solidFill>
                 <a:latin typeface="Raleway" pitchFamily="34" charset="0"/>
                 <a:ea typeface="Raleway" pitchFamily="34" charset="-122"/>
@@ -2080,7 +2080,7 @@
               </a:rPr>
               <a:t>53%</a:t>
             </a:r>
-            <a:endParaRPr lang="en-US" sz="864" dirty="0"/>
+            <a:endParaRPr lang="en-US" sz="816" dirty="0"/>
           </a:p>
         </p:txBody>
       </p:sp>
@@ -2131,7 +2131,7 @@
         </p:nvSpPr>
         <p:spPr>
           <a:xfrm>
-            <a:off x="1400289" y="3269033"/>
+            <a:off x="1363517" y="3269033"/>
             <a:ext cx="1262489" cy="247650"/>
           </a:xfrm>
           <a:prstGeom prst="rect">
@@ -2170,7 +2170,7 @@
         </p:nvSpPr>
         <p:spPr>
           <a:xfrm>
-            <a:off x="4729937" y="3269033"/>
+            <a:off x="4695532" y="3269033"/>
             <a:ext cx="1181246" cy="247650"/>
           </a:xfrm>
           <a:prstGeom prst="rect">
@@ -2187,9 +2187,9 @@
               <a:buNone/>
             </a:pPr>
             <a:r>
-              <a:rPr lang="en-US" sz="864" dirty="0">
-                <a:solidFill>
-                  <a:srgbClr val="333333"/>
+              <a:rPr lang="en-US" sz="816" b="1" dirty="0">
+                <a:solidFill>
+                  <a:srgbClr val="008060"/>
                 </a:solidFill>
                 <a:latin typeface="Raleway" pitchFamily="34" charset="0"/>
                 <a:ea typeface="Raleway" pitchFamily="34" charset="-122"/>
@@ -2197,7 +2197,7 @@
               </a:rPr>
               <a:t>52%</a:t>
             </a:r>
-            <a:endParaRPr lang="en-US" sz="864" dirty="0"/>
+            <a:endParaRPr lang="en-US" sz="816" dirty="0"/>
           </a:p>
         </p:txBody>
       </p:sp>
@@ -2248,7 +2248,7 @@
         </p:nvSpPr>
         <p:spPr>
           <a:xfrm>
-            <a:off x="4729937" y="3516683"/>
+            <a:off x="4695532" y="3516683"/>
             <a:ext cx="1181246" cy="247650"/>
           </a:xfrm>
           <a:prstGeom prst="rect">
@@ -2265,9 +2265,9 @@
               <a:buNone/>
             </a:pPr>
             <a:r>
-              <a:rPr lang="en-US" sz="864" dirty="0">
-                <a:solidFill>
-                  <a:srgbClr val="333333"/>
+              <a:rPr lang="en-US" sz="816" b="1" dirty="0">
+                <a:solidFill>
+                  <a:srgbClr val="8A6200"/>
                 </a:solidFill>
                 <a:latin typeface="Raleway" pitchFamily="34" charset="0"/>
                 <a:ea typeface="Raleway" pitchFamily="34" charset="-122"/>
@@ -2275,7 +2275,7 @@
               </a:rPr>
               <a:t>35%</a:t>
             </a:r>
-            <a:endParaRPr lang="en-US" sz="864" dirty="0"/>
+            <a:endParaRPr lang="en-US" sz="816" dirty="0"/>
           </a:p>
         </p:txBody>
       </p:sp>
@@ -2326,7 +2326,7 @@
         </p:nvSpPr>
         <p:spPr>
           <a:xfrm>
-            <a:off x="4729937" y="3764333"/>
+            <a:off x="4695532" y="3764333"/>
             <a:ext cx="1181246" cy="247650"/>
           </a:xfrm>
           <a:prstGeom prst="rect">
@@ -2343,6 +2343,396 @@
               <a:buNone/>
             </a:pPr>
             <a:r>
+              <a:rPr lang="en-US" sz="816" b="1" dirty="0">
+                <a:solidFill>
+                  <a:srgbClr val="C44A1A"/>
+                </a:solidFill>
+                <a:latin typeface="Raleway" pitchFamily="34" charset="0"/>
+                <a:ea typeface="Raleway" pitchFamily="34" charset="-122"/>
+                <a:cs typeface="Raleway" pitchFamily="34" charset="-120"/>
+              </a:rPr>
+              <a:t>26%</a:t>
+            </a:r>
+            <a:endParaRPr lang="en-US" sz="816" dirty="0"/>
+          </a:p>
+        </p:txBody>
+      </p:sp>
+      <p:sp>
+        <p:nvSpPr>
+          <p:cNvPr id="36" name="Text 33"/>
+          <p:cNvSpPr/>
+          <p:nvPr/>
+        </p:nvSpPr>
+        <p:spPr>
+          <a:xfrm>
+            <a:off x="2595606" y="4011983"/>
+            <a:ext cx="1043746" cy="214313"/>
+          </a:xfrm>
+          <a:prstGeom prst="rect">
+            <a:avLst/>
+          </a:prstGeom>
+          <a:noFill/>
+          <a:ln/>
+        </p:spPr>
+        <p:txBody>
+          <a:bodyPr wrap="square" lIns="38100" tIns="114300" rIns="114300" bIns="38100" rtlCol="0" anchor="ctr"/>
+          <a:lstStyle/>
+          <a:p>
+            <a:pPr algn="r" indent="0" marL="0">
+              <a:buNone/>
+            </a:pPr>
+            <a:r>
+              <a:rPr lang="en-US" sz="864" b="1" dirty="0">
+                <a:solidFill>
+                  <a:srgbClr val="120180"/>
+                </a:solidFill>
+                <a:latin typeface="Raleway" pitchFamily="34" charset="0"/>
+                <a:ea typeface="Raleway" pitchFamily="34" charset="-122"/>
+                <a:cs typeface="Raleway" pitchFamily="34" charset="-120"/>
+              </a:rPr>
+              <a:t>326</a:t>
+            </a:r>
+            <a:endParaRPr lang="en-US" sz="864" dirty="0"/>
+          </a:p>
+        </p:txBody>
+      </p:sp>
+      <p:sp>
+        <p:nvSpPr>
+          <p:cNvPr id="37" name="Text 34"/>
+          <p:cNvSpPr/>
+          <p:nvPr/>
+        </p:nvSpPr>
+        <p:spPr>
+          <a:xfrm>
+            <a:off x="3606634" y="4011983"/>
+            <a:ext cx="1123303" cy="214313"/>
+          </a:xfrm>
+          <a:prstGeom prst="rect">
+            <a:avLst/>
+          </a:prstGeom>
+          <a:noFill/>
+          <a:ln/>
+        </p:spPr>
+        <p:txBody>
+          <a:bodyPr wrap="square" lIns="38100" tIns="114300" rIns="114300" bIns="38100" rtlCol="0" anchor="ctr"/>
+          <a:lstStyle/>
+          <a:p>
+            <a:pPr algn="r" indent="0" marL="0">
+              <a:buNone/>
+            </a:pPr>
+            <a:r>
+              <a:rPr lang="en-US" sz="864" b="1" dirty="0">
+                <a:solidFill>
+                  <a:srgbClr val="120180"/>
+                </a:solidFill>
+                <a:latin typeface="Raleway" pitchFamily="34" charset="0"/>
+                <a:ea typeface="Raleway" pitchFamily="34" charset="-122"/>
+                <a:cs typeface="Raleway" pitchFamily="34" charset="-120"/>
+              </a:rPr>
+              <a:t>222</a:t>
+            </a:r>
+            <a:endParaRPr lang="en-US" sz="864" dirty="0"/>
+          </a:p>
+        </p:txBody>
+      </p:sp>
+      <p:sp>
+        <p:nvSpPr>
+          <p:cNvPr id="38" name="Text 35"/>
+          <p:cNvSpPr/>
+          <p:nvPr/>
+        </p:nvSpPr>
+        <p:spPr>
+          <a:xfrm>
+            <a:off x="781030" y="1143000"/>
+            <a:ext cx="419772" cy="264890"/>
+          </a:xfrm>
+          <a:prstGeom prst="rect">
+            <a:avLst/>
+          </a:prstGeom>
+          <a:noFill/>
+          <a:ln/>
+        </p:spPr>
+        <p:txBody>
+          <a:bodyPr wrap="square" lIns="0" tIns="0" rIns="0" bIns="0" rtlCol="0" anchor="t"/>
+          <a:lstStyle/>
+          <a:p>
+            <a:pPr algn="l" indent="0" marL="0">
+              <a:buNone/>
+            </a:pPr>
+            <a:r>
+              <a:rPr lang="en-US" sz="1740" b="1" dirty="0">
+                <a:solidFill>
+                  <a:srgbClr val="120180"/>
+                </a:solidFill>
+                <a:latin typeface="Raleway" pitchFamily="34" charset="0"/>
+                <a:ea typeface="Raleway" pitchFamily="34" charset="-122"/>
+                <a:cs typeface="Raleway" pitchFamily="34" charset="-120"/>
+              </a:rPr>
+              <a:t>373</a:t>
+            </a:r>
+            <a:endParaRPr lang="en-US" sz="1740" dirty="0"/>
+          </a:p>
+        </p:txBody>
+      </p:sp>
+      <p:sp>
+        <p:nvSpPr>
+          <p:cNvPr id="39" name="Text 36"/>
+          <p:cNvSpPr/>
+          <p:nvPr/>
+        </p:nvSpPr>
+        <p:spPr>
+          <a:xfrm>
+            <a:off x="6440849" y="2354610"/>
+            <a:ext cx="274320" cy="128016"/>
+          </a:xfrm>
+          <a:prstGeom prst="rect">
+            <a:avLst/>
+          </a:prstGeom>
+          <a:noFill/>
+          <a:ln/>
+        </p:spPr>
+        <p:txBody>
+          <a:bodyPr wrap="square" lIns="0" tIns="0" rIns="0" bIns="0" rtlCol="0" anchor="t"/>
+          <a:lstStyle/>
+          <a:p>
+            <a:pPr algn="r" indent="0" marL="0">
+              <a:buNone/>
+            </a:pPr>
+            <a:r>
+              <a:rPr lang="en-US" sz="780" b="1" dirty="0">
+                <a:solidFill>
+                  <a:srgbClr val="333333"/>
+                </a:solidFill>
+                <a:latin typeface="Raleway" pitchFamily="34" charset="0"/>
+                <a:ea typeface="Raleway" pitchFamily="34" charset="-122"/>
+                <a:cs typeface="Raleway" pitchFamily="34" charset="-120"/>
+              </a:rPr>
+              <a:t>Ene</a:t>
+            </a:r>
+            <a:endParaRPr lang="en-US" sz="780" dirty="0"/>
+          </a:p>
+        </p:txBody>
+      </p:sp>
+      <p:sp>
+        <p:nvSpPr>
+          <p:cNvPr id="40" name="Text 37"/>
+          <p:cNvSpPr/>
+          <p:nvPr/>
+        </p:nvSpPr>
+        <p:spPr>
+          <a:xfrm>
+            <a:off x="6443373" y="2583210"/>
+            <a:ext cx="274320" cy="128016"/>
+          </a:xfrm>
+          <a:prstGeom prst="rect">
+            <a:avLst/>
+          </a:prstGeom>
+          <a:noFill/>
+          <a:ln/>
+        </p:spPr>
+        <p:txBody>
+          <a:bodyPr wrap="square" lIns="0" tIns="0" rIns="0" bIns="0" rtlCol="0" anchor="t"/>
+          <a:lstStyle/>
+          <a:p>
+            <a:pPr algn="r" indent="0" marL="0">
+              <a:buNone/>
+            </a:pPr>
+            <a:r>
+              <a:rPr lang="en-US" sz="780" b="1" dirty="0">
+                <a:solidFill>
+                  <a:srgbClr val="333333"/>
+                </a:solidFill>
+                <a:latin typeface="Raleway" pitchFamily="34" charset="0"/>
+                <a:ea typeface="Raleway" pitchFamily="34" charset="-122"/>
+                <a:cs typeface="Raleway" pitchFamily="34" charset="-120"/>
+              </a:rPr>
+              <a:t>Feb</a:t>
+            </a:r>
+            <a:endParaRPr lang="en-US" sz="780" dirty="0"/>
+          </a:p>
+        </p:txBody>
+      </p:sp>
+      <p:sp>
+        <p:nvSpPr>
+          <p:cNvPr id="41" name="Text 38"/>
+          <p:cNvSpPr/>
+          <p:nvPr/>
+        </p:nvSpPr>
+        <p:spPr>
+          <a:xfrm>
+            <a:off x="6438798" y="2811810"/>
+            <a:ext cx="274320" cy="128016"/>
+          </a:xfrm>
+          <a:prstGeom prst="rect">
+            <a:avLst/>
+          </a:prstGeom>
+          <a:noFill/>
+          <a:ln/>
+        </p:spPr>
+        <p:txBody>
+          <a:bodyPr wrap="square" lIns="0" tIns="0" rIns="0" bIns="0" rtlCol="0" anchor="t"/>
+          <a:lstStyle/>
+          <a:p>
+            <a:pPr algn="r" indent="0" marL="0">
+              <a:buNone/>
+            </a:pPr>
+            <a:r>
+              <a:rPr lang="en-US" sz="780" b="1" dirty="0">
+                <a:solidFill>
+                  <a:srgbClr val="333333"/>
+                </a:solidFill>
+                <a:latin typeface="Raleway" pitchFamily="34" charset="0"/>
+                <a:ea typeface="Raleway" pitchFamily="34" charset="-122"/>
+                <a:cs typeface="Raleway" pitchFamily="34" charset="-120"/>
+              </a:rPr>
+              <a:t>Mar</a:t>
+            </a:r>
+            <a:endParaRPr lang="en-US" sz="780" dirty="0"/>
+          </a:p>
+        </p:txBody>
+      </p:sp>
+      <p:sp>
+        <p:nvSpPr>
+          <p:cNvPr id="42" name="Text 39"/>
+          <p:cNvSpPr/>
+          <p:nvPr/>
+        </p:nvSpPr>
+        <p:spPr>
+          <a:xfrm>
+            <a:off x="6452207" y="3040410"/>
+            <a:ext cx="274320" cy="128016"/>
+          </a:xfrm>
+          <a:prstGeom prst="rect">
+            <a:avLst/>
+          </a:prstGeom>
+          <a:noFill/>
+          <a:ln/>
+        </p:spPr>
+        <p:txBody>
+          <a:bodyPr wrap="square" lIns="0" tIns="0" rIns="0" bIns="0" rtlCol="0" anchor="t"/>
+          <a:lstStyle/>
+          <a:p>
+            <a:pPr algn="r" indent="0" marL="0">
+              <a:buNone/>
+            </a:pPr>
+            <a:r>
+              <a:rPr lang="en-US" sz="780" b="1" dirty="0">
+                <a:solidFill>
+                  <a:srgbClr val="333333"/>
+                </a:solidFill>
+                <a:latin typeface="Raleway" pitchFamily="34" charset="0"/>
+                <a:ea typeface="Raleway" pitchFamily="34" charset="-122"/>
+                <a:cs typeface="Raleway" pitchFamily="34" charset="-120"/>
+              </a:rPr>
+              <a:t>Abr</a:t>
+            </a:r>
+            <a:endParaRPr lang="en-US" sz="780" dirty="0"/>
+          </a:p>
+        </p:txBody>
+      </p:sp>
+      <p:sp>
+        <p:nvSpPr>
+          <p:cNvPr id="43" name="Text 40"/>
+          <p:cNvSpPr/>
+          <p:nvPr/>
+        </p:nvSpPr>
+        <p:spPr>
+          <a:xfrm>
+            <a:off x="6423811" y="3269010"/>
+            <a:ext cx="274320" cy="128016"/>
+          </a:xfrm>
+          <a:prstGeom prst="rect">
+            <a:avLst/>
+          </a:prstGeom>
+          <a:noFill/>
+          <a:ln/>
+        </p:spPr>
+        <p:txBody>
+          <a:bodyPr wrap="square" lIns="0" tIns="0" rIns="0" bIns="0" rtlCol="0" anchor="t"/>
+          <a:lstStyle/>
+          <a:p>
+            <a:pPr algn="r" indent="0" marL="0">
+              <a:buNone/>
+            </a:pPr>
+            <a:r>
+              <a:rPr lang="en-US" sz="780" b="1" dirty="0">
+                <a:solidFill>
+                  <a:srgbClr val="333333"/>
+                </a:solidFill>
+                <a:latin typeface="Raleway" pitchFamily="34" charset="0"/>
+                <a:ea typeface="Raleway" pitchFamily="34" charset="-122"/>
+                <a:cs typeface="Raleway" pitchFamily="34" charset="-120"/>
+              </a:rPr>
+              <a:t>May</a:t>
+            </a:r>
+            <a:endParaRPr lang="en-US" sz="780" dirty="0"/>
+          </a:p>
+        </p:txBody>
+      </p:sp>
+      <p:sp>
+        <p:nvSpPr>
+          <p:cNvPr id="44" name="Text 41"/>
+          <p:cNvSpPr/>
+          <p:nvPr/>
+        </p:nvSpPr>
+        <p:spPr>
+          <a:xfrm>
+            <a:off x="6450787" y="3497610"/>
+            <a:ext cx="274320" cy="128016"/>
+          </a:xfrm>
+          <a:prstGeom prst="rect">
+            <a:avLst/>
+          </a:prstGeom>
+          <a:noFill/>
+          <a:ln/>
+        </p:spPr>
+        <p:txBody>
+          <a:bodyPr wrap="square" lIns="0" tIns="0" rIns="0" bIns="0" rtlCol="0" anchor="t"/>
+          <a:lstStyle/>
+          <a:p>
+            <a:pPr algn="r" indent="0" marL="0">
+              <a:buNone/>
+            </a:pPr>
+            <a:r>
+              <a:rPr lang="en-US" sz="780" b="1" dirty="0">
+                <a:solidFill>
+                  <a:srgbClr val="333333"/>
+                </a:solidFill>
+                <a:latin typeface="Raleway" pitchFamily="34" charset="0"/>
+                <a:ea typeface="Raleway" pitchFamily="34" charset="-122"/>
+                <a:cs typeface="Raleway" pitchFamily="34" charset="-120"/>
+              </a:rPr>
+              <a:t>Jun</a:t>
+            </a:r>
+            <a:endParaRPr lang="en-US" sz="780" dirty="0"/>
+          </a:p>
+        </p:txBody>
+      </p:sp>
+      <p:sp>
+        <p:nvSpPr>
+          <p:cNvPr id="45" name="Text 42"/>
+          <p:cNvSpPr/>
+          <p:nvPr/>
+        </p:nvSpPr>
+        <p:spPr>
+          <a:xfrm>
+            <a:off x="2595606" y="2530845"/>
+            <a:ext cx="1043746" cy="242888"/>
+          </a:xfrm>
+          <a:prstGeom prst="rect">
+            <a:avLst/>
+          </a:prstGeom>
+          <a:noFill/>
+          <a:ln/>
+        </p:spPr>
+        <p:txBody>
+          <a:bodyPr wrap="square" lIns="38100" tIns="114300" rIns="114300" bIns="38100" rtlCol="0" anchor="ctr"/>
+          <a:lstStyle/>
+          <a:p>
+            <a:pPr algn="r" indent="0" marL="0">
+              <a:buNone/>
+            </a:pPr>
+            <a:r>
               <a:rPr lang="en-US" sz="864" dirty="0">
                 <a:solidFill>
                   <a:srgbClr val="333333"/>
@@ -2351,7 +2741,7 @@
                 <a:ea typeface="Raleway" pitchFamily="34" charset="-122"/>
                 <a:cs typeface="Raleway" pitchFamily="34" charset="-120"/>
               </a:rPr>
-              <a:t>26%</a:t>
+              <a:t>71</a:t>
             </a:r>
             <a:endParaRPr lang="en-US" sz="864" dirty="0"/>
           </a:p>
@@ -2359,38 +2749,38 @@
       </p:sp>
       <p:sp>
         <p:nvSpPr>
-          <p:cNvPr id="36" name="Text 33"/>
-          <p:cNvSpPr/>
-          <p:nvPr/>
-        </p:nvSpPr>
-        <p:spPr>
-          <a:xfrm>
-            <a:off x="2626007" y="4011983"/>
-            <a:ext cx="1043746" cy="214313"/>
-          </a:xfrm>
-          <a:prstGeom prst="rect">
-            <a:avLst/>
-          </a:prstGeom>
-          <a:noFill/>
-          <a:ln/>
-        </p:spPr>
-        <p:txBody>
-          <a:bodyPr wrap="square" lIns="38100" tIns="114300" rIns="114300" bIns="38100" rtlCol="0" anchor="ctr"/>
-          <a:lstStyle/>
-          <a:p>
-            <a:pPr algn="r" indent="0" marL="0">
-              <a:buNone/>
-            </a:pPr>
-            <a:r>
-              <a:rPr lang="en-US" sz="864" b="1" dirty="0">
-                <a:solidFill>
-                  <a:srgbClr val="120180"/>
-                </a:solidFill>
-                <a:latin typeface="Raleway" pitchFamily="34" charset="0"/>
-                <a:ea typeface="Raleway" pitchFamily="34" charset="-122"/>
-                <a:cs typeface="Raleway" pitchFamily="34" charset="-120"/>
-              </a:rPr>
-              <a:t>326</a:t>
+          <p:cNvPr id="46" name="Text 43"/>
+          <p:cNvSpPr/>
+          <p:nvPr/>
+        </p:nvSpPr>
+        <p:spPr>
+          <a:xfrm>
+            <a:off x="3606634" y="2530845"/>
+            <a:ext cx="1123303" cy="242888"/>
+          </a:xfrm>
+          <a:prstGeom prst="rect">
+            <a:avLst/>
+          </a:prstGeom>
+          <a:noFill/>
+          <a:ln/>
+        </p:spPr>
+        <p:txBody>
+          <a:bodyPr wrap="square" lIns="38100" tIns="114300" rIns="114300" bIns="38100" rtlCol="0" anchor="ctr"/>
+          <a:lstStyle/>
+          <a:p>
+            <a:pPr algn="r" indent="0" marL="0">
+              <a:buNone/>
+            </a:pPr>
+            <a:r>
+              <a:rPr lang="en-US" sz="864" dirty="0">
+                <a:solidFill>
+                  <a:srgbClr val="333333"/>
+                </a:solidFill>
+                <a:latin typeface="Raleway" pitchFamily="34" charset="0"/>
+                <a:ea typeface="Raleway" pitchFamily="34" charset="-122"/>
+                <a:cs typeface="Raleway" pitchFamily="34" charset="-120"/>
+              </a:rPr>
+              <a:t>56</a:t>
             </a:r>
             <a:endParaRPr lang="en-US" sz="864" dirty="0"/>
           </a:p>
@@ -2398,38 +2788,38 @@
       </p:sp>
       <p:sp>
         <p:nvSpPr>
-          <p:cNvPr id="37" name="Text 34"/>
-          <p:cNvSpPr/>
-          <p:nvPr/>
-        </p:nvSpPr>
-        <p:spPr>
-          <a:xfrm>
-            <a:off x="3639352" y="4011983"/>
-            <a:ext cx="1123303" cy="214313"/>
-          </a:xfrm>
-          <a:prstGeom prst="rect">
-            <a:avLst/>
-          </a:prstGeom>
-          <a:noFill/>
-          <a:ln/>
-        </p:spPr>
-        <p:txBody>
-          <a:bodyPr wrap="square" lIns="38100" tIns="114300" rIns="114300" bIns="38100" rtlCol="0" anchor="ctr"/>
-          <a:lstStyle/>
-          <a:p>
-            <a:pPr algn="r" indent="0" marL="0">
-              <a:buNone/>
-            </a:pPr>
-            <a:r>
-              <a:rPr lang="en-US" sz="864" b="1" dirty="0">
-                <a:solidFill>
-                  <a:srgbClr val="120180"/>
-                </a:solidFill>
-                <a:latin typeface="Raleway" pitchFamily="34" charset="0"/>
-                <a:ea typeface="Raleway" pitchFamily="34" charset="-122"/>
-                <a:cs typeface="Raleway" pitchFamily="34" charset="-120"/>
-              </a:rPr>
-              <a:t>222</a:t>
+          <p:cNvPr id="47" name="Text 44"/>
+          <p:cNvSpPr/>
+          <p:nvPr/>
+        </p:nvSpPr>
+        <p:spPr>
+          <a:xfrm>
+            <a:off x="2595606" y="2773733"/>
+            <a:ext cx="1043746" cy="247650"/>
+          </a:xfrm>
+          <a:prstGeom prst="rect">
+            <a:avLst/>
+          </a:prstGeom>
+          <a:noFill/>
+          <a:ln/>
+        </p:spPr>
+        <p:txBody>
+          <a:bodyPr wrap="square" lIns="38100" tIns="114300" rIns="114300" bIns="38100" rtlCol="0" anchor="ctr"/>
+          <a:lstStyle/>
+          <a:p>
+            <a:pPr algn="r" indent="0" marL="0">
+              <a:buNone/>
+            </a:pPr>
+            <a:r>
+              <a:rPr lang="en-US" sz="864" dirty="0">
+                <a:solidFill>
+                  <a:srgbClr val="333333"/>
+                </a:solidFill>
+                <a:latin typeface="Raleway" pitchFamily="34" charset="0"/>
+                <a:ea typeface="Raleway" pitchFamily="34" charset="-122"/>
+                <a:cs typeface="Raleway" pitchFamily="34" charset="-120"/>
+              </a:rPr>
+              <a:t>65</a:t>
             </a:r>
             <a:endParaRPr lang="en-US" sz="864" dirty="0"/>
           </a:p>
@@ -2437,14 +2827,443 @@
       </p:sp>
       <p:sp>
         <p:nvSpPr>
-          <p:cNvPr id="38" name="Text 35"/>
-          <p:cNvSpPr/>
-          <p:nvPr/>
-        </p:nvSpPr>
-        <p:spPr>
-          <a:xfrm>
-            <a:off x="781030" y="1162050"/>
-            <a:ext cx="5238810" cy="227640"/>
+          <p:cNvPr id="48" name="Text 45"/>
+          <p:cNvSpPr/>
+          <p:nvPr/>
+        </p:nvSpPr>
+        <p:spPr>
+          <a:xfrm>
+            <a:off x="3606634" y="2773733"/>
+            <a:ext cx="1123303" cy="247650"/>
+          </a:xfrm>
+          <a:prstGeom prst="rect">
+            <a:avLst/>
+          </a:prstGeom>
+          <a:noFill/>
+          <a:ln/>
+        </p:spPr>
+        <p:txBody>
+          <a:bodyPr wrap="square" lIns="38100" tIns="114300" rIns="114300" bIns="38100" rtlCol="0" anchor="ctr"/>
+          <a:lstStyle/>
+          <a:p>
+            <a:pPr algn="r" indent="0" marL="0">
+              <a:buNone/>
+            </a:pPr>
+            <a:r>
+              <a:rPr lang="en-US" sz="864" dirty="0">
+                <a:solidFill>
+                  <a:srgbClr val="333333"/>
+                </a:solidFill>
+                <a:latin typeface="Raleway" pitchFamily="34" charset="0"/>
+                <a:ea typeface="Raleway" pitchFamily="34" charset="-122"/>
+                <a:cs typeface="Raleway" pitchFamily="34" charset="-120"/>
+              </a:rPr>
+              <a:t>52</a:t>
+            </a:r>
+            <a:endParaRPr lang="en-US" sz="864" dirty="0"/>
+          </a:p>
+        </p:txBody>
+      </p:sp>
+      <p:sp>
+        <p:nvSpPr>
+          <p:cNvPr id="49" name="Text 46"/>
+          <p:cNvSpPr/>
+          <p:nvPr/>
+        </p:nvSpPr>
+        <p:spPr>
+          <a:xfrm>
+            <a:off x="2595606" y="3021383"/>
+            <a:ext cx="1043746" cy="247650"/>
+          </a:xfrm>
+          <a:prstGeom prst="rect">
+            <a:avLst/>
+          </a:prstGeom>
+          <a:noFill/>
+          <a:ln/>
+        </p:spPr>
+        <p:txBody>
+          <a:bodyPr wrap="square" lIns="38100" tIns="114300" rIns="114300" bIns="38100" rtlCol="0" anchor="ctr"/>
+          <a:lstStyle/>
+          <a:p>
+            <a:pPr algn="r" indent="0" marL="0">
+              <a:buNone/>
+            </a:pPr>
+            <a:r>
+              <a:rPr lang="en-US" sz="864" dirty="0">
+                <a:solidFill>
+                  <a:srgbClr val="333333"/>
+                </a:solidFill>
+                <a:latin typeface="Raleway" pitchFamily="34" charset="0"/>
+                <a:ea typeface="Raleway" pitchFamily="34" charset="-122"/>
+                <a:cs typeface="Raleway" pitchFamily="34" charset="-120"/>
+              </a:rPr>
+              <a:t>71</a:t>
+            </a:r>
+            <a:endParaRPr lang="en-US" sz="864" dirty="0"/>
+          </a:p>
+        </p:txBody>
+      </p:sp>
+      <p:sp>
+        <p:nvSpPr>
+          <p:cNvPr id="50" name="Text 47"/>
+          <p:cNvSpPr/>
+          <p:nvPr/>
+        </p:nvSpPr>
+        <p:spPr>
+          <a:xfrm>
+            <a:off x="3606634" y="3021383"/>
+            <a:ext cx="1123303" cy="247650"/>
+          </a:xfrm>
+          <a:prstGeom prst="rect">
+            <a:avLst/>
+          </a:prstGeom>
+          <a:noFill/>
+          <a:ln/>
+        </p:spPr>
+        <p:txBody>
+          <a:bodyPr wrap="square" lIns="38100" tIns="114300" rIns="114300" bIns="38100" rtlCol="0" anchor="ctr"/>
+          <a:lstStyle/>
+          <a:p>
+            <a:pPr algn="r" indent="0" marL="0">
+              <a:buNone/>
+            </a:pPr>
+            <a:r>
+              <a:rPr lang="en-US" sz="864" dirty="0">
+                <a:solidFill>
+                  <a:srgbClr val="333333"/>
+                </a:solidFill>
+                <a:latin typeface="Raleway" pitchFamily="34" charset="0"/>
+                <a:ea typeface="Raleway" pitchFamily="34" charset="-122"/>
+                <a:cs typeface="Raleway" pitchFamily="34" charset="-120"/>
+              </a:rPr>
+              <a:t>45</a:t>
+            </a:r>
+            <a:endParaRPr lang="en-US" sz="864" dirty="0"/>
+          </a:p>
+        </p:txBody>
+      </p:sp>
+      <p:sp>
+        <p:nvSpPr>
+          <p:cNvPr id="51" name="Text 48"/>
+          <p:cNvSpPr/>
+          <p:nvPr/>
+        </p:nvSpPr>
+        <p:spPr>
+          <a:xfrm>
+            <a:off x="2595606" y="3269033"/>
+            <a:ext cx="1043746" cy="247650"/>
+          </a:xfrm>
+          <a:prstGeom prst="rect">
+            <a:avLst/>
+          </a:prstGeom>
+          <a:noFill/>
+          <a:ln/>
+        </p:spPr>
+        <p:txBody>
+          <a:bodyPr wrap="square" lIns="38100" tIns="114300" rIns="114300" bIns="38100" rtlCol="0" anchor="ctr"/>
+          <a:lstStyle/>
+          <a:p>
+            <a:pPr algn="r" indent="0" marL="0">
+              <a:buNone/>
+            </a:pPr>
+            <a:r>
+              <a:rPr lang="en-US" sz="864" dirty="0">
+                <a:solidFill>
+                  <a:srgbClr val="333333"/>
+                </a:solidFill>
+                <a:latin typeface="Raleway" pitchFamily="34" charset="0"/>
+                <a:ea typeface="Raleway" pitchFamily="34" charset="-122"/>
+                <a:cs typeface="Raleway" pitchFamily="34" charset="-120"/>
+              </a:rPr>
+              <a:t>61</a:t>
+            </a:r>
+            <a:endParaRPr lang="en-US" sz="864" dirty="0"/>
+          </a:p>
+        </p:txBody>
+      </p:sp>
+      <p:sp>
+        <p:nvSpPr>
+          <p:cNvPr id="52" name="Text 49"/>
+          <p:cNvSpPr/>
+          <p:nvPr/>
+        </p:nvSpPr>
+        <p:spPr>
+          <a:xfrm>
+            <a:off x="3606634" y="3269033"/>
+            <a:ext cx="1123303" cy="247650"/>
+          </a:xfrm>
+          <a:prstGeom prst="rect">
+            <a:avLst/>
+          </a:prstGeom>
+          <a:noFill/>
+          <a:ln/>
+        </p:spPr>
+        <p:txBody>
+          <a:bodyPr wrap="square" lIns="38100" tIns="114300" rIns="114300" bIns="38100" rtlCol="0" anchor="ctr"/>
+          <a:lstStyle/>
+          <a:p>
+            <a:pPr algn="r" indent="0" marL="0">
+              <a:buNone/>
+            </a:pPr>
+            <a:r>
+              <a:rPr lang="en-US" sz="864" dirty="0">
+                <a:solidFill>
+                  <a:srgbClr val="333333"/>
+                </a:solidFill>
+                <a:latin typeface="Raleway" pitchFamily="34" charset="0"/>
+                <a:ea typeface="Raleway" pitchFamily="34" charset="-122"/>
+                <a:cs typeface="Raleway" pitchFamily="34" charset="-120"/>
+              </a:rPr>
+              <a:t>36</a:t>
+            </a:r>
+            <a:endParaRPr lang="en-US" sz="864" dirty="0"/>
+          </a:p>
+        </p:txBody>
+      </p:sp>
+      <p:sp>
+        <p:nvSpPr>
+          <p:cNvPr id="53" name="Text 50"/>
+          <p:cNvSpPr/>
+          <p:nvPr/>
+        </p:nvSpPr>
+        <p:spPr>
+          <a:xfrm>
+            <a:off x="1363517" y="3516683"/>
+            <a:ext cx="1262489" cy="247650"/>
+          </a:xfrm>
+          <a:prstGeom prst="rect">
+            <a:avLst/>
+          </a:prstGeom>
+          <a:noFill/>
+          <a:ln/>
+        </p:spPr>
+        <p:txBody>
+          <a:bodyPr wrap="square" lIns="38100" tIns="114300" rIns="114300" bIns="38100" rtlCol="0" anchor="ctr"/>
+          <a:lstStyle/>
+          <a:p>
+            <a:pPr algn="r" indent="0" marL="0">
+              <a:buNone/>
+            </a:pPr>
+            <a:r>
+              <a:rPr lang="en-US" sz="864" dirty="0">
+                <a:solidFill>
+                  <a:srgbClr val="333333"/>
+                </a:solidFill>
+                <a:latin typeface="Raleway" pitchFamily="34" charset="0"/>
+                <a:ea typeface="Raleway" pitchFamily="34" charset="-122"/>
+                <a:cs typeface="Raleway" pitchFamily="34" charset="-120"/>
+              </a:rPr>
+              <a:t>93</a:t>
+            </a:r>
+            <a:endParaRPr lang="en-US" sz="864" dirty="0"/>
+          </a:p>
+        </p:txBody>
+      </p:sp>
+      <p:sp>
+        <p:nvSpPr>
+          <p:cNvPr id="54" name="Text 51"/>
+          <p:cNvSpPr/>
+          <p:nvPr/>
+        </p:nvSpPr>
+        <p:spPr>
+          <a:xfrm>
+            <a:off x="2595606" y="3516683"/>
+            <a:ext cx="1043746" cy="247650"/>
+          </a:xfrm>
+          <a:prstGeom prst="rect">
+            <a:avLst/>
+          </a:prstGeom>
+          <a:noFill/>
+          <a:ln/>
+        </p:spPr>
+        <p:txBody>
+          <a:bodyPr wrap="square" lIns="38100" tIns="114300" rIns="114300" bIns="38100" rtlCol="0" anchor="ctr"/>
+          <a:lstStyle/>
+          <a:p>
+            <a:pPr algn="r" indent="0" marL="0">
+              <a:buNone/>
+            </a:pPr>
+            <a:r>
+              <a:rPr lang="en-US" sz="864" dirty="0">
+                <a:solidFill>
+                  <a:srgbClr val="333333"/>
+                </a:solidFill>
+                <a:latin typeface="Raleway" pitchFamily="34" charset="0"/>
+                <a:ea typeface="Raleway" pitchFamily="34" charset="-122"/>
+                <a:cs typeface="Raleway" pitchFamily="34" charset="-120"/>
+              </a:rPr>
+              <a:t>33</a:t>
+            </a:r>
+            <a:endParaRPr lang="en-US" sz="864" dirty="0"/>
+          </a:p>
+        </p:txBody>
+      </p:sp>
+      <p:sp>
+        <p:nvSpPr>
+          <p:cNvPr id="55" name="Text 52"/>
+          <p:cNvSpPr/>
+          <p:nvPr/>
+        </p:nvSpPr>
+        <p:spPr>
+          <a:xfrm>
+            <a:off x="3606634" y="3516683"/>
+            <a:ext cx="1123303" cy="247650"/>
+          </a:xfrm>
+          <a:prstGeom prst="rect">
+            <a:avLst/>
+          </a:prstGeom>
+          <a:noFill/>
+          <a:ln/>
+        </p:spPr>
+        <p:txBody>
+          <a:bodyPr wrap="square" lIns="38100" tIns="114300" rIns="114300" bIns="38100" rtlCol="0" anchor="ctr"/>
+          <a:lstStyle/>
+          <a:p>
+            <a:pPr algn="r" indent="0" marL="0">
+              <a:buNone/>
+            </a:pPr>
+            <a:r>
+              <a:rPr lang="en-US" sz="864" dirty="0">
+                <a:solidFill>
+                  <a:srgbClr val="333333"/>
+                </a:solidFill>
+                <a:latin typeface="Raleway" pitchFamily="34" charset="0"/>
+                <a:ea typeface="Raleway" pitchFamily="34" charset="-122"/>
+                <a:cs typeface="Raleway" pitchFamily="34" charset="-120"/>
+              </a:rPr>
+              <a:t>19</a:t>
+            </a:r>
+            <a:endParaRPr lang="en-US" sz="864" dirty="0"/>
+          </a:p>
+        </p:txBody>
+      </p:sp>
+      <p:sp>
+        <p:nvSpPr>
+          <p:cNvPr id="56" name="Text 53"/>
+          <p:cNvSpPr/>
+          <p:nvPr/>
+        </p:nvSpPr>
+        <p:spPr>
+          <a:xfrm>
+            <a:off x="1363517" y="3764333"/>
+            <a:ext cx="1262489" cy="247650"/>
+          </a:xfrm>
+          <a:prstGeom prst="rect">
+            <a:avLst/>
+          </a:prstGeom>
+          <a:noFill/>
+          <a:ln/>
+        </p:spPr>
+        <p:txBody>
+          <a:bodyPr wrap="square" lIns="38100" tIns="114300" rIns="114300" bIns="38100" rtlCol="0" anchor="ctr"/>
+          <a:lstStyle/>
+          <a:p>
+            <a:pPr algn="r" indent="0" marL="0">
+              <a:buNone/>
+            </a:pPr>
+            <a:r>
+              <a:rPr lang="en-US" sz="864" dirty="0">
+                <a:solidFill>
+                  <a:srgbClr val="333333"/>
+                </a:solidFill>
+                <a:latin typeface="Raleway" pitchFamily="34" charset="0"/>
+                <a:ea typeface="Raleway" pitchFamily="34" charset="-122"/>
+                <a:cs typeface="Raleway" pitchFamily="34" charset="-120"/>
+              </a:rPr>
+              <a:t>96</a:t>
+            </a:r>
+            <a:endParaRPr lang="en-US" sz="864" dirty="0"/>
+          </a:p>
+        </p:txBody>
+      </p:sp>
+      <p:sp>
+        <p:nvSpPr>
+          <p:cNvPr id="57" name="Text 54"/>
+          <p:cNvSpPr/>
+          <p:nvPr/>
+        </p:nvSpPr>
+        <p:spPr>
+          <a:xfrm>
+            <a:off x="2595606" y="3764333"/>
+            <a:ext cx="1043746" cy="247650"/>
+          </a:xfrm>
+          <a:prstGeom prst="rect">
+            <a:avLst/>
+          </a:prstGeom>
+          <a:noFill/>
+          <a:ln/>
+        </p:spPr>
+        <p:txBody>
+          <a:bodyPr wrap="square" lIns="38100" tIns="114300" rIns="114300" bIns="38100" rtlCol="0" anchor="ctr"/>
+          <a:lstStyle/>
+          <a:p>
+            <a:pPr algn="r" indent="0" marL="0">
+              <a:buNone/>
+            </a:pPr>
+            <a:r>
+              <a:rPr lang="en-US" sz="864" dirty="0">
+                <a:solidFill>
+                  <a:srgbClr val="333333"/>
+                </a:solidFill>
+                <a:latin typeface="Raleway" pitchFamily="34" charset="0"/>
+                <a:ea typeface="Raleway" pitchFamily="34" charset="-122"/>
+                <a:cs typeface="Raleway" pitchFamily="34" charset="-120"/>
+              </a:rPr>
+              <a:t>25</a:t>
+            </a:r>
+            <a:endParaRPr lang="en-US" sz="864" dirty="0"/>
+          </a:p>
+        </p:txBody>
+      </p:sp>
+      <p:sp>
+        <p:nvSpPr>
+          <p:cNvPr id="58" name="Text 55"/>
+          <p:cNvSpPr/>
+          <p:nvPr/>
+        </p:nvSpPr>
+        <p:spPr>
+          <a:xfrm>
+            <a:off x="3606634" y="3764333"/>
+            <a:ext cx="1123303" cy="247650"/>
+          </a:xfrm>
+          <a:prstGeom prst="rect">
+            <a:avLst/>
+          </a:prstGeom>
+          <a:noFill/>
+          <a:ln/>
+        </p:spPr>
+        <p:txBody>
+          <a:bodyPr wrap="square" lIns="38100" tIns="114300" rIns="114300" bIns="38100" rtlCol="0" anchor="ctr"/>
+          <a:lstStyle/>
+          <a:p>
+            <a:pPr algn="r" indent="0" marL="0">
+              <a:buNone/>
+            </a:pPr>
+            <a:r>
+              <a:rPr lang="en-US" sz="864" dirty="0">
+                <a:solidFill>
+                  <a:srgbClr val="333333"/>
+                </a:solidFill>
+                <a:latin typeface="Raleway" pitchFamily="34" charset="0"/>
+                <a:ea typeface="Raleway" pitchFamily="34" charset="-122"/>
+                <a:cs typeface="Raleway" pitchFamily="34" charset="-120"/>
+              </a:rPr>
+              <a:t>14</a:t>
+            </a:r>
+            <a:endParaRPr lang="en-US" sz="864" dirty="0"/>
+          </a:p>
+        </p:txBody>
+      </p:sp>
+      <p:sp>
+        <p:nvSpPr>
+          <p:cNvPr id="59" name="Text 56"/>
+          <p:cNvSpPr/>
+          <p:nvPr/>
+        </p:nvSpPr>
+        <p:spPr>
+          <a:xfrm>
+            <a:off x="11331368" y="2354610"/>
+            <a:ext cx="274320" cy="128016"/>
           </a:xfrm>
           <a:prstGeom prst="rect">
             <a:avLst/>
@@ -2456,34 +3275,34 @@
           <a:bodyPr wrap="square" lIns="0" tIns="0" rIns="0" bIns="0" rtlCol="0" anchor="t"/>
           <a:lstStyle/>
           <a:p>
-            <a:pPr algn="l" indent="0" marL="0">
-              <a:buNone/>
-            </a:pPr>
-            <a:r>
-              <a:rPr lang="en-US" sz="1740" b="1" dirty="0">
-                <a:solidFill>
-                  <a:srgbClr val="120180"/>
-                </a:solidFill>
-                <a:latin typeface="Raleway" pitchFamily="34" charset="0"/>
-                <a:ea typeface="Raleway" pitchFamily="34" charset="-122"/>
-                <a:cs typeface="Raleway" pitchFamily="34" charset="-120"/>
-              </a:rPr>
-              <a:t>373</a:t>
-            </a:r>
-            <a:endParaRPr lang="en-US" sz="1740" dirty="0"/>
-          </a:p>
-        </p:txBody>
-      </p:sp>
-      <p:sp>
-        <p:nvSpPr>
-          <p:cNvPr id="39" name="Text 36"/>
-          <p:cNvSpPr/>
-          <p:nvPr/>
-        </p:nvSpPr>
-        <p:spPr>
-          <a:xfrm>
-            <a:off x="6314917" y="2354610"/>
-            <a:ext cx="343368" cy="128016"/>
+            <a:pPr algn="r" indent="0" marL="0">
+              <a:buNone/>
+            </a:pPr>
+            <a:r>
+              <a:rPr lang="en-US" sz="780" b="1" dirty="0">
+                <a:solidFill>
+                  <a:srgbClr val="333333"/>
+                </a:solidFill>
+                <a:latin typeface="Raleway" pitchFamily="34" charset="0"/>
+                <a:ea typeface="Raleway" pitchFamily="34" charset="-122"/>
+                <a:cs typeface="Raleway" pitchFamily="34" charset="-120"/>
+              </a:rPr>
+              <a:t>81</a:t>
+            </a:r>
+            <a:endParaRPr lang="en-US" sz="780" dirty="0"/>
+          </a:p>
+        </p:txBody>
+      </p:sp>
+      <p:sp>
+        <p:nvSpPr>
+          <p:cNvPr id="60" name="Text 57"/>
+          <p:cNvSpPr/>
+          <p:nvPr/>
+        </p:nvSpPr>
+        <p:spPr>
+          <a:xfrm>
+            <a:off x="11331841" y="2583210"/>
+            <a:ext cx="274320" cy="128016"/>
           </a:xfrm>
           <a:prstGeom prst="rect">
             <a:avLst/>
@@ -2507,7 +3326,7 @@
                 <a:ea typeface="Raleway" pitchFamily="34" charset="-122"/>
                 <a:cs typeface="Raleway" pitchFamily="34" charset="-120"/>
               </a:rPr>
-              <a:t>Ene</a:t>
+              <a:t>74</a:t>
             </a:r>
             <a:endParaRPr lang="en-US" sz="780" dirty="0"/>
           </a:p>
@@ -2515,14 +3334,14 @@
       </p:sp>
       <p:sp>
         <p:nvSpPr>
-          <p:cNvPr id="40" name="Text 37"/>
-          <p:cNvSpPr/>
-          <p:nvPr/>
-        </p:nvSpPr>
-        <p:spPr>
-          <a:xfrm>
-            <a:off x="6314917" y="2583210"/>
-            <a:ext cx="343368" cy="128016"/>
+          <p:cNvPr id="61" name="Text 58"/>
+          <p:cNvSpPr/>
+          <p:nvPr/>
+        </p:nvSpPr>
+        <p:spPr>
+          <a:xfrm>
+            <a:off x="11331841" y="2811810"/>
+            <a:ext cx="274320" cy="128016"/>
           </a:xfrm>
           <a:prstGeom prst="rect">
             <a:avLst/>
@@ -2546,7 +3365,7 @@
                 <a:ea typeface="Raleway" pitchFamily="34" charset="-122"/>
                 <a:cs typeface="Raleway" pitchFamily="34" charset="-120"/>
               </a:rPr>
-              <a:t>Feb</a:t>
+              <a:t>75</a:t>
             </a:r>
             <a:endParaRPr lang="en-US" sz="780" dirty="0"/>
           </a:p>
@@ -2554,14 +3373,14 @@
       </p:sp>
       <p:sp>
         <p:nvSpPr>
-          <p:cNvPr id="41" name="Text 38"/>
-          <p:cNvSpPr/>
-          <p:nvPr/>
-        </p:nvSpPr>
-        <p:spPr>
-          <a:xfrm>
-            <a:off x="6314917" y="2811810"/>
-            <a:ext cx="343368" cy="128016"/>
+          <p:cNvPr id="62" name="Text 59"/>
+          <p:cNvSpPr/>
+          <p:nvPr/>
+        </p:nvSpPr>
+        <p:spPr>
+          <a:xfrm>
+            <a:off x="11325057" y="3040410"/>
+            <a:ext cx="274320" cy="128016"/>
           </a:xfrm>
           <a:prstGeom prst="rect">
             <a:avLst/>
@@ -2585,7 +3404,7 @@
                 <a:ea typeface="Raleway" pitchFamily="34" charset="-122"/>
                 <a:cs typeface="Raleway" pitchFamily="34" charset="-120"/>
               </a:rPr>
-              <a:t>Mar</a:t>
+              <a:t>76</a:t>
             </a:r>
             <a:endParaRPr lang="en-US" sz="780" dirty="0"/>
           </a:p>
@@ -2593,14 +3412,14 @@
       </p:sp>
       <p:sp>
         <p:nvSpPr>
-          <p:cNvPr id="42" name="Text 39"/>
-          <p:cNvSpPr/>
-          <p:nvPr/>
-        </p:nvSpPr>
-        <p:spPr>
-          <a:xfrm>
-            <a:off x="6314917" y="3040410"/>
-            <a:ext cx="343368" cy="128016"/>
+          <p:cNvPr id="63" name="Text 60"/>
+          <p:cNvSpPr/>
+          <p:nvPr/>
+        </p:nvSpPr>
+        <p:spPr>
+          <a:xfrm>
+            <a:off x="11329159" y="3269010"/>
+            <a:ext cx="274320" cy="128016"/>
           </a:xfrm>
           <a:prstGeom prst="rect">
             <a:avLst/>
@@ -2624,7 +3443,7 @@
                 <a:ea typeface="Raleway" pitchFamily="34" charset="-122"/>
                 <a:cs typeface="Raleway" pitchFamily="34" charset="-120"/>
               </a:rPr>
-              <a:t>Abr</a:t>
+              <a:t>37</a:t>
             </a:r>
             <a:endParaRPr lang="en-US" sz="780" dirty="0"/>
           </a:p>
@@ -2632,833 +3451,14 @@
       </p:sp>
       <p:sp>
         <p:nvSpPr>
-          <p:cNvPr id="43" name="Text 40"/>
-          <p:cNvSpPr/>
-          <p:nvPr/>
-        </p:nvSpPr>
-        <p:spPr>
-          <a:xfrm>
-            <a:off x="6314917" y="3269010"/>
-            <a:ext cx="343368" cy="128016"/>
-          </a:xfrm>
-          <a:prstGeom prst="rect">
-            <a:avLst/>
-          </a:prstGeom>
-          <a:noFill/>
-          <a:ln/>
-        </p:spPr>
-        <p:txBody>
-          <a:bodyPr wrap="square" lIns="0" tIns="0" rIns="0" bIns="0" rtlCol="0" anchor="t"/>
-          <a:lstStyle/>
-          <a:p>
-            <a:pPr algn="r" indent="0" marL="0">
-              <a:buNone/>
-            </a:pPr>
-            <a:r>
-              <a:rPr lang="en-US" sz="780" b="1" dirty="0">
-                <a:solidFill>
-                  <a:srgbClr val="333333"/>
-                </a:solidFill>
-                <a:latin typeface="Raleway" pitchFamily="34" charset="0"/>
-                <a:ea typeface="Raleway" pitchFamily="34" charset="-122"/>
-                <a:cs typeface="Raleway" pitchFamily="34" charset="-120"/>
-              </a:rPr>
-              <a:t>May</a:t>
-            </a:r>
-            <a:endParaRPr lang="en-US" sz="780" dirty="0"/>
-          </a:p>
-        </p:txBody>
-      </p:sp>
-      <p:sp>
-        <p:nvSpPr>
-          <p:cNvPr id="44" name="Text 41"/>
-          <p:cNvSpPr/>
-          <p:nvPr/>
-        </p:nvSpPr>
-        <p:spPr>
-          <a:xfrm>
-            <a:off x="6314917" y="3497610"/>
-            <a:ext cx="343368" cy="128016"/>
-          </a:xfrm>
-          <a:prstGeom prst="rect">
-            <a:avLst/>
-          </a:prstGeom>
-          <a:noFill/>
-          <a:ln/>
-        </p:spPr>
-        <p:txBody>
-          <a:bodyPr wrap="square" lIns="0" tIns="0" rIns="0" bIns="0" rtlCol="0" anchor="t"/>
-          <a:lstStyle/>
-          <a:p>
-            <a:pPr algn="r" indent="0" marL="0">
-              <a:buNone/>
-            </a:pPr>
-            <a:r>
-              <a:rPr lang="en-US" sz="780" b="1" dirty="0">
-                <a:solidFill>
-                  <a:srgbClr val="333333"/>
-                </a:solidFill>
-                <a:latin typeface="Raleway" pitchFamily="34" charset="0"/>
-                <a:ea typeface="Raleway" pitchFamily="34" charset="-122"/>
-                <a:cs typeface="Raleway" pitchFamily="34" charset="-120"/>
-              </a:rPr>
-              <a:t>Jun</a:t>
-            </a:r>
-            <a:endParaRPr lang="en-US" sz="780" dirty="0"/>
-          </a:p>
-        </p:txBody>
-      </p:sp>
-      <p:sp>
-        <p:nvSpPr>
-          <p:cNvPr id="45" name="Text 42"/>
-          <p:cNvSpPr/>
-          <p:nvPr/>
-        </p:nvSpPr>
-        <p:spPr>
-          <a:xfrm>
-            <a:off x="2626007" y="2530845"/>
-            <a:ext cx="1043746" cy="242888"/>
-          </a:xfrm>
-          <a:prstGeom prst="rect">
-            <a:avLst/>
-          </a:prstGeom>
-          <a:noFill/>
-          <a:ln/>
-        </p:spPr>
-        <p:txBody>
-          <a:bodyPr wrap="square" lIns="38100" tIns="114300" rIns="114300" bIns="38100" rtlCol="0" anchor="ctr"/>
-          <a:lstStyle/>
-          <a:p>
-            <a:pPr algn="r" indent="0" marL="0">
-              <a:buNone/>
-            </a:pPr>
-            <a:r>
-              <a:rPr lang="en-US" sz="864" dirty="0">
-                <a:solidFill>
-                  <a:srgbClr val="333333"/>
-                </a:solidFill>
-                <a:latin typeface="Raleway" pitchFamily="34" charset="0"/>
-                <a:ea typeface="Raleway" pitchFamily="34" charset="-122"/>
-                <a:cs typeface="Raleway" pitchFamily="34" charset="-120"/>
-              </a:rPr>
-              <a:t>71</a:t>
-            </a:r>
-            <a:endParaRPr lang="en-US" sz="864" dirty="0"/>
-          </a:p>
-        </p:txBody>
-      </p:sp>
-      <p:sp>
-        <p:nvSpPr>
-          <p:cNvPr id="46" name="Text 43"/>
-          <p:cNvSpPr/>
-          <p:nvPr/>
-        </p:nvSpPr>
-        <p:spPr>
-          <a:xfrm>
-            <a:off x="3639352" y="2530845"/>
-            <a:ext cx="1123303" cy="242888"/>
-          </a:xfrm>
-          <a:prstGeom prst="rect">
-            <a:avLst/>
-          </a:prstGeom>
-          <a:noFill/>
-          <a:ln/>
-        </p:spPr>
-        <p:txBody>
-          <a:bodyPr wrap="square" lIns="38100" tIns="114300" rIns="114300" bIns="38100" rtlCol="0" anchor="ctr"/>
-          <a:lstStyle/>
-          <a:p>
-            <a:pPr algn="r" indent="0" marL="0">
-              <a:buNone/>
-            </a:pPr>
-            <a:r>
-              <a:rPr lang="en-US" sz="864" dirty="0">
-                <a:solidFill>
-                  <a:srgbClr val="333333"/>
-                </a:solidFill>
-                <a:latin typeface="Raleway" pitchFamily="34" charset="0"/>
-                <a:ea typeface="Raleway" pitchFamily="34" charset="-122"/>
-                <a:cs typeface="Raleway" pitchFamily="34" charset="-120"/>
-              </a:rPr>
-              <a:t>56</a:t>
-            </a:r>
-            <a:endParaRPr lang="en-US" sz="864" dirty="0"/>
-          </a:p>
-        </p:txBody>
-      </p:sp>
-      <p:sp>
-        <p:nvSpPr>
-          <p:cNvPr id="47" name="Text 44"/>
-          <p:cNvSpPr/>
-          <p:nvPr/>
-        </p:nvSpPr>
-        <p:spPr>
-          <a:xfrm>
-            <a:off x="2626007" y="2773733"/>
-            <a:ext cx="1043746" cy="247650"/>
-          </a:xfrm>
-          <a:prstGeom prst="rect">
-            <a:avLst/>
-          </a:prstGeom>
-          <a:noFill/>
-          <a:ln/>
-        </p:spPr>
-        <p:txBody>
-          <a:bodyPr wrap="square" lIns="38100" tIns="114300" rIns="114300" bIns="38100" rtlCol="0" anchor="ctr"/>
-          <a:lstStyle/>
-          <a:p>
-            <a:pPr algn="r" indent="0" marL="0">
-              <a:buNone/>
-            </a:pPr>
-            <a:r>
-              <a:rPr lang="en-US" sz="864" dirty="0">
-                <a:solidFill>
-                  <a:srgbClr val="333333"/>
-                </a:solidFill>
-                <a:latin typeface="Raleway" pitchFamily="34" charset="0"/>
-                <a:ea typeface="Raleway" pitchFamily="34" charset="-122"/>
-                <a:cs typeface="Raleway" pitchFamily="34" charset="-120"/>
-              </a:rPr>
-              <a:t>65</a:t>
-            </a:r>
-            <a:endParaRPr lang="en-US" sz="864" dirty="0"/>
-          </a:p>
-        </p:txBody>
-      </p:sp>
-      <p:sp>
-        <p:nvSpPr>
-          <p:cNvPr id="48" name="Text 45"/>
-          <p:cNvSpPr/>
-          <p:nvPr/>
-        </p:nvSpPr>
-        <p:spPr>
-          <a:xfrm>
-            <a:off x="3639352" y="2773733"/>
-            <a:ext cx="1123303" cy="247650"/>
-          </a:xfrm>
-          <a:prstGeom prst="rect">
-            <a:avLst/>
-          </a:prstGeom>
-          <a:noFill/>
-          <a:ln/>
-        </p:spPr>
-        <p:txBody>
-          <a:bodyPr wrap="square" lIns="38100" tIns="114300" rIns="114300" bIns="38100" rtlCol="0" anchor="ctr"/>
-          <a:lstStyle/>
-          <a:p>
-            <a:pPr algn="r" indent="0" marL="0">
-              <a:buNone/>
-            </a:pPr>
-            <a:r>
-              <a:rPr lang="en-US" sz="864" dirty="0">
-                <a:solidFill>
-                  <a:srgbClr val="333333"/>
-                </a:solidFill>
-                <a:latin typeface="Raleway" pitchFamily="34" charset="0"/>
-                <a:ea typeface="Raleway" pitchFamily="34" charset="-122"/>
-                <a:cs typeface="Raleway" pitchFamily="34" charset="-120"/>
-              </a:rPr>
-              <a:t>52</a:t>
-            </a:r>
-            <a:endParaRPr lang="en-US" sz="864" dirty="0"/>
-          </a:p>
-        </p:txBody>
-      </p:sp>
-      <p:sp>
-        <p:nvSpPr>
-          <p:cNvPr id="49" name="Text 46"/>
-          <p:cNvSpPr/>
-          <p:nvPr/>
-        </p:nvSpPr>
-        <p:spPr>
-          <a:xfrm>
-            <a:off x="2626007" y="3021383"/>
-            <a:ext cx="1043746" cy="247650"/>
-          </a:xfrm>
-          <a:prstGeom prst="rect">
-            <a:avLst/>
-          </a:prstGeom>
-          <a:noFill/>
-          <a:ln/>
-        </p:spPr>
-        <p:txBody>
-          <a:bodyPr wrap="square" lIns="38100" tIns="114300" rIns="114300" bIns="38100" rtlCol="0" anchor="ctr"/>
-          <a:lstStyle/>
-          <a:p>
-            <a:pPr algn="r" indent="0" marL="0">
-              <a:buNone/>
-            </a:pPr>
-            <a:r>
-              <a:rPr lang="en-US" sz="864" dirty="0">
-                <a:solidFill>
-                  <a:srgbClr val="333333"/>
-                </a:solidFill>
-                <a:latin typeface="Raleway" pitchFamily="34" charset="0"/>
-                <a:ea typeface="Raleway" pitchFamily="34" charset="-122"/>
-                <a:cs typeface="Raleway" pitchFamily="34" charset="-120"/>
-              </a:rPr>
-              <a:t>71</a:t>
-            </a:r>
-            <a:endParaRPr lang="en-US" sz="864" dirty="0"/>
-          </a:p>
-        </p:txBody>
-      </p:sp>
-      <p:sp>
-        <p:nvSpPr>
-          <p:cNvPr id="50" name="Text 47"/>
-          <p:cNvSpPr/>
-          <p:nvPr/>
-        </p:nvSpPr>
-        <p:spPr>
-          <a:xfrm>
-            <a:off x="3639352" y="3021383"/>
-            <a:ext cx="1123303" cy="247650"/>
-          </a:xfrm>
-          <a:prstGeom prst="rect">
-            <a:avLst/>
-          </a:prstGeom>
-          <a:noFill/>
-          <a:ln/>
-        </p:spPr>
-        <p:txBody>
-          <a:bodyPr wrap="square" lIns="38100" tIns="114300" rIns="114300" bIns="38100" rtlCol="0" anchor="ctr"/>
-          <a:lstStyle/>
-          <a:p>
-            <a:pPr algn="r" indent="0" marL="0">
-              <a:buNone/>
-            </a:pPr>
-            <a:r>
-              <a:rPr lang="en-US" sz="864" dirty="0">
-                <a:solidFill>
-                  <a:srgbClr val="333333"/>
-                </a:solidFill>
-                <a:latin typeface="Raleway" pitchFamily="34" charset="0"/>
-                <a:ea typeface="Raleway" pitchFamily="34" charset="-122"/>
-                <a:cs typeface="Raleway" pitchFamily="34" charset="-120"/>
-              </a:rPr>
-              <a:t>45</a:t>
-            </a:r>
-            <a:endParaRPr lang="en-US" sz="864" dirty="0"/>
-          </a:p>
-        </p:txBody>
-      </p:sp>
-      <p:sp>
-        <p:nvSpPr>
-          <p:cNvPr id="51" name="Text 48"/>
-          <p:cNvSpPr/>
-          <p:nvPr/>
-        </p:nvSpPr>
-        <p:spPr>
-          <a:xfrm>
-            <a:off x="2626007" y="3269033"/>
-            <a:ext cx="1043746" cy="247650"/>
-          </a:xfrm>
-          <a:prstGeom prst="rect">
-            <a:avLst/>
-          </a:prstGeom>
-          <a:noFill/>
-          <a:ln/>
-        </p:spPr>
-        <p:txBody>
-          <a:bodyPr wrap="square" lIns="38100" tIns="114300" rIns="114300" bIns="38100" rtlCol="0" anchor="ctr"/>
-          <a:lstStyle/>
-          <a:p>
-            <a:pPr algn="r" indent="0" marL="0">
-              <a:buNone/>
-            </a:pPr>
-            <a:r>
-              <a:rPr lang="en-US" sz="864" dirty="0">
-                <a:solidFill>
-                  <a:srgbClr val="333333"/>
-                </a:solidFill>
-                <a:latin typeface="Raleway" pitchFamily="34" charset="0"/>
-                <a:ea typeface="Raleway" pitchFamily="34" charset="-122"/>
-                <a:cs typeface="Raleway" pitchFamily="34" charset="-120"/>
-              </a:rPr>
-              <a:t>61</a:t>
-            </a:r>
-            <a:endParaRPr lang="en-US" sz="864" dirty="0"/>
-          </a:p>
-        </p:txBody>
-      </p:sp>
-      <p:sp>
-        <p:nvSpPr>
-          <p:cNvPr id="52" name="Text 49"/>
-          <p:cNvSpPr/>
-          <p:nvPr/>
-        </p:nvSpPr>
-        <p:spPr>
-          <a:xfrm>
-            <a:off x="3639352" y="3269033"/>
-            <a:ext cx="1123303" cy="247650"/>
-          </a:xfrm>
-          <a:prstGeom prst="rect">
-            <a:avLst/>
-          </a:prstGeom>
-          <a:noFill/>
-          <a:ln/>
-        </p:spPr>
-        <p:txBody>
-          <a:bodyPr wrap="square" lIns="38100" tIns="114300" rIns="114300" bIns="38100" rtlCol="0" anchor="ctr"/>
-          <a:lstStyle/>
-          <a:p>
-            <a:pPr algn="r" indent="0" marL="0">
-              <a:buNone/>
-            </a:pPr>
-            <a:r>
-              <a:rPr lang="en-US" sz="864" dirty="0">
-                <a:solidFill>
-                  <a:srgbClr val="333333"/>
-                </a:solidFill>
-                <a:latin typeface="Raleway" pitchFamily="34" charset="0"/>
-                <a:ea typeface="Raleway" pitchFamily="34" charset="-122"/>
-                <a:cs typeface="Raleway" pitchFamily="34" charset="-120"/>
-              </a:rPr>
-              <a:t>36</a:t>
-            </a:r>
-            <a:endParaRPr lang="en-US" sz="864" dirty="0"/>
-          </a:p>
-        </p:txBody>
-      </p:sp>
-      <p:sp>
-        <p:nvSpPr>
-          <p:cNvPr id="53" name="Text 50"/>
-          <p:cNvSpPr/>
-          <p:nvPr/>
-        </p:nvSpPr>
-        <p:spPr>
-          <a:xfrm>
-            <a:off x="1400289" y="3516683"/>
-            <a:ext cx="1262489" cy="247650"/>
-          </a:xfrm>
-          <a:prstGeom prst="rect">
-            <a:avLst/>
-          </a:prstGeom>
-          <a:noFill/>
-          <a:ln/>
-        </p:spPr>
-        <p:txBody>
-          <a:bodyPr wrap="square" lIns="38100" tIns="114300" rIns="114300" bIns="38100" rtlCol="0" anchor="ctr"/>
-          <a:lstStyle/>
-          <a:p>
-            <a:pPr algn="r" indent="0" marL="0">
-              <a:buNone/>
-            </a:pPr>
-            <a:r>
-              <a:rPr lang="en-US" sz="864" dirty="0">
-                <a:solidFill>
-                  <a:srgbClr val="333333"/>
-                </a:solidFill>
-                <a:latin typeface="Raleway" pitchFamily="34" charset="0"/>
-                <a:ea typeface="Raleway" pitchFamily="34" charset="-122"/>
-                <a:cs typeface="Raleway" pitchFamily="34" charset="-120"/>
-              </a:rPr>
-              <a:t>93</a:t>
-            </a:r>
-            <a:endParaRPr lang="en-US" sz="864" dirty="0"/>
-          </a:p>
-        </p:txBody>
-      </p:sp>
-      <p:sp>
-        <p:nvSpPr>
-          <p:cNvPr id="54" name="Text 51"/>
-          <p:cNvSpPr/>
-          <p:nvPr/>
-        </p:nvSpPr>
-        <p:spPr>
-          <a:xfrm>
-            <a:off x="2626007" y="3516683"/>
-            <a:ext cx="1043746" cy="247650"/>
-          </a:xfrm>
-          <a:prstGeom prst="rect">
-            <a:avLst/>
-          </a:prstGeom>
-          <a:noFill/>
-          <a:ln/>
-        </p:spPr>
-        <p:txBody>
-          <a:bodyPr wrap="square" lIns="38100" tIns="114300" rIns="114300" bIns="38100" rtlCol="0" anchor="ctr"/>
-          <a:lstStyle/>
-          <a:p>
-            <a:pPr algn="r" indent="0" marL="0">
-              <a:buNone/>
-            </a:pPr>
-            <a:r>
-              <a:rPr lang="en-US" sz="864" dirty="0">
-                <a:solidFill>
-                  <a:srgbClr val="333333"/>
-                </a:solidFill>
-                <a:latin typeface="Raleway" pitchFamily="34" charset="0"/>
-                <a:ea typeface="Raleway" pitchFamily="34" charset="-122"/>
-                <a:cs typeface="Raleway" pitchFamily="34" charset="-120"/>
-              </a:rPr>
-              <a:t>33</a:t>
-            </a:r>
-            <a:endParaRPr lang="en-US" sz="864" dirty="0"/>
-          </a:p>
-        </p:txBody>
-      </p:sp>
-      <p:sp>
-        <p:nvSpPr>
-          <p:cNvPr id="55" name="Text 52"/>
-          <p:cNvSpPr/>
-          <p:nvPr/>
-        </p:nvSpPr>
-        <p:spPr>
-          <a:xfrm>
-            <a:off x="3639352" y="3516683"/>
-            <a:ext cx="1123303" cy="247650"/>
-          </a:xfrm>
-          <a:prstGeom prst="rect">
-            <a:avLst/>
-          </a:prstGeom>
-          <a:noFill/>
-          <a:ln/>
-        </p:spPr>
-        <p:txBody>
-          <a:bodyPr wrap="square" lIns="38100" tIns="114300" rIns="114300" bIns="38100" rtlCol="0" anchor="ctr"/>
-          <a:lstStyle/>
-          <a:p>
-            <a:pPr algn="r" indent="0" marL="0">
-              <a:buNone/>
-            </a:pPr>
-            <a:r>
-              <a:rPr lang="en-US" sz="864" dirty="0">
-                <a:solidFill>
-                  <a:srgbClr val="333333"/>
-                </a:solidFill>
-                <a:latin typeface="Raleway" pitchFamily="34" charset="0"/>
-                <a:ea typeface="Raleway" pitchFamily="34" charset="-122"/>
-                <a:cs typeface="Raleway" pitchFamily="34" charset="-120"/>
-              </a:rPr>
-              <a:t>19</a:t>
-            </a:r>
-            <a:endParaRPr lang="en-US" sz="864" dirty="0"/>
-          </a:p>
-        </p:txBody>
-      </p:sp>
-      <p:sp>
-        <p:nvSpPr>
-          <p:cNvPr id="56" name="Text 53"/>
-          <p:cNvSpPr/>
-          <p:nvPr/>
-        </p:nvSpPr>
-        <p:spPr>
-          <a:xfrm>
-            <a:off x="1400289" y="3764333"/>
-            <a:ext cx="1262489" cy="247650"/>
-          </a:xfrm>
-          <a:prstGeom prst="rect">
-            <a:avLst/>
-          </a:prstGeom>
-          <a:noFill/>
-          <a:ln/>
-        </p:spPr>
-        <p:txBody>
-          <a:bodyPr wrap="square" lIns="38100" tIns="114300" rIns="114300" bIns="38100" rtlCol="0" anchor="ctr"/>
-          <a:lstStyle/>
-          <a:p>
-            <a:pPr algn="r" indent="0" marL="0">
-              <a:buNone/>
-            </a:pPr>
-            <a:r>
-              <a:rPr lang="en-US" sz="864" dirty="0">
-                <a:solidFill>
-                  <a:srgbClr val="333333"/>
-                </a:solidFill>
-                <a:latin typeface="Raleway" pitchFamily="34" charset="0"/>
-                <a:ea typeface="Raleway" pitchFamily="34" charset="-122"/>
-                <a:cs typeface="Raleway" pitchFamily="34" charset="-120"/>
-              </a:rPr>
-              <a:t>96</a:t>
-            </a:r>
-            <a:endParaRPr lang="en-US" sz="864" dirty="0"/>
-          </a:p>
-        </p:txBody>
-      </p:sp>
-      <p:sp>
-        <p:nvSpPr>
-          <p:cNvPr id="57" name="Text 54"/>
-          <p:cNvSpPr/>
-          <p:nvPr/>
-        </p:nvSpPr>
-        <p:spPr>
-          <a:xfrm>
-            <a:off x="2626007" y="3764333"/>
-            <a:ext cx="1043746" cy="247650"/>
-          </a:xfrm>
-          <a:prstGeom prst="rect">
-            <a:avLst/>
-          </a:prstGeom>
-          <a:noFill/>
-          <a:ln/>
-        </p:spPr>
-        <p:txBody>
-          <a:bodyPr wrap="square" lIns="38100" tIns="114300" rIns="114300" bIns="38100" rtlCol="0" anchor="ctr"/>
-          <a:lstStyle/>
-          <a:p>
-            <a:pPr algn="r" indent="0" marL="0">
-              <a:buNone/>
-            </a:pPr>
-            <a:r>
-              <a:rPr lang="en-US" sz="864" dirty="0">
-                <a:solidFill>
-                  <a:srgbClr val="333333"/>
-                </a:solidFill>
-                <a:latin typeface="Raleway" pitchFamily="34" charset="0"/>
-                <a:ea typeface="Raleway" pitchFamily="34" charset="-122"/>
-                <a:cs typeface="Raleway" pitchFamily="34" charset="-120"/>
-              </a:rPr>
-              <a:t>25</a:t>
-            </a:r>
-            <a:endParaRPr lang="en-US" sz="864" dirty="0"/>
-          </a:p>
-        </p:txBody>
-      </p:sp>
-      <p:sp>
-        <p:nvSpPr>
-          <p:cNvPr id="58" name="Text 55"/>
-          <p:cNvSpPr/>
-          <p:nvPr/>
-        </p:nvSpPr>
-        <p:spPr>
-          <a:xfrm>
-            <a:off x="3639352" y="3764333"/>
-            <a:ext cx="1123303" cy="247650"/>
-          </a:xfrm>
-          <a:prstGeom prst="rect">
-            <a:avLst/>
-          </a:prstGeom>
-          <a:noFill/>
-          <a:ln/>
-        </p:spPr>
-        <p:txBody>
-          <a:bodyPr wrap="square" lIns="38100" tIns="114300" rIns="114300" bIns="38100" rtlCol="0" anchor="ctr"/>
-          <a:lstStyle/>
-          <a:p>
-            <a:pPr algn="r" indent="0" marL="0">
-              <a:buNone/>
-            </a:pPr>
-            <a:r>
-              <a:rPr lang="en-US" sz="864" dirty="0">
-                <a:solidFill>
-                  <a:srgbClr val="333333"/>
-                </a:solidFill>
-                <a:latin typeface="Raleway" pitchFamily="34" charset="0"/>
-                <a:ea typeface="Raleway" pitchFamily="34" charset="-122"/>
-                <a:cs typeface="Raleway" pitchFamily="34" charset="-120"/>
-              </a:rPr>
-              <a:t>14</a:t>
-            </a:r>
-            <a:endParaRPr lang="en-US" sz="864" dirty="0"/>
-          </a:p>
-        </p:txBody>
-      </p:sp>
-      <p:sp>
-        <p:nvSpPr>
-          <p:cNvPr id="59" name="Text 56"/>
-          <p:cNvSpPr/>
-          <p:nvPr/>
-        </p:nvSpPr>
-        <p:spPr>
-          <a:xfrm>
-            <a:off x="11010625" y="2354610"/>
-            <a:ext cx="470904" cy="128016"/>
-          </a:xfrm>
-          <a:prstGeom prst="rect">
-            <a:avLst/>
-          </a:prstGeom>
-          <a:noFill/>
-          <a:ln/>
-        </p:spPr>
-        <p:txBody>
-          <a:bodyPr wrap="square" lIns="0" tIns="0" rIns="0" bIns="0" rtlCol="0" anchor="t"/>
-          <a:lstStyle/>
-          <a:p>
-            <a:pPr algn="r" indent="0" marL="0">
-              <a:buNone/>
-            </a:pPr>
-            <a:r>
-              <a:rPr lang="en-US" sz="780" b="1" dirty="0">
-                <a:solidFill>
-                  <a:srgbClr val="333333"/>
-                </a:solidFill>
-                <a:latin typeface="Raleway" pitchFamily="34" charset="0"/>
-                <a:ea typeface="Raleway" pitchFamily="34" charset="-122"/>
-                <a:cs typeface="Raleway" pitchFamily="34" charset="-120"/>
-              </a:rPr>
-              <a:t>81</a:t>
-            </a:r>
-            <a:endParaRPr lang="en-US" sz="780" dirty="0"/>
-          </a:p>
-        </p:txBody>
-      </p:sp>
-      <p:sp>
-        <p:nvSpPr>
-          <p:cNvPr id="60" name="Text 57"/>
-          <p:cNvSpPr/>
-          <p:nvPr/>
-        </p:nvSpPr>
-        <p:spPr>
-          <a:xfrm>
-            <a:off x="11010625" y="2583210"/>
-            <a:ext cx="470904" cy="128016"/>
-          </a:xfrm>
-          <a:prstGeom prst="rect">
-            <a:avLst/>
-          </a:prstGeom>
-          <a:noFill/>
-          <a:ln/>
-        </p:spPr>
-        <p:txBody>
-          <a:bodyPr wrap="square" lIns="0" tIns="0" rIns="0" bIns="0" rtlCol="0" anchor="t"/>
-          <a:lstStyle/>
-          <a:p>
-            <a:pPr algn="r" indent="0" marL="0">
-              <a:buNone/>
-            </a:pPr>
-            <a:r>
-              <a:rPr lang="en-US" sz="780" b="1" dirty="0">
-                <a:solidFill>
-                  <a:srgbClr val="333333"/>
-                </a:solidFill>
-                <a:latin typeface="Raleway" pitchFamily="34" charset="0"/>
-                <a:ea typeface="Raleway" pitchFamily="34" charset="-122"/>
-                <a:cs typeface="Raleway" pitchFamily="34" charset="-120"/>
-              </a:rPr>
-              <a:t>74</a:t>
-            </a:r>
-            <a:endParaRPr lang="en-US" sz="780" dirty="0"/>
-          </a:p>
-        </p:txBody>
-      </p:sp>
-      <p:sp>
-        <p:nvSpPr>
-          <p:cNvPr id="61" name="Text 58"/>
-          <p:cNvSpPr/>
-          <p:nvPr/>
-        </p:nvSpPr>
-        <p:spPr>
-          <a:xfrm>
-            <a:off x="11010625" y="2811810"/>
-            <a:ext cx="470904" cy="128016"/>
-          </a:xfrm>
-          <a:prstGeom prst="rect">
-            <a:avLst/>
-          </a:prstGeom>
-          <a:noFill/>
-          <a:ln/>
-        </p:spPr>
-        <p:txBody>
-          <a:bodyPr wrap="square" lIns="0" tIns="0" rIns="0" bIns="0" rtlCol="0" anchor="t"/>
-          <a:lstStyle/>
-          <a:p>
-            <a:pPr algn="r" indent="0" marL="0">
-              <a:buNone/>
-            </a:pPr>
-            <a:r>
-              <a:rPr lang="en-US" sz="780" b="1" dirty="0">
-                <a:solidFill>
-                  <a:srgbClr val="333333"/>
-                </a:solidFill>
-                <a:latin typeface="Raleway" pitchFamily="34" charset="0"/>
-                <a:ea typeface="Raleway" pitchFamily="34" charset="-122"/>
-                <a:cs typeface="Raleway" pitchFamily="34" charset="-120"/>
-              </a:rPr>
-              <a:t>75</a:t>
-            </a:r>
-            <a:endParaRPr lang="en-US" sz="780" dirty="0"/>
-          </a:p>
-        </p:txBody>
-      </p:sp>
-      <p:sp>
-        <p:nvSpPr>
-          <p:cNvPr id="62" name="Text 59"/>
-          <p:cNvSpPr/>
-          <p:nvPr/>
-        </p:nvSpPr>
-        <p:spPr>
-          <a:xfrm>
-            <a:off x="11010625" y="3040410"/>
-            <a:ext cx="470904" cy="128016"/>
-          </a:xfrm>
-          <a:prstGeom prst="rect">
-            <a:avLst/>
-          </a:prstGeom>
-          <a:noFill/>
-          <a:ln/>
-        </p:spPr>
-        <p:txBody>
-          <a:bodyPr wrap="square" lIns="0" tIns="0" rIns="0" bIns="0" rtlCol="0" anchor="t"/>
-          <a:lstStyle/>
-          <a:p>
-            <a:pPr algn="r" indent="0" marL="0">
-              <a:buNone/>
-            </a:pPr>
-            <a:r>
-              <a:rPr lang="en-US" sz="780" b="1" dirty="0">
-                <a:solidFill>
-                  <a:srgbClr val="333333"/>
-                </a:solidFill>
-                <a:latin typeface="Raleway" pitchFamily="34" charset="0"/>
-                <a:ea typeface="Raleway" pitchFamily="34" charset="-122"/>
-                <a:cs typeface="Raleway" pitchFamily="34" charset="-120"/>
-              </a:rPr>
-              <a:t>76</a:t>
-            </a:r>
-            <a:endParaRPr lang="en-US" sz="780" dirty="0"/>
-          </a:p>
-        </p:txBody>
-      </p:sp>
-      <p:sp>
-        <p:nvSpPr>
-          <p:cNvPr id="63" name="Text 60"/>
-          <p:cNvSpPr/>
-          <p:nvPr/>
-        </p:nvSpPr>
-        <p:spPr>
-          <a:xfrm>
-            <a:off x="11010625" y="3269010"/>
-            <a:ext cx="470904" cy="128016"/>
-          </a:xfrm>
-          <a:prstGeom prst="rect">
-            <a:avLst/>
-          </a:prstGeom>
-          <a:noFill/>
-          <a:ln/>
-        </p:spPr>
-        <p:txBody>
-          <a:bodyPr wrap="square" lIns="0" tIns="0" rIns="0" bIns="0" rtlCol="0" anchor="t"/>
-          <a:lstStyle/>
-          <a:p>
-            <a:pPr algn="r" indent="0" marL="0">
-              <a:buNone/>
-            </a:pPr>
-            <a:r>
-              <a:rPr lang="en-US" sz="780" b="1" dirty="0">
-                <a:solidFill>
-                  <a:srgbClr val="333333"/>
-                </a:solidFill>
-                <a:latin typeface="Raleway" pitchFamily="34" charset="0"/>
-                <a:ea typeface="Raleway" pitchFamily="34" charset="-122"/>
-                <a:cs typeface="Raleway" pitchFamily="34" charset="-120"/>
-              </a:rPr>
-              <a:t>37</a:t>
-            </a:r>
-            <a:endParaRPr lang="en-US" sz="780" dirty="0"/>
-          </a:p>
-        </p:txBody>
-      </p:sp>
-      <p:sp>
-        <p:nvSpPr>
           <p:cNvPr id="64" name="Text 61"/>
           <p:cNvSpPr/>
           <p:nvPr/>
         </p:nvSpPr>
         <p:spPr>
           <a:xfrm>
-            <a:off x="11010625" y="3497610"/>
-            <a:ext cx="470904" cy="128016"/>
+            <a:off x="11325215" y="3497610"/>
+            <a:ext cx="274320" cy="128016"/>
           </a:xfrm>
           <a:prstGeom prst="rect">
             <a:avLst/>
@@ -3515,7 +3515,7 @@
       </p:grpSpPr>
       <p:pic>
         <p:nvPicPr>
-          <p:cNvPr id="2" name="Image 0" descr="C:\01_Repositorios\13_Presentaciones\dash\retail\ppt_slides\sk_01_Cobertura.png">    </p:cNvPr>
+          <p:cNvPr id="2" name="Image 0" descr="C:\01_Repositorios\13_Presentaciones\dash\retail\ppt_slides\sk_01_main.png">    </p:cNvPr>
           <p:cNvPicPr>
             <a:picLocks noChangeAspect="1"/>
           </p:cNvPicPr>
@@ -3546,7 +3546,7 @@
         <p:spPr>
           <a:xfrm>
             <a:off x="6295868" y="3766542"/>
-            <a:ext cx="5327104" cy="431673"/>
+            <a:ext cx="5463636" cy="431673"/>
           </a:xfrm>
           <a:prstGeom prst="rect">
             <a:avLst/>
@@ -3570,7 +3570,35 @@
                 <a:ea typeface="Raleway" pitchFamily="34" charset="-122"/>
                 <a:cs typeface="Raleway" pitchFamily="34" charset="-120"/>
               </a:rPr>
-              <a:t>* Universo = PDV físicos distintos observados en los 26 cortes semanales "Como vamos" del semestre. Coberturas &gt;100 % indican PDV que Formación visitó con nombre distinto al registrado en Como vamos ese corte, o puntos sin gestión comercial activa ese mes. Gestores del canal: 147 (ene) → 96 (jun), promedio 123; los cortes "Como vamos" no desagregan gestores por aliado.</a:t>
+              <a:t>* Universo = PDV físicos distintos observados en los 26 cortes semanales "Como vamos" del semestre. Coberturas &gt;100 % indican PDV que Formación visitó con nombre distinto al registrado en Como vamos ese corte, o puntos sin gestión comercial activa ese mes. </a:t>
+            </a:r>
+            <a:pPr algn="l" indent="0" marL="0">
+              <a:buNone/>
+            </a:pPr>
+            <a:r>
+              <a:rPr lang="en-US" sz="720" b="1" dirty="0">
+                <a:solidFill>
+                  <a:srgbClr val="9098B0"/>
+                </a:solidFill>
+                <a:latin typeface="Raleway" pitchFamily="34" charset="0"/>
+                <a:ea typeface="Raleway" pitchFamily="34" charset="-122"/>
+                <a:cs typeface="Raleway" pitchFamily="34" charset="-120"/>
+              </a:rPr>
+              <a:t>Gestores del canal:</a:t>
+            </a:r>
+            <a:pPr algn="l" indent="0" marL="0">
+              <a:buNone/>
+            </a:pPr>
+            <a:r>
+              <a:rPr lang="en-US" sz="720" dirty="0">
+                <a:solidFill>
+                  <a:srgbClr val="9098B0"/>
+                </a:solidFill>
+                <a:latin typeface="Raleway" pitchFamily="34" charset="0"/>
+                <a:ea typeface="Raleway" pitchFamily="34" charset="-122"/>
+                <a:cs typeface="Raleway" pitchFamily="34" charset="-120"/>
+              </a:rPr>
+              <a:t> 147 (ene) → 96 (jun), promedio 123; los cortes "Como vamos" no desagregan gestores por aliado.</a:t>
             </a:r>
             <a:endParaRPr lang="en-US" sz="720" dirty="0"/>
           </a:p>
@@ -3584,8 +3612,8 @@
         </p:nvSpPr>
         <p:spPr>
           <a:xfrm>
-            <a:off x="5470636" y="4735116"/>
-            <a:ext cx="6186903" cy="272861"/>
+            <a:off x="5470636" y="4744641"/>
+            <a:ext cx="6244360" cy="244349"/>
           </a:xfrm>
           <a:prstGeom prst="rect">
             <a:avLst/>
@@ -3601,6 +3629,20 @@
               <a:buNone/>
             </a:pPr>
             <a:r>
+              <a:rPr lang="en-US" sz="720" b="1" dirty="0">
+                <a:solidFill>
+                  <a:srgbClr val="333333"/>
+                </a:solidFill>
+                <a:latin typeface="Raleway" pitchFamily="34" charset="0"/>
+                <a:ea typeface="Raleway" pitchFamily="34" charset="-122"/>
+                <a:cs typeface="Raleway" pitchFamily="34" charset="-120"/>
+              </a:rPr>
+              <a:t>Sobre "Serdán" (90 visitas):</a:t>
+            </a:r>
+            <a:pPr algn="l" indent="0" marL="0">
+              <a:buNone/>
+            </a:pPr>
+            <a:r>
               <a:rPr lang="en-US" sz="720" dirty="0">
                 <a:solidFill>
                   <a:srgbClr val="333333"/>
@@ -3609,7 +3651,91 @@
                 <a:ea typeface="Raleway" pitchFamily="34" charset="-122"/>
                 <a:cs typeface="Raleway" pitchFamily="34" charset="-120"/>
               </a:rPr>
-              <a:t>Sobre "Serdán" (90 visitas): empresa que provee promotores a ambos canales, no un aliado. De las 90: 33 puras Retail+Tradicional, 33 sedes/roles internos (no PDV) y 14 con cédula activa en ambos canales (contadas en los dos). Total atribuido: 24 a Retail y 47 a Tradicional.</a:t>
+              <a:t> empresa que provee promotores a ambos canales, no un aliado. De las 90: 33 puras Retail+Tradicional, 33 sedes/roles internos (no PDV) y 14 con cédula activa en ambos canales </a:t>
+            </a:r>
+            <a:pPr algn="l" indent="0" marL="0">
+              <a:buNone/>
+            </a:pPr>
+            <a:r>
+              <a:rPr lang="en-US" sz="720" b="1" dirty="0">
+                <a:solidFill>
+                  <a:srgbClr val="333333"/>
+                </a:solidFill>
+                <a:latin typeface="Raleway" pitchFamily="34" charset="0"/>
+                <a:ea typeface="Raleway" pitchFamily="34" charset="-122"/>
+                <a:cs typeface="Raleway" pitchFamily="34" charset="-120"/>
+              </a:rPr>
+              <a:t>(contadas en los dos)</a:t>
+            </a:r>
+            <a:pPr algn="l" indent="0" marL="0">
+              <a:buNone/>
+            </a:pPr>
+            <a:r>
+              <a:rPr lang="en-US" sz="720" dirty="0">
+                <a:solidFill>
+                  <a:srgbClr val="333333"/>
+                </a:solidFill>
+                <a:latin typeface="Raleway" pitchFamily="34" charset="0"/>
+                <a:ea typeface="Raleway" pitchFamily="34" charset="-122"/>
+                <a:cs typeface="Raleway" pitchFamily="34" charset="-120"/>
+              </a:rPr>
+              <a:t>. Total atribuido: </a:t>
+            </a:r>
+            <a:pPr algn="l" indent="0" marL="0">
+              <a:buNone/>
+            </a:pPr>
+            <a:r>
+              <a:rPr lang="en-US" sz="720" b="1" dirty="0">
+                <a:solidFill>
+                  <a:srgbClr val="333333"/>
+                </a:solidFill>
+                <a:latin typeface="Raleway" pitchFamily="34" charset="0"/>
+                <a:ea typeface="Raleway" pitchFamily="34" charset="-122"/>
+                <a:cs typeface="Raleway" pitchFamily="34" charset="-120"/>
+              </a:rPr>
+              <a:t>24 a Retail</a:t>
+            </a:r>
+            <a:pPr algn="l" indent="0" marL="0">
+              <a:buNone/>
+            </a:pPr>
+            <a:r>
+              <a:rPr lang="en-US" sz="720" dirty="0">
+                <a:solidFill>
+                  <a:srgbClr val="333333"/>
+                </a:solidFill>
+                <a:latin typeface="Raleway" pitchFamily="34" charset="0"/>
+                <a:ea typeface="Raleway" pitchFamily="34" charset="-122"/>
+                <a:cs typeface="Raleway" pitchFamily="34" charset="-120"/>
+              </a:rPr>
+              <a:t> y </a:t>
+            </a:r>
+            <a:pPr algn="l" indent="0" marL="0">
+              <a:buNone/>
+            </a:pPr>
+            <a:r>
+              <a:rPr lang="en-US" sz="720" b="1" dirty="0">
+                <a:solidFill>
+                  <a:srgbClr val="333333"/>
+                </a:solidFill>
+                <a:latin typeface="Raleway" pitchFamily="34" charset="0"/>
+                <a:ea typeface="Raleway" pitchFamily="34" charset="-122"/>
+                <a:cs typeface="Raleway" pitchFamily="34" charset="-120"/>
+              </a:rPr>
+              <a:t>47 a Tradicional</a:t>
+            </a:r>
+            <a:pPr algn="l" indent="0" marL="0">
+              <a:buNone/>
+            </a:pPr>
+            <a:r>
+              <a:rPr lang="en-US" sz="720" dirty="0">
+                <a:solidFill>
+                  <a:srgbClr val="333333"/>
+                </a:solidFill>
+                <a:latin typeface="Raleway" pitchFamily="34" charset="0"/>
+                <a:ea typeface="Raleway" pitchFamily="34" charset="-122"/>
+                <a:cs typeface="Raleway" pitchFamily="34" charset="-120"/>
+              </a:rPr>
+              <a:t>.</a:t>
             </a:r>
             <a:endParaRPr lang="en-US" sz="720" dirty="0"/>
           </a:p>
@@ -3623,8 +3749,8 @@
         </p:nvSpPr>
         <p:spPr>
           <a:xfrm>
-            <a:off x="704832" y="1796355"/>
-            <a:ext cx="5366346" cy="141030"/>
+            <a:off x="704832" y="1805880"/>
+            <a:ext cx="5159013" cy="128016"/>
           </a:xfrm>
           <a:prstGeom prst="rect">
             <a:avLst/>
@@ -3663,7 +3789,7 @@
         <p:spPr>
           <a:xfrm>
             <a:off x="5470636" y="5765602"/>
-            <a:ext cx="6186903" cy="128016"/>
+            <a:ext cx="4503546" cy="128016"/>
           </a:xfrm>
           <a:prstGeom prst="rect">
             <a:avLst/>
@@ -3701,8 +3827,8 @@
         </p:nvSpPr>
         <p:spPr>
           <a:xfrm>
-            <a:off x="704832" y="4614267"/>
-            <a:ext cx="4526168" cy="136124"/>
+            <a:off x="704832" y="4623792"/>
+            <a:ext cx="3486349" cy="128016"/>
           </a:xfrm>
           <a:prstGeom prst="rect">
             <a:avLst/>
@@ -3741,7 +3867,7 @@
         <p:spPr>
           <a:xfrm>
             <a:off x="571486" y="209550"/>
-            <a:ext cx="4468532" cy="196215"/>
+            <a:ext cx="4616971" cy="196215"/>
           </a:xfrm>
           <a:prstGeom prst="rect">
             <a:avLst/>
@@ -3779,17 +3905,17 @@
         </p:nvSpPr>
         <p:spPr>
           <a:xfrm>
-            <a:off x="6295868" y="1567755"/>
-            <a:ext cx="5327104" cy="215836"/>
-          </a:xfrm>
-          <a:prstGeom prst="rect">
-            <a:avLst/>
-          </a:prstGeom>
-          <a:noFill/>
-          <a:ln/>
-        </p:spPr>
-        <p:txBody>
-          <a:bodyPr wrap="square" lIns="0" tIns="0" rIns="0" bIns="38100" rtlCol="0" anchor="t"/>
+            <a:off x="6448264" y="1567755"/>
+            <a:ext cx="3171788" cy="156972"/>
+          </a:xfrm>
+          <a:prstGeom prst="rect">
+            <a:avLst/>
+          </a:prstGeom>
+          <a:noFill/>
+          <a:ln/>
+        </p:spPr>
+        <p:txBody>
+          <a:bodyPr wrap="square" lIns="0" tIns="0" rIns="0" bIns="0" rtlCol="0" anchor="t"/>
           <a:lstStyle/>
           <a:p>
             <a:pPr algn="l" indent="0" marL="0">
@@ -3818,17 +3944,17 @@
         </p:nvSpPr>
         <p:spPr>
           <a:xfrm>
-            <a:off x="704832" y="1567755"/>
-            <a:ext cx="5366346" cy="196215"/>
-          </a:xfrm>
-          <a:prstGeom prst="rect">
-            <a:avLst/>
-          </a:prstGeom>
-          <a:noFill/>
-          <a:ln/>
-        </p:spPr>
-        <p:txBody>
-          <a:bodyPr wrap="square" lIns="0" tIns="0" rIns="0" bIns="19050" rtlCol="0" anchor="t"/>
+            <a:off x="857229" y="1596330"/>
+            <a:ext cx="2659403" cy="128016"/>
+          </a:xfrm>
+          <a:prstGeom prst="rect">
+            <a:avLst/>
+          </a:prstGeom>
+          <a:noFill/>
+          <a:ln/>
+        </p:spPr>
+        <p:txBody>
+          <a:bodyPr wrap="square" lIns="0" tIns="0" rIns="0" bIns="0" rtlCol="0" anchor="t"/>
           <a:lstStyle/>
           <a:p>
             <a:pPr algn="l" indent="0" marL="0">
@@ -3857,8 +3983,8 @@
         </p:nvSpPr>
         <p:spPr>
           <a:xfrm>
-            <a:off x="5470636" y="4423767"/>
-            <a:ext cx="6186903" cy="128016"/>
+            <a:off x="5594458" y="4433292"/>
+            <a:ext cx="2429556" cy="128016"/>
           </a:xfrm>
           <a:prstGeom prst="rect">
             <a:avLst/>
@@ -3921,7 +4047,21 @@
                 <a:ea typeface="Raleway" pitchFamily="34" charset="-122"/>
                 <a:cs typeface="Raleway" pitchFamily="34" charset="-120"/>
               </a:rPr>
-              <a:t>Colombiana de Comercio (Alkosto/Ktronix)</a:t>
+              <a:t>Colombiana de Comercio</a:t>
+            </a:r>
+            <a:pPr algn="l" indent="0" marL="0">
+              <a:buNone/>
+            </a:pPr>
+            <a:r>
+              <a:rPr lang="en-US" sz="888" dirty="0">
+                <a:solidFill>
+                  <a:srgbClr val="333333"/>
+                </a:solidFill>
+                <a:latin typeface="Raleway" pitchFamily="34" charset="0"/>
+                <a:ea typeface="Raleway" pitchFamily="34" charset="-122"/>
+                <a:cs typeface="Raleway" pitchFamily="34" charset="-120"/>
+              </a:rPr>
+              <a:t> (Alkosto/Ktronix)</a:t>
             </a:r>
             <a:endParaRPr lang="en-US" sz="888" dirty="0"/>
           </a:p>
@@ -3960,7 +4100,21 @@
                 <a:ea typeface="Raleway" pitchFamily="34" charset="-122"/>
                 <a:cs typeface="Raleway" pitchFamily="34" charset="-120"/>
               </a:rPr>
-              <a:t>Olímpica solo ene · aliado retirado</a:t>
+              <a:t>Olímpica </a:t>
+            </a:r>
+            <a:pPr algn="l" indent="0" marL="0">
+              <a:buNone/>
+            </a:pPr>
+            <a:r>
+              <a:rPr lang="en-US" sz="696" b="1" dirty="0">
+                <a:solidFill>
+                  <a:srgbClr val="C44A1A"/>
+                </a:solidFill>
+                <a:latin typeface="Raleway" pitchFamily="34" charset="0"/>
+                <a:ea typeface="Raleway" pitchFamily="34" charset="-122"/>
+                <a:cs typeface="Raleway" pitchFamily="34" charset="-120"/>
+              </a:rPr>
+              <a:t>solo ene · aliado retirado</a:t>
             </a:r>
             <a:endParaRPr lang="en-US" sz="888" dirty="0"/>
           </a:p>
@@ -3975,7 +4129,7 @@
         <p:spPr>
           <a:xfrm>
             <a:off x="9067573" y="1272480"/>
-            <a:ext cx="2511489" cy="128016"/>
+            <a:ext cx="1309503" cy="128016"/>
           </a:xfrm>
           <a:prstGeom prst="rect">
             <a:avLst/>
@@ -4038,7 +4192,21 @@
                 <a:ea typeface="Raleway" pitchFamily="34" charset="-122"/>
                 <a:cs typeface="Raleway" pitchFamily="34" charset="-120"/>
               </a:rPr>
-              <a:t>Almacenes Éxito aliado retirado</a:t>
+              <a:t>Almacenes Éxito </a:t>
+            </a:r>
+            <a:pPr algn="l" indent="0" marL="0">
+              <a:buNone/>
+            </a:pPr>
+            <a:r>
+              <a:rPr lang="en-US" sz="696" b="1" dirty="0">
+                <a:solidFill>
+                  <a:srgbClr val="C44A1A"/>
+                </a:solidFill>
+                <a:latin typeface="Raleway" pitchFamily="34" charset="0"/>
+                <a:ea typeface="Raleway" pitchFamily="34" charset="-122"/>
+                <a:cs typeface="Raleway" pitchFamily="34" charset="-120"/>
+              </a:rPr>
+              <a:t>aliado retirado</a:t>
             </a:r>
             <a:endParaRPr lang="en-US" sz="888" dirty="0"/>
           </a:p>
@@ -4053,7 +4221,7 @@
         <p:spPr>
           <a:xfrm>
             <a:off x="3505112" y="1272480"/>
-            <a:ext cx="2511489" cy="128016"/>
+            <a:ext cx="1142284" cy="128016"/>
           </a:xfrm>
           <a:prstGeom prst="rect">
             <a:avLst/>
@@ -4092,7 +4260,7 @@
         <p:spPr>
           <a:xfrm>
             <a:off x="6286343" y="1272480"/>
-            <a:ext cx="2511489" cy="128016"/>
+            <a:ext cx="1199707" cy="128016"/>
           </a:xfrm>
           <a:prstGeom prst="rect">
             <a:avLst/>
@@ -4155,7 +4323,21 @@
                 <a:ea typeface="Raleway" pitchFamily="34" charset="-122"/>
                 <a:cs typeface="Raleway" pitchFamily="34" charset="-120"/>
               </a:rPr>
-              <a:t>Cencosud (Jumbo/Metro/Easy)</a:t>
+              <a:t>Cencosud</a:t>
+            </a:r>
+            <a:pPr algn="l" indent="0" marL="0">
+              <a:buNone/>
+            </a:pPr>
+            <a:r>
+              <a:rPr lang="en-US" sz="888" dirty="0">
+                <a:solidFill>
+                  <a:srgbClr val="333333"/>
+                </a:solidFill>
+                <a:latin typeface="Raleway" pitchFamily="34" charset="0"/>
+                <a:ea typeface="Raleway" pitchFamily="34" charset="-122"/>
+                <a:cs typeface="Raleway" pitchFamily="34" charset="-120"/>
+              </a:rPr>
+              <a:t> (Jumbo/Metro/Easy)</a:t>
             </a:r>
             <a:endParaRPr lang="en-US" sz="888" dirty="0"/>
           </a:p>
@@ -4169,17 +4351,17 @@
         </p:nvSpPr>
         <p:spPr>
           <a:xfrm>
-            <a:off x="704832" y="4414242"/>
-            <a:ext cx="4526168" cy="186404"/>
-          </a:xfrm>
-          <a:prstGeom prst="rect">
-            <a:avLst/>
-          </a:prstGeom>
-          <a:noFill/>
-          <a:ln/>
-        </p:spPr>
-        <p:txBody>
-          <a:bodyPr wrap="square" lIns="0" tIns="0" rIns="0" bIns="19050" rtlCol="0" anchor="t"/>
+            <a:off x="857229" y="4433292"/>
+            <a:ext cx="1369134" cy="137350"/>
+          </a:xfrm>
+          <a:prstGeom prst="rect">
+            <a:avLst/>
+          </a:prstGeom>
+          <a:noFill/>
+          <a:ln/>
+        </p:spPr>
+        <p:txBody>
+          <a:bodyPr wrap="square" lIns="0" tIns="0" rIns="0" bIns="0" rtlCol="0" anchor="t"/>
           <a:lstStyle/>
           <a:p>
             <a:pPr algn="l" indent="0" marL="0">
@@ -4209,7 +4391,7 @@
         <p:spPr>
           <a:xfrm>
             <a:off x="723882" y="962025"/>
-            <a:ext cx="2511489" cy="128016"/>
+            <a:ext cx="1509851" cy="128016"/>
           </a:xfrm>
           <a:prstGeom prst="rect">
             <a:avLst/>
@@ -4248,7 +4430,7 @@
         <p:spPr>
           <a:xfrm>
             <a:off x="723882" y="1272480"/>
-            <a:ext cx="2511489" cy="128016"/>
+            <a:ext cx="907704" cy="128016"/>
           </a:xfrm>
           <a:prstGeom prst="rect">
             <a:avLst/>
@@ -4287,7 +4469,7 @@
         <p:spPr>
           <a:xfrm>
             <a:off x="6286343" y="962025"/>
-            <a:ext cx="2511489" cy="128016"/>
+            <a:ext cx="1344525" cy="128016"/>
           </a:xfrm>
           <a:prstGeom prst="rect">
             <a:avLst/>
@@ -4326,7 +4508,7 @@
         <p:spPr>
           <a:xfrm>
             <a:off x="9067573" y="962025"/>
-            <a:ext cx="2511489" cy="128016"/>
+            <a:ext cx="1097955" cy="128016"/>
           </a:xfrm>
           <a:prstGeom prst="rect">
             <a:avLst/>
@@ -4403,7 +4585,7 @@
         </p:nvSpPr>
         <p:spPr>
           <a:xfrm>
-            <a:off x="2580318" y="1976163"/>
+            <a:off x="2544372" y="1976163"/>
             <a:ext cx="1234131" cy="228600"/>
           </a:xfrm>
           <a:prstGeom prst="rect">
@@ -4443,7 +4625,7 @@
         <p:spPr>
           <a:xfrm>
             <a:off x="3505112" y="962025"/>
-            <a:ext cx="2511489" cy="128016"/>
+            <a:ext cx="972541" cy="128016"/>
           </a:xfrm>
           <a:prstGeom prst="rect">
             <a:avLst/>
@@ -4481,7 +4663,7 @@
         </p:nvSpPr>
         <p:spPr>
           <a:xfrm>
-            <a:off x="3778503" y="1976163"/>
+            <a:off x="3745683" y="1976163"/>
             <a:ext cx="1126828" cy="228600"/>
           </a:xfrm>
           <a:prstGeom prst="rect">
@@ -4520,7 +4702,7 @@
         </p:nvSpPr>
         <p:spPr>
           <a:xfrm>
-            <a:off x="7922816" y="1801141"/>
+            <a:off x="7890764" y="1801141"/>
             <a:ext cx="1100463" cy="228600"/>
           </a:xfrm>
           <a:prstGeom prst="rect">
@@ -4559,7 +4741,7 @@
         </p:nvSpPr>
         <p:spPr>
           <a:xfrm>
-            <a:off x="8991226" y="1801141"/>
+            <a:off x="8960429" y="1801141"/>
             <a:ext cx="1057388" cy="228600"/>
           </a:xfrm>
           <a:prstGeom prst="rect">
@@ -4676,7 +4858,7 @@
         </p:nvSpPr>
         <p:spPr>
           <a:xfrm>
-            <a:off x="4872511" y="1976163"/>
+            <a:off x="4841240" y="1976163"/>
             <a:ext cx="1073637" cy="228600"/>
           </a:xfrm>
           <a:prstGeom prst="rect">
@@ -4793,8 +4975,8 @@
         </p:nvSpPr>
         <p:spPr>
           <a:xfrm>
-            <a:off x="6734751" y="5416153"/>
-            <a:ext cx="1076550" cy="128016"/>
+            <a:off x="6969851" y="5416153"/>
+            <a:ext cx="574844" cy="128016"/>
           </a:xfrm>
           <a:prstGeom prst="rect">
             <a:avLst/>
@@ -4832,8 +5014,8 @@
         </p:nvSpPr>
         <p:spPr>
           <a:xfrm>
-            <a:off x="10384520" y="5416153"/>
-            <a:ext cx="1076550" cy="128016"/>
+            <a:off x="10645646" y="5416153"/>
+            <a:ext cx="522943" cy="128016"/>
           </a:xfrm>
           <a:prstGeom prst="rect">
             <a:avLst/>
@@ -4949,8 +5131,8 @@
         </p:nvSpPr>
         <p:spPr>
           <a:xfrm>
-            <a:off x="5518260" y="5416153"/>
-            <a:ext cx="1076396" cy="128016"/>
+            <a:off x="5816147" y="5416153"/>
+            <a:ext cx="449272" cy="128016"/>
           </a:xfrm>
           <a:prstGeom prst="rect">
             <a:avLst/>
@@ -4988,8 +5170,8 @@
         </p:nvSpPr>
         <p:spPr>
           <a:xfrm>
-            <a:off x="7951390" y="5416153"/>
-            <a:ext cx="1076396" cy="128016"/>
+            <a:off x="8260797" y="5416153"/>
+            <a:ext cx="426082" cy="128016"/>
           </a:xfrm>
           <a:prstGeom prst="rect">
             <a:avLst/>
@@ -5027,7 +5209,7 @@
         </p:nvSpPr>
         <p:spPr>
           <a:xfrm>
-            <a:off x="10017817" y="1801141"/>
+            <a:off x="9992957" y="1801141"/>
             <a:ext cx="853514" cy="228600"/>
           </a:xfrm>
           <a:prstGeom prst="rect">
@@ -5105,8 +5287,8 @@
         </p:nvSpPr>
         <p:spPr>
           <a:xfrm>
-            <a:off x="9167881" y="5416153"/>
-            <a:ext cx="1076550" cy="128016"/>
+            <a:off x="9485487" y="5416153"/>
+            <a:ext cx="409833" cy="128016"/>
           </a:xfrm>
           <a:prstGeom prst="rect">
             <a:avLst/>
@@ -5144,7 +5326,7 @@
         </p:nvSpPr>
         <p:spPr>
           <a:xfrm>
-            <a:off x="1538398" y="1976163"/>
+            <a:off x="1507140" y="1976163"/>
             <a:ext cx="1073177" cy="228600"/>
           </a:xfrm>
           <a:prstGeom prst="rect">
@@ -5300,7 +5482,7 @@
         </p:nvSpPr>
         <p:spPr>
           <a:xfrm>
-            <a:off x="10846471" y="1801141"/>
+            <a:off x="10827831" y="1801141"/>
             <a:ext cx="639982" cy="228600"/>
           </a:xfrm>
           <a:prstGeom prst="rect">
@@ -5339,7 +5521,7 @@
         </p:nvSpPr>
         <p:spPr>
           <a:xfrm>
-            <a:off x="10017817" y="3461765"/>
+            <a:off x="9992957" y="3461765"/>
             <a:ext cx="853514" cy="242888"/>
           </a:xfrm>
           <a:prstGeom prst="rect">
@@ -5356,9 +5538,9 @@
               <a:buNone/>
             </a:pPr>
             <a:r>
-              <a:rPr lang="en-US" sz="888" b="1" dirty="0">
-                <a:solidFill>
-                  <a:srgbClr val="120180"/>
+              <a:rPr lang="en-US" sz="816" b="1" dirty="0">
+                <a:solidFill>
+                  <a:srgbClr val="008060"/>
                 </a:solidFill>
                 <a:latin typeface="Raleway" pitchFamily="34" charset="0"/>
                 <a:ea typeface="Raleway" pitchFamily="34" charset="-122"/>
@@ -5366,7 +5548,7 @@
               </a:rPr>
               <a:t>102,9 %</a:t>
             </a:r>
-            <a:endParaRPr lang="en-US" sz="888" dirty="0"/>
+            <a:endParaRPr lang="en-US" sz="816" dirty="0"/>
           </a:p>
         </p:txBody>
       </p:sp>
@@ -5417,7 +5599,7 @@
         </p:nvSpPr>
         <p:spPr>
           <a:xfrm>
-            <a:off x="10017817" y="2029741"/>
+            <a:off x="9992957" y="2029741"/>
             <a:ext cx="853514" cy="347663"/>
           </a:xfrm>
           <a:prstGeom prst="rect">
@@ -5434,9 +5616,9 @@
               <a:buNone/>
             </a:pPr>
             <a:r>
-              <a:rPr lang="en-US" sz="888" dirty="0">
-                <a:solidFill>
-                  <a:srgbClr val="333333"/>
+              <a:rPr lang="en-US" sz="816" b="1" dirty="0">
+                <a:solidFill>
+                  <a:srgbClr val="008060"/>
                 </a:solidFill>
                 <a:latin typeface="Raleway" pitchFamily="34" charset="0"/>
                 <a:ea typeface="Raleway" pitchFamily="34" charset="-122"/>
@@ -5444,7 +5626,7 @@
               </a:rPr>
               <a:t>90,5 %</a:t>
             </a:r>
-            <a:endParaRPr lang="en-US" sz="888" dirty="0"/>
+            <a:endParaRPr lang="en-US" sz="816" dirty="0"/>
           </a:p>
         </p:txBody>
       </p:sp>
@@ -5495,8 +5677,8 @@
         </p:nvSpPr>
         <p:spPr>
           <a:xfrm>
-            <a:off x="3505112" y="1104900"/>
-            <a:ext cx="2511489" cy="133365"/>
+            <a:off x="3505112" y="1085850"/>
+            <a:ext cx="439806" cy="156972"/>
           </a:xfrm>
           <a:prstGeom prst="rect">
             <a:avLst/>
@@ -5534,7 +5716,7 @@
         </p:nvSpPr>
         <p:spPr>
           <a:xfrm>
-            <a:off x="4872511" y="2204763"/>
+            <a:off x="4841240" y="2204763"/>
             <a:ext cx="1073637" cy="242888"/>
           </a:xfrm>
           <a:prstGeom prst="rect">
@@ -5551,9 +5733,9 @@
               <a:buNone/>
             </a:pPr>
             <a:r>
-              <a:rPr lang="en-US" sz="888" dirty="0">
-                <a:solidFill>
-                  <a:srgbClr val="333333"/>
+              <a:rPr lang="en-US" sz="816" b="1" dirty="0">
+                <a:solidFill>
+                  <a:srgbClr val="008060"/>
                 </a:solidFill>
                 <a:latin typeface="Raleway" pitchFamily="34" charset="0"/>
                 <a:ea typeface="Raleway" pitchFamily="34" charset="-122"/>
@@ -5561,7 +5743,7 @@
               </a:rPr>
               <a:t>60,9%</a:t>
             </a:r>
-            <a:endParaRPr lang="en-US" sz="888" dirty="0"/>
+            <a:endParaRPr lang="en-US" sz="816" dirty="0"/>
           </a:p>
         </p:txBody>
       </p:sp>
@@ -5573,7 +5755,7 @@
         </p:nvSpPr>
         <p:spPr>
           <a:xfrm>
-            <a:off x="4872511" y="2447650"/>
+            <a:off x="4841240" y="2447650"/>
             <a:ext cx="1073637" cy="247650"/>
           </a:xfrm>
           <a:prstGeom prst="rect">
@@ -5590,9 +5772,9 @@
               <a:buNone/>
             </a:pPr>
             <a:r>
-              <a:rPr lang="en-US" sz="888" dirty="0">
-                <a:solidFill>
-                  <a:srgbClr val="333333"/>
+              <a:rPr lang="en-US" sz="816" b="1" dirty="0">
+                <a:solidFill>
+                  <a:srgbClr val="008060"/>
                 </a:solidFill>
                 <a:latin typeface="Raleway" pitchFamily="34" charset="0"/>
                 <a:ea typeface="Raleway" pitchFamily="34" charset="-122"/>
@@ -5600,7 +5782,7 @@
               </a:rPr>
               <a:t>57,1%</a:t>
             </a:r>
-            <a:endParaRPr lang="en-US" sz="888" dirty="0"/>
+            <a:endParaRPr lang="en-US" sz="816" dirty="0"/>
           </a:p>
         </p:txBody>
       </p:sp>
@@ -5612,7 +5794,7 @@
         </p:nvSpPr>
         <p:spPr>
           <a:xfrm>
-            <a:off x="4872511" y="2695300"/>
+            <a:off x="4841240" y="2695300"/>
             <a:ext cx="1073637" cy="247650"/>
           </a:xfrm>
           <a:prstGeom prst="rect">
@@ -5629,9 +5811,9 @@
               <a:buNone/>
             </a:pPr>
             <a:r>
-              <a:rPr lang="en-US" sz="888" dirty="0">
-                <a:solidFill>
-                  <a:srgbClr val="333333"/>
+              <a:rPr lang="en-US" sz="816" b="1" dirty="0">
+                <a:solidFill>
+                  <a:srgbClr val="8A6200"/>
                 </a:solidFill>
                 <a:latin typeface="Raleway" pitchFamily="34" charset="0"/>
                 <a:ea typeface="Raleway" pitchFamily="34" charset="-122"/>
@@ -5639,7 +5821,7 @@
               </a:rPr>
               <a:t>54,9%</a:t>
             </a:r>
-            <a:endParaRPr lang="en-US" sz="888" dirty="0"/>
+            <a:endParaRPr lang="en-US" sz="816" dirty="0"/>
           </a:p>
         </p:txBody>
       </p:sp>
@@ -5651,7 +5833,7 @@
         </p:nvSpPr>
         <p:spPr>
           <a:xfrm>
-            <a:off x="4872511" y="2942950"/>
+            <a:off x="4841240" y="2942950"/>
             <a:ext cx="1073637" cy="247650"/>
           </a:xfrm>
           <a:prstGeom prst="rect">
@@ -5668,9 +5850,9 @@
               <a:buNone/>
             </a:pPr>
             <a:r>
-              <a:rPr lang="en-US" sz="888" dirty="0">
-                <a:solidFill>
-                  <a:srgbClr val="333333"/>
+              <a:rPr lang="en-US" sz="816" b="1" dirty="0">
+                <a:solidFill>
+                  <a:srgbClr val="8A6200"/>
                 </a:solidFill>
                 <a:latin typeface="Raleway" pitchFamily="34" charset="0"/>
                 <a:ea typeface="Raleway" pitchFamily="34" charset="-122"/>
@@ -5678,7 +5860,7 @@
               </a:rPr>
               <a:t>50,0%</a:t>
             </a:r>
-            <a:endParaRPr lang="en-US" sz="888" dirty="0"/>
+            <a:endParaRPr lang="en-US" sz="816" dirty="0"/>
           </a:p>
         </p:txBody>
       </p:sp>
@@ -5690,7 +5872,7 @@
         </p:nvSpPr>
         <p:spPr>
           <a:xfrm>
-            <a:off x="4872511" y="3190600"/>
+            <a:off x="4841240" y="3190600"/>
             <a:ext cx="1073637" cy="247650"/>
           </a:xfrm>
           <a:prstGeom prst="rect">
@@ -5707,9 +5889,9 @@
               <a:buNone/>
             </a:pPr>
             <a:r>
-              <a:rPr lang="en-US" sz="888" dirty="0">
-                <a:solidFill>
-                  <a:srgbClr val="333333"/>
+              <a:rPr lang="en-US" sz="816" b="1" dirty="0">
+                <a:solidFill>
+                  <a:srgbClr val="C44A1A"/>
                 </a:solidFill>
                 <a:latin typeface="Raleway" pitchFamily="34" charset="0"/>
                 <a:ea typeface="Raleway" pitchFamily="34" charset="-122"/>
@@ -5717,7 +5899,7 @@
               </a:rPr>
               <a:t>33,3%</a:t>
             </a:r>
-            <a:endParaRPr lang="en-US" sz="888" dirty="0"/>
+            <a:endParaRPr lang="en-US" sz="816" dirty="0"/>
           </a:p>
         </p:txBody>
       </p:sp>
@@ -5729,7 +5911,7 @@
         </p:nvSpPr>
         <p:spPr>
           <a:xfrm>
-            <a:off x="4872511" y="3438250"/>
+            <a:off x="4841240" y="3438250"/>
             <a:ext cx="1073637" cy="247650"/>
           </a:xfrm>
           <a:prstGeom prst="rect">
@@ -5746,9 +5928,9 @@
               <a:buNone/>
             </a:pPr>
             <a:r>
-              <a:rPr lang="en-US" sz="888" dirty="0">
-                <a:solidFill>
-                  <a:srgbClr val="333333"/>
+              <a:rPr lang="en-US" sz="816" b="1" dirty="0">
+                <a:solidFill>
+                  <a:srgbClr val="C44A1A"/>
                 </a:solidFill>
                 <a:latin typeface="Raleway" pitchFamily="34" charset="0"/>
                 <a:ea typeface="Raleway" pitchFamily="34" charset="-122"/>
@@ -5756,7 +5938,7 @@
               </a:rPr>
               <a:t>26,9%</a:t>
             </a:r>
-            <a:endParaRPr lang="en-US" sz="888" dirty="0"/>
+            <a:endParaRPr lang="en-US" sz="816" dirty="0"/>
           </a:p>
         </p:txBody>
       </p:sp>
@@ -5768,7 +5950,7 @@
         </p:nvSpPr>
         <p:spPr>
           <a:xfrm>
-            <a:off x="4872511" y="3685900"/>
+            <a:off x="4841240" y="3685900"/>
             <a:ext cx="1073637" cy="242888"/>
           </a:xfrm>
           <a:prstGeom prst="rect">
@@ -5785,9 +5967,9 @@
               <a:buNone/>
             </a:pPr>
             <a:r>
-              <a:rPr lang="en-US" sz="888" b="1" dirty="0">
-                <a:solidFill>
-                  <a:srgbClr val="120180"/>
+              <a:rPr lang="en-US" sz="816" b="1" dirty="0">
+                <a:solidFill>
+                  <a:srgbClr val="8A6200"/>
                 </a:solidFill>
                 <a:latin typeface="Raleway" pitchFamily="34" charset="0"/>
                 <a:ea typeface="Raleway" pitchFamily="34" charset="-122"/>
@@ -5795,7 +5977,7 @@
               </a:rPr>
               <a:t>47,2%</a:t>
             </a:r>
-            <a:endParaRPr lang="en-US" sz="888" dirty="0"/>
+            <a:endParaRPr lang="en-US" sz="816" dirty="0"/>
           </a:p>
         </p:txBody>
       </p:sp>
@@ -5807,7 +5989,7 @@
         </p:nvSpPr>
         <p:spPr>
           <a:xfrm>
-            <a:off x="10017817" y="2377403"/>
+            <a:off x="9992957" y="2377403"/>
             <a:ext cx="853514" cy="365968"/>
           </a:xfrm>
           <a:prstGeom prst="rect">
@@ -5824,9 +6006,9 @@
               <a:buNone/>
             </a:pPr>
             <a:r>
-              <a:rPr lang="en-US" sz="888" dirty="0">
-                <a:solidFill>
-                  <a:srgbClr val="333333"/>
+              <a:rPr lang="en-US" sz="816" b="1" dirty="0">
+                <a:solidFill>
+                  <a:srgbClr val="008060"/>
                 </a:solidFill>
                 <a:latin typeface="Raleway" pitchFamily="34" charset="0"/>
                 <a:ea typeface="Raleway" pitchFamily="34" charset="-122"/>
@@ -5834,7 +6016,7 @@
               </a:rPr>
               <a:t>116 %</a:t>
             </a:r>
-            <a:endParaRPr lang="en-US" sz="888" dirty="0"/>
+            <a:endParaRPr lang="en-US" sz="816" dirty="0"/>
           </a:p>
         </p:txBody>
       </p:sp>
@@ -5846,7 +6028,7 @@
         </p:nvSpPr>
         <p:spPr>
           <a:xfrm>
-            <a:off x="10017817" y="2743372"/>
+            <a:off x="9992957" y="2743372"/>
             <a:ext cx="853514" cy="352425"/>
           </a:xfrm>
           <a:prstGeom prst="rect">
@@ -5863,9 +6045,9 @@
               <a:buNone/>
             </a:pPr>
             <a:r>
-              <a:rPr lang="en-US" sz="888" dirty="0">
-                <a:solidFill>
-                  <a:srgbClr val="333333"/>
+              <a:rPr lang="en-US" sz="816" b="1" dirty="0">
+                <a:solidFill>
+                  <a:srgbClr val="008060"/>
                 </a:solidFill>
                 <a:latin typeface="Raleway" pitchFamily="34" charset="0"/>
                 <a:ea typeface="Raleway" pitchFamily="34" charset="-122"/>
@@ -5873,7 +6055,7 @@
               </a:rPr>
               <a:t>119 %</a:t>
             </a:r>
-            <a:endParaRPr lang="en-US" sz="888" dirty="0"/>
+            <a:endParaRPr lang="en-US" sz="816" dirty="0"/>
           </a:p>
         </p:txBody>
       </p:sp>
@@ -5924,7 +6106,7 @@
         </p:nvSpPr>
         <p:spPr>
           <a:xfrm>
-            <a:off x="10017817" y="3095797"/>
+            <a:off x="9992957" y="3095797"/>
             <a:ext cx="853514" cy="365968"/>
           </a:xfrm>
           <a:prstGeom prst="rect">
@@ -5941,9 +6123,9 @@
               <a:buNone/>
             </a:pPr>
             <a:r>
-              <a:rPr lang="en-US" sz="888" dirty="0">
-                <a:solidFill>
-                  <a:srgbClr val="333333"/>
+              <a:rPr lang="en-US" sz="816" b="1" dirty="0">
+                <a:solidFill>
+                  <a:srgbClr val="8A6200"/>
                 </a:solidFill>
                 <a:latin typeface="Raleway" pitchFamily="34" charset="0"/>
                 <a:ea typeface="Raleway" pitchFamily="34" charset="-122"/>
@@ -5951,7 +6133,7 @@
               </a:rPr>
               <a:t>50 %</a:t>
             </a:r>
-            <a:endParaRPr lang="en-US" sz="888" dirty="0"/>
+            <a:endParaRPr lang="en-US" sz="816" dirty="0"/>
           </a:p>
         </p:txBody>
       </p:sp>
@@ -6080,7 +6262,7 @@
         </p:nvSpPr>
         <p:spPr>
           <a:xfrm>
-            <a:off x="1538398" y="2204763"/>
+            <a:off x="1507140" y="2204763"/>
             <a:ext cx="1073177" cy="242888"/>
           </a:xfrm>
           <a:prstGeom prst="rect">
@@ -6158,7 +6340,7 @@
         </p:nvSpPr>
         <p:spPr>
           <a:xfrm>
-            <a:off x="1538398" y="2447650"/>
+            <a:off x="1507140" y="2447650"/>
             <a:ext cx="1073177" cy="247650"/>
           </a:xfrm>
           <a:prstGeom prst="rect">
@@ -6236,7 +6418,7 @@
         </p:nvSpPr>
         <p:spPr>
           <a:xfrm>
-            <a:off x="1538398" y="2695300"/>
+            <a:off x="1507140" y="2695300"/>
             <a:ext cx="1073177" cy="247650"/>
           </a:xfrm>
           <a:prstGeom prst="rect">
@@ -6314,7 +6496,7 @@
         </p:nvSpPr>
         <p:spPr>
           <a:xfrm>
-            <a:off x="1538398" y="2942950"/>
+            <a:off x="1507140" y="2942950"/>
             <a:ext cx="1073177" cy="247650"/>
           </a:xfrm>
           <a:prstGeom prst="rect">
@@ -6431,7 +6613,7 @@
         </p:nvSpPr>
         <p:spPr>
           <a:xfrm>
-            <a:off x="1538398" y="3685900"/>
+            <a:off x="1507140" y="3685900"/>
             <a:ext cx="1073177" cy="242888"/>
           </a:xfrm>
           <a:prstGeom prst="rect">
@@ -6470,7 +6652,7 @@
         </p:nvSpPr>
         <p:spPr>
           <a:xfrm>
-            <a:off x="10846471" y="2029741"/>
+            <a:off x="10827831" y="2029741"/>
             <a:ext cx="639982" cy="347663"/>
           </a:xfrm>
           <a:prstGeom prst="rect">
@@ -6509,7 +6691,7 @@
         </p:nvSpPr>
         <p:spPr>
           <a:xfrm>
-            <a:off x="7922816" y="3461765"/>
+            <a:off x="7890764" y="3461765"/>
             <a:ext cx="1100463" cy="242888"/>
           </a:xfrm>
           <a:prstGeom prst="rect">
@@ -6548,7 +6730,7 @@
         </p:nvSpPr>
         <p:spPr>
           <a:xfrm>
-            <a:off x="8991226" y="3461765"/>
+            <a:off x="8960429" y="3461765"/>
             <a:ext cx="1057388" cy="242888"/>
           </a:xfrm>
           <a:prstGeom prst="rect">
@@ -6587,7 +6769,7 @@
         </p:nvSpPr>
         <p:spPr>
           <a:xfrm>
-            <a:off x="10846471" y="3461765"/>
+            <a:off x="10827831" y="3461765"/>
             <a:ext cx="639982" cy="242888"/>
           </a:xfrm>
           <a:prstGeom prst="rect">
@@ -6626,7 +6808,7 @@
         </p:nvSpPr>
         <p:spPr>
           <a:xfrm>
-            <a:off x="2302611" y="4789312"/>
+            <a:off x="2286632" y="4789312"/>
             <a:ext cx="548622" cy="176212"/>
           </a:xfrm>
           <a:prstGeom prst="rect">
@@ -6665,8 +6847,8 @@
         </p:nvSpPr>
         <p:spPr>
           <a:xfrm>
-            <a:off x="6286343" y="1104900"/>
-            <a:ext cx="2511489" cy="133365"/>
+            <a:off x="6286343" y="1085850"/>
+            <a:ext cx="274320" cy="156972"/>
           </a:xfrm>
           <a:prstGeom prst="rect">
             <a:avLst/>
@@ -6704,7 +6886,7 @@
         </p:nvSpPr>
         <p:spPr>
           <a:xfrm>
-            <a:off x="2580318" y="2204763"/>
+            <a:off x="2544372" y="2204763"/>
             <a:ext cx="1234131" cy="242888"/>
           </a:xfrm>
           <a:prstGeom prst="rect">
@@ -6743,7 +6925,7 @@
         </p:nvSpPr>
         <p:spPr>
           <a:xfrm>
-            <a:off x="3778503" y="2204763"/>
+            <a:off x="3745683" y="2204763"/>
             <a:ext cx="1126828" cy="242888"/>
           </a:xfrm>
           <a:prstGeom prst="rect">
@@ -6782,7 +6964,7 @@
         </p:nvSpPr>
         <p:spPr>
           <a:xfrm>
-            <a:off x="2580318" y="2447650"/>
+            <a:off x="2544372" y="2447650"/>
             <a:ext cx="1234131" cy="247650"/>
           </a:xfrm>
           <a:prstGeom prst="rect">
@@ -6821,7 +7003,7 @@
         </p:nvSpPr>
         <p:spPr>
           <a:xfrm>
-            <a:off x="3778503" y="2447650"/>
+            <a:off x="3745683" y="2447650"/>
             <a:ext cx="1126828" cy="247650"/>
           </a:xfrm>
           <a:prstGeom prst="rect">
@@ -6860,7 +7042,7 @@
         </p:nvSpPr>
         <p:spPr>
           <a:xfrm>
-            <a:off x="2580318" y="2695300"/>
+            <a:off x="2544372" y="2695300"/>
             <a:ext cx="1234131" cy="247650"/>
           </a:xfrm>
           <a:prstGeom prst="rect">
@@ -6899,7 +7081,7 @@
         </p:nvSpPr>
         <p:spPr>
           <a:xfrm>
-            <a:off x="3778503" y="2695300"/>
+            <a:off x="3745683" y="2695300"/>
             <a:ext cx="1126828" cy="247650"/>
           </a:xfrm>
           <a:prstGeom prst="rect">
@@ -6938,7 +7120,7 @@
         </p:nvSpPr>
         <p:spPr>
           <a:xfrm>
-            <a:off x="2580318" y="2942950"/>
+            <a:off x="2544372" y="2942950"/>
             <a:ext cx="1234131" cy="247650"/>
           </a:xfrm>
           <a:prstGeom prst="rect">
@@ -6977,7 +7159,7 @@
         </p:nvSpPr>
         <p:spPr>
           <a:xfrm>
-            <a:off x="3778503" y="2942950"/>
+            <a:off x="3745683" y="2942950"/>
             <a:ext cx="1126828" cy="247650"/>
           </a:xfrm>
           <a:prstGeom prst="rect">
@@ -7016,7 +7198,7 @@
         </p:nvSpPr>
         <p:spPr>
           <a:xfrm>
-            <a:off x="1538398" y="3190600"/>
+            <a:off x="1507140" y="3190600"/>
             <a:ext cx="1073177" cy="247650"/>
           </a:xfrm>
           <a:prstGeom prst="rect">
@@ -7055,7 +7237,7 @@
         </p:nvSpPr>
         <p:spPr>
           <a:xfrm>
-            <a:off x="2580318" y="3190600"/>
+            <a:off x="2544372" y="3190600"/>
             <a:ext cx="1234131" cy="247650"/>
           </a:xfrm>
           <a:prstGeom prst="rect">
@@ -7094,7 +7276,7 @@
         </p:nvSpPr>
         <p:spPr>
           <a:xfrm>
-            <a:off x="3778503" y="3190600"/>
+            <a:off x="3745683" y="3190600"/>
             <a:ext cx="1126828" cy="247650"/>
           </a:xfrm>
           <a:prstGeom prst="rect">
@@ -7133,7 +7315,7 @@
         </p:nvSpPr>
         <p:spPr>
           <a:xfrm>
-            <a:off x="1538398" y="3438250"/>
+            <a:off x="1507140" y="3438250"/>
             <a:ext cx="1073177" cy="247650"/>
           </a:xfrm>
           <a:prstGeom prst="rect">
@@ -7172,7 +7354,7 @@
         </p:nvSpPr>
         <p:spPr>
           <a:xfrm>
-            <a:off x="2580318" y="3438250"/>
+            <a:off x="2544372" y="3438250"/>
             <a:ext cx="1234131" cy="247650"/>
           </a:xfrm>
           <a:prstGeom prst="rect">
@@ -7211,7 +7393,7 @@
         </p:nvSpPr>
         <p:spPr>
           <a:xfrm>
-            <a:off x="3778503" y="3438250"/>
+            <a:off x="3745683" y="3438250"/>
             <a:ext cx="1126828" cy="247650"/>
           </a:xfrm>
           <a:prstGeom prst="rect">
@@ -7250,7 +7432,7 @@
         </p:nvSpPr>
         <p:spPr>
           <a:xfrm>
-            <a:off x="2580318" y="3685900"/>
+            <a:off x="2544372" y="3685900"/>
             <a:ext cx="1234131" cy="242888"/>
           </a:xfrm>
           <a:prstGeom prst="rect">
@@ -7289,7 +7471,7 @@
         </p:nvSpPr>
         <p:spPr>
           <a:xfrm>
-            <a:off x="3778503" y="3685900"/>
+            <a:off x="3745683" y="3685900"/>
             <a:ext cx="1126828" cy="242888"/>
           </a:xfrm>
           <a:prstGeom prst="rect">
@@ -7328,7 +7510,7 @@
         </p:nvSpPr>
         <p:spPr>
           <a:xfrm>
-            <a:off x="7922816" y="2029741"/>
+            <a:off x="7890764" y="2029741"/>
             <a:ext cx="1100463" cy="347663"/>
           </a:xfrm>
           <a:prstGeom prst="rect">
@@ -7367,7 +7549,7 @@
         </p:nvSpPr>
         <p:spPr>
           <a:xfrm>
-            <a:off x="8991226" y="2029741"/>
+            <a:off x="8960429" y="2029741"/>
             <a:ext cx="1057388" cy="347663"/>
           </a:xfrm>
           <a:prstGeom prst="rect">
@@ -7406,7 +7588,7 @@
         </p:nvSpPr>
         <p:spPr>
           <a:xfrm>
-            <a:off x="7922816" y="2377403"/>
+            <a:off x="7890764" y="2377403"/>
             <a:ext cx="1100463" cy="365968"/>
           </a:xfrm>
           <a:prstGeom prst="rect">
@@ -7445,7 +7627,7 @@
         </p:nvSpPr>
         <p:spPr>
           <a:xfrm>
-            <a:off x="8991226" y="2377403"/>
+            <a:off x="8960429" y="2377403"/>
             <a:ext cx="1057388" cy="365968"/>
           </a:xfrm>
           <a:prstGeom prst="rect">
@@ -7484,7 +7666,7 @@
         </p:nvSpPr>
         <p:spPr>
           <a:xfrm>
-            <a:off x="10846471" y="2377403"/>
+            <a:off x="10827831" y="2377403"/>
             <a:ext cx="639982" cy="365968"/>
           </a:xfrm>
           <a:prstGeom prst="rect">
@@ -7523,7 +7705,7 @@
         </p:nvSpPr>
         <p:spPr>
           <a:xfrm>
-            <a:off x="7922816" y="2743372"/>
+            <a:off x="7890764" y="2743372"/>
             <a:ext cx="1100463" cy="352425"/>
           </a:xfrm>
           <a:prstGeom prst="rect">
@@ -7562,7 +7744,7 @@
         </p:nvSpPr>
         <p:spPr>
           <a:xfrm>
-            <a:off x="8991226" y="2743372"/>
+            <a:off x="8960429" y="2743372"/>
             <a:ext cx="1057388" cy="352425"/>
           </a:xfrm>
           <a:prstGeom prst="rect">
@@ -7601,7 +7783,7 @@
         </p:nvSpPr>
         <p:spPr>
           <a:xfrm>
-            <a:off x="10846471" y="2743372"/>
+            <a:off x="10827831" y="2743372"/>
             <a:ext cx="639982" cy="352425"/>
           </a:xfrm>
           <a:prstGeom prst="rect">
@@ -7640,7 +7822,7 @@
         </p:nvSpPr>
         <p:spPr>
           <a:xfrm>
-            <a:off x="2302611" y="4965524"/>
+            <a:off x="2286632" y="4965524"/>
             <a:ext cx="548622" cy="180975"/>
           </a:xfrm>
           <a:prstGeom prst="rect">
@@ -7679,7 +7861,7 @@
         </p:nvSpPr>
         <p:spPr>
           <a:xfrm>
-            <a:off x="2302611" y="5146499"/>
+            <a:off x="2286632" y="5146499"/>
             <a:ext cx="548622" cy="180975"/>
           </a:xfrm>
           <a:prstGeom prst="rect">
@@ -7718,7 +7900,7 @@
         </p:nvSpPr>
         <p:spPr>
           <a:xfrm>
-            <a:off x="2302611" y="5327474"/>
+            <a:off x="2286632" y="5327474"/>
             <a:ext cx="548622" cy="180975"/>
           </a:xfrm>
           <a:prstGeom prst="rect">
@@ -7757,7 +7939,7 @@
         </p:nvSpPr>
         <p:spPr>
           <a:xfrm>
-            <a:off x="2302611" y="5508449"/>
+            <a:off x="2286632" y="5508449"/>
             <a:ext cx="548622" cy="180975"/>
           </a:xfrm>
           <a:prstGeom prst="rect">
@@ -7796,7 +7978,7 @@
         </p:nvSpPr>
         <p:spPr>
           <a:xfrm>
-            <a:off x="2302611" y="5689424"/>
+            <a:off x="2286632" y="5689424"/>
             <a:ext cx="548622" cy="176212"/>
           </a:xfrm>
           <a:prstGeom prst="rect">
@@ -7835,7 +8017,7 @@
         </p:nvSpPr>
         <p:spPr>
           <a:xfrm>
-            <a:off x="4566528" y="4789312"/>
+            <a:off x="4550549" y="4789312"/>
             <a:ext cx="548622" cy="176212"/>
           </a:xfrm>
           <a:prstGeom prst="rect">
@@ -7874,7 +8056,7 @@
         </p:nvSpPr>
         <p:spPr>
           <a:xfrm>
-            <a:off x="4566528" y="4965524"/>
+            <a:off x="4550549" y="4965524"/>
             <a:ext cx="548622" cy="180975"/>
           </a:xfrm>
           <a:prstGeom prst="rect">
@@ -7913,8 +8095,8 @@
         </p:nvSpPr>
         <p:spPr>
           <a:xfrm>
-            <a:off x="723882" y="1104900"/>
-            <a:ext cx="2511489" cy="133365"/>
+            <a:off x="723882" y="1085850"/>
+            <a:ext cx="274320" cy="156972"/>
           </a:xfrm>
           <a:prstGeom prst="rect">
             <a:avLst/>
@@ -7952,8 +8134,8 @@
         </p:nvSpPr>
         <p:spPr>
           <a:xfrm>
-            <a:off x="9067573" y="1104900"/>
-            <a:ext cx="2511489" cy="133365"/>
+            <a:off x="9067573" y="1085850"/>
+            <a:ext cx="274320" cy="156972"/>
           </a:xfrm>
           <a:prstGeom prst="rect">
             <a:avLst/>
@@ -7991,8 +8173,8 @@
         </p:nvSpPr>
         <p:spPr>
           <a:xfrm>
-            <a:off x="5518260" y="5254228"/>
-            <a:ext cx="1076396" cy="166783"/>
+            <a:off x="5948345" y="5254228"/>
+            <a:ext cx="274320" cy="166783"/>
           </a:xfrm>
           <a:prstGeom prst="rect">
             <a:avLst/>
@@ -8030,8 +8212,8 @@
         </p:nvSpPr>
         <p:spPr>
           <a:xfrm>
-            <a:off x="6734751" y="5254228"/>
-            <a:ext cx="1076550" cy="166783"/>
+            <a:off x="7164673" y="5254228"/>
+            <a:ext cx="274320" cy="166783"/>
           </a:xfrm>
           <a:prstGeom prst="rect">
             <a:avLst/>
@@ -8069,8 +8251,8 @@
         </p:nvSpPr>
         <p:spPr>
           <a:xfrm>
-            <a:off x="7951390" y="5254228"/>
-            <a:ext cx="1076396" cy="166783"/>
+            <a:off x="8377851" y="5254228"/>
+            <a:ext cx="274320" cy="166783"/>
           </a:xfrm>
           <a:prstGeom prst="rect">
             <a:avLst/>
@@ -8127,7 +8309,7 @@
       </p:grpSpPr>
       <p:pic>
         <p:nvPicPr>
-          <p:cNvPr id="2" name="Image 0" descr="C:\01_Repositorios\13_Presentaciones\dash\retail\ppt_slides\sk_02_Ventas.png">    </p:cNvPr>
+          <p:cNvPr id="2" name="Image 0" descr="C:\01_Repositorios\13_Presentaciones\dash\retail\ppt_slides\sk_02_main.png">    </p:cNvPr>
           <p:cNvPicPr>
             <a:picLocks noChangeAspect="1"/>
           </p:cNvPicPr>
@@ -8157,24 +8339,141 @@
         </p:nvSpPr>
         <p:spPr>
           <a:xfrm>
-            <a:off x="571486" y="6339483"/>
-            <a:ext cx="11380185" cy="534073"/>
-          </a:xfrm>
-          <a:prstGeom prst="rect">
-            <a:avLst/>
-          </a:prstGeom>
-          <a:noFill/>
-          <a:ln/>
-        </p:spPr>
-        <p:txBody>
-          <a:bodyPr wrap="square" lIns="114300" tIns="171450" rIns="171450" bIns="114300" rtlCol="0" anchor="t"/>
+            <a:off x="1028674" y="6463308"/>
+            <a:ext cx="10683081" cy="276847"/>
+          </a:xfrm>
+          <a:prstGeom prst="rect">
+            <a:avLst/>
+          </a:prstGeom>
+          <a:noFill/>
+          <a:ln/>
+        </p:spPr>
+        <p:txBody>
+          <a:bodyPr wrap="square" lIns="0" tIns="0" rIns="0" bIns="0" rtlCol="0" anchor="t"/>
           <a:lstStyle/>
           <a:p>
             <a:pPr algn="l" indent="0" marL="0">
               <a:buNone/>
             </a:pPr>
             <a:r>
-              <a:rPr lang="en-US" sz="960" b="1" dirty="0">
+              <a:rPr lang="en-US" sz="816" b="1" dirty="0">
+                <a:solidFill>
+                  <a:srgbClr val="333333"/>
+                </a:solidFill>
+                <a:latin typeface="Raleway" pitchFamily="34" charset="0"/>
+                <a:ea typeface="Raleway" pitchFamily="34" charset="-122"/>
+                <a:cs typeface="Raleway" pitchFamily="34" charset="-120"/>
+              </a:rPr>
+              <a:t>Logro Comercial: el canal Retail cerró el semestre con 13.155 ventas efectivas entre Cuota Protegida y Rueda Seguro, sosteniendo una efectividad promedio superior al 69 % durante todo el semestre — un desempeño comercial consistente que valida el enfoque del canal en los puntos de mayor valor.</a:t>
+            </a:r>
+            <a:endParaRPr lang="en-US" sz="816" dirty="0"/>
+          </a:p>
+        </p:txBody>
+      </p:sp>
+      <p:sp>
+        <p:nvSpPr>
+          <p:cNvPr id="4" name="Text 1"/>
+          <p:cNvSpPr/>
+          <p:nvPr/>
+        </p:nvSpPr>
+        <p:spPr>
+          <a:xfrm>
+            <a:off x="571486" y="6006108"/>
+            <a:ext cx="7248306" cy="128016"/>
+          </a:xfrm>
+          <a:prstGeom prst="rect">
+            <a:avLst/>
+          </a:prstGeom>
+          <a:noFill/>
+          <a:ln/>
+        </p:spPr>
+        <p:txBody>
+          <a:bodyPr wrap="square" lIns="0" tIns="0" rIns="0" bIns="0" rtlCol="0" anchor="t"/>
+          <a:lstStyle/>
+          <a:p>
+            <a:pPr algn="l" indent="0" marL="0">
+              <a:buNone/>
+            </a:pPr>
+            <a:r>
+              <a:rPr lang="en-US" sz="696" dirty="0">
+                <a:solidFill>
+                  <a:srgbClr val="9098B0"/>
+                </a:solidFill>
+                <a:latin typeface="Raleway" pitchFamily="34" charset="0"/>
+                <a:ea typeface="Raleway" pitchFamily="34" charset="-122"/>
+                <a:cs typeface="Raleway" pitchFamily="34" charset="-120"/>
+              </a:rPr>
+              <a:t>* Gestores y PDV en la fila de total corresponden al promedio mensual de la estructura activa del canal (los mismos gestores atienden Cuota Protegida y Rueda Seguro).</a:t>
+            </a:r>
+            <a:endParaRPr lang="en-US" sz="696" dirty="0"/>
+          </a:p>
+        </p:txBody>
+      </p:sp>
+      <p:sp>
+        <p:nvSpPr>
+          <p:cNvPr id="5" name="Text 2"/>
+          <p:cNvSpPr/>
+          <p:nvPr/>
+        </p:nvSpPr>
+        <p:spPr>
+          <a:xfrm>
+            <a:off x="571486" y="209550"/>
+            <a:ext cx="4462214" cy="196215"/>
+          </a:xfrm>
+          <a:prstGeom prst="rect">
+            <a:avLst/>
+          </a:prstGeom>
+          <a:noFill/>
+          <a:ln/>
+        </p:spPr>
+        <p:txBody>
+          <a:bodyPr wrap="square" lIns="0" tIns="0" rIns="0" bIns="0" rtlCol="0" anchor="t"/>
+          <a:lstStyle/>
+          <a:p>
+            <a:pPr algn="l" indent="0" marL="0">
+              <a:buNone/>
+            </a:pPr>
+            <a:r>
+              <a:rPr lang="en-US" sz="1260" b="1" dirty="0">
+                <a:solidFill>
+                  <a:srgbClr val="FFFFFF"/>
+                </a:solidFill>
+                <a:latin typeface="Raleway" pitchFamily="34" charset="0"/>
+                <a:ea typeface="Raleway" pitchFamily="34" charset="-122"/>
+                <a:cs typeface="Raleway" pitchFamily="34" charset="-120"/>
+              </a:rPr>
+              <a:t>Ventas del Canal · Cuota Protegida y Rueda Seguro</a:t>
+            </a:r>
+            <a:endParaRPr lang="en-US" sz="1260" dirty="0"/>
+          </a:p>
+        </p:txBody>
+      </p:sp>
+      <p:sp>
+        <p:nvSpPr>
+          <p:cNvPr id="6" name="Text 3"/>
+          <p:cNvSpPr/>
+          <p:nvPr/>
+        </p:nvSpPr>
+        <p:spPr>
+          <a:xfrm>
+            <a:off x="838179" y="1786830"/>
+            <a:ext cx="1998730" cy="128016"/>
+          </a:xfrm>
+          <a:prstGeom prst="rect">
+            <a:avLst/>
+          </a:prstGeom>
+          <a:noFill/>
+          <a:ln/>
+        </p:spPr>
+        <p:txBody>
+          <a:bodyPr wrap="square" lIns="0" tIns="0" rIns="0" bIns="0" rtlCol="0" anchor="t"/>
+          <a:lstStyle/>
+          <a:p>
+            <a:pPr algn="l" indent="0" marL="0">
+              <a:buNone/>
+            </a:pPr>
+            <a:r>
+              <a:rPr lang="en-US" sz="816" b="1" dirty="0">
                 <a:solidFill>
                   <a:srgbClr val="120180"/>
                 </a:solidFill>
@@ -8182,22 +8481,22 @@
                 <a:ea typeface="Raleway" pitchFamily="34" charset="-122"/>
                 <a:cs typeface="Raleway" pitchFamily="34" charset="-120"/>
               </a:rPr>
-              <a:t>Logro Comercial: el canal Retail cerró el semestre con 13.155 ventas efectivas entre Cuota Protegida y Rueda Seguro, sosteniendo una efectividad promedio superior al 69 % durante todo el semestre — un desempeño comercial consistente que valida el enfoque del canal en los puntos de mayor valor.</a:t>
-            </a:r>
-            <a:endParaRPr lang="en-US" sz="960" dirty="0"/>
-          </a:p>
-        </p:txBody>
-      </p:sp>
-      <p:sp>
-        <p:nvSpPr>
-          <p:cNvPr id="4" name="Text 1"/>
-          <p:cNvSpPr/>
-          <p:nvPr/>
-        </p:nvSpPr>
-        <p:spPr>
-          <a:xfrm>
-            <a:off x="571486" y="6006108"/>
-            <a:ext cx="11380185" cy="128016"/>
+              <a:t>Cuota Protegida Retail (Como vamos)</a:t>
+            </a:r>
+            <a:endParaRPr lang="en-US" sz="816" dirty="0"/>
+          </a:p>
+        </p:txBody>
+      </p:sp>
+      <p:sp>
+        <p:nvSpPr>
+          <p:cNvPr id="7" name="Text 4"/>
+          <p:cNvSpPr/>
+          <p:nvPr/>
+        </p:nvSpPr>
+        <p:spPr>
+          <a:xfrm>
+            <a:off x="723882" y="1272480"/>
+            <a:ext cx="1231415" cy="128016"/>
           </a:xfrm>
           <a:prstGeom prst="rect">
             <a:avLst/>
@@ -8213,7 +8512,7 @@
               <a:buNone/>
             </a:pPr>
             <a:r>
-              <a:rPr lang="en-US" sz="696" dirty="0">
+              <a:rPr lang="en-US" sz="600" dirty="0">
                 <a:solidFill>
                   <a:srgbClr val="9098B0"/>
                 </a:solidFill>
@@ -8221,7 +8520,202 @@
                 <a:ea typeface="Raleway" pitchFamily="34" charset="-122"/>
                 <a:cs typeface="Raleway" pitchFamily="34" charset="-120"/>
               </a:rPr>
-              <a:t>* Gestores y PDV en la fila de total corresponden al promedio mensual de la estructura activa del canal (los mismos gestores atienden Cuota Protegida y Rueda Seguro).</a:t>
+              <a:t>Total de 16.062 cantadas (79,0%)</a:t>
+            </a:r>
+            <a:endParaRPr lang="en-US" sz="600" dirty="0"/>
+          </a:p>
+        </p:txBody>
+      </p:sp>
+      <p:sp>
+        <p:nvSpPr>
+          <p:cNvPr id="8" name="Text 5"/>
+          <p:cNvSpPr/>
+          <p:nvPr/>
+        </p:nvSpPr>
+        <p:spPr>
+          <a:xfrm>
+            <a:off x="6410165" y="1786830"/>
+            <a:ext cx="1888618" cy="128016"/>
+          </a:xfrm>
+          <a:prstGeom prst="rect">
+            <a:avLst/>
+          </a:prstGeom>
+          <a:noFill/>
+          <a:ln/>
+        </p:spPr>
+        <p:txBody>
+          <a:bodyPr wrap="square" lIns="0" tIns="0" rIns="0" bIns="0" rtlCol="0" anchor="t"/>
+          <a:lstStyle/>
+          <a:p>
+            <a:pPr algn="l" indent="0" marL="0">
+              <a:buNone/>
+            </a:pPr>
+            <a:r>
+              <a:rPr lang="en-US" sz="816" b="1" dirty="0">
+                <a:solidFill>
+                  <a:srgbClr val="120180"/>
+                </a:solidFill>
+                <a:latin typeface="Raleway" pitchFamily="34" charset="0"/>
+                <a:ea typeface="Raleway" pitchFamily="34" charset="-122"/>
+                <a:cs typeface="Raleway" pitchFamily="34" charset="-120"/>
+              </a:rPr>
+              <a:t>Rueda Seguro Retail (Como vamos)</a:t>
+            </a:r>
+            <a:endParaRPr lang="en-US" sz="816" dirty="0"/>
+          </a:p>
+        </p:txBody>
+      </p:sp>
+      <p:sp>
+        <p:nvSpPr>
+          <p:cNvPr id="9" name="Text 6"/>
+          <p:cNvSpPr/>
+          <p:nvPr/>
+        </p:nvSpPr>
+        <p:spPr>
+          <a:xfrm>
+            <a:off x="3505112" y="1272480"/>
+            <a:ext cx="1121776" cy="128016"/>
+          </a:xfrm>
+          <a:prstGeom prst="rect">
+            <a:avLst/>
+          </a:prstGeom>
+          <a:noFill/>
+          <a:ln/>
+        </p:spPr>
+        <p:txBody>
+          <a:bodyPr wrap="square" lIns="0" tIns="0" rIns="0" bIns="0" rtlCol="0" anchor="t"/>
+          <a:lstStyle/>
+          <a:p>
+            <a:pPr algn="l" indent="0" marL="0">
+              <a:buNone/>
+            </a:pPr>
+            <a:r>
+              <a:rPr lang="en-US" sz="600" dirty="0">
+                <a:solidFill>
+                  <a:srgbClr val="9098B0"/>
+                </a:solidFill>
+                <a:latin typeface="Raleway" pitchFamily="34" charset="0"/>
+                <a:ea typeface="Raleway" pitchFamily="34" charset="-122"/>
+                <a:cs typeface="Raleway" pitchFamily="34" charset="-120"/>
+              </a:rPr>
+              <a:t>Total de 675 cantadas (69,2%)</a:t>
+            </a:r>
+            <a:endParaRPr lang="en-US" sz="600" dirty="0"/>
+          </a:p>
+        </p:txBody>
+      </p:sp>
+      <p:sp>
+        <p:nvSpPr>
+          <p:cNvPr id="10" name="Text 7"/>
+          <p:cNvSpPr/>
+          <p:nvPr/>
+        </p:nvSpPr>
+        <p:spPr>
+          <a:xfrm>
+            <a:off x="9067573" y="1272480"/>
+            <a:ext cx="1149541" cy="128016"/>
+          </a:xfrm>
+          <a:prstGeom prst="rect">
+            <a:avLst/>
+          </a:prstGeom>
+          <a:noFill/>
+          <a:ln/>
+        </p:spPr>
+        <p:txBody>
+          <a:bodyPr wrap="square" lIns="0" tIns="0" rIns="0" bIns="0" rtlCol="0" anchor="t"/>
+          <a:lstStyle/>
+          <a:p>
+            <a:pPr algn="l" indent="0" marL="0">
+              <a:buNone/>
+            </a:pPr>
+            <a:r>
+              <a:rPr lang="en-US" sz="600" dirty="0">
+                <a:solidFill>
+                  <a:srgbClr val="9098B0"/>
+                </a:solidFill>
+                <a:latin typeface="Raleway" pitchFamily="34" charset="0"/>
+                <a:ea typeface="Raleway" pitchFamily="34" charset="-122"/>
+                <a:cs typeface="Raleway" pitchFamily="34" charset="-120"/>
+              </a:rPr>
+              <a:t>Reales consolidadas de cierre</a:t>
+            </a:r>
+            <a:endParaRPr lang="en-US" sz="600" dirty="0"/>
+          </a:p>
+        </p:txBody>
+      </p:sp>
+      <p:sp>
+        <p:nvSpPr>
+          <p:cNvPr id="11" name="Text 8"/>
+          <p:cNvSpPr/>
+          <p:nvPr/>
+        </p:nvSpPr>
+        <p:spPr>
+          <a:xfrm>
+            <a:off x="6286343" y="1272480"/>
+            <a:ext cx="1067982" cy="128016"/>
+          </a:xfrm>
+          <a:prstGeom prst="rect">
+            <a:avLst/>
+          </a:prstGeom>
+          <a:noFill/>
+          <a:ln/>
+        </p:spPr>
+        <p:txBody>
+          <a:bodyPr wrap="square" lIns="0" tIns="0" rIns="0" bIns="0" rtlCol="0" anchor="t"/>
+          <a:lstStyle/>
+          <a:p>
+            <a:pPr algn="l" indent="0" marL="0">
+              <a:buNone/>
+            </a:pPr>
+            <a:r>
+              <a:rPr lang="en-US" sz="600" dirty="0">
+                <a:solidFill>
+                  <a:srgbClr val="9098B0"/>
+                </a:solidFill>
+                <a:latin typeface="Raleway" pitchFamily="34" charset="0"/>
+                <a:ea typeface="Raleway" pitchFamily="34" charset="-122"/>
+                <a:cs typeface="Raleway" pitchFamily="34" charset="-120"/>
+              </a:rPr>
+              <a:t>Marzo · 135 gestores activos</a:t>
+            </a:r>
+            <a:endParaRPr lang="en-US" sz="600" dirty="0"/>
+          </a:p>
+        </p:txBody>
+      </p:sp>
+      <p:sp>
+        <p:nvSpPr>
+          <p:cNvPr id="12" name="Text 9"/>
+          <p:cNvSpPr/>
+          <p:nvPr/>
+        </p:nvSpPr>
+        <p:spPr>
+          <a:xfrm>
+            <a:off x="723882" y="962025"/>
+            <a:ext cx="1353517" cy="128016"/>
+          </a:xfrm>
+          <a:prstGeom prst="rect">
+            <a:avLst/>
+          </a:prstGeom>
+          <a:noFill/>
+          <a:ln/>
+        </p:spPr>
+        <p:txBody>
+          <a:bodyPr wrap="square" lIns="0" tIns="0" rIns="0" bIns="0" rtlCol="0" anchor="t"/>
+          <a:lstStyle/>
+          <a:p>
+            <a:pPr algn="l" indent="0" marL="0">
+              <a:buNone/>
+            </a:pPr>
+            <a:r>
+              <a:rPr lang="en-US" sz="696" b="1" dirty="0">
+                <a:solidFill>
+                  <a:srgbClr val="9098B0"/>
+                </a:solidFill>
+                <a:latin typeface="Raleway" pitchFamily="34" charset="0"/>
+                <a:ea typeface="Raleway" pitchFamily="34" charset="-122"/>
+                <a:cs typeface="Raleway" pitchFamily="34" charset="-120"/>
+              </a:rPr>
+              <a:t>Ventas CP 1S (Efectivas)</a:t>
             </a:r>
             <a:endParaRPr lang="en-US" sz="696" dirty="0"/>
           </a:p>
@@ -8229,14 +8723,14 @@
       </p:sp>
       <p:sp>
         <p:nvSpPr>
-          <p:cNvPr id="5" name="Text 2"/>
-          <p:cNvSpPr/>
-          <p:nvPr/>
-        </p:nvSpPr>
-        <p:spPr>
-          <a:xfrm>
-            <a:off x="571486" y="209550"/>
-            <a:ext cx="4318155" cy="196215"/>
+          <p:cNvPr id="13" name="Text 10"/>
+          <p:cNvSpPr/>
+          <p:nvPr/>
+        </p:nvSpPr>
+        <p:spPr>
+          <a:xfrm>
+            <a:off x="3505112" y="962025"/>
+            <a:ext cx="1352570" cy="128016"/>
           </a:xfrm>
           <a:prstGeom prst="rect">
             <a:avLst/>
@@ -8252,7 +8746,124 @@
               <a:buNone/>
             </a:pPr>
             <a:r>
-              <a:rPr lang="en-US" sz="1260" b="1" dirty="0">
+              <a:rPr lang="en-US" sz="696" b="1" dirty="0">
+                <a:solidFill>
+                  <a:srgbClr val="9098B0"/>
+                </a:solidFill>
+                <a:latin typeface="Raleway" pitchFamily="34" charset="0"/>
+                <a:ea typeface="Raleway" pitchFamily="34" charset="-122"/>
+                <a:cs typeface="Raleway" pitchFamily="34" charset="-120"/>
+              </a:rPr>
+              <a:t>Ventas RS 1S (Efectivas)</a:t>
+            </a:r>
+            <a:endParaRPr lang="en-US" sz="696" dirty="0"/>
+          </a:p>
+        </p:txBody>
+      </p:sp>
+      <p:sp>
+        <p:nvSpPr>
+          <p:cNvPr id="14" name="Text 11"/>
+          <p:cNvSpPr/>
+          <p:nvPr/>
+        </p:nvSpPr>
+        <p:spPr>
+          <a:xfrm>
+            <a:off x="9067573" y="962025"/>
+            <a:ext cx="1303509" cy="128016"/>
+          </a:xfrm>
+          <a:prstGeom prst="rect">
+            <a:avLst/>
+          </a:prstGeom>
+          <a:noFill/>
+          <a:ln/>
+        </p:spPr>
+        <p:txBody>
+          <a:bodyPr wrap="square" lIns="0" tIns="0" rIns="0" bIns="0" rtlCol="0" anchor="t"/>
+          <a:lstStyle/>
+          <a:p>
+            <a:pPr algn="l" indent="0" marL="0">
+              <a:buNone/>
+            </a:pPr>
+            <a:r>
+              <a:rPr lang="en-US" sz="696" b="1" dirty="0">
+                <a:solidFill>
+                  <a:srgbClr val="9098B0"/>
+                </a:solidFill>
+                <a:latin typeface="Raleway" pitchFamily="34" charset="0"/>
+                <a:ea typeface="Raleway" pitchFamily="34" charset="-122"/>
+                <a:cs typeface="Raleway" pitchFamily="34" charset="-120"/>
+              </a:rPr>
+              <a:t>Ventas CP Mayo + Junio</a:t>
+            </a:r>
+            <a:endParaRPr lang="en-US" sz="696" dirty="0"/>
+          </a:p>
+        </p:txBody>
+      </p:sp>
+      <p:sp>
+        <p:nvSpPr>
+          <p:cNvPr id="15" name="Text 12"/>
+          <p:cNvSpPr/>
+          <p:nvPr/>
+        </p:nvSpPr>
+        <p:spPr>
+          <a:xfrm>
+            <a:off x="6286343" y="962025"/>
+            <a:ext cx="977274" cy="128016"/>
+          </a:xfrm>
+          <a:prstGeom prst="rect">
+            <a:avLst/>
+          </a:prstGeom>
+          <a:noFill/>
+          <a:ln/>
+        </p:spPr>
+        <p:txBody>
+          <a:bodyPr wrap="square" lIns="0" tIns="0" rIns="0" bIns="0" rtlCol="0" anchor="t"/>
+          <a:lstStyle/>
+          <a:p>
+            <a:pPr algn="l" indent="0" marL="0">
+              <a:buNone/>
+            </a:pPr>
+            <a:r>
+              <a:rPr lang="en-US" sz="696" b="1" dirty="0">
+                <a:solidFill>
+                  <a:srgbClr val="9098B0"/>
+                </a:solidFill>
+                <a:latin typeface="Raleway" pitchFamily="34" charset="0"/>
+                <a:ea typeface="Raleway" pitchFamily="34" charset="-122"/>
+                <a:cs typeface="Raleway" pitchFamily="34" charset="-120"/>
+              </a:rPr>
+              <a:t>Pico CP Semestre</a:t>
+            </a:r>
+            <a:endParaRPr lang="en-US" sz="696" dirty="0"/>
+          </a:p>
+        </p:txBody>
+      </p:sp>
+      <p:sp>
+        <p:nvSpPr>
+          <p:cNvPr id="16" name="Text 13"/>
+          <p:cNvSpPr/>
+          <p:nvPr/>
+        </p:nvSpPr>
+        <p:spPr>
+          <a:xfrm>
+            <a:off x="4040834" y="1982116"/>
+            <a:ext cx="1008183" cy="228600"/>
+          </a:xfrm>
+          <a:prstGeom prst="rect">
+            <a:avLst/>
+          </a:prstGeom>
+          <a:noFill/>
+          <a:ln/>
+        </p:spPr>
+        <p:txBody>
+          <a:bodyPr wrap="square" lIns="47625" tIns="114300" rIns="114300" bIns="47625" rtlCol="0" anchor="ctr"/>
+          <a:lstStyle/>
+          <a:p>
+            <a:pPr algn="r" indent="0" marL="0">
+              <a:buNone/>
+            </a:pPr>
+            <a:r>
+              <a:rPr lang="en-US" sz="888" b="1" dirty="0">
                 <a:solidFill>
                   <a:srgbClr val="FFFFFF"/>
                 </a:solidFill>
@@ -8260,412 +8871,22 @@
                 <a:ea typeface="Raleway" pitchFamily="34" charset="-122"/>
                 <a:cs typeface="Raleway" pitchFamily="34" charset="-120"/>
               </a:rPr>
-              <a:t>Ventas del Canal · Cuota Protegida y Rueda Seguro</a:t>
-            </a:r>
-            <a:endParaRPr lang="en-US" sz="1260" dirty="0"/>
-          </a:p>
-        </p:txBody>
-      </p:sp>
-      <p:sp>
-        <p:nvSpPr>
-          <p:cNvPr id="6" name="Text 3"/>
-          <p:cNvSpPr/>
-          <p:nvPr/>
-        </p:nvSpPr>
-        <p:spPr>
-          <a:xfrm>
-            <a:off x="685783" y="1758255"/>
-            <a:ext cx="5405588" cy="206026"/>
-          </a:xfrm>
-          <a:prstGeom prst="rect">
-            <a:avLst/>
-          </a:prstGeom>
-          <a:noFill/>
-          <a:ln/>
-        </p:spPr>
-        <p:txBody>
-          <a:bodyPr wrap="square" lIns="0" tIns="0" rIns="0" bIns="28575" rtlCol="0" anchor="t"/>
-          <a:lstStyle/>
-          <a:p>
-            <a:pPr algn="l" indent="0" marL="0">
-              <a:buNone/>
-            </a:pPr>
-            <a:r>
-              <a:rPr lang="en-US" sz="816" b="1" dirty="0">
-                <a:solidFill>
-                  <a:srgbClr val="120180"/>
-                </a:solidFill>
-                <a:latin typeface="Raleway" pitchFamily="34" charset="0"/>
-                <a:ea typeface="Raleway" pitchFamily="34" charset="-122"/>
-                <a:cs typeface="Raleway" pitchFamily="34" charset="-120"/>
-              </a:rPr>
-              <a:t>Cuota Protegida Retail (Como vamos)</a:t>
-            </a:r>
-            <a:endParaRPr lang="en-US" sz="816" dirty="0"/>
-          </a:p>
-        </p:txBody>
-      </p:sp>
-      <p:sp>
-        <p:nvSpPr>
-          <p:cNvPr id="7" name="Text 4"/>
-          <p:cNvSpPr/>
-          <p:nvPr/>
-        </p:nvSpPr>
-        <p:spPr>
-          <a:xfrm>
-            <a:off x="723882" y="1272480"/>
-            <a:ext cx="2511489" cy="128016"/>
-          </a:xfrm>
-          <a:prstGeom prst="rect">
-            <a:avLst/>
-          </a:prstGeom>
-          <a:noFill/>
-          <a:ln/>
-        </p:spPr>
-        <p:txBody>
-          <a:bodyPr wrap="square" lIns="0" tIns="0" rIns="0" bIns="0" rtlCol="0" anchor="t"/>
-          <a:lstStyle/>
-          <a:p>
-            <a:pPr algn="l" indent="0" marL="0">
-              <a:buNone/>
-            </a:pPr>
-            <a:r>
-              <a:rPr lang="en-US" sz="600" dirty="0">
-                <a:solidFill>
-                  <a:srgbClr val="9098B0"/>
-                </a:solidFill>
-                <a:latin typeface="Raleway" pitchFamily="34" charset="0"/>
-                <a:ea typeface="Raleway" pitchFamily="34" charset="-122"/>
-                <a:cs typeface="Raleway" pitchFamily="34" charset="-120"/>
-              </a:rPr>
-              <a:t>Total de 16.062 cantadas (79,0%)</a:t>
-            </a:r>
-            <a:endParaRPr lang="en-US" sz="600" dirty="0"/>
-          </a:p>
-        </p:txBody>
-      </p:sp>
-      <p:sp>
-        <p:nvSpPr>
-          <p:cNvPr id="8" name="Text 5"/>
-          <p:cNvSpPr/>
-          <p:nvPr/>
-        </p:nvSpPr>
-        <p:spPr>
-          <a:xfrm>
-            <a:off x="6257769" y="1758255"/>
-            <a:ext cx="5405588" cy="206026"/>
-          </a:xfrm>
-          <a:prstGeom prst="rect">
-            <a:avLst/>
-          </a:prstGeom>
-          <a:noFill/>
-          <a:ln/>
-        </p:spPr>
-        <p:txBody>
-          <a:bodyPr wrap="square" lIns="0" tIns="0" rIns="0" bIns="28575" rtlCol="0" anchor="t"/>
-          <a:lstStyle/>
-          <a:p>
-            <a:pPr algn="l" indent="0" marL="0">
-              <a:buNone/>
-            </a:pPr>
-            <a:r>
-              <a:rPr lang="en-US" sz="816" b="1" dirty="0">
-                <a:solidFill>
-                  <a:srgbClr val="120180"/>
-                </a:solidFill>
-                <a:latin typeface="Raleway" pitchFamily="34" charset="0"/>
-                <a:ea typeface="Raleway" pitchFamily="34" charset="-122"/>
-                <a:cs typeface="Raleway" pitchFamily="34" charset="-120"/>
-              </a:rPr>
-              <a:t>Rueda Seguro Retail (Como vamos)</a:t>
-            </a:r>
-            <a:endParaRPr lang="en-US" sz="816" dirty="0"/>
-          </a:p>
-        </p:txBody>
-      </p:sp>
-      <p:sp>
-        <p:nvSpPr>
-          <p:cNvPr id="9" name="Text 6"/>
-          <p:cNvSpPr/>
-          <p:nvPr/>
-        </p:nvSpPr>
-        <p:spPr>
-          <a:xfrm>
-            <a:off x="3505112" y="1272480"/>
-            <a:ext cx="2511489" cy="128016"/>
-          </a:xfrm>
-          <a:prstGeom prst="rect">
-            <a:avLst/>
-          </a:prstGeom>
-          <a:noFill/>
-          <a:ln/>
-        </p:spPr>
-        <p:txBody>
-          <a:bodyPr wrap="square" lIns="0" tIns="0" rIns="0" bIns="0" rtlCol="0" anchor="t"/>
-          <a:lstStyle/>
-          <a:p>
-            <a:pPr algn="l" indent="0" marL="0">
-              <a:buNone/>
-            </a:pPr>
-            <a:r>
-              <a:rPr lang="en-US" sz="600" dirty="0">
-                <a:solidFill>
-                  <a:srgbClr val="9098B0"/>
-                </a:solidFill>
-                <a:latin typeface="Raleway" pitchFamily="34" charset="0"/>
-                <a:ea typeface="Raleway" pitchFamily="34" charset="-122"/>
-                <a:cs typeface="Raleway" pitchFamily="34" charset="-120"/>
-              </a:rPr>
-              <a:t>Total de 675 cantadas (69,2%)</a:t>
-            </a:r>
-            <a:endParaRPr lang="en-US" sz="600" dirty="0"/>
-          </a:p>
-        </p:txBody>
-      </p:sp>
-      <p:sp>
-        <p:nvSpPr>
-          <p:cNvPr id="10" name="Text 7"/>
-          <p:cNvSpPr/>
-          <p:nvPr/>
-        </p:nvSpPr>
-        <p:spPr>
-          <a:xfrm>
-            <a:off x="9067573" y="1272480"/>
-            <a:ext cx="2511489" cy="128016"/>
-          </a:xfrm>
-          <a:prstGeom prst="rect">
-            <a:avLst/>
-          </a:prstGeom>
-          <a:noFill/>
-          <a:ln/>
-        </p:spPr>
-        <p:txBody>
-          <a:bodyPr wrap="square" lIns="0" tIns="0" rIns="0" bIns="0" rtlCol="0" anchor="t"/>
-          <a:lstStyle/>
-          <a:p>
-            <a:pPr algn="l" indent="0" marL="0">
-              <a:buNone/>
-            </a:pPr>
-            <a:r>
-              <a:rPr lang="en-US" sz="600" dirty="0">
-                <a:solidFill>
-                  <a:srgbClr val="9098B0"/>
-                </a:solidFill>
-                <a:latin typeface="Raleway" pitchFamily="34" charset="0"/>
-                <a:ea typeface="Raleway" pitchFamily="34" charset="-122"/>
-                <a:cs typeface="Raleway" pitchFamily="34" charset="-120"/>
-              </a:rPr>
-              <a:t>Reales consolidadas de cierre</a:t>
-            </a:r>
-            <a:endParaRPr lang="en-US" sz="600" dirty="0"/>
-          </a:p>
-        </p:txBody>
-      </p:sp>
-      <p:sp>
-        <p:nvSpPr>
-          <p:cNvPr id="11" name="Text 8"/>
-          <p:cNvSpPr/>
-          <p:nvPr/>
-        </p:nvSpPr>
-        <p:spPr>
-          <a:xfrm>
-            <a:off x="6286343" y="1272480"/>
-            <a:ext cx="2511489" cy="128016"/>
-          </a:xfrm>
-          <a:prstGeom prst="rect">
-            <a:avLst/>
-          </a:prstGeom>
-          <a:noFill/>
-          <a:ln/>
-        </p:spPr>
-        <p:txBody>
-          <a:bodyPr wrap="square" lIns="0" tIns="0" rIns="0" bIns="0" rtlCol="0" anchor="t"/>
-          <a:lstStyle/>
-          <a:p>
-            <a:pPr algn="l" indent="0" marL="0">
-              <a:buNone/>
-            </a:pPr>
-            <a:r>
-              <a:rPr lang="en-US" sz="600" dirty="0">
-                <a:solidFill>
-                  <a:srgbClr val="9098B0"/>
-                </a:solidFill>
-                <a:latin typeface="Raleway" pitchFamily="34" charset="0"/>
-                <a:ea typeface="Raleway" pitchFamily="34" charset="-122"/>
-                <a:cs typeface="Raleway" pitchFamily="34" charset="-120"/>
-              </a:rPr>
-              <a:t>Marzo · 135 gestores activos</a:t>
-            </a:r>
-            <a:endParaRPr lang="en-US" sz="600" dirty="0"/>
-          </a:p>
-        </p:txBody>
-      </p:sp>
-      <p:sp>
-        <p:nvSpPr>
-          <p:cNvPr id="12" name="Text 9"/>
-          <p:cNvSpPr/>
-          <p:nvPr/>
-        </p:nvSpPr>
-        <p:spPr>
-          <a:xfrm>
-            <a:off x="723882" y="962025"/>
-            <a:ext cx="2511489" cy="128016"/>
-          </a:xfrm>
-          <a:prstGeom prst="rect">
-            <a:avLst/>
-          </a:prstGeom>
-          <a:noFill/>
-          <a:ln/>
-        </p:spPr>
-        <p:txBody>
-          <a:bodyPr wrap="square" lIns="0" tIns="0" rIns="0" bIns="0" rtlCol="0" anchor="t"/>
-          <a:lstStyle/>
-          <a:p>
-            <a:pPr algn="l" indent="0" marL="0">
-              <a:buNone/>
-            </a:pPr>
-            <a:r>
-              <a:rPr lang="en-US" sz="696" b="1" dirty="0">
-                <a:solidFill>
-                  <a:srgbClr val="9098B0"/>
-                </a:solidFill>
-                <a:latin typeface="Raleway" pitchFamily="34" charset="0"/>
-                <a:ea typeface="Raleway" pitchFamily="34" charset="-122"/>
-                <a:cs typeface="Raleway" pitchFamily="34" charset="-120"/>
-              </a:rPr>
-              <a:t>Ventas CP 1S (Efectivas)</a:t>
-            </a:r>
-            <a:endParaRPr lang="en-US" sz="696" dirty="0"/>
-          </a:p>
-        </p:txBody>
-      </p:sp>
-      <p:sp>
-        <p:nvSpPr>
-          <p:cNvPr id="13" name="Text 10"/>
-          <p:cNvSpPr/>
-          <p:nvPr/>
-        </p:nvSpPr>
-        <p:spPr>
-          <a:xfrm>
-            <a:off x="3505112" y="962025"/>
-            <a:ext cx="2511489" cy="128016"/>
-          </a:xfrm>
-          <a:prstGeom prst="rect">
-            <a:avLst/>
-          </a:prstGeom>
-          <a:noFill/>
-          <a:ln/>
-        </p:spPr>
-        <p:txBody>
-          <a:bodyPr wrap="square" lIns="0" tIns="0" rIns="0" bIns="0" rtlCol="0" anchor="t"/>
-          <a:lstStyle/>
-          <a:p>
-            <a:pPr algn="l" indent="0" marL="0">
-              <a:buNone/>
-            </a:pPr>
-            <a:r>
-              <a:rPr lang="en-US" sz="696" b="1" dirty="0">
-                <a:solidFill>
-                  <a:srgbClr val="9098B0"/>
-                </a:solidFill>
-                <a:latin typeface="Raleway" pitchFamily="34" charset="0"/>
-                <a:ea typeface="Raleway" pitchFamily="34" charset="-122"/>
-                <a:cs typeface="Raleway" pitchFamily="34" charset="-120"/>
-              </a:rPr>
-              <a:t>Ventas RS 1S (Efectivas)</a:t>
-            </a:r>
-            <a:endParaRPr lang="en-US" sz="696" dirty="0"/>
-          </a:p>
-        </p:txBody>
-      </p:sp>
-      <p:sp>
-        <p:nvSpPr>
-          <p:cNvPr id="14" name="Text 11"/>
-          <p:cNvSpPr/>
-          <p:nvPr/>
-        </p:nvSpPr>
-        <p:spPr>
-          <a:xfrm>
-            <a:off x="9067573" y="962025"/>
-            <a:ext cx="2511489" cy="128016"/>
-          </a:xfrm>
-          <a:prstGeom prst="rect">
-            <a:avLst/>
-          </a:prstGeom>
-          <a:noFill/>
-          <a:ln/>
-        </p:spPr>
-        <p:txBody>
-          <a:bodyPr wrap="square" lIns="0" tIns="0" rIns="0" bIns="0" rtlCol="0" anchor="t"/>
-          <a:lstStyle/>
-          <a:p>
-            <a:pPr algn="l" indent="0" marL="0">
-              <a:buNone/>
-            </a:pPr>
-            <a:r>
-              <a:rPr lang="en-US" sz="696" b="1" dirty="0">
-                <a:solidFill>
-                  <a:srgbClr val="9098B0"/>
-                </a:solidFill>
-                <a:latin typeface="Raleway" pitchFamily="34" charset="0"/>
-                <a:ea typeface="Raleway" pitchFamily="34" charset="-122"/>
-                <a:cs typeface="Raleway" pitchFamily="34" charset="-120"/>
-              </a:rPr>
-              <a:t>Ventas CP Mayo + Junio</a:t>
-            </a:r>
-            <a:endParaRPr lang="en-US" sz="696" dirty="0"/>
-          </a:p>
-        </p:txBody>
-      </p:sp>
-      <p:sp>
-        <p:nvSpPr>
-          <p:cNvPr id="15" name="Text 12"/>
-          <p:cNvSpPr/>
-          <p:nvPr/>
-        </p:nvSpPr>
-        <p:spPr>
-          <a:xfrm>
-            <a:off x="6286343" y="962025"/>
-            <a:ext cx="2511489" cy="128016"/>
-          </a:xfrm>
-          <a:prstGeom prst="rect">
-            <a:avLst/>
-          </a:prstGeom>
-          <a:noFill/>
-          <a:ln/>
-        </p:spPr>
-        <p:txBody>
-          <a:bodyPr wrap="square" lIns="0" tIns="0" rIns="0" bIns="0" rtlCol="0" anchor="t"/>
-          <a:lstStyle/>
-          <a:p>
-            <a:pPr algn="l" indent="0" marL="0">
-              <a:buNone/>
-            </a:pPr>
-            <a:r>
-              <a:rPr lang="en-US" sz="696" b="1" dirty="0">
-                <a:solidFill>
-                  <a:srgbClr val="9098B0"/>
-                </a:solidFill>
-                <a:latin typeface="Raleway" pitchFamily="34" charset="0"/>
-                <a:ea typeface="Raleway" pitchFamily="34" charset="-122"/>
-                <a:cs typeface="Raleway" pitchFamily="34" charset="-120"/>
-              </a:rPr>
-              <a:t>Pico CP Semestre</a:t>
-            </a:r>
-            <a:endParaRPr lang="en-US" sz="696" dirty="0"/>
-          </a:p>
-        </p:txBody>
-      </p:sp>
-      <p:sp>
-        <p:nvSpPr>
-          <p:cNvPr id="16" name="Text 13"/>
-          <p:cNvSpPr/>
-          <p:nvPr/>
-        </p:nvSpPr>
-        <p:spPr>
-          <a:xfrm>
-            <a:off x="4070199" y="1982116"/>
-            <a:ext cx="1008183" cy="228600"/>
+              <a:t>Efectivas</a:t>
+            </a:r>
+            <a:endParaRPr lang="en-US" sz="888" dirty="0"/>
+          </a:p>
+        </p:txBody>
+      </p:sp>
+      <p:sp>
+        <p:nvSpPr>
+          <p:cNvPr id="17" name="Text 14"/>
+          <p:cNvSpPr/>
+          <p:nvPr/>
+        </p:nvSpPr>
+        <p:spPr>
+          <a:xfrm>
+            <a:off x="9370044" y="1982116"/>
+            <a:ext cx="1137405" cy="228600"/>
           </a:xfrm>
           <a:prstGeom prst="rect">
             <a:avLst/>
@@ -8697,14 +8918,14 @@
       </p:sp>
       <p:sp>
         <p:nvSpPr>
-          <p:cNvPr id="17" name="Text 14"/>
-          <p:cNvSpPr/>
-          <p:nvPr/>
-        </p:nvSpPr>
-        <p:spPr>
-          <a:xfrm>
-            <a:off x="9403172" y="1982116"/>
-            <a:ext cx="1137405" cy="228600"/>
+          <p:cNvPr id="18" name="Text 15"/>
+          <p:cNvSpPr/>
+          <p:nvPr/>
+        </p:nvSpPr>
+        <p:spPr>
+          <a:xfrm>
+            <a:off x="1490284" y="1982116"/>
+            <a:ext cx="987642" cy="228600"/>
           </a:xfrm>
           <a:prstGeom prst="rect">
             <a:avLst/>
@@ -8728,22 +8949,22 @@
                 <a:ea typeface="Raleway" pitchFamily="34" charset="-122"/>
                 <a:cs typeface="Raleway" pitchFamily="34" charset="-120"/>
               </a:rPr>
-              <a:t>Efectivas</a:t>
-            </a:r>
-            <a:endParaRPr lang="en-US" sz="888" dirty="0"/>
-          </a:p>
-        </p:txBody>
-      </p:sp>
-      <p:sp>
-        <p:nvSpPr>
-          <p:cNvPr id="18" name="Text 15"/>
-          <p:cNvSpPr/>
-          <p:nvPr/>
-        </p:nvSpPr>
-        <p:spPr>
-          <a:xfrm>
-            <a:off x="1519051" y="1982116"/>
-            <a:ext cx="987642" cy="228600"/>
+              <a:t>Gestores</a:t>
+            </a:r>
+            <a:endParaRPr lang="en-US" sz="888" dirty="0"/>
+          </a:p>
+        </p:txBody>
+      </p:sp>
+      <p:sp>
+        <p:nvSpPr>
+          <p:cNvPr id="19" name="Text 16"/>
+          <p:cNvSpPr/>
+          <p:nvPr/>
+        </p:nvSpPr>
+        <p:spPr>
+          <a:xfrm>
+            <a:off x="3044234" y="1982116"/>
+            <a:ext cx="1025964" cy="228600"/>
           </a:xfrm>
           <a:prstGeom prst="rect">
             <a:avLst/>
@@ -8767,45 +8988,6 @@
                 <a:ea typeface="Raleway" pitchFamily="34" charset="-122"/>
                 <a:cs typeface="Raleway" pitchFamily="34" charset="-120"/>
               </a:rPr>
-              <a:t>Gestores</a:t>
-            </a:r>
-            <a:endParaRPr lang="en-US" sz="888" dirty="0"/>
-          </a:p>
-        </p:txBody>
-      </p:sp>
-      <p:sp>
-        <p:nvSpPr>
-          <p:cNvPr id="19" name="Text 16"/>
-          <p:cNvSpPr/>
-          <p:nvPr/>
-        </p:nvSpPr>
-        <p:spPr>
-          <a:xfrm>
-            <a:off x="3074117" y="1982116"/>
-            <a:ext cx="1025964" cy="228600"/>
-          </a:xfrm>
-          <a:prstGeom prst="rect">
-            <a:avLst/>
-          </a:prstGeom>
-          <a:noFill/>
-          <a:ln/>
-        </p:spPr>
-        <p:txBody>
-          <a:bodyPr wrap="square" lIns="47625" tIns="114300" rIns="114300" bIns="47625" rtlCol="0" anchor="ctr"/>
-          <a:lstStyle/>
-          <a:p>
-            <a:pPr algn="r" indent="0" marL="0">
-              <a:buNone/>
-            </a:pPr>
-            <a:r>
-              <a:rPr lang="en-US" sz="888" b="1" dirty="0">
-                <a:solidFill>
-                  <a:srgbClr val="FFFFFF"/>
-                </a:solidFill>
-                <a:latin typeface="Raleway" pitchFamily="34" charset="0"/>
-                <a:ea typeface="Raleway" pitchFamily="34" charset="-122"/>
-                <a:cs typeface="Raleway" pitchFamily="34" charset="-120"/>
-              </a:rPr>
               <a:t>Cantadas</a:t>
             </a:r>
             <a:endParaRPr lang="en-US" sz="888" dirty="0"/>
@@ -8820,7 +9002,7 @@
         </p:nvSpPr>
         <p:spPr>
           <a:xfrm>
-            <a:off x="5049017" y="1982116"/>
+            <a:off x="5022469" y="1982116"/>
             <a:ext cx="911457" cy="228600"/>
           </a:xfrm>
           <a:prstGeom prst="rect">
@@ -8898,7 +9080,7 @@
         </p:nvSpPr>
         <p:spPr>
           <a:xfrm>
-            <a:off x="7197743" y="1982116"/>
+            <a:off x="7165294" y="1982116"/>
             <a:ext cx="1114105" cy="228600"/>
           </a:xfrm>
           <a:prstGeom prst="rect">
@@ -8937,7 +9119,7 @@
         </p:nvSpPr>
         <p:spPr>
           <a:xfrm>
-            <a:off x="8279399" y="1982116"/>
+            <a:off x="8245686" y="1982116"/>
             <a:ext cx="1157486" cy="228600"/>
           </a:xfrm>
           <a:prstGeom prst="rect">
@@ -8976,7 +9158,7 @@
         </p:nvSpPr>
         <p:spPr>
           <a:xfrm>
-            <a:off x="10507449" y="1982116"/>
+            <a:off x="10477496" y="1982116"/>
             <a:ext cx="1028417" cy="228600"/>
           </a:xfrm>
           <a:prstGeom prst="rect">
@@ -9054,7 +9236,7 @@
         </p:nvSpPr>
         <p:spPr>
           <a:xfrm>
-            <a:off x="3074117" y="5227164"/>
+            <a:off x="3044234" y="5227164"/>
             <a:ext cx="1025964" cy="459879"/>
           </a:xfrm>
           <a:prstGeom prst="rect">
@@ -9093,7 +9275,7 @@
         </p:nvSpPr>
         <p:spPr>
           <a:xfrm>
-            <a:off x="4070199" y="5227164"/>
+            <a:off x="4040834" y="5227164"/>
             <a:ext cx="1008183" cy="459879"/>
           </a:xfrm>
           <a:prstGeom prst="rect">
@@ -9132,8 +9314,8 @@
         </p:nvSpPr>
         <p:spPr>
           <a:xfrm>
-            <a:off x="723882" y="1104900"/>
-            <a:ext cx="2511489" cy="133365"/>
+            <a:off x="723882" y="1085850"/>
+            <a:ext cx="452111" cy="156972"/>
           </a:xfrm>
           <a:prstGeom prst="rect">
             <a:avLst/>
@@ -9171,7 +9353,7 @@
         </p:nvSpPr>
         <p:spPr>
           <a:xfrm>
-            <a:off x="3074117" y="2210716"/>
+            <a:off x="3044234" y="2210716"/>
             <a:ext cx="1025964" cy="495300"/>
           </a:xfrm>
           <a:prstGeom prst="rect">
@@ -9210,7 +9392,7 @@
         </p:nvSpPr>
         <p:spPr>
           <a:xfrm>
-            <a:off x="4070199" y="2210716"/>
+            <a:off x="4040834" y="2210716"/>
             <a:ext cx="1008183" cy="495300"/>
           </a:xfrm>
           <a:prstGeom prst="rect">
@@ -9249,7 +9431,7 @@
         </p:nvSpPr>
         <p:spPr>
           <a:xfrm>
-            <a:off x="5049017" y="2210716"/>
+            <a:off x="5022469" y="2210716"/>
             <a:ext cx="911457" cy="495300"/>
           </a:xfrm>
           <a:prstGeom prst="rect">
@@ -9266,6 +9448,45 @@
               <a:buNone/>
             </a:pPr>
             <a:r>
+              <a:rPr lang="en-US" sz="816" b="1" dirty="0">
+                <a:solidFill>
+                  <a:srgbClr val="008060"/>
+                </a:solidFill>
+                <a:latin typeface="Raleway" pitchFamily="34" charset="0"/>
+                <a:ea typeface="Raleway" pitchFamily="34" charset="-122"/>
+                <a:cs typeface="Raleway" pitchFamily="34" charset="-120"/>
+              </a:rPr>
+              <a:t>82,6%</a:t>
+            </a:r>
+            <a:endParaRPr lang="en-US" sz="816" dirty="0"/>
+          </a:p>
+        </p:txBody>
+      </p:sp>
+      <p:sp>
+        <p:nvSpPr>
+          <p:cNvPr id="32" name="Text 29"/>
+          <p:cNvSpPr/>
+          <p:nvPr/>
+        </p:nvSpPr>
+        <p:spPr>
+          <a:xfrm>
+            <a:off x="3044234" y="2706016"/>
+            <a:ext cx="1025964" cy="504230"/>
+          </a:xfrm>
+          <a:prstGeom prst="rect">
+            <a:avLst/>
+          </a:prstGeom>
+          <a:noFill/>
+          <a:ln/>
+        </p:spPr>
+        <p:txBody>
+          <a:bodyPr wrap="square" lIns="38100" tIns="114300" rIns="114300" bIns="38100" rtlCol="0" anchor="ctr"/>
+          <a:lstStyle/>
+          <a:p>
+            <a:pPr algn="r" indent="0" marL="0">
+              <a:buNone/>
+            </a:pPr>
+            <a:r>
               <a:rPr lang="en-US" sz="888" dirty="0">
                 <a:solidFill>
                   <a:srgbClr val="333333"/>
@@ -9274,21 +9495,99 @@
                 <a:ea typeface="Raleway" pitchFamily="34" charset="-122"/>
                 <a:cs typeface="Raleway" pitchFamily="34" charset="-120"/>
               </a:rPr>
-              <a:t>82,6%</a:t>
-            </a:r>
-            <a:endParaRPr lang="en-US" sz="888" dirty="0"/>
-          </a:p>
-        </p:txBody>
-      </p:sp>
-      <p:sp>
-        <p:nvSpPr>
-          <p:cNvPr id="32" name="Text 29"/>
-          <p:cNvSpPr/>
-          <p:nvPr/>
-        </p:nvSpPr>
-        <p:spPr>
-          <a:xfrm>
-            <a:off x="3074117" y="2706016"/>
+              <a:t>2.298</a:t>
+            </a:r>
+            <a:endParaRPr lang="en-US" sz="888" dirty="0"/>
+          </a:p>
+        </p:txBody>
+      </p:sp>
+      <p:sp>
+        <p:nvSpPr>
+          <p:cNvPr id="33" name="Text 30"/>
+          <p:cNvSpPr/>
+          <p:nvPr/>
+        </p:nvSpPr>
+        <p:spPr>
+          <a:xfrm>
+            <a:off x="4040834" y="2706016"/>
+            <a:ext cx="1008183" cy="504230"/>
+          </a:xfrm>
+          <a:prstGeom prst="rect">
+            <a:avLst/>
+          </a:prstGeom>
+          <a:noFill/>
+          <a:ln/>
+        </p:spPr>
+        <p:txBody>
+          <a:bodyPr wrap="square" lIns="38100" tIns="114300" rIns="114300" bIns="38100" rtlCol="0" anchor="ctr"/>
+          <a:lstStyle/>
+          <a:p>
+            <a:pPr algn="r" indent="0" marL="0">
+              <a:buNone/>
+            </a:pPr>
+            <a:r>
+              <a:rPr lang="en-US" sz="888" dirty="0">
+                <a:solidFill>
+                  <a:srgbClr val="333333"/>
+                </a:solidFill>
+                <a:latin typeface="Raleway" pitchFamily="34" charset="0"/>
+                <a:ea typeface="Raleway" pitchFamily="34" charset="-122"/>
+                <a:cs typeface="Raleway" pitchFamily="34" charset="-120"/>
+              </a:rPr>
+              <a:t>1.798</a:t>
+            </a:r>
+            <a:endParaRPr lang="en-US" sz="888" dirty="0"/>
+          </a:p>
+        </p:txBody>
+      </p:sp>
+      <p:sp>
+        <p:nvSpPr>
+          <p:cNvPr id="34" name="Text 31"/>
+          <p:cNvSpPr/>
+          <p:nvPr/>
+        </p:nvSpPr>
+        <p:spPr>
+          <a:xfrm>
+            <a:off x="5022469" y="2706016"/>
+            <a:ext cx="911457" cy="504230"/>
+          </a:xfrm>
+          <a:prstGeom prst="rect">
+            <a:avLst/>
+          </a:prstGeom>
+          <a:noFill/>
+          <a:ln/>
+        </p:spPr>
+        <p:txBody>
+          <a:bodyPr wrap="square" lIns="38100" tIns="114300" rIns="114300" bIns="38100" rtlCol="0" anchor="ctr"/>
+          <a:lstStyle/>
+          <a:p>
+            <a:pPr algn="r" indent="0" marL="0">
+              <a:buNone/>
+            </a:pPr>
+            <a:r>
+              <a:rPr lang="en-US" sz="816" b="1" dirty="0">
+                <a:solidFill>
+                  <a:srgbClr val="8A6200"/>
+                </a:solidFill>
+                <a:latin typeface="Raleway" pitchFamily="34" charset="0"/>
+                <a:ea typeface="Raleway" pitchFamily="34" charset="-122"/>
+                <a:cs typeface="Raleway" pitchFamily="34" charset="-120"/>
+              </a:rPr>
+              <a:t>78,2%</a:t>
+            </a:r>
+            <a:endParaRPr lang="en-US" sz="816" dirty="0"/>
+          </a:p>
+        </p:txBody>
+      </p:sp>
+      <p:sp>
+        <p:nvSpPr>
+          <p:cNvPr id="35" name="Text 32"/>
+          <p:cNvSpPr/>
+          <p:nvPr/>
+        </p:nvSpPr>
+        <p:spPr>
+          <a:xfrm>
+            <a:off x="3044234" y="3210246"/>
             <a:ext cx="1025964" cy="504230"/>
           </a:xfrm>
           <a:prstGeom prst="rect">
@@ -9313,21 +9612,21 @@
                 <a:ea typeface="Raleway" pitchFamily="34" charset="-122"/>
                 <a:cs typeface="Raleway" pitchFamily="34" charset="-120"/>
               </a:rPr>
-              <a:t>2.298</a:t>
-            </a:r>
-            <a:endParaRPr lang="en-US" sz="888" dirty="0"/>
-          </a:p>
-        </p:txBody>
-      </p:sp>
-      <p:sp>
-        <p:nvSpPr>
-          <p:cNvPr id="33" name="Text 30"/>
-          <p:cNvSpPr/>
-          <p:nvPr/>
-        </p:nvSpPr>
-        <p:spPr>
-          <a:xfrm>
-            <a:off x="4070199" y="2706016"/>
+              <a:t>3.344</a:t>
+            </a:r>
+            <a:endParaRPr lang="en-US" sz="888" dirty="0"/>
+          </a:p>
+        </p:txBody>
+      </p:sp>
+      <p:sp>
+        <p:nvSpPr>
+          <p:cNvPr id="36" name="Text 33"/>
+          <p:cNvSpPr/>
+          <p:nvPr/>
+        </p:nvSpPr>
+        <p:spPr>
+          <a:xfrm>
+            <a:off x="4040834" y="3210246"/>
             <a:ext cx="1008183" cy="504230"/>
           </a:xfrm>
           <a:prstGeom prst="rect">
@@ -9352,21 +9651,21 @@
                 <a:ea typeface="Raleway" pitchFamily="34" charset="-122"/>
                 <a:cs typeface="Raleway" pitchFamily="34" charset="-120"/>
               </a:rPr>
-              <a:t>1.798</a:t>
-            </a:r>
-            <a:endParaRPr lang="en-US" sz="888" dirty="0"/>
-          </a:p>
-        </p:txBody>
-      </p:sp>
-      <p:sp>
-        <p:nvSpPr>
-          <p:cNvPr id="34" name="Text 31"/>
-          <p:cNvSpPr/>
-          <p:nvPr/>
-        </p:nvSpPr>
-        <p:spPr>
-          <a:xfrm>
-            <a:off x="5049017" y="2706016"/>
+              <a:t>2.474</a:t>
+            </a:r>
+            <a:endParaRPr lang="en-US" sz="888" dirty="0"/>
+          </a:p>
+        </p:txBody>
+      </p:sp>
+      <p:sp>
+        <p:nvSpPr>
+          <p:cNvPr id="37" name="Text 34"/>
+          <p:cNvSpPr/>
+          <p:nvPr/>
+        </p:nvSpPr>
+        <p:spPr>
+          <a:xfrm>
+            <a:off x="5022469" y="3210246"/>
             <a:ext cx="911457" cy="504230"/>
           </a:xfrm>
           <a:prstGeom prst="rect">
@@ -9383,6 +9682,45 @@
               <a:buNone/>
             </a:pPr>
             <a:r>
+              <a:rPr lang="en-US" sz="816" b="1" dirty="0">
+                <a:solidFill>
+                  <a:srgbClr val="8A6200"/>
+                </a:solidFill>
+                <a:latin typeface="Raleway" pitchFamily="34" charset="0"/>
+                <a:ea typeface="Raleway" pitchFamily="34" charset="-122"/>
+                <a:cs typeface="Raleway" pitchFamily="34" charset="-120"/>
+              </a:rPr>
+              <a:t>74,0%</a:t>
+            </a:r>
+            <a:endParaRPr lang="en-US" sz="816" dirty="0"/>
+          </a:p>
+        </p:txBody>
+      </p:sp>
+      <p:sp>
+        <p:nvSpPr>
+          <p:cNvPr id="38" name="Text 35"/>
+          <p:cNvSpPr/>
+          <p:nvPr/>
+        </p:nvSpPr>
+        <p:spPr>
+          <a:xfrm>
+            <a:off x="3044234" y="3714475"/>
+            <a:ext cx="1025964" cy="504230"/>
+          </a:xfrm>
+          <a:prstGeom prst="rect">
+            <a:avLst/>
+          </a:prstGeom>
+          <a:noFill/>
+          <a:ln/>
+        </p:spPr>
+        <p:txBody>
+          <a:bodyPr wrap="square" lIns="38100" tIns="114300" rIns="114300" bIns="38100" rtlCol="0" anchor="ctr"/>
+          <a:lstStyle/>
+          <a:p>
+            <a:pPr algn="r" indent="0" marL="0">
+              <a:buNone/>
+            </a:pPr>
+            <a:r>
               <a:rPr lang="en-US" sz="888" dirty="0">
                 <a:solidFill>
                   <a:srgbClr val="333333"/>
@@ -9391,21 +9729,99 @@
                 <a:ea typeface="Raleway" pitchFamily="34" charset="-122"/>
                 <a:cs typeface="Raleway" pitchFamily="34" charset="-120"/>
               </a:rPr>
-              <a:t>78,2%</a:t>
-            </a:r>
-            <a:endParaRPr lang="en-US" sz="888" dirty="0"/>
-          </a:p>
-        </p:txBody>
-      </p:sp>
-      <p:sp>
-        <p:nvSpPr>
-          <p:cNvPr id="35" name="Text 32"/>
-          <p:cNvSpPr/>
-          <p:nvPr/>
-        </p:nvSpPr>
-        <p:spPr>
-          <a:xfrm>
-            <a:off x="3074117" y="3210246"/>
+              <a:t>2.731</a:t>
+            </a:r>
+            <a:endParaRPr lang="en-US" sz="888" dirty="0"/>
+          </a:p>
+        </p:txBody>
+      </p:sp>
+      <p:sp>
+        <p:nvSpPr>
+          <p:cNvPr id="39" name="Text 36"/>
+          <p:cNvSpPr/>
+          <p:nvPr/>
+        </p:nvSpPr>
+        <p:spPr>
+          <a:xfrm>
+            <a:off x="4040834" y="3714475"/>
+            <a:ext cx="1008183" cy="504230"/>
+          </a:xfrm>
+          <a:prstGeom prst="rect">
+            <a:avLst/>
+          </a:prstGeom>
+          <a:noFill/>
+          <a:ln/>
+        </p:spPr>
+        <p:txBody>
+          <a:bodyPr wrap="square" lIns="38100" tIns="114300" rIns="114300" bIns="38100" rtlCol="0" anchor="ctr"/>
+          <a:lstStyle/>
+          <a:p>
+            <a:pPr algn="r" indent="0" marL="0">
+              <a:buNone/>
+            </a:pPr>
+            <a:r>
+              <a:rPr lang="en-US" sz="888" dirty="0">
+                <a:solidFill>
+                  <a:srgbClr val="333333"/>
+                </a:solidFill>
+                <a:latin typeface="Raleway" pitchFamily="34" charset="0"/>
+                <a:ea typeface="Raleway" pitchFamily="34" charset="-122"/>
+                <a:cs typeface="Raleway" pitchFamily="34" charset="-120"/>
+              </a:rPr>
+              <a:t>2.177</a:t>
+            </a:r>
+            <a:endParaRPr lang="en-US" sz="888" dirty="0"/>
+          </a:p>
+        </p:txBody>
+      </p:sp>
+      <p:sp>
+        <p:nvSpPr>
+          <p:cNvPr id="40" name="Text 37"/>
+          <p:cNvSpPr/>
+          <p:nvPr/>
+        </p:nvSpPr>
+        <p:spPr>
+          <a:xfrm>
+            <a:off x="5022469" y="3714475"/>
+            <a:ext cx="911457" cy="504230"/>
+          </a:xfrm>
+          <a:prstGeom prst="rect">
+            <a:avLst/>
+          </a:prstGeom>
+          <a:noFill/>
+          <a:ln/>
+        </p:spPr>
+        <p:txBody>
+          <a:bodyPr wrap="square" lIns="38100" tIns="114300" rIns="114300" bIns="38100" rtlCol="0" anchor="ctr"/>
+          <a:lstStyle/>
+          <a:p>
+            <a:pPr algn="r" indent="0" marL="0">
+              <a:buNone/>
+            </a:pPr>
+            <a:r>
+              <a:rPr lang="en-US" sz="816" b="1" dirty="0">
+                <a:solidFill>
+                  <a:srgbClr val="8A6200"/>
+                </a:solidFill>
+                <a:latin typeface="Raleway" pitchFamily="34" charset="0"/>
+                <a:ea typeface="Raleway" pitchFamily="34" charset="-122"/>
+                <a:cs typeface="Raleway" pitchFamily="34" charset="-120"/>
+              </a:rPr>
+              <a:t>79,7%</a:t>
+            </a:r>
+            <a:endParaRPr lang="en-US" sz="816" dirty="0"/>
+          </a:p>
+        </p:txBody>
+      </p:sp>
+      <p:sp>
+        <p:nvSpPr>
+          <p:cNvPr id="41" name="Text 38"/>
+          <p:cNvSpPr/>
+          <p:nvPr/>
+        </p:nvSpPr>
+        <p:spPr>
+          <a:xfrm>
+            <a:off x="3044234" y="4218705"/>
             <a:ext cx="1025964" cy="504230"/>
           </a:xfrm>
           <a:prstGeom prst="rect">
@@ -9430,21 +9846,21 @@
                 <a:ea typeface="Raleway" pitchFamily="34" charset="-122"/>
                 <a:cs typeface="Raleway" pitchFamily="34" charset="-120"/>
               </a:rPr>
-              <a:t>3.344</a:t>
-            </a:r>
-            <a:endParaRPr lang="en-US" sz="888" dirty="0"/>
-          </a:p>
-        </p:txBody>
-      </p:sp>
-      <p:sp>
-        <p:nvSpPr>
-          <p:cNvPr id="36" name="Text 33"/>
-          <p:cNvSpPr/>
-          <p:nvPr/>
-        </p:nvSpPr>
-        <p:spPr>
-          <a:xfrm>
-            <a:off x="4070199" y="3210246"/>
+              <a:t>3.116</a:t>
+            </a:r>
+            <a:endParaRPr lang="en-US" sz="888" dirty="0"/>
+          </a:p>
+        </p:txBody>
+      </p:sp>
+      <p:sp>
+        <p:nvSpPr>
+          <p:cNvPr id="42" name="Text 39"/>
+          <p:cNvSpPr/>
+          <p:nvPr/>
+        </p:nvSpPr>
+        <p:spPr>
+          <a:xfrm>
+            <a:off x="4040834" y="4218705"/>
             <a:ext cx="1008183" cy="504230"/>
           </a:xfrm>
           <a:prstGeom prst="rect">
@@ -9469,412 +9885,568 @@
                 <a:ea typeface="Raleway" pitchFamily="34" charset="-122"/>
                 <a:cs typeface="Raleway" pitchFamily="34" charset="-120"/>
               </a:rPr>
+              <a:t>2.443</a:t>
+            </a:r>
+            <a:endParaRPr lang="en-US" sz="888" dirty="0"/>
+          </a:p>
+        </p:txBody>
+      </p:sp>
+      <p:sp>
+        <p:nvSpPr>
+          <p:cNvPr id="43" name="Text 40"/>
+          <p:cNvSpPr/>
+          <p:nvPr/>
+        </p:nvSpPr>
+        <p:spPr>
+          <a:xfrm>
+            <a:off x="5022469" y="4218705"/>
+            <a:ext cx="911457" cy="504230"/>
+          </a:xfrm>
+          <a:prstGeom prst="rect">
+            <a:avLst/>
+          </a:prstGeom>
+          <a:noFill/>
+          <a:ln/>
+        </p:spPr>
+        <p:txBody>
+          <a:bodyPr wrap="square" lIns="38100" tIns="114300" rIns="114300" bIns="38100" rtlCol="0" anchor="ctr"/>
+          <a:lstStyle/>
+          <a:p>
+            <a:pPr algn="r" indent="0" marL="0">
+              <a:buNone/>
+            </a:pPr>
+            <a:r>
+              <a:rPr lang="en-US" sz="816" b="1" dirty="0">
+                <a:solidFill>
+                  <a:srgbClr val="8A6200"/>
+                </a:solidFill>
+                <a:latin typeface="Raleway" pitchFamily="34" charset="0"/>
+                <a:ea typeface="Raleway" pitchFamily="34" charset="-122"/>
+                <a:cs typeface="Raleway" pitchFamily="34" charset="-120"/>
+              </a:rPr>
+              <a:t>78,4%</a:t>
+            </a:r>
+            <a:endParaRPr lang="en-US" sz="816" dirty="0"/>
+          </a:p>
+        </p:txBody>
+      </p:sp>
+      <p:sp>
+        <p:nvSpPr>
+          <p:cNvPr id="44" name="Text 41"/>
+          <p:cNvSpPr/>
+          <p:nvPr/>
+        </p:nvSpPr>
+        <p:spPr>
+          <a:xfrm>
+            <a:off x="3044234" y="4722935"/>
+            <a:ext cx="1025964" cy="504230"/>
+          </a:xfrm>
+          <a:prstGeom prst="rect">
+            <a:avLst/>
+          </a:prstGeom>
+          <a:noFill/>
+          <a:ln/>
+        </p:spPr>
+        <p:txBody>
+          <a:bodyPr wrap="square" lIns="38100" tIns="114300" rIns="114300" bIns="38100" rtlCol="0" anchor="ctr"/>
+          <a:lstStyle/>
+          <a:p>
+            <a:pPr algn="r" indent="0" marL="0">
+              <a:buNone/>
+            </a:pPr>
+            <a:r>
+              <a:rPr lang="en-US" sz="888" dirty="0">
+                <a:solidFill>
+                  <a:srgbClr val="333333"/>
+                </a:solidFill>
+                <a:latin typeface="Raleway" pitchFamily="34" charset="0"/>
+                <a:ea typeface="Raleway" pitchFamily="34" charset="-122"/>
+                <a:cs typeface="Raleway" pitchFamily="34" charset="-120"/>
+              </a:rPr>
+              <a:t>2.620</a:t>
+            </a:r>
+            <a:endParaRPr lang="en-US" sz="888" dirty="0"/>
+          </a:p>
+        </p:txBody>
+      </p:sp>
+      <p:sp>
+        <p:nvSpPr>
+          <p:cNvPr id="45" name="Text 42"/>
+          <p:cNvSpPr/>
+          <p:nvPr/>
+        </p:nvSpPr>
+        <p:spPr>
+          <a:xfrm>
+            <a:off x="4040834" y="4722935"/>
+            <a:ext cx="1008183" cy="504230"/>
+          </a:xfrm>
+          <a:prstGeom prst="rect">
+            <a:avLst/>
+          </a:prstGeom>
+          <a:noFill/>
+          <a:ln/>
+        </p:spPr>
+        <p:txBody>
+          <a:bodyPr wrap="square" lIns="38100" tIns="114300" rIns="114300" bIns="38100" rtlCol="0" anchor="ctr"/>
+          <a:lstStyle/>
+          <a:p>
+            <a:pPr algn="r" indent="0" marL="0">
+              <a:buNone/>
+            </a:pPr>
+            <a:r>
+              <a:rPr lang="en-US" sz="888" dirty="0">
+                <a:solidFill>
+                  <a:srgbClr val="333333"/>
+                </a:solidFill>
+                <a:latin typeface="Raleway" pitchFamily="34" charset="0"/>
+                <a:ea typeface="Raleway" pitchFamily="34" charset="-122"/>
+                <a:cs typeface="Raleway" pitchFamily="34" charset="-120"/>
+              </a:rPr>
+              <a:t>2.182</a:t>
+            </a:r>
+            <a:endParaRPr lang="en-US" sz="888" dirty="0"/>
+          </a:p>
+        </p:txBody>
+      </p:sp>
+      <p:sp>
+        <p:nvSpPr>
+          <p:cNvPr id="46" name="Text 43"/>
+          <p:cNvSpPr/>
+          <p:nvPr/>
+        </p:nvSpPr>
+        <p:spPr>
+          <a:xfrm>
+            <a:off x="5022469" y="4722935"/>
+            <a:ext cx="911457" cy="504230"/>
+          </a:xfrm>
+          <a:prstGeom prst="rect">
+            <a:avLst/>
+          </a:prstGeom>
+          <a:noFill/>
+          <a:ln/>
+        </p:spPr>
+        <p:txBody>
+          <a:bodyPr wrap="square" lIns="38100" tIns="114300" rIns="114300" bIns="38100" rtlCol="0" anchor="ctr"/>
+          <a:lstStyle/>
+          <a:p>
+            <a:pPr algn="r" indent="0" marL="0">
+              <a:buNone/>
+            </a:pPr>
+            <a:r>
+              <a:rPr lang="en-US" sz="816" b="1" dirty="0">
+                <a:solidFill>
+                  <a:srgbClr val="008060"/>
+                </a:solidFill>
+                <a:latin typeface="Raleway" pitchFamily="34" charset="0"/>
+                <a:ea typeface="Raleway" pitchFamily="34" charset="-122"/>
+                <a:cs typeface="Raleway" pitchFamily="34" charset="-120"/>
+              </a:rPr>
+              <a:t>83,3%</a:t>
+            </a:r>
+            <a:endParaRPr lang="en-US" sz="816" dirty="0"/>
+          </a:p>
+        </p:txBody>
+      </p:sp>
+      <p:sp>
+        <p:nvSpPr>
+          <p:cNvPr id="47" name="Text 44"/>
+          <p:cNvSpPr/>
+          <p:nvPr/>
+        </p:nvSpPr>
+        <p:spPr>
+          <a:xfrm>
+            <a:off x="5022469" y="5227164"/>
+            <a:ext cx="911457" cy="459879"/>
+          </a:xfrm>
+          <a:prstGeom prst="rect">
+            <a:avLst/>
+          </a:prstGeom>
+          <a:noFill/>
+          <a:ln/>
+        </p:spPr>
+        <p:txBody>
+          <a:bodyPr wrap="square" lIns="38100" tIns="114300" rIns="114300" bIns="38100" rtlCol="0" anchor="ctr"/>
+          <a:lstStyle/>
+          <a:p>
+            <a:pPr algn="r" indent="0" marL="0">
+              <a:buNone/>
+            </a:pPr>
+            <a:r>
+              <a:rPr lang="en-US" sz="816" b="1" dirty="0">
+                <a:solidFill>
+                  <a:srgbClr val="008060"/>
+                </a:solidFill>
+                <a:latin typeface="Raleway" pitchFamily="34" charset="0"/>
+                <a:ea typeface="Raleway" pitchFamily="34" charset="-122"/>
+                <a:cs typeface="Raleway" pitchFamily="34" charset="-120"/>
+              </a:rPr>
+              <a:t>79,0%</a:t>
+            </a:r>
+            <a:endParaRPr lang="en-US" sz="816" dirty="0"/>
+          </a:p>
+        </p:txBody>
+      </p:sp>
+      <p:sp>
+        <p:nvSpPr>
+          <p:cNvPr id="48" name="Text 45"/>
+          <p:cNvSpPr/>
+          <p:nvPr/>
+        </p:nvSpPr>
+        <p:spPr>
+          <a:xfrm>
+            <a:off x="10477496" y="2210716"/>
+            <a:ext cx="1028417" cy="495300"/>
+          </a:xfrm>
+          <a:prstGeom prst="rect">
+            <a:avLst/>
+          </a:prstGeom>
+          <a:noFill/>
+          <a:ln/>
+        </p:spPr>
+        <p:txBody>
+          <a:bodyPr wrap="square" lIns="38100" tIns="114300" rIns="114300" bIns="38100" rtlCol="0" anchor="ctr"/>
+          <a:lstStyle/>
+          <a:p>
+            <a:pPr algn="r" indent="0" marL="0">
+              <a:buNone/>
+            </a:pPr>
+            <a:r>
+              <a:rPr lang="en-US" sz="816" b="1" dirty="0">
+                <a:solidFill>
+                  <a:srgbClr val="8A6200"/>
+                </a:solidFill>
+                <a:latin typeface="Raleway" pitchFamily="34" charset="0"/>
+                <a:ea typeface="Raleway" pitchFamily="34" charset="-122"/>
+                <a:cs typeface="Raleway" pitchFamily="34" charset="-120"/>
+              </a:rPr>
+              <a:t>54,0%</a:t>
+            </a:r>
+            <a:endParaRPr lang="en-US" sz="816" dirty="0"/>
+          </a:p>
+        </p:txBody>
+      </p:sp>
+      <p:sp>
+        <p:nvSpPr>
+          <p:cNvPr id="49" name="Text 46"/>
+          <p:cNvSpPr/>
+          <p:nvPr/>
+        </p:nvSpPr>
+        <p:spPr>
+          <a:xfrm>
+            <a:off x="10477496" y="2706016"/>
+            <a:ext cx="1028417" cy="504230"/>
+          </a:xfrm>
+          <a:prstGeom prst="rect">
+            <a:avLst/>
+          </a:prstGeom>
+          <a:noFill/>
+          <a:ln/>
+        </p:spPr>
+        <p:txBody>
+          <a:bodyPr wrap="square" lIns="38100" tIns="114300" rIns="114300" bIns="38100" rtlCol="0" anchor="ctr"/>
+          <a:lstStyle/>
+          <a:p>
+            <a:pPr algn="r" indent="0" marL="0">
+              <a:buNone/>
+            </a:pPr>
+            <a:r>
+              <a:rPr lang="en-US" sz="816" b="1" dirty="0">
+                <a:solidFill>
+                  <a:srgbClr val="8A6200"/>
+                </a:solidFill>
+                <a:latin typeface="Raleway" pitchFamily="34" charset="0"/>
+                <a:ea typeface="Raleway" pitchFamily="34" charset="-122"/>
+                <a:cs typeface="Raleway" pitchFamily="34" charset="-120"/>
+              </a:rPr>
+              <a:t>54,2%</a:t>
+            </a:r>
+            <a:endParaRPr lang="en-US" sz="816" dirty="0"/>
+          </a:p>
+        </p:txBody>
+      </p:sp>
+      <p:sp>
+        <p:nvSpPr>
+          <p:cNvPr id="50" name="Text 47"/>
+          <p:cNvSpPr/>
+          <p:nvPr/>
+        </p:nvSpPr>
+        <p:spPr>
+          <a:xfrm>
+            <a:off x="10477496" y="3210246"/>
+            <a:ext cx="1028417" cy="504230"/>
+          </a:xfrm>
+          <a:prstGeom prst="rect">
+            <a:avLst/>
+          </a:prstGeom>
+          <a:noFill/>
+          <a:ln/>
+        </p:spPr>
+        <p:txBody>
+          <a:bodyPr wrap="square" lIns="38100" tIns="114300" rIns="114300" bIns="38100" rtlCol="0" anchor="ctr"/>
+          <a:lstStyle/>
+          <a:p>
+            <a:pPr algn="r" indent="0" marL="0">
+              <a:buNone/>
+            </a:pPr>
+            <a:r>
+              <a:rPr lang="en-US" sz="816" b="1" dirty="0">
+                <a:solidFill>
+                  <a:srgbClr val="008060"/>
+                </a:solidFill>
+                <a:latin typeface="Raleway" pitchFamily="34" charset="0"/>
+                <a:ea typeface="Raleway" pitchFamily="34" charset="-122"/>
+                <a:cs typeface="Raleway" pitchFamily="34" charset="-120"/>
+              </a:rPr>
+              <a:t>72,2%</a:t>
+            </a:r>
+            <a:endParaRPr lang="en-US" sz="816" dirty="0"/>
+          </a:p>
+        </p:txBody>
+      </p:sp>
+      <p:sp>
+        <p:nvSpPr>
+          <p:cNvPr id="51" name="Text 48"/>
+          <p:cNvSpPr/>
+          <p:nvPr/>
+        </p:nvSpPr>
+        <p:spPr>
+          <a:xfrm>
+            <a:off x="10477496" y="3714475"/>
+            <a:ext cx="1028417" cy="504230"/>
+          </a:xfrm>
+          <a:prstGeom prst="rect">
+            <a:avLst/>
+          </a:prstGeom>
+          <a:noFill/>
+          <a:ln/>
+        </p:spPr>
+        <p:txBody>
+          <a:bodyPr wrap="square" lIns="38100" tIns="114300" rIns="114300" bIns="38100" rtlCol="0" anchor="ctr"/>
+          <a:lstStyle/>
+          <a:p>
+            <a:pPr algn="r" indent="0" marL="0">
+              <a:buNone/>
+            </a:pPr>
+            <a:r>
+              <a:rPr lang="en-US" sz="816" b="1" dirty="0">
+                <a:solidFill>
+                  <a:srgbClr val="008060"/>
+                </a:solidFill>
+                <a:latin typeface="Raleway" pitchFamily="34" charset="0"/>
+                <a:ea typeface="Raleway" pitchFamily="34" charset="-122"/>
+                <a:cs typeface="Raleway" pitchFamily="34" charset="-120"/>
+              </a:rPr>
+              <a:t>75,8%</a:t>
+            </a:r>
+            <a:endParaRPr lang="en-US" sz="816" dirty="0"/>
+          </a:p>
+        </p:txBody>
+      </p:sp>
+      <p:sp>
+        <p:nvSpPr>
+          <p:cNvPr id="52" name="Text 49"/>
+          <p:cNvSpPr/>
+          <p:nvPr/>
+        </p:nvSpPr>
+        <p:spPr>
+          <a:xfrm>
+            <a:off x="10477496" y="4218705"/>
+            <a:ext cx="1028417" cy="504230"/>
+          </a:xfrm>
+          <a:prstGeom prst="rect">
+            <a:avLst/>
+          </a:prstGeom>
+          <a:noFill/>
+          <a:ln/>
+        </p:spPr>
+        <p:txBody>
+          <a:bodyPr wrap="square" lIns="38100" tIns="114300" rIns="114300" bIns="38100" rtlCol="0" anchor="ctr"/>
+          <a:lstStyle/>
+          <a:p>
+            <a:pPr algn="r" indent="0" marL="0">
+              <a:buNone/>
+            </a:pPr>
+            <a:r>
+              <a:rPr lang="en-US" sz="816" b="1" dirty="0">
+                <a:solidFill>
+                  <a:srgbClr val="008060"/>
+                </a:solidFill>
+                <a:latin typeface="Raleway" pitchFamily="34" charset="0"/>
+                <a:ea typeface="Raleway" pitchFamily="34" charset="-122"/>
+                <a:cs typeface="Raleway" pitchFamily="34" charset="-120"/>
+              </a:rPr>
+              <a:t>68,0%</a:t>
+            </a:r>
+            <a:endParaRPr lang="en-US" sz="816" dirty="0"/>
+          </a:p>
+        </p:txBody>
+      </p:sp>
+      <p:sp>
+        <p:nvSpPr>
+          <p:cNvPr id="53" name="Text 50"/>
+          <p:cNvSpPr/>
+          <p:nvPr/>
+        </p:nvSpPr>
+        <p:spPr>
+          <a:xfrm>
+            <a:off x="10477496" y="4722935"/>
+            <a:ext cx="1028417" cy="504230"/>
+          </a:xfrm>
+          <a:prstGeom prst="rect">
+            <a:avLst/>
+          </a:prstGeom>
+          <a:noFill/>
+          <a:ln/>
+        </p:spPr>
+        <p:txBody>
+          <a:bodyPr wrap="square" lIns="38100" tIns="114300" rIns="114300" bIns="38100" rtlCol="0" anchor="ctr"/>
+          <a:lstStyle/>
+          <a:p>
+            <a:pPr algn="r" indent="0" marL="0">
+              <a:buNone/>
+            </a:pPr>
+            <a:r>
+              <a:rPr lang="en-US" sz="816" b="1" dirty="0">
+                <a:solidFill>
+                  <a:srgbClr val="008060"/>
+                </a:solidFill>
+                <a:latin typeface="Raleway" pitchFamily="34" charset="0"/>
+                <a:ea typeface="Raleway" pitchFamily="34" charset="-122"/>
+                <a:cs typeface="Raleway" pitchFamily="34" charset="-120"/>
+              </a:rPr>
+              <a:t>85,0%</a:t>
+            </a:r>
+            <a:endParaRPr lang="en-US" sz="816" dirty="0"/>
+          </a:p>
+        </p:txBody>
+      </p:sp>
+      <p:sp>
+        <p:nvSpPr>
+          <p:cNvPr id="54" name="Text 51"/>
+          <p:cNvSpPr/>
+          <p:nvPr/>
+        </p:nvSpPr>
+        <p:spPr>
+          <a:xfrm>
+            <a:off x="10477496" y="5227164"/>
+            <a:ext cx="1028417" cy="459879"/>
+          </a:xfrm>
+          <a:prstGeom prst="rect">
+            <a:avLst/>
+          </a:prstGeom>
+          <a:noFill/>
+          <a:ln/>
+        </p:spPr>
+        <p:txBody>
+          <a:bodyPr wrap="square" lIns="38100" tIns="114300" rIns="114300" bIns="38100" rtlCol="0" anchor="ctr"/>
+          <a:lstStyle/>
+          <a:p>
+            <a:pPr algn="r" indent="0" marL="0">
+              <a:buNone/>
+            </a:pPr>
+            <a:r>
+              <a:rPr lang="en-US" sz="816" b="1" dirty="0">
+                <a:solidFill>
+                  <a:srgbClr val="008060"/>
+                </a:solidFill>
+                <a:latin typeface="Raleway" pitchFamily="34" charset="0"/>
+                <a:ea typeface="Raleway" pitchFamily="34" charset="-122"/>
+                <a:cs typeface="Raleway" pitchFamily="34" charset="-120"/>
+              </a:rPr>
+              <a:t>69,2%</a:t>
+            </a:r>
+            <a:endParaRPr lang="en-US" sz="816" dirty="0"/>
+          </a:p>
+        </p:txBody>
+      </p:sp>
+      <p:sp>
+        <p:nvSpPr>
+          <p:cNvPr id="55" name="Text 52"/>
+          <p:cNvSpPr/>
+          <p:nvPr/>
+        </p:nvSpPr>
+        <p:spPr>
+          <a:xfrm>
+            <a:off x="6286343" y="1085850"/>
+            <a:ext cx="363927" cy="156972"/>
+          </a:xfrm>
+          <a:prstGeom prst="rect">
+            <a:avLst/>
+          </a:prstGeom>
+          <a:noFill/>
+          <a:ln/>
+        </p:spPr>
+        <p:txBody>
+          <a:bodyPr wrap="square" lIns="0" tIns="0" rIns="0" bIns="0" rtlCol="0" anchor="t"/>
+          <a:lstStyle/>
+          <a:p>
+            <a:pPr algn="l" indent="0" marL="0">
+              <a:buNone/>
+            </a:pPr>
+            <a:r>
+              <a:rPr lang="en-US" sz="1020" b="1" dirty="0">
+                <a:solidFill>
+                  <a:srgbClr val="120180"/>
+                </a:solidFill>
+                <a:latin typeface="Raleway" pitchFamily="34" charset="0"/>
+                <a:ea typeface="Raleway" pitchFamily="34" charset="-122"/>
+                <a:cs typeface="Raleway" pitchFamily="34" charset="-120"/>
+              </a:rPr>
               <a:t>2.474</a:t>
             </a:r>
-            <a:endParaRPr lang="en-US" sz="888" dirty="0"/>
-          </a:p>
-        </p:txBody>
-      </p:sp>
-      <p:sp>
-        <p:nvSpPr>
-          <p:cNvPr id="37" name="Text 34"/>
-          <p:cNvSpPr/>
-          <p:nvPr/>
-        </p:nvSpPr>
-        <p:spPr>
-          <a:xfrm>
-            <a:off x="5049017" y="3210246"/>
-            <a:ext cx="911457" cy="504230"/>
-          </a:xfrm>
-          <a:prstGeom prst="rect">
-            <a:avLst/>
-          </a:prstGeom>
-          <a:noFill/>
-          <a:ln/>
-        </p:spPr>
-        <p:txBody>
-          <a:bodyPr wrap="square" lIns="38100" tIns="114300" rIns="114300" bIns="38100" rtlCol="0" anchor="ctr"/>
-          <a:lstStyle/>
-          <a:p>
-            <a:pPr algn="r" indent="0" marL="0">
-              <a:buNone/>
-            </a:pPr>
-            <a:r>
-              <a:rPr lang="en-US" sz="888" dirty="0">
-                <a:solidFill>
-                  <a:srgbClr val="333333"/>
-                </a:solidFill>
-                <a:latin typeface="Raleway" pitchFamily="34" charset="0"/>
-                <a:ea typeface="Raleway" pitchFamily="34" charset="-122"/>
-                <a:cs typeface="Raleway" pitchFamily="34" charset="-120"/>
-              </a:rPr>
-              <a:t>74,0%</a:t>
-            </a:r>
-            <a:endParaRPr lang="en-US" sz="888" dirty="0"/>
-          </a:p>
-        </p:txBody>
-      </p:sp>
-      <p:sp>
-        <p:nvSpPr>
-          <p:cNvPr id="38" name="Text 35"/>
-          <p:cNvSpPr/>
-          <p:nvPr/>
-        </p:nvSpPr>
-        <p:spPr>
-          <a:xfrm>
-            <a:off x="3074117" y="3714475"/>
-            <a:ext cx="1025964" cy="504230"/>
-          </a:xfrm>
-          <a:prstGeom prst="rect">
-            <a:avLst/>
-          </a:prstGeom>
-          <a:noFill/>
-          <a:ln/>
-        </p:spPr>
-        <p:txBody>
-          <a:bodyPr wrap="square" lIns="38100" tIns="114300" rIns="114300" bIns="38100" rtlCol="0" anchor="ctr"/>
-          <a:lstStyle/>
-          <a:p>
-            <a:pPr algn="r" indent="0" marL="0">
-              <a:buNone/>
-            </a:pPr>
-            <a:r>
-              <a:rPr lang="en-US" sz="888" dirty="0">
-                <a:solidFill>
-                  <a:srgbClr val="333333"/>
-                </a:solidFill>
-                <a:latin typeface="Raleway" pitchFamily="34" charset="0"/>
-                <a:ea typeface="Raleway" pitchFamily="34" charset="-122"/>
-                <a:cs typeface="Raleway" pitchFamily="34" charset="-120"/>
-              </a:rPr>
-              <a:t>2.731</a:t>
-            </a:r>
-            <a:endParaRPr lang="en-US" sz="888" dirty="0"/>
-          </a:p>
-        </p:txBody>
-      </p:sp>
-      <p:sp>
-        <p:nvSpPr>
-          <p:cNvPr id="39" name="Text 36"/>
-          <p:cNvSpPr/>
-          <p:nvPr/>
-        </p:nvSpPr>
-        <p:spPr>
-          <a:xfrm>
-            <a:off x="4070199" y="3714475"/>
-            <a:ext cx="1008183" cy="504230"/>
-          </a:xfrm>
-          <a:prstGeom prst="rect">
-            <a:avLst/>
-          </a:prstGeom>
-          <a:noFill/>
-          <a:ln/>
-        </p:spPr>
-        <p:txBody>
-          <a:bodyPr wrap="square" lIns="38100" tIns="114300" rIns="114300" bIns="38100" rtlCol="0" anchor="ctr"/>
-          <a:lstStyle/>
-          <a:p>
-            <a:pPr algn="r" indent="0" marL="0">
-              <a:buNone/>
-            </a:pPr>
-            <a:r>
-              <a:rPr lang="en-US" sz="888" dirty="0">
-                <a:solidFill>
-                  <a:srgbClr val="333333"/>
-                </a:solidFill>
-                <a:latin typeface="Raleway" pitchFamily="34" charset="0"/>
-                <a:ea typeface="Raleway" pitchFamily="34" charset="-122"/>
-                <a:cs typeface="Raleway" pitchFamily="34" charset="-120"/>
-              </a:rPr>
-              <a:t>2.177</a:t>
-            </a:r>
-            <a:endParaRPr lang="en-US" sz="888" dirty="0"/>
-          </a:p>
-        </p:txBody>
-      </p:sp>
-      <p:sp>
-        <p:nvSpPr>
-          <p:cNvPr id="40" name="Text 37"/>
-          <p:cNvSpPr/>
-          <p:nvPr/>
-        </p:nvSpPr>
-        <p:spPr>
-          <a:xfrm>
-            <a:off x="5049017" y="3714475"/>
-            <a:ext cx="911457" cy="504230"/>
-          </a:xfrm>
-          <a:prstGeom prst="rect">
-            <a:avLst/>
-          </a:prstGeom>
-          <a:noFill/>
-          <a:ln/>
-        </p:spPr>
-        <p:txBody>
-          <a:bodyPr wrap="square" lIns="38100" tIns="114300" rIns="114300" bIns="38100" rtlCol="0" anchor="ctr"/>
-          <a:lstStyle/>
-          <a:p>
-            <a:pPr algn="r" indent="0" marL="0">
-              <a:buNone/>
-            </a:pPr>
-            <a:r>
-              <a:rPr lang="en-US" sz="888" dirty="0">
-                <a:solidFill>
-                  <a:srgbClr val="333333"/>
-                </a:solidFill>
-                <a:latin typeface="Raleway" pitchFamily="34" charset="0"/>
-                <a:ea typeface="Raleway" pitchFamily="34" charset="-122"/>
-                <a:cs typeface="Raleway" pitchFamily="34" charset="-120"/>
-              </a:rPr>
-              <a:t>79,7%</a:t>
-            </a:r>
-            <a:endParaRPr lang="en-US" sz="888" dirty="0"/>
-          </a:p>
-        </p:txBody>
-      </p:sp>
-      <p:sp>
-        <p:nvSpPr>
-          <p:cNvPr id="41" name="Text 38"/>
-          <p:cNvSpPr/>
-          <p:nvPr/>
-        </p:nvSpPr>
-        <p:spPr>
-          <a:xfrm>
-            <a:off x="3074117" y="4218705"/>
-            <a:ext cx="1025964" cy="504230"/>
-          </a:xfrm>
-          <a:prstGeom prst="rect">
-            <a:avLst/>
-          </a:prstGeom>
-          <a:noFill/>
-          <a:ln/>
-        </p:spPr>
-        <p:txBody>
-          <a:bodyPr wrap="square" lIns="38100" tIns="114300" rIns="114300" bIns="38100" rtlCol="0" anchor="ctr"/>
-          <a:lstStyle/>
-          <a:p>
-            <a:pPr algn="r" indent="0" marL="0">
-              <a:buNone/>
-            </a:pPr>
-            <a:r>
-              <a:rPr lang="en-US" sz="888" dirty="0">
-                <a:solidFill>
-                  <a:srgbClr val="333333"/>
-                </a:solidFill>
-                <a:latin typeface="Raleway" pitchFamily="34" charset="0"/>
-                <a:ea typeface="Raleway" pitchFamily="34" charset="-122"/>
-                <a:cs typeface="Raleway" pitchFamily="34" charset="-120"/>
-              </a:rPr>
-              <a:t>3.116</a:t>
-            </a:r>
-            <a:endParaRPr lang="en-US" sz="888" dirty="0"/>
-          </a:p>
-        </p:txBody>
-      </p:sp>
-      <p:sp>
-        <p:nvSpPr>
-          <p:cNvPr id="42" name="Text 39"/>
-          <p:cNvSpPr/>
-          <p:nvPr/>
-        </p:nvSpPr>
-        <p:spPr>
-          <a:xfrm>
-            <a:off x="4070199" y="4218705"/>
-            <a:ext cx="1008183" cy="504230"/>
-          </a:xfrm>
-          <a:prstGeom prst="rect">
-            <a:avLst/>
-          </a:prstGeom>
-          <a:noFill/>
-          <a:ln/>
-        </p:spPr>
-        <p:txBody>
-          <a:bodyPr wrap="square" lIns="38100" tIns="114300" rIns="114300" bIns="38100" rtlCol="0" anchor="ctr"/>
-          <a:lstStyle/>
-          <a:p>
-            <a:pPr algn="r" indent="0" marL="0">
-              <a:buNone/>
-            </a:pPr>
-            <a:r>
-              <a:rPr lang="en-US" sz="888" dirty="0">
-                <a:solidFill>
-                  <a:srgbClr val="333333"/>
-                </a:solidFill>
-                <a:latin typeface="Raleway" pitchFamily="34" charset="0"/>
-                <a:ea typeface="Raleway" pitchFamily="34" charset="-122"/>
-                <a:cs typeface="Raleway" pitchFamily="34" charset="-120"/>
-              </a:rPr>
-              <a:t>2.443</a:t>
-            </a:r>
-            <a:endParaRPr lang="en-US" sz="888" dirty="0"/>
-          </a:p>
-        </p:txBody>
-      </p:sp>
-      <p:sp>
-        <p:nvSpPr>
-          <p:cNvPr id="43" name="Text 40"/>
-          <p:cNvSpPr/>
-          <p:nvPr/>
-        </p:nvSpPr>
-        <p:spPr>
-          <a:xfrm>
-            <a:off x="5049017" y="4218705"/>
-            <a:ext cx="911457" cy="504230"/>
-          </a:xfrm>
-          <a:prstGeom prst="rect">
-            <a:avLst/>
-          </a:prstGeom>
-          <a:noFill/>
-          <a:ln/>
-        </p:spPr>
-        <p:txBody>
-          <a:bodyPr wrap="square" lIns="38100" tIns="114300" rIns="114300" bIns="38100" rtlCol="0" anchor="ctr"/>
-          <a:lstStyle/>
-          <a:p>
-            <a:pPr algn="r" indent="0" marL="0">
-              <a:buNone/>
-            </a:pPr>
-            <a:r>
-              <a:rPr lang="en-US" sz="888" dirty="0">
-                <a:solidFill>
-                  <a:srgbClr val="333333"/>
-                </a:solidFill>
-                <a:latin typeface="Raleway" pitchFamily="34" charset="0"/>
-                <a:ea typeface="Raleway" pitchFamily="34" charset="-122"/>
-                <a:cs typeface="Raleway" pitchFamily="34" charset="-120"/>
-              </a:rPr>
-              <a:t>78,4%</a:t>
-            </a:r>
-            <a:endParaRPr lang="en-US" sz="888" dirty="0"/>
-          </a:p>
-        </p:txBody>
-      </p:sp>
-      <p:sp>
-        <p:nvSpPr>
-          <p:cNvPr id="44" name="Text 41"/>
-          <p:cNvSpPr/>
-          <p:nvPr/>
-        </p:nvSpPr>
-        <p:spPr>
-          <a:xfrm>
-            <a:off x="3074117" y="4722935"/>
-            <a:ext cx="1025964" cy="504230"/>
-          </a:xfrm>
-          <a:prstGeom prst="rect">
-            <a:avLst/>
-          </a:prstGeom>
-          <a:noFill/>
-          <a:ln/>
-        </p:spPr>
-        <p:txBody>
-          <a:bodyPr wrap="square" lIns="38100" tIns="114300" rIns="114300" bIns="38100" rtlCol="0" anchor="ctr"/>
-          <a:lstStyle/>
-          <a:p>
-            <a:pPr algn="r" indent="0" marL="0">
-              <a:buNone/>
-            </a:pPr>
-            <a:r>
-              <a:rPr lang="en-US" sz="888" dirty="0">
-                <a:solidFill>
-                  <a:srgbClr val="333333"/>
-                </a:solidFill>
-                <a:latin typeface="Raleway" pitchFamily="34" charset="0"/>
-                <a:ea typeface="Raleway" pitchFamily="34" charset="-122"/>
-                <a:cs typeface="Raleway" pitchFamily="34" charset="-120"/>
-              </a:rPr>
-              <a:t>2.620</a:t>
-            </a:r>
-            <a:endParaRPr lang="en-US" sz="888" dirty="0"/>
-          </a:p>
-        </p:txBody>
-      </p:sp>
-      <p:sp>
-        <p:nvSpPr>
-          <p:cNvPr id="45" name="Text 42"/>
-          <p:cNvSpPr/>
-          <p:nvPr/>
-        </p:nvSpPr>
-        <p:spPr>
-          <a:xfrm>
-            <a:off x="4070199" y="4722935"/>
-            <a:ext cx="1008183" cy="504230"/>
-          </a:xfrm>
-          <a:prstGeom prst="rect">
-            <a:avLst/>
-          </a:prstGeom>
-          <a:noFill/>
-          <a:ln/>
-        </p:spPr>
-        <p:txBody>
-          <a:bodyPr wrap="square" lIns="38100" tIns="114300" rIns="114300" bIns="38100" rtlCol="0" anchor="ctr"/>
-          <a:lstStyle/>
-          <a:p>
-            <a:pPr algn="r" indent="0" marL="0">
-              <a:buNone/>
-            </a:pPr>
-            <a:r>
-              <a:rPr lang="en-US" sz="888" dirty="0">
-                <a:solidFill>
-                  <a:srgbClr val="333333"/>
-                </a:solidFill>
-                <a:latin typeface="Raleway" pitchFamily="34" charset="0"/>
-                <a:ea typeface="Raleway" pitchFamily="34" charset="-122"/>
-                <a:cs typeface="Raleway" pitchFamily="34" charset="-120"/>
-              </a:rPr>
-              <a:t>2.182</a:t>
-            </a:r>
-            <a:endParaRPr lang="en-US" sz="888" dirty="0"/>
-          </a:p>
-        </p:txBody>
-      </p:sp>
-      <p:sp>
-        <p:nvSpPr>
-          <p:cNvPr id="46" name="Text 43"/>
-          <p:cNvSpPr/>
-          <p:nvPr/>
-        </p:nvSpPr>
-        <p:spPr>
-          <a:xfrm>
-            <a:off x="5049017" y="4722935"/>
-            <a:ext cx="911457" cy="504230"/>
-          </a:xfrm>
-          <a:prstGeom prst="rect">
-            <a:avLst/>
-          </a:prstGeom>
-          <a:noFill/>
-          <a:ln/>
-        </p:spPr>
-        <p:txBody>
-          <a:bodyPr wrap="square" lIns="38100" tIns="114300" rIns="114300" bIns="38100" rtlCol="0" anchor="ctr"/>
-          <a:lstStyle/>
-          <a:p>
-            <a:pPr algn="r" indent="0" marL="0">
-              <a:buNone/>
-            </a:pPr>
-            <a:r>
-              <a:rPr lang="en-US" sz="888" dirty="0">
-                <a:solidFill>
-                  <a:srgbClr val="333333"/>
-                </a:solidFill>
-                <a:latin typeface="Raleway" pitchFamily="34" charset="0"/>
-                <a:ea typeface="Raleway" pitchFamily="34" charset="-122"/>
-                <a:cs typeface="Raleway" pitchFamily="34" charset="-120"/>
-              </a:rPr>
-              <a:t>83,3%</a:t>
-            </a:r>
-            <a:endParaRPr lang="en-US" sz="888" dirty="0"/>
-          </a:p>
-        </p:txBody>
-      </p:sp>
-      <p:sp>
-        <p:nvSpPr>
-          <p:cNvPr id="47" name="Text 44"/>
-          <p:cNvSpPr/>
-          <p:nvPr/>
-        </p:nvSpPr>
-        <p:spPr>
-          <a:xfrm>
-            <a:off x="5049017" y="5227164"/>
-            <a:ext cx="911457" cy="459879"/>
+            <a:endParaRPr lang="en-US" sz="1020" dirty="0"/>
+          </a:p>
+        </p:txBody>
+      </p:sp>
+      <p:sp>
+        <p:nvSpPr>
+          <p:cNvPr id="56" name="Text 53"/>
+          <p:cNvSpPr/>
+          <p:nvPr/>
+        </p:nvSpPr>
+        <p:spPr>
+          <a:xfrm>
+            <a:off x="9067573" y="1085850"/>
+            <a:ext cx="370237" cy="156972"/>
+          </a:xfrm>
+          <a:prstGeom prst="rect">
+            <a:avLst/>
+          </a:prstGeom>
+          <a:noFill/>
+          <a:ln/>
+        </p:spPr>
+        <p:txBody>
+          <a:bodyPr wrap="square" lIns="0" tIns="0" rIns="0" bIns="0" rtlCol="0" anchor="t"/>
+          <a:lstStyle/>
+          <a:p>
+            <a:pPr algn="l" indent="0" marL="0">
+              <a:buNone/>
+            </a:pPr>
+            <a:r>
+              <a:rPr lang="en-US" sz="1020" b="1" dirty="0">
+                <a:solidFill>
+                  <a:srgbClr val="FF6B35"/>
+                </a:solidFill>
+                <a:latin typeface="Raleway" pitchFamily="34" charset="0"/>
+                <a:ea typeface="Raleway" pitchFamily="34" charset="-122"/>
+                <a:cs typeface="Raleway" pitchFamily="34" charset="-120"/>
+              </a:rPr>
+              <a:t>4.625</a:t>
+            </a:r>
+            <a:endParaRPr lang="en-US" sz="1020" dirty="0"/>
+          </a:p>
+        </p:txBody>
+      </p:sp>
+      <p:sp>
+        <p:nvSpPr>
+          <p:cNvPr id="57" name="Text 54"/>
+          <p:cNvSpPr/>
+          <p:nvPr/>
+        </p:nvSpPr>
+        <p:spPr>
+          <a:xfrm>
+            <a:off x="1490284" y="5227164"/>
+            <a:ext cx="987642" cy="459879"/>
           </a:xfrm>
           <a:prstGeom prst="rect">
             <a:avLst/>
@@ -9898,396 +10470,6 @@
                 <a:ea typeface="Raleway" pitchFamily="34" charset="-122"/>
                 <a:cs typeface="Raleway" pitchFamily="34" charset="-120"/>
               </a:rPr>
-              <a:t>79,0%</a:t>
-            </a:r>
-            <a:endParaRPr lang="en-US" sz="888" dirty="0"/>
-          </a:p>
-        </p:txBody>
-      </p:sp>
-      <p:sp>
-        <p:nvSpPr>
-          <p:cNvPr id="48" name="Text 45"/>
-          <p:cNvSpPr/>
-          <p:nvPr/>
-        </p:nvSpPr>
-        <p:spPr>
-          <a:xfrm>
-            <a:off x="10507449" y="2210716"/>
-            <a:ext cx="1028417" cy="495300"/>
-          </a:xfrm>
-          <a:prstGeom prst="rect">
-            <a:avLst/>
-          </a:prstGeom>
-          <a:noFill/>
-          <a:ln/>
-        </p:spPr>
-        <p:txBody>
-          <a:bodyPr wrap="square" lIns="38100" tIns="114300" rIns="114300" bIns="38100" rtlCol="0" anchor="ctr"/>
-          <a:lstStyle/>
-          <a:p>
-            <a:pPr algn="r" indent="0" marL="0">
-              <a:buNone/>
-            </a:pPr>
-            <a:r>
-              <a:rPr lang="en-US" sz="888" dirty="0">
-                <a:solidFill>
-                  <a:srgbClr val="333333"/>
-                </a:solidFill>
-                <a:latin typeface="Raleway" pitchFamily="34" charset="0"/>
-                <a:ea typeface="Raleway" pitchFamily="34" charset="-122"/>
-                <a:cs typeface="Raleway" pitchFamily="34" charset="-120"/>
-              </a:rPr>
-              <a:t>54,0%</a:t>
-            </a:r>
-            <a:endParaRPr lang="en-US" sz="888" dirty="0"/>
-          </a:p>
-        </p:txBody>
-      </p:sp>
-      <p:sp>
-        <p:nvSpPr>
-          <p:cNvPr id="49" name="Text 46"/>
-          <p:cNvSpPr/>
-          <p:nvPr/>
-        </p:nvSpPr>
-        <p:spPr>
-          <a:xfrm>
-            <a:off x="10507449" y="2706016"/>
-            <a:ext cx="1028417" cy="504230"/>
-          </a:xfrm>
-          <a:prstGeom prst="rect">
-            <a:avLst/>
-          </a:prstGeom>
-          <a:noFill/>
-          <a:ln/>
-        </p:spPr>
-        <p:txBody>
-          <a:bodyPr wrap="square" lIns="38100" tIns="114300" rIns="114300" bIns="38100" rtlCol="0" anchor="ctr"/>
-          <a:lstStyle/>
-          <a:p>
-            <a:pPr algn="r" indent="0" marL="0">
-              <a:buNone/>
-            </a:pPr>
-            <a:r>
-              <a:rPr lang="en-US" sz="888" dirty="0">
-                <a:solidFill>
-                  <a:srgbClr val="333333"/>
-                </a:solidFill>
-                <a:latin typeface="Raleway" pitchFamily="34" charset="0"/>
-                <a:ea typeface="Raleway" pitchFamily="34" charset="-122"/>
-                <a:cs typeface="Raleway" pitchFamily="34" charset="-120"/>
-              </a:rPr>
-              <a:t>54,2%</a:t>
-            </a:r>
-            <a:endParaRPr lang="en-US" sz="888" dirty="0"/>
-          </a:p>
-        </p:txBody>
-      </p:sp>
-      <p:sp>
-        <p:nvSpPr>
-          <p:cNvPr id="50" name="Text 47"/>
-          <p:cNvSpPr/>
-          <p:nvPr/>
-        </p:nvSpPr>
-        <p:spPr>
-          <a:xfrm>
-            <a:off x="10507449" y="3210246"/>
-            <a:ext cx="1028417" cy="504230"/>
-          </a:xfrm>
-          <a:prstGeom prst="rect">
-            <a:avLst/>
-          </a:prstGeom>
-          <a:noFill/>
-          <a:ln/>
-        </p:spPr>
-        <p:txBody>
-          <a:bodyPr wrap="square" lIns="38100" tIns="114300" rIns="114300" bIns="38100" rtlCol="0" anchor="ctr"/>
-          <a:lstStyle/>
-          <a:p>
-            <a:pPr algn="r" indent="0" marL="0">
-              <a:buNone/>
-            </a:pPr>
-            <a:r>
-              <a:rPr lang="en-US" sz="888" dirty="0">
-                <a:solidFill>
-                  <a:srgbClr val="333333"/>
-                </a:solidFill>
-                <a:latin typeface="Raleway" pitchFamily="34" charset="0"/>
-                <a:ea typeface="Raleway" pitchFamily="34" charset="-122"/>
-                <a:cs typeface="Raleway" pitchFamily="34" charset="-120"/>
-              </a:rPr>
-              <a:t>72,2%</a:t>
-            </a:r>
-            <a:endParaRPr lang="en-US" sz="888" dirty="0"/>
-          </a:p>
-        </p:txBody>
-      </p:sp>
-      <p:sp>
-        <p:nvSpPr>
-          <p:cNvPr id="51" name="Text 48"/>
-          <p:cNvSpPr/>
-          <p:nvPr/>
-        </p:nvSpPr>
-        <p:spPr>
-          <a:xfrm>
-            <a:off x="10507449" y="3714475"/>
-            <a:ext cx="1028417" cy="504230"/>
-          </a:xfrm>
-          <a:prstGeom prst="rect">
-            <a:avLst/>
-          </a:prstGeom>
-          <a:noFill/>
-          <a:ln/>
-        </p:spPr>
-        <p:txBody>
-          <a:bodyPr wrap="square" lIns="38100" tIns="114300" rIns="114300" bIns="38100" rtlCol="0" anchor="ctr"/>
-          <a:lstStyle/>
-          <a:p>
-            <a:pPr algn="r" indent="0" marL="0">
-              <a:buNone/>
-            </a:pPr>
-            <a:r>
-              <a:rPr lang="en-US" sz="888" dirty="0">
-                <a:solidFill>
-                  <a:srgbClr val="333333"/>
-                </a:solidFill>
-                <a:latin typeface="Raleway" pitchFamily="34" charset="0"/>
-                <a:ea typeface="Raleway" pitchFamily="34" charset="-122"/>
-                <a:cs typeface="Raleway" pitchFamily="34" charset="-120"/>
-              </a:rPr>
-              <a:t>75,8%</a:t>
-            </a:r>
-            <a:endParaRPr lang="en-US" sz="888" dirty="0"/>
-          </a:p>
-        </p:txBody>
-      </p:sp>
-      <p:sp>
-        <p:nvSpPr>
-          <p:cNvPr id="52" name="Text 49"/>
-          <p:cNvSpPr/>
-          <p:nvPr/>
-        </p:nvSpPr>
-        <p:spPr>
-          <a:xfrm>
-            <a:off x="10507449" y="4218705"/>
-            <a:ext cx="1028417" cy="504230"/>
-          </a:xfrm>
-          <a:prstGeom prst="rect">
-            <a:avLst/>
-          </a:prstGeom>
-          <a:noFill/>
-          <a:ln/>
-        </p:spPr>
-        <p:txBody>
-          <a:bodyPr wrap="square" lIns="38100" tIns="114300" rIns="114300" bIns="38100" rtlCol="0" anchor="ctr"/>
-          <a:lstStyle/>
-          <a:p>
-            <a:pPr algn="r" indent="0" marL="0">
-              <a:buNone/>
-            </a:pPr>
-            <a:r>
-              <a:rPr lang="en-US" sz="888" dirty="0">
-                <a:solidFill>
-                  <a:srgbClr val="333333"/>
-                </a:solidFill>
-                <a:latin typeface="Raleway" pitchFamily="34" charset="0"/>
-                <a:ea typeface="Raleway" pitchFamily="34" charset="-122"/>
-                <a:cs typeface="Raleway" pitchFamily="34" charset="-120"/>
-              </a:rPr>
-              <a:t>68,0%</a:t>
-            </a:r>
-            <a:endParaRPr lang="en-US" sz="888" dirty="0"/>
-          </a:p>
-        </p:txBody>
-      </p:sp>
-      <p:sp>
-        <p:nvSpPr>
-          <p:cNvPr id="53" name="Text 50"/>
-          <p:cNvSpPr/>
-          <p:nvPr/>
-        </p:nvSpPr>
-        <p:spPr>
-          <a:xfrm>
-            <a:off x="10507449" y="4722935"/>
-            <a:ext cx="1028417" cy="504230"/>
-          </a:xfrm>
-          <a:prstGeom prst="rect">
-            <a:avLst/>
-          </a:prstGeom>
-          <a:noFill/>
-          <a:ln/>
-        </p:spPr>
-        <p:txBody>
-          <a:bodyPr wrap="square" lIns="38100" tIns="114300" rIns="114300" bIns="38100" rtlCol="0" anchor="ctr"/>
-          <a:lstStyle/>
-          <a:p>
-            <a:pPr algn="r" indent="0" marL="0">
-              <a:buNone/>
-            </a:pPr>
-            <a:r>
-              <a:rPr lang="en-US" sz="888" dirty="0">
-                <a:solidFill>
-                  <a:srgbClr val="333333"/>
-                </a:solidFill>
-                <a:latin typeface="Raleway" pitchFamily="34" charset="0"/>
-                <a:ea typeface="Raleway" pitchFamily="34" charset="-122"/>
-                <a:cs typeface="Raleway" pitchFamily="34" charset="-120"/>
-              </a:rPr>
-              <a:t>85,0%</a:t>
-            </a:r>
-            <a:endParaRPr lang="en-US" sz="888" dirty="0"/>
-          </a:p>
-        </p:txBody>
-      </p:sp>
-      <p:sp>
-        <p:nvSpPr>
-          <p:cNvPr id="54" name="Text 51"/>
-          <p:cNvSpPr/>
-          <p:nvPr/>
-        </p:nvSpPr>
-        <p:spPr>
-          <a:xfrm>
-            <a:off x="10507449" y="5227164"/>
-            <a:ext cx="1028417" cy="459879"/>
-          </a:xfrm>
-          <a:prstGeom prst="rect">
-            <a:avLst/>
-          </a:prstGeom>
-          <a:noFill/>
-          <a:ln/>
-        </p:spPr>
-        <p:txBody>
-          <a:bodyPr wrap="square" lIns="38100" tIns="114300" rIns="114300" bIns="38100" rtlCol="0" anchor="ctr"/>
-          <a:lstStyle/>
-          <a:p>
-            <a:pPr algn="r" indent="0" marL="0">
-              <a:buNone/>
-            </a:pPr>
-            <a:r>
-              <a:rPr lang="en-US" sz="888" b="1" dirty="0">
-                <a:solidFill>
-                  <a:srgbClr val="120180"/>
-                </a:solidFill>
-                <a:latin typeface="Raleway" pitchFamily="34" charset="0"/>
-                <a:ea typeface="Raleway" pitchFamily="34" charset="-122"/>
-                <a:cs typeface="Raleway" pitchFamily="34" charset="-120"/>
-              </a:rPr>
-              <a:t>69,2%</a:t>
-            </a:r>
-            <a:endParaRPr lang="en-US" sz="888" dirty="0"/>
-          </a:p>
-        </p:txBody>
-      </p:sp>
-      <p:sp>
-        <p:nvSpPr>
-          <p:cNvPr id="55" name="Text 52"/>
-          <p:cNvSpPr/>
-          <p:nvPr/>
-        </p:nvSpPr>
-        <p:spPr>
-          <a:xfrm>
-            <a:off x="6286343" y="1104900"/>
-            <a:ext cx="2511489" cy="133365"/>
-          </a:xfrm>
-          <a:prstGeom prst="rect">
-            <a:avLst/>
-          </a:prstGeom>
-          <a:noFill/>
-          <a:ln/>
-        </p:spPr>
-        <p:txBody>
-          <a:bodyPr wrap="square" lIns="0" tIns="0" rIns="0" bIns="0" rtlCol="0" anchor="t"/>
-          <a:lstStyle/>
-          <a:p>
-            <a:pPr algn="l" indent="0" marL="0">
-              <a:buNone/>
-            </a:pPr>
-            <a:r>
-              <a:rPr lang="en-US" sz="1020" b="1" dirty="0">
-                <a:solidFill>
-                  <a:srgbClr val="120180"/>
-                </a:solidFill>
-                <a:latin typeface="Raleway" pitchFamily="34" charset="0"/>
-                <a:ea typeface="Raleway" pitchFamily="34" charset="-122"/>
-                <a:cs typeface="Raleway" pitchFamily="34" charset="-120"/>
-              </a:rPr>
-              <a:t>2.474</a:t>
-            </a:r>
-            <a:endParaRPr lang="en-US" sz="1020" dirty="0"/>
-          </a:p>
-        </p:txBody>
-      </p:sp>
-      <p:sp>
-        <p:nvSpPr>
-          <p:cNvPr id="56" name="Text 53"/>
-          <p:cNvSpPr/>
-          <p:nvPr/>
-        </p:nvSpPr>
-        <p:spPr>
-          <a:xfrm>
-            <a:off x="9067573" y="1104900"/>
-            <a:ext cx="2511489" cy="133365"/>
-          </a:xfrm>
-          <a:prstGeom prst="rect">
-            <a:avLst/>
-          </a:prstGeom>
-          <a:noFill/>
-          <a:ln/>
-        </p:spPr>
-        <p:txBody>
-          <a:bodyPr wrap="square" lIns="0" tIns="0" rIns="0" bIns="0" rtlCol="0" anchor="t"/>
-          <a:lstStyle/>
-          <a:p>
-            <a:pPr algn="l" indent="0" marL="0">
-              <a:buNone/>
-            </a:pPr>
-            <a:r>
-              <a:rPr lang="en-US" sz="1020" b="1" dirty="0">
-                <a:solidFill>
-                  <a:srgbClr val="FF6B35"/>
-                </a:solidFill>
-                <a:latin typeface="Raleway" pitchFamily="34" charset="0"/>
-                <a:ea typeface="Raleway" pitchFamily="34" charset="-122"/>
-                <a:cs typeface="Raleway" pitchFamily="34" charset="-120"/>
-              </a:rPr>
-              <a:t>4.625</a:t>
-            </a:r>
-            <a:endParaRPr lang="en-US" sz="1020" dirty="0"/>
-          </a:p>
-        </p:txBody>
-      </p:sp>
-      <p:sp>
-        <p:nvSpPr>
-          <p:cNvPr id="57" name="Text 54"/>
-          <p:cNvSpPr/>
-          <p:nvPr/>
-        </p:nvSpPr>
-        <p:spPr>
-          <a:xfrm>
-            <a:off x="1519051" y="5227164"/>
-            <a:ext cx="987642" cy="459879"/>
-          </a:xfrm>
-          <a:prstGeom prst="rect">
-            <a:avLst/>
-          </a:prstGeom>
-          <a:noFill/>
-          <a:ln/>
-        </p:spPr>
-        <p:txBody>
-          <a:bodyPr wrap="square" lIns="38100" tIns="114300" rIns="114300" bIns="38100" rtlCol="0" anchor="ctr"/>
-          <a:lstStyle/>
-          <a:p>
-            <a:pPr algn="r" indent="0" marL="0">
-              <a:buNone/>
-            </a:pPr>
-            <a:r>
-              <a:rPr lang="en-US" sz="888" b="1" dirty="0">
-                <a:solidFill>
-                  <a:srgbClr val="120180"/>
-                </a:solidFill>
-                <a:latin typeface="Raleway" pitchFamily="34" charset="0"/>
-                <a:ea typeface="Raleway" pitchFamily="34" charset="-122"/>
-                <a:cs typeface="Raleway" pitchFamily="34" charset="-120"/>
-              </a:rPr>
               <a:t>123*</a:t>
             </a:r>
             <a:endParaRPr lang="en-US" sz="888" dirty="0"/>
@@ -10302,7 +10484,7 @@
         </p:nvSpPr>
         <p:spPr>
           <a:xfrm>
-            <a:off x="7197743" y="5227164"/>
+            <a:off x="7165294" y="5227164"/>
             <a:ext cx="1114105" cy="459879"/>
           </a:xfrm>
           <a:prstGeom prst="rect">
@@ -10380,7 +10562,7 @@
         </p:nvSpPr>
         <p:spPr>
           <a:xfrm>
-            <a:off x="2477926" y="1982116"/>
+            <a:off x="2460041" y="1982116"/>
             <a:ext cx="614076" cy="228600"/>
           </a:xfrm>
           <a:prstGeom prst="rect">
@@ -10458,7 +10640,7 @@
         </p:nvSpPr>
         <p:spPr>
           <a:xfrm>
-            <a:off x="1519051" y="2210716"/>
+            <a:off x="1490284" y="2210716"/>
             <a:ext cx="987642" cy="495300"/>
           </a:xfrm>
           <a:prstGeom prst="rect">
@@ -10536,7 +10718,7 @@
         </p:nvSpPr>
         <p:spPr>
           <a:xfrm>
-            <a:off x="1519051" y="2706016"/>
+            <a:off x="1490284" y="2706016"/>
             <a:ext cx="987642" cy="504230"/>
           </a:xfrm>
           <a:prstGeom prst="rect">
@@ -10614,7 +10796,7 @@
         </p:nvSpPr>
         <p:spPr>
           <a:xfrm>
-            <a:off x="1519051" y="3210246"/>
+            <a:off x="1490284" y="3210246"/>
             <a:ext cx="987642" cy="504230"/>
           </a:xfrm>
           <a:prstGeom prst="rect">
@@ -10692,7 +10874,7 @@
         </p:nvSpPr>
         <p:spPr>
           <a:xfrm>
-            <a:off x="1519051" y="3714475"/>
+            <a:off x="1490284" y="3714475"/>
             <a:ext cx="987642" cy="504230"/>
           </a:xfrm>
           <a:prstGeom prst="rect">
@@ -10809,7 +10991,7 @@
         </p:nvSpPr>
         <p:spPr>
           <a:xfrm>
-            <a:off x="2477926" y="5227164"/>
+            <a:off x="2460041" y="5227164"/>
             <a:ext cx="614076" cy="459879"/>
           </a:xfrm>
           <a:prstGeom prst="rect">
@@ -10926,7 +11108,7 @@
         </p:nvSpPr>
         <p:spPr>
           <a:xfrm>
-            <a:off x="7197743" y="2210716"/>
+            <a:off x="7165294" y="2210716"/>
             <a:ext cx="1114105" cy="495300"/>
           </a:xfrm>
           <a:prstGeom prst="rect">
@@ -11004,7 +11186,7 @@
         </p:nvSpPr>
         <p:spPr>
           <a:xfrm>
-            <a:off x="7197743" y="2706016"/>
+            <a:off x="7165294" y="2706016"/>
             <a:ext cx="1114105" cy="504230"/>
           </a:xfrm>
           <a:prstGeom prst="rect">
@@ -11043,7 +11225,7 @@
         </p:nvSpPr>
         <p:spPr>
           <a:xfrm>
-            <a:off x="8279399" y="2706016"/>
+            <a:off x="8245686" y="2706016"/>
             <a:ext cx="1157486" cy="504230"/>
           </a:xfrm>
           <a:prstGeom prst="rect">
@@ -11121,7 +11303,7 @@
         </p:nvSpPr>
         <p:spPr>
           <a:xfrm>
-            <a:off x="7197743" y="3210246"/>
+            <a:off x="7165294" y="3210246"/>
             <a:ext cx="1114105" cy="504230"/>
           </a:xfrm>
           <a:prstGeom prst="rect">
@@ -11160,7 +11342,7 @@
         </p:nvSpPr>
         <p:spPr>
           <a:xfrm>
-            <a:off x="8279399" y="3210246"/>
+            <a:off x="8245686" y="3210246"/>
             <a:ext cx="1157486" cy="504230"/>
           </a:xfrm>
           <a:prstGeom prst="rect">
@@ -11199,7 +11381,7 @@
         </p:nvSpPr>
         <p:spPr>
           <a:xfrm>
-            <a:off x="9403172" y="3210246"/>
+            <a:off x="9370044" y="3210246"/>
             <a:ext cx="1137405" cy="504230"/>
           </a:xfrm>
           <a:prstGeom prst="rect">
@@ -11277,7 +11459,7 @@
         </p:nvSpPr>
         <p:spPr>
           <a:xfrm>
-            <a:off x="7197743" y="3714475"/>
+            <a:off x="7165294" y="3714475"/>
             <a:ext cx="1114105" cy="504230"/>
           </a:xfrm>
           <a:prstGeom prst="rect">
@@ -11316,7 +11498,7 @@
         </p:nvSpPr>
         <p:spPr>
           <a:xfrm>
-            <a:off x="8279399" y="3714475"/>
+            <a:off x="8245686" y="3714475"/>
             <a:ext cx="1157486" cy="504230"/>
           </a:xfrm>
           <a:prstGeom prst="rect">
@@ -11394,7 +11576,7 @@
         </p:nvSpPr>
         <p:spPr>
           <a:xfrm>
-            <a:off x="8279399" y="4218705"/>
+            <a:off x="8245686" y="4218705"/>
             <a:ext cx="1157486" cy="504230"/>
           </a:xfrm>
           <a:prstGeom prst="rect">
@@ -11472,7 +11654,7 @@
         </p:nvSpPr>
         <p:spPr>
           <a:xfrm>
-            <a:off x="8279399" y="4722935"/>
+            <a:off x="8245686" y="4722935"/>
             <a:ext cx="1157486" cy="504230"/>
           </a:xfrm>
           <a:prstGeom prst="rect">
@@ -11511,7 +11693,7 @@
         </p:nvSpPr>
         <p:spPr>
           <a:xfrm>
-            <a:off x="8279399" y="5227164"/>
+            <a:off x="8245686" y="5227164"/>
             <a:ext cx="1157486" cy="459879"/>
           </a:xfrm>
           <a:prstGeom prst="rect">
@@ -11550,7 +11732,7 @@
         </p:nvSpPr>
         <p:spPr>
           <a:xfrm>
-            <a:off x="9403172" y="5227164"/>
+            <a:off x="9370044" y="5227164"/>
             <a:ext cx="1137405" cy="459879"/>
           </a:xfrm>
           <a:prstGeom prst="rect">
@@ -11589,8 +11771,8 @@
         </p:nvSpPr>
         <p:spPr>
           <a:xfrm>
-            <a:off x="3505112" y="1104900"/>
-            <a:ext cx="2511489" cy="133365"/>
+            <a:off x="3505112" y="1085850"/>
+            <a:ext cx="274320" cy="156972"/>
           </a:xfrm>
           <a:prstGeom prst="rect">
             <a:avLst/>
@@ -11628,7 +11810,7 @@
         </p:nvSpPr>
         <p:spPr>
           <a:xfrm>
-            <a:off x="2477926" y="2210716"/>
+            <a:off x="2460041" y="2210716"/>
             <a:ext cx="614076" cy="495300"/>
           </a:xfrm>
           <a:prstGeom prst="rect">
@@ -11667,7 +11849,7 @@
         </p:nvSpPr>
         <p:spPr>
           <a:xfrm>
-            <a:off x="2477926" y="2706016"/>
+            <a:off x="2460041" y="2706016"/>
             <a:ext cx="614076" cy="504230"/>
           </a:xfrm>
           <a:prstGeom prst="rect">
@@ -11706,7 +11888,7 @@
         </p:nvSpPr>
         <p:spPr>
           <a:xfrm>
-            <a:off x="2477926" y="3210246"/>
+            <a:off x="2460041" y="3210246"/>
             <a:ext cx="614076" cy="504230"/>
           </a:xfrm>
           <a:prstGeom prst="rect">
@@ -11745,7 +11927,7 @@
         </p:nvSpPr>
         <p:spPr>
           <a:xfrm>
-            <a:off x="2477926" y="3714475"/>
+            <a:off x="2460041" y="3714475"/>
             <a:ext cx="614076" cy="504230"/>
           </a:xfrm>
           <a:prstGeom prst="rect">
@@ -11784,7 +11966,7 @@
         </p:nvSpPr>
         <p:spPr>
           <a:xfrm>
-            <a:off x="1519051" y="4218705"/>
+            <a:off x="1490284" y="4218705"/>
             <a:ext cx="987642" cy="504230"/>
           </a:xfrm>
           <a:prstGeom prst="rect">
@@ -11823,7 +12005,7 @@
         </p:nvSpPr>
         <p:spPr>
           <a:xfrm>
-            <a:off x="2477926" y="4218705"/>
+            <a:off x="2460041" y="4218705"/>
             <a:ext cx="614076" cy="504230"/>
           </a:xfrm>
           <a:prstGeom prst="rect">
@@ -11862,7 +12044,7 @@
         </p:nvSpPr>
         <p:spPr>
           <a:xfrm>
-            <a:off x="1519051" y="4722935"/>
+            <a:off x="1490284" y="4722935"/>
             <a:ext cx="987642" cy="504230"/>
           </a:xfrm>
           <a:prstGeom prst="rect">
@@ -11901,7 +12083,7 @@
         </p:nvSpPr>
         <p:spPr>
           <a:xfrm>
-            <a:off x="2477926" y="4722935"/>
+            <a:off x="2460041" y="4722935"/>
             <a:ext cx="614076" cy="504230"/>
           </a:xfrm>
           <a:prstGeom prst="rect">
@@ -11940,7 +12122,7 @@
         </p:nvSpPr>
         <p:spPr>
           <a:xfrm>
-            <a:off x="8279399" y="2210716"/>
+            <a:off x="8245686" y="2210716"/>
             <a:ext cx="1157486" cy="495300"/>
           </a:xfrm>
           <a:prstGeom prst="rect">
@@ -11979,7 +12161,7 @@
         </p:nvSpPr>
         <p:spPr>
           <a:xfrm>
-            <a:off x="9403172" y="2210716"/>
+            <a:off x="9370044" y="2210716"/>
             <a:ext cx="1137405" cy="495300"/>
           </a:xfrm>
           <a:prstGeom prst="rect">
@@ -12018,7 +12200,7 @@
         </p:nvSpPr>
         <p:spPr>
           <a:xfrm>
-            <a:off x="9403172" y="2706016"/>
+            <a:off x="9370044" y="2706016"/>
             <a:ext cx="1137405" cy="504230"/>
           </a:xfrm>
           <a:prstGeom prst="rect">
@@ -12057,7 +12239,7 @@
         </p:nvSpPr>
         <p:spPr>
           <a:xfrm>
-            <a:off x="9403172" y="3714475"/>
+            <a:off x="9370044" y="3714475"/>
             <a:ext cx="1137405" cy="504230"/>
           </a:xfrm>
           <a:prstGeom prst="rect">
@@ -12096,7 +12278,7 @@
         </p:nvSpPr>
         <p:spPr>
           <a:xfrm>
-            <a:off x="7197743" y="4218705"/>
+            <a:off x="7165294" y="4218705"/>
             <a:ext cx="1114105" cy="504230"/>
           </a:xfrm>
           <a:prstGeom prst="rect">
@@ -12135,7 +12317,7 @@
         </p:nvSpPr>
         <p:spPr>
           <a:xfrm>
-            <a:off x="9403172" y="4218705"/>
+            <a:off x="9370044" y="4218705"/>
             <a:ext cx="1137405" cy="504230"/>
           </a:xfrm>
           <a:prstGeom prst="rect">
@@ -12174,7 +12356,7 @@
         </p:nvSpPr>
         <p:spPr>
           <a:xfrm>
-            <a:off x="7197743" y="4722935"/>
+            <a:off x="7165294" y="4722935"/>
             <a:ext cx="1114105" cy="504230"/>
           </a:xfrm>
           <a:prstGeom prst="rect">
@@ -12213,7 +12395,7 @@
         </p:nvSpPr>
         <p:spPr>
           <a:xfrm>
-            <a:off x="9403172" y="4722935"/>
+            <a:off x="9370044" y="4722935"/>
             <a:ext cx="1137405" cy="504230"/>
           </a:xfrm>
           <a:prstGeom prst="rect">

--- a/retail/INFORME_RETAIL_SKELETON.pptx
+++ b/retail/INFORME_RETAIL_SKELETON.pptx
@@ -1468,17 +1468,17 @@
         </p:nvSpPr>
         <p:spPr>
           <a:xfrm>
-            <a:off x="1363517" y="2302245"/>
-            <a:ext cx="1262489" cy="228600"/>
-          </a:xfrm>
-          <a:prstGeom prst="rect">
-            <a:avLst/>
-          </a:prstGeom>
-          <a:noFill/>
-          <a:ln/>
-        </p:spPr>
-        <p:txBody>
-          <a:bodyPr wrap="square" lIns="47625" tIns="114300" rIns="114300" bIns="47625" rtlCol="0" anchor="ctr"/>
+            <a:off x="1363517" y="2364135"/>
+            <a:ext cx="1262489" cy="133350"/>
+          </a:xfrm>
+          <a:prstGeom prst="rect">
+            <a:avLst/>
+          </a:prstGeom>
+          <a:noFill/>
+          <a:ln/>
+        </p:spPr>
+        <p:txBody>
+          <a:bodyPr wrap="square" lIns="0" tIns="114300" rIns="114300" bIns="0" rtlCol="0" anchor="ctr"/>
           <a:lstStyle/>
           <a:p>
             <a:pPr algn="r" indent="0" marL="0">
@@ -1507,17 +1507,17 @@
         </p:nvSpPr>
         <p:spPr>
           <a:xfrm>
-            <a:off x="3606634" y="2302245"/>
-            <a:ext cx="1123303" cy="228600"/>
-          </a:xfrm>
-          <a:prstGeom prst="rect">
-            <a:avLst/>
-          </a:prstGeom>
-          <a:noFill/>
-          <a:ln/>
-        </p:spPr>
-        <p:txBody>
-          <a:bodyPr wrap="square" lIns="47625" tIns="114300" rIns="114300" bIns="47625" rtlCol="0" anchor="ctr"/>
+            <a:off x="3606634" y="2364135"/>
+            <a:ext cx="1123303" cy="133350"/>
+          </a:xfrm>
+          <a:prstGeom prst="rect">
+            <a:avLst/>
+          </a:prstGeom>
+          <a:noFill/>
+          <a:ln/>
+        </p:spPr>
+        <p:txBody>
+          <a:bodyPr wrap="square" lIns="0" tIns="114300" rIns="114300" bIns="0" rtlCol="0" anchor="ctr"/>
           <a:lstStyle/>
           <a:p>
             <a:pPr algn="r" indent="0" marL="0">
@@ -1546,17 +1546,17 @@
         </p:nvSpPr>
         <p:spPr>
           <a:xfrm>
-            <a:off x="4695532" y="2302245"/>
-            <a:ext cx="1181246" cy="228600"/>
-          </a:xfrm>
-          <a:prstGeom prst="rect">
-            <a:avLst/>
-          </a:prstGeom>
-          <a:noFill/>
-          <a:ln/>
-        </p:spPr>
-        <p:txBody>
-          <a:bodyPr wrap="square" lIns="47625" tIns="114300" rIns="114300" bIns="47625" rtlCol="0" anchor="ctr"/>
+            <a:off x="4695532" y="2364135"/>
+            <a:ext cx="1181246" cy="133350"/>
+          </a:xfrm>
+          <a:prstGeom prst="rect">
+            <a:avLst/>
+          </a:prstGeom>
+          <a:noFill/>
+          <a:ln/>
+        </p:spPr>
+        <p:txBody>
+          <a:bodyPr wrap="square" lIns="0" tIns="114300" rIns="114300" bIns="0" rtlCol="0" anchor="ctr"/>
           <a:lstStyle/>
           <a:p>
             <a:pPr algn="r" indent="0" marL="0">
@@ -1585,17 +1585,17 @@
         </p:nvSpPr>
         <p:spPr>
           <a:xfrm>
-            <a:off x="2595606" y="2302245"/>
-            <a:ext cx="1043746" cy="228600"/>
-          </a:xfrm>
-          <a:prstGeom prst="rect">
-            <a:avLst/>
-          </a:prstGeom>
-          <a:noFill/>
-          <a:ln/>
-        </p:spPr>
-        <p:txBody>
-          <a:bodyPr wrap="square" lIns="47625" tIns="114300" rIns="114300" bIns="47625" rtlCol="0" anchor="ctr"/>
+            <a:off x="2595606" y="2364135"/>
+            <a:ext cx="1043746" cy="133350"/>
+          </a:xfrm>
+          <a:prstGeom prst="rect">
+            <a:avLst/>
+          </a:prstGeom>
+          <a:noFill/>
+          <a:ln/>
+        </p:spPr>
+        <p:txBody>
+          <a:bodyPr wrap="square" lIns="0" tIns="114300" rIns="114300" bIns="0" rtlCol="0" anchor="ctr"/>
           <a:lstStyle/>
           <a:p>
             <a:pPr algn="r" indent="0" marL="0">
@@ -1624,17 +1624,17 @@
         </p:nvSpPr>
         <p:spPr>
           <a:xfrm>
-            <a:off x="723882" y="4011983"/>
-            <a:ext cx="696699" cy="214313"/>
-          </a:xfrm>
-          <a:prstGeom prst="rect">
-            <a:avLst/>
-          </a:prstGeom>
-          <a:noFill/>
-          <a:ln/>
-        </p:spPr>
-        <p:txBody>
-          <a:bodyPr wrap="square" lIns="38100" tIns="114300" rIns="114300" bIns="38100" rtlCol="0" anchor="ctr"/>
+            <a:off x="723882" y="4069110"/>
+            <a:ext cx="696699" cy="133350"/>
+          </a:xfrm>
+          <a:prstGeom prst="rect">
+            <a:avLst/>
+          </a:prstGeom>
+          <a:noFill/>
+          <a:ln/>
+        </p:spPr>
+        <p:txBody>
+          <a:bodyPr wrap="square" lIns="0" tIns="114300" rIns="114300" bIns="0" rtlCol="0" anchor="ctr"/>
           <a:lstStyle/>
           <a:p>
             <a:pPr algn="l" indent="0" marL="0">
@@ -1702,17 +1702,17 @@
         </p:nvSpPr>
         <p:spPr>
           <a:xfrm>
-            <a:off x="723882" y="2302245"/>
-            <a:ext cx="696699" cy="228600"/>
-          </a:xfrm>
-          <a:prstGeom prst="rect">
-            <a:avLst/>
-          </a:prstGeom>
-          <a:noFill/>
-          <a:ln/>
-        </p:spPr>
-        <p:txBody>
-          <a:bodyPr wrap="square" lIns="47625" tIns="114300" rIns="114300" bIns="47625" rtlCol="0" anchor="ctr"/>
+            <a:off x="723882" y="2364135"/>
+            <a:ext cx="696699" cy="133350"/>
+          </a:xfrm>
+          <a:prstGeom prst="rect">
+            <a:avLst/>
+          </a:prstGeom>
+          <a:noFill/>
+          <a:ln/>
+        </p:spPr>
+        <p:txBody>
+          <a:bodyPr wrap="square" lIns="0" tIns="114300" rIns="114300" bIns="0" rtlCol="0" anchor="ctr"/>
           <a:lstStyle/>
           <a:p>
             <a:pPr algn="l" indent="0" marL="0">
@@ -1741,17 +1741,17 @@
         </p:nvSpPr>
         <p:spPr>
           <a:xfrm>
-            <a:off x="723882" y="2530845"/>
-            <a:ext cx="696699" cy="242888"/>
-          </a:xfrm>
-          <a:prstGeom prst="rect">
-            <a:avLst/>
-          </a:prstGeom>
-          <a:noFill/>
-          <a:ln/>
-        </p:spPr>
-        <p:txBody>
-          <a:bodyPr wrap="square" lIns="38100" tIns="114300" rIns="114300" bIns="38100" rtlCol="0" anchor="ctr"/>
+            <a:off x="723882" y="2597497"/>
+            <a:ext cx="696699" cy="133350"/>
+          </a:xfrm>
+          <a:prstGeom prst="rect">
+            <a:avLst/>
+          </a:prstGeom>
+          <a:noFill/>
+          <a:ln/>
+        </p:spPr>
+        <p:txBody>
+          <a:bodyPr wrap="square" lIns="0" tIns="114300" rIns="114300" bIns="0" rtlCol="0" anchor="ctr"/>
           <a:lstStyle/>
           <a:p>
             <a:pPr algn="l" indent="0" marL="0">
@@ -1780,17 +1780,17 @@
         </p:nvSpPr>
         <p:spPr>
           <a:xfrm>
-            <a:off x="1363517" y="2530845"/>
-            <a:ext cx="1262489" cy="242888"/>
-          </a:xfrm>
-          <a:prstGeom prst="rect">
-            <a:avLst/>
-          </a:prstGeom>
-          <a:noFill/>
-          <a:ln/>
-        </p:spPr>
-        <p:txBody>
-          <a:bodyPr wrap="square" lIns="38100" tIns="114300" rIns="114300" bIns="38100" rtlCol="0" anchor="ctr"/>
+            <a:off x="1363517" y="2597497"/>
+            <a:ext cx="1262489" cy="133350"/>
+          </a:xfrm>
+          <a:prstGeom prst="rect">
+            <a:avLst/>
+          </a:prstGeom>
+          <a:noFill/>
+          <a:ln/>
+        </p:spPr>
+        <p:txBody>
+          <a:bodyPr wrap="square" lIns="0" tIns="114300" rIns="114300" bIns="0" rtlCol="0" anchor="ctr"/>
           <a:lstStyle/>
           <a:p>
             <a:pPr algn="r" indent="0" marL="0">
@@ -1819,17 +1819,17 @@
         </p:nvSpPr>
         <p:spPr>
           <a:xfrm>
-            <a:off x="4695532" y="2530845"/>
-            <a:ext cx="1181246" cy="242888"/>
-          </a:xfrm>
-          <a:prstGeom prst="rect">
-            <a:avLst/>
-          </a:prstGeom>
-          <a:noFill/>
-          <a:ln/>
-        </p:spPr>
-        <p:txBody>
-          <a:bodyPr wrap="square" lIns="38100" tIns="114300" rIns="114300" bIns="38100" rtlCol="0" anchor="ctr"/>
+            <a:off x="4695532" y="2602260"/>
+            <a:ext cx="1181246" cy="123825"/>
+          </a:xfrm>
+          <a:prstGeom prst="rect">
+            <a:avLst/>
+          </a:prstGeom>
+          <a:noFill/>
+          <a:ln/>
+        </p:spPr>
+        <p:txBody>
+          <a:bodyPr wrap="square" lIns="0" tIns="114300" rIns="114300" bIns="0" rtlCol="0" anchor="ctr"/>
           <a:lstStyle/>
           <a:p>
             <a:pPr algn="r" indent="0" marL="0">
@@ -1858,17 +1858,17 @@
         </p:nvSpPr>
         <p:spPr>
           <a:xfrm>
-            <a:off x="723882" y="2773733"/>
-            <a:ext cx="696699" cy="247650"/>
-          </a:xfrm>
-          <a:prstGeom prst="rect">
-            <a:avLst/>
-          </a:prstGeom>
-          <a:noFill/>
-          <a:ln/>
-        </p:spPr>
-        <p:txBody>
-          <a:bodyPr wrap="square" lIns="38100" tIns="114300" rIns="114300" bIns="38100" rtlCol="0" anchor="ctr"/>
+            <a:off x="723882" y="2845147"/>
+            <a:ext cx="696699" cy="133350"/>
+          </a:xfrm>
+          <a:prstGeom prst="rect">
+            <a:avLst/>
+          </a:prstGeom>
+          <a:noFill/>
+          <a:ln/>
+        </p:spPr>
+        <p:txBody>
+          <a:bodyPr wrap="square" lIns="0" tIns="114300" rIns="114300" bIns="0" rtlCol="0" anchor="ctr"/>
           <a:lstStyle/>
           <a:p>
             <a:pPr algn="l" indent="0" marL="0">
@@ -1897,17 +1897,17 @@
         </p:nvSpPr>
         <p:spPr>
           <a:xfrm>
-            <a:off x="1363517" y="2773733"/>
-            <a:ext cx="1262489" cy="247650"/>
-          </a:xfrm>
-          <a:prstGeom prst="rect">
-            <a:avLst/>
-          </a:prstGeom>
-          <a:noFill/>
-          <a:ln/>
-        </p:spPr>
-        <p:txBody>
-          <a:bodyPr wrap="square" lIns="38100" tIns="114300" rIns="114300" bIns="38100" rtlCol="0" anchor="ctr"/>
+            <a:off x="1363517" y="2845147"/>
+            <a:ext cx="1262489" cy="133350"/>
+          </a:xfrm>
+          <a:prstGeom prst="rect">
+            <a:avLst/>
+          </a:prstGeom>
+          <a:noFill/>
+          <a:ln/>
+        </p:spPr>
+        <p:txBody>
+          <a:bodyPr wrap="square" lIns="0" tIns="114300" rIns="114300" bIns="0" rtlCol="0" anchor="ctr"/>
           <a:lstStyle/>
           <a:p>
             <a:pPr algn="r" indent="0" marL="0">
@@ -1936,17 +1936,17 @@
         </p:nvSpPr>
         <p:spPr>
           <a:xfrm>
-            <a:off x="4695532" y="2773733"/>
-            <a:ext cx="1181246" cy="247650"/>
-          </a:xfrm>
-          <a:prstGeom prst="rect">
-            <a:avLst/>
-          </a:prstGeom>
-          <a:noFill/>
-          <a:ln/>
-        </p:spPr>
-        <p:txBody>
-          <a:bodyPr wrap="square" lIns="38100" tIns="114300" rIns="114300" bIns="38100" rtlCol="0" anchor="ctr"/>
+            <a:off x="4695532" y="2849910"/>
+            <a:ext cx="1181246" cy="123825"/>
+          </a:xfrm>
+          <a:prstGeom prst="rect">
+            <a:avLst/>
+          </a:prstGeom>
+          <a:noFill/>
+          <a:ln/>
+        </p:spPr>
+        <p:txBody>
+          <a:bodyPr wrap="square" lIns="0" tIns="114300" rIns="114300" bIns="0" rtlCol="0" anchor="ctr"/>
           <a:lstStyle/>
           <a:p>
             <a:pPr algn="r" indent="0" marL="0">
@@ -1975,17 +1975,17 @@
         </p:nvSpPr>
         <p:spPr>
           <a:xfrm>
-            <a:off x="723882" y="3021383"/>
-            <a:ext cx="696699" cy="247650"/>
-          </a:xfrm>
-          <a:prstGeom prst="rect">
-            <a:avLst/>
-          </a:prstGeom>
-          <a:noFill/>
-          <a:ln/>
-        </p:spPr>
-        <p:txBody>
-          <a:bodyPr wrap="square" lIns="38100" tIns="114300" rIns="114300" bIns="38100" rtlCol="0" anchor="ctr"/>
+            <a:off x="723882" y="3092797"/>
+            <a:ext cx="696699" cy="133350"/>
+          </a:xfrm>
+          <a:prstGeom prst="rect">
+            <a:avLst/>
+          </a:prstGeom>
+          <a:noFill/>
+          <a:ln/>
+        </p:spPr>
+        <p:txBody>
+          <a:bodyPr wrap="square" lIns="0" tIns="114300" rIns="114300" bIns="0" rtlCol="0" anchor="ctr"/>
           <a:lstStyle/>
           <a:p>
             <a:pPr algn="l" indent="0" marL="0">
@@ -2014,17 +2014,17 @@
         </p:nvSpPr>
         <p:spPr>
           <a:xfrm>
-            <a:off x="1363517" y="3021383"/>
-            <a:ext cx="1262489" cy="247650"/>
-          </a:xfrm>
-          <a:prstGeom prst="rect">
-            <a:avLst/>
-          </a:prstGeom>
-          <a:noFill/>
-          <a:ln/>
-        </p:spPr>
-        <p:txBody>
-          <a:bodyPr wrap="square" lIns="38100" tIns="114300" rIns="114300" bIns="38100" rtlCol="0" anchor="ctr"/>
+            <a:off x="1363517" y="3092797"/>
+            <a:ext cx="1262489" cy="133350"/>
+          </a:xfrm>
+          <a:prstGeom prst="rect">
+            <a:avLst/>
+          </a:prstGeom>
+          <a:noFill/>
+          <a:ln/>
+        </p:spPr>
+        <p:txBody>
+          <a:bodyPr wrap="square" lIns="0" tIns="114300" rIns="114300" bIns="0" rtlCol="0" anchor="ctr"/>
           <a:lstStyle/>
           <a:p>
             <a:pPr algn="r" indent="0" marL="0">
@@ -2053,17 +2053,17 @@
         </p:nvSpPr>
         <p:spPr>
           <a:xfrm>
-            <a:off x="4695532" y="3021383"/>
-            <a:ext cx="1181246" cy="247650"/>
-          </a:xfrm>
-          <a:prstGeom prst="rect">
-            <a:avLst/>
-          </a:prstGeom>
-          <a:noFill/>
-          <a:ln/>
-        </p:spPr>
-        <p:txBody>
-          <a:bodyPr wrap="square" lIns="38100" tIns="114300" rIns="114300" bIns="38100" rtlCol="0" anchor="ctr"/>
+            <a:off x="4695532" y="3097560"/>
+            <a:ext cx="1181246" cy="123825"/>
+          </a:xfrm>
+          <a:prstGeom prst="rect">
+            <a:avLst/>
+          </a:prstGeom>
+          <a:noFill/>
+          <a:ln/>
+        </p:spPr>
+        <p:txBody>
+          <a:bodyPr wrap="square" lIns="0" tIns="114300" rIns="114300" bIns="0" rtlCol="0" anchor="ctr"/>
           <a:lstStyle/>
           <a:p>
             <a:pPr algn="r" indent="0" marL="0">
@@ -2092,17 +2092,17 @@
         </p:nvSpPr>
         <p:spPr>
           <a:xfrm>
-            <a:off x="723882" y="3269033"/>
-            <a:ext cx="696699" cy="247650"/>
-          </a:xfrm>
-          <a:prstGeom prst="rect">
-            <a:avLst/>
-          </a:prstGeom>
-          <a:noFill/>
-          <a:ln/>
-        </p:spPr>
-        <p:txBody>
-          <a:bodyPr wrap="square" lIns="38100" tIns="114300" rIns="114300" bIns="38100" rtlCol="0" anchor="ctr"/>
+            <a:off x="723882" y="3340447"/>
+            <a:ext cx="696699" cy="133350"/>
+          </a:xfrm>
+          <a:prstGeom prst="rect">
+            <a:avLst/>
+          </a:prstGeom>
+          <a:noFill/>
+          <a:ln/>
+        </p:spPr>
+        <p:txBody>
+          <a:bodyPr wrap="square" lIns="0" tIns="114300" rIns="114300" bIns="0" rtlCol="0" anchor="ctr"/>
           <a:lstStyle/>
           <a:p>
             <a:pPr algn="l" indent="0" marL="0">
@@ -2131,17 +2131,17 @@
         </p:nvSpPr>
         <p:spPr>
           <a:xfrm>
-            <a:off x="1363517" y="3269033"/>
-            <a:ext cx="1262489" cy="247650"/>
-          </a:xfrm>
-          <a:prstGeom prst="rect">
-            <a:avLst/>
-          </a:prstGeom>
-          <a:noFill/>
-          <a:ln/>
-        </p:spPr>
-        <p:txBody>
-          <a:bodyPr wrap="square" lIns="38100" tIns="114300" rIns="114300" bIns="38100" rtlCol="0" anchor="ctr"/>
+            <a:off x="1363517" y="3340447"/>
+            <a:ext cx="1262489" cy="133350"/>
+          </a:xfrm>
+          <a:prstGeom prst="rect">
+            <a:avLst/>
+          </a:prstGeom>
+          <a:noFill/>
+          <a:ln/>
+        </p:spPr>
+        <p:txBody>
+          <a:bodyPr wrap="square" lIns="0" tIns="114300" rIns="114300" bIns="0" rtlCol="0" anchor="ctr"/>
           <a:lstStyle/>
           <a:p>
             <a:pPr algn="r" indent="0" marL="0">
@@ -2170,17 +2170,17 @@
         </p:nvSpPr>
         <p:spPr>
           <a:xfrm>
-            <a:off x="4695532" y="3269033"/>
-            <a:ext cx="1181246" cy="247650"/>
-          </a:xfrm>
-          <a:prstGeom prst="rect">
-            <a:avLst/>
-          </a:prstGeom>
-          <a:noFill/>
-          <a:ln/>
-        </p:spPr>
-        <p:txBody>
-          <a:bodyPr wrap="square" lIns="38100" tIns="114300" rIns="114300" bIns="38100" rtlCol="0" anchor="ctr"/>
+            <a:off x="4695532" y="3345210"/>
+            <a:ext cx="1181246" cy="123825"/>
+          </a:xfrm>
+          <a:prstGeom prst="rect">
+            <a:avLst/>
+          </a:prstGeom>
+          <a:noFill/>
+          <a:ln/>
+        </p:spPr>
+        <p:txBody>
+          <a:bodyPr wrap="square" lIns="0" tIns="114300" rIns="114300" bIns="0" rtlCol="0" anchor="ctr"/>
           <a:lstStyle/>
           <a:p>
             <a:pPr algn="r" indent="0" marL="0">
@@ -2209,17 +2209,17 @@
         </p:nvSpPr>
         <p:spPr>
           <a:xfrm>
-            <a:off x="723882" y="3516683"/>
-            <a:ext cx="696699" cy="247650"/>
-          </a:xfrm>
-          <a:prstGeom prst="rect">
-            <a:avLst/>
-          </a:prstGeom>
-          <a:noFill/>
-          <a:ln/>
-        </p:spPr>
-        <p:txBody>
-          <a:bodyPr wrap="square" lIns="38100" tIns="114300" rIns="114300" bIns="38100" rtlCol="0" anchor="ctr"/>
+            <a:off x="723882" y="3588097"/>
+            <a:ext cx="696699" cy="133350"/>
+          </a:xfrm>
+          <a:prstGeom prst="rect">
+            <a:avLst/>
+          </a:prstGeom>
+          <a:noFill/>
+          <a:ln/>
+        </p:spPr>
+        <p:txBody>
+          <a:bodyPr wrap="square" lIns="0" tIns="114300" rIns="114300" bIns="0" rtlCol="0" anchor="ctr"/>
           <a:lstStyle/>
           <a:p>
             <a:pPr algn="l" indent="0" marL="0">
@@ -2248,17 +2248,17 @@
         </p:nvSpPr>
         <p:spPr>
           <a:xfrm>
-            <a:off x="4695532" y="3516683"/>
-            <a:ext cx="1181246" cy="247650"/>
-          </a:xfrm>
-          <a:prstGeom prst="rect">
-            <a:avLst/>
-          </a:prstGeom>
-          <a:noFill/>
-          <a:ln/>
-        </p:spPr>
-        <p:txBody>
-          <a:bodyPr wrap="square" lIns="38100" tIns="114300" rIns="114300" bIns="38100" rtlCol="0" anchor="ctr"/>
+            <a:off x="4695532" y="3592860"/>
+            <a:ext cx="1181246" cy="123825"/>
+          </a:xfrm>
+          <a:prstGeom prst="rect">
+            <a:avLst/>
+          </a:prstGeom>
+          <a:noFill/>
+          <a:ln/>
+        </p:spPr>
+        <p:txBody>
+          <a:bodyPr wrap="square" lIns="0" tIns="114300" rIns="114300" bIns="0" rtlCol="0" anchor="ctr"/>
           <a:lstStyle/>
           <a:p>
             <a:pPr algn="r" indent="0" marL="0">
@@ -2287,17 +2287,17 @@
         </p:nvSpPr>
         <p:spPr>
           <a:xfrm>
-            <a:off x="723882" y="3764333"/>
-            <a:ext cx="696699" cy="247650"/>
-          </a:xfrm>
-          <a:prstGeom prst="rect">
-            <a:avLst/>
-          </a:prstGeom>
-          <a:noFill/>
-          <a:ln/>
-        </p:spPr>
-        <p:txBody>
-          <a:bodyPr wrap="square" lIns="38100" tIns="114300" rIns="114300" bIns="38100" rtlCol="0" anchor="ctr"/>
+            <a:off x="723882" y="3835747"/>
+            <a:ext cx="696699" cy="133350"/>
+          </a:xfrm>
+          <a:prstGeom prst="rect">
+            <a:avLst/>
+          </a:prstGeom>
+          <a:noFill/>
+          <a:ln/>
+        </p:spPr>
+        <p:txBody>
+          <a:bodyPr wrap="square" lIns="0" tIns="114300" rIns="114300" bIns="0" rtlCol="0" anchor="ctr"/>
           <a:lstStyle/>
           <a:p>
             <a:pPr algn="l" indent="0" marL="0">
@@ -2326,17 +2326,17 @@
         </p:nvSpPr>
         <p:spPr>
           <a:xfrm>
-            <a:off x="4695532" y="3764333"/>
-            <a:ext cx="1181246" cy="247650"/>
-          </a:xfrm>
-          <a:prstGeom prst="rect">
-            <a:avLst/>
-          </a:prstGeom>
-          <a:noFill/>
-          <a:ln/>
-        </p:spPr>
-        <p:txBody>
-          <a:bodyPr wrap="square" lIns="38100" tIns="114300" rIns="114300" bIns="38100" rtlCol="0" anchor="ctr"/>
+            <a:off x="4695532" y="3840510"/>
+            <a:ext cx="1181246" cy="123825"/>
+          </a:xfrm>
+          <a:prstGeom prst="rect">
+            <a:avLst/>
+          </a:prstGeom>
+          <a:noFill/>
+          <a:ln/>
+        </p:spPr>
+        <p:txBody>
+          <a:bodyPr wrap="square" lIns="0" tIns="114300" rIns="114300" bIns="0" rtlCol="0" anchor="ctr"/>
           <a:lstStyle/>
           <a:p>
             <a:pPr algn="r" indent="0" marL="0">
@@ -2365,17 +2365,17 @@
         </p:nvSpPr>
         <p:spPr>
           <a:xfrm>
-            <a:off x="2595606" y="4011983"/>
-            <a:ext cx="1043746" cy="214313"/>
-          </a:xfrm>
-          <a:prstGeom prst="rect">
-            <a:avLst/>
-          </a:prstGeom>
-          <a:noFill/>
-          <a:ln/>
-        </p:spPr>
-        <p:txBody>
-          <a:bodyPr wrap="square" lIns="38100" tIns="114300" rIns="114300" bIns="38100" rtlCol="0" anchor="ctr"/>
+            <a:off x="2595606" y="4069110"/>
+            <a:ext cx="1043746" cy="133350"/>
+          </a:xfrm>
+          <a:prstGeom prst="rect">
+            <a:avLst/>
+          </a:prstGeom>
+          <a:noFill/>
+          <a:ln/>
+        </p:spPr>
+        <p:txBody>
+          <a:bodyPr wrap="square" lIns="0" tIns="114300" rIns="114300" bIns="0" rtlCol="0" anchor="ctr"/>
           <a:lstStyle/>
           <a:p>
             <a:pPr algn="r" indent="0" marL="0">
@@ -2404,17 +2404,17 @@
         </p:nvSpPr>
         <p:spPr>
           <a:xfrm>
-            <a:off x="3606634" y="4011983"/>
-            <a:ext cx="1123303" cy="214313"/>
-          </a:xfrm>
-          <a:prstGeom prst="rect">
-            <a:avLst/>
-          </a:prstGeom>
-          <a:noFill/>
-          <a:ln/>
-        </p:spPr>
-        <p:txBody>
-          <a:bodyPr wrap="square" lIns="38100" tIns="114300" rIns="114300" bIns="38100" rtlCol="0" anchor="ctr"/>
+            <a:off x="3606634" y="4069110"/>
+            <a:ext cx="1123303" cy="133350"/>
+          </a:xfrm>
+          <a:prstGeom prst="rect">
+            <a:avLst/>
+          </a:prstGeom>
+          <a:noFill/>
+          <a:ln/>
+        </p:spPr>
+        <p:txBody>
+          <a:bodyPr wrap="square" lIns="0" tIns="114300" rIns="114300" bIns="0" rtlCol="0" anchor="ctr"/>
           <a:lstStyle/>
           <a:p>
             <a:pPr algn="r" indent="0" marL="0">
@@ -2716,17 +2716,17 @@
         </p:nvSpPr>
         <p:spPr>
           <a:xfrm>
-            <a:off x="2595606" y="2530845"/>
-            <a:ext cx="1043746" cy="242888"/>
-          </a:xfrm>
-          <a:prstGeom prst="rect">
-            <a:avLst/>
-          </a:prstGeom>
-          <a:noFill/>
-          <a:ln/>
-        </p:spPr>
-        <p:txBody>
-          <a:bodyPr wrap="square" lIns="38100" tIns="114300" rIns="114300" bIns="38100" rtlCol="0" anchor="ctr"/>
+            <a:off x="2595606" y="2597497"/>
+            <a:ext cx="1043746" cy="133350"/>
+          </a:xfrm>
+          <a:prstGeom prst="rect">
+            <a:avLst/>
+          </a:prstGeom>
+          <a:noFill/>
+          <a:ln/>
+        </p:spPr>
+        <p:txBody>
+          <a:bodyPr wrap="square" lIns="0" tIns="114300" rIns="114300" bIns="0" rtlCol="0" anchor="ctr"/>
           <a:lstStyle/>
           <a:p>
             <a:pPr algn="r" indent="0" marL="0">
@@ -2755,17 +2755,17 @@
         </p:nvSpPr>
         <p:spPr>
           <a:xfrm>
-            <a:off x="3606634" y="2530845"/>
-            <a:ext cx="1123303" cy="242888"/>
-          </a:xfrm>
-          <a:prstGeom prst="rect">
-            <a:avLst/>
-          </a:prstGeom>
-          <a:noFill/>
-          <a:ln/>
-        </p:spPr>
-        <p:txBody>
-          <a:bodyPr wrap="square" lIns="38100" tIns="114300" rIns="114300" bIns="38100" rtlCol="0" anchor="ctr"/>
+            <a:off x="3606634" y="2597497"/>
+            <a:ext cx="1123303" cy="133350"/>
+          </a:xfrm>
+          <a:prstGeom prst="rect">
+            <a:avLst/>
+          </a:prstGeom>
+          <a:noFill/>
+          <a:ln/>
+        </p:spPr>
+        <p:txBody>
+          <a:bodyPr wrap="square" lIns="0" tIns="114300" rIns="114300" bIns="0" rtlCol="0" anchor="ctr"/>
           <a:lstStyle/>
           <a:p>
             <a:pPr algn="r" indent="0" marL="0">
@@ -2794,17 +2794,17 @@
         </p:nvSpPr>
         <p:spPr>
           <a:xfrm>
-            <a:off x="2595606" y="2773733"/>
-            <a:ext cx="1043746" cy="247650"/>
-          </a:xfrm>
-          <a:prstGeom prst="rect">
-            <a:avLst/>
-          </a:prstGeom>
-          <a:noFill/>
-          <a:ln/>
-        </p:spPr>
-        <p:txBody>
-          <a:bodyPr wrap="square" lIns="38100" tIns="114300" rIns="114300" bIns="38100" rtlCol="0" anchor="ctr"/>
+            <a:off x="2595606" y="2845147"/>
+            <a:ext cx="1043746" cy="133350"/>
+          </a:xfrm>
+          <a:prstGeom prst="rect">
+            <a:avLst/>
+          </a:prstGeom>
+          <a:noFill/>
+          <a:ln/>
+        </p:spPr>
+        <p:txBody>
+          <a:bodyPr wrap="square" lIns="0" tIns="114300" rIns="114300" bIns="0" rtlCol="0" anchor="ctr"/>
           <a:lstStyle/>
           <a:p>
             <a:pPr algn="r" indent="0" marL="0">
@@ -2833,17 +2833,17 @@
         </p:nvSpPr>
         <p:spPr>
           <a:xfrm>
-            <a:off x="3606634" y="2773733"/>
-            <a:ext cx="1123303" cy="247650"/>
-          </a:xfrm>
-          <a:prstGeom prst="rect">
-            <a:avLst/>
-          </a:prstGeom>
-          <a:noFill/>
-          <a:ln/>
-        </p:spPr>
-        <p:txBody>
-          <a:bodyPr wrap="square" lIns="38100" tIns="114300" rIns="114300" bIns="38100" rtlCol="0" anchor="ctr"/>
+            <a:off x="3606634" y="2845147"/>
+            <a:ext cx="1123303" cy="133350"/>
+          </a:xfrm>
+          <a:prstGeom prst="rect">
+            <a:avLst/>
+          </a:prstGeom>
+          <a:noFill/>
+          <a:ln/>
+        </p:spPr>
+        <p:txBody>
+          <a:bodyPr wrap="square" lIns="0" tIns="114300" rIns="114300" bIns="0" rtlCol="0" anchor="ctr"/>
           <a:lstStyle/>
           <a:p>
             <a:pPr algn="r" indent="0" marL="0">
@@ -2872,17 +2872,17 @@
         </p:nvSpPr>
         <p:spPr>
           <a:xfrm>
-            <a:off x="2595606" y="3021383"/>
-            <a:ext cx="1043746" cy="247650"/>
-          </a:xfrm>
-          <a:prstGeom prst="rect">
-            <a:avLst/>
-          </a:prstGeom>
-          <a:noFill/>
-          <a:ln/>
-        </p:spPr>
-        <p:txBody>
-          <a:bodyPr wrap="square" lIns="38100" tIns="114300" rIns="114300" bIns="38100" rtlCol="0" anchor="ctr"/>
+            <a:off x="2595606" y="3092797"/>
+            <a:ext cx="1043746" cy="133350"/>
+          </a:xfrm>
+          <a:prstGeom prst="rect">
+            <a:avLst/>
+          </a:prstGeom>
+          <a:noFill/>
+          <a:ln/>
+        </p:spPr>
+        <p:txBody>
+          <a:bodyPr wrap="square" lIns="0" tIns="114300" rIns="114300" bIns="0" rtlCol="0" anchor="ctr"/>
           <a:lstStyle/>
           <a:p>
             <a:pPr algn="r" indent="0" marL="0">
@@ -2911,17 +2911,17 @@
         </p:nvSpPr>
         <p:spPr>
           <a:xfrm>
-            <a:off x="3606634" y="3021383"/>
-            <a:ext cx="1123303" cy="247650"/>
-          </a:xfrm>
-          <a:prstGeom prst="rect">
-            <a:avLst/>
-          </a:prstGeom>
-          <a:noFill/>
-          <a:ln/>
-        </p:spPr>
-        <p:txBody>
-          <a:bodyPr wrap="square" lIns="38100" tIns="114300" rIns="114300" bIns="38100" rtlCol="0" anchor="ctr"/>
+            <a:off x="3606634" y="3092797"/>
+            <a:ext cx="1123303" cy="133350"/>
+          </a:xfrm>
+          <a:prstGeom prst="rect">
+            <a:avLst/>
+          </a:prstGeom>
+          <a:noFill/>
+          <a:ln/>
+        </p:spPr>
+        <p:txBody>
+          <a:bodyPr wrap="square" lIns="0" tIns="114300" rIns="114300" bIns="0" rtlCol="0" anchor="ctr"/>
           <a:lstStyle/>
           <a:p>
             <a:pPr algn="r" indent="0" marL="0">
@@ -2950,17 +2950,17 @@
         </p:nvSpPr>
         <p:spPr>
           <a:xfrm>
-            <a:off x="2595606" y="3269033"/>
-            <a:ext cx="1043746" cy="247650"/>
-          </a:xfrm>
-          <a:prstGeom prst="rect">
-            <a:avLst/>
-          </a:prstGeom>
-          <a:noFill/>
-          <a:ln/>
-        </p:spPr>
-        <p:txBody>
-          <a:bodyPr wrap="square" lIns="38100" tIns="114300" rIns="114300" bIns="38100" rtlCol="0" anchor="ctr"/>
+            <a:off x="2595606" y="3340447"/>
+            <a:ext cx="1043746" cy="133350"/>
+          </a:xfrm>
+          <a:prstGeom prst="rect">
+            <a:avLst/>
+          </a:prstGeom>
+          <a:noFill/>
+          <a:ln/>
+        </p:spPr>
+        <p:txBody>
+          <a:bodyPr wrap="square" lIns="0" tIns="114300" rIns="114300" bIns="0" rtlCol="0" anchor="ctr"/>
           <a:lstStyle/>
           <a:p>
             <a:pPr algn="r" indent="0" marL="0">
@@ -2989,17 +2989,17 @@
         </p:nvSpPr>
         <p:spPr>
           <a:xfrm>
-            <a:off x="3606634" y="3269033"/>
-            <a:ext cx="1123303" cy="247650"/>
-          </a:xfrm>
-          <a:prstGeom prst="rect">
-            <a:avLst/>
-          </a:prstGeom>
-          <a:noFill/>
-          <a:ln/>
-        </p:spPr>
-        <p:txBody>
-          <a:bodyPr wrap="square" lIns="38100" tIns="114300" rIns="114300" bIns="38100" rtlCol="0" anchor="ctr"/>
+            <a:off x="3606634" y="3340447"/>
+            <a:ext cx="1123303" cy="133350"/>
+          </a:xfrm>
+          <a:prstGeom prst="rect">
+            <a:avLst/>
+          </a:prstGeom>
+          <a:noFill/>
+          <a:ln/>
+        </p:spPr>
+        <p:txBody>
+          <a:bodyPr wrap="square" lIns="0" tIns="114300" rIns="114300" bIns="0" rtlCol="0" anchor="ctr"/>
           <a:lstStyle/>
           <a:p>
             <a:pPr algn="r" indent="0" marL="0">
@@ -3028,17 +3028,17 @@
         </p:nvSpPr>
         <p:spPr>
           <a:xfrm>
-            <a:off x="1363517" y="3516683"/>
-            <a:ext cx="1262489" cy="247650"/>
-          </a:xfrm>
-          <a:prstGeom prst="rect">
-            <a:avLst/>
-          </a:prstGeom>
-          <a:noFill/>
-          <a:ln/>
-        </p:spPr>
-        <p:txBody>
-          <a:bodyPr wrap="square" lIns="38100" tIns="114300" rIns="114300" bIns="38100" rtlCol="0" anchor="ctr"/>
+            <a:off x="1363517" y="3588097"/>
+            <a:ext cx="1262489" cy="133350"/>
+          </a:xfrm>
+          <a:prstGeom prst="rect">
+            <a:avLst/>
+          </a:prstGeom>
+          <a:noFill/>
+          <a:ln/>
+        </p:spPr>
+        <p:txBody>
+          <a:bodyPr wrap="square" lIns="0" tIns="114300" rIns="114300" bIns="0" rtlCol="0" anchor="ctr"/>
           <a:lstStyle/>
           <a:p>
             <a:pPr algn="r" indent="0" marL="0">
@@ -3067,17 +3067,17 @@
         </p:nvSpPr>
         <p:spPr>
           <a:xfrm>
-            <a:off x="2595606" y="3516683"/>
-            <a:ext cx="1043746" cy="247650"/>
-          </a:xfrm>
-          <a:prstGeom prst="rect">
-            <a:avLst/>
-          </a:prstGeom>
-          <a:noFill/>
-          <a:ln/>
-        </p:spPr>
-        <p:txBody>
-          <a:bodyPr wrap="square" lIns="38100" tIns="114300" rIns="114300" bIns="38100" rtlCol="0" anchor="ctr"/>
+            <a:off x="2595606" y="3588097"/>
+            <a:ext cx="1043746" cy="133350"/>
+          </a:xfrm>
+          <a:prstGeom prst="rect">
+            <a:avLst/>
+          </a:prstGeom>
+          <a:noFill/>
+          <a:ln/>
+        </p:spPr>
+        <p:txBody>
+          <a:bodyPr wrap="square" lIns="0" tIns="114300" rIns="114300" bIns="0" rtlCol="0" anchor="ctr"/>
           <a:lstStyle/>
           <a:p>
             <a:pPr algn="r" indent="0" marL="0">
@@ -3106,17 +3106,17 @@
         </p:nvSpPr>
         <p:spPr>
           <a:xfrm>
-            <a:off x="3606634" y="3516683"/>
-            <a:ext cx="1123303" cy="247650"/>
-          </a:xfrm>
-          <a:prstGeom prst="rect">
-            <a:avLst/>
-          </a:prstGeom>
-          <a:noFill/>
-          <a:ln/>
-        </p:spPr>
-        <p:txBody>
-          <a:bodyPr wrap="square" lIns="38100" tIns="114300" rIns="114300" bIns="38100" rtlCol="0" anchor="ctr"/>
+            <a:off x="3606634" y="3588097"/>
+            <a:ext cx="1123303" cy="133350"/>
+          </a:xfrm>
+          <a:prstGeom prst="rect">
+            <a:avLst/>
+          </a:prstGeom>
+          <a:noFill/>
+          <a:ln/>
+        </p:spPr>
+        <p:txBody>
+          <a:bodyPr wrap="square" lIns="0" tIns="114300" rIns="114300" bIns="0" rtlCol="0" anchor="ctr"/>
           <a:lstStyle/>
           <a:p>
             <a:pPr algn="r" indent="0" marL="0">
@@ -3145,17 +3145,17 @@
         </p:nvSpPr>
         <p:spPr>
           <a:xfrm>
-            <a:off x="1363517" y="3764333"/>
-            <a:ext cx="1262489" cy="247650"/>
-          </a:xfrm>
-          <a:prstGeom prst="rect">
-            <a:avLst/>
-          </a:prstGeom>
-          <a:noFill/>
-          <a:ln/>
-        </p:spPr>
-        <p:txBody>
-          <a:bodyPr wrap="square" lIns="38100" tIns="114300" rIns="114300" bIns="38100" rtlCol="0" anchor="ctr"/>
+            <a:off x="1363517" y="3835747"/>
+            <a:ext cx="1262489" cy="133350"/>
+          </a:xfrm>
+          <a:prstGeom prst="rect">
+            <a:avLst/>
+          </a:prstGeom>
+          <a:noFill/>
+          <a:ln/>
+        </p:spPr>
+        <p:txBody>
+          <a:bodyPr wrap="square" lIns="0" tIns="114300" rIns="114300" bIns="0" rtlCol="0" anchor="ctr"/>
           <a:lstStyle/>
           <a:p>
             <a:pPr algn="r" indent="0" marL="0">
@@ -3184,17 +3184,17 @@
         </p:nvSpPr>
         <p:spPr>
           <a:xfrm>
-            <a:off x="2595606" y="3764333"/>
-            <a:ext cx="1043746" cy="247650"/>
-          </a:xfrm>
-          <a:prstGeom prst="rect">
-            <a:avLst/>
-          </a:prstGeom>
-          <a:noFill/>
-          <a:ln/>
-        </p:spPr>
-        <p:txBody>
-          <a:bodyPr wrap="square" lIns="38100" tIns="114300" rIns="114300" bIns="38100" rtlCol="0" anchor="ctr"/>
+            <a:off x="2595606" y="3835747"/>
+            <a:ext cx="1043746" cy="133350"/>
+          </a:xfrm>
+          <a:prstGeom prst="rect">
+            <a:avLst/>
+          </a:prstGeom>
+          <a:noFill/>
+          <a:ln/>
+        </p:spPr>
+        <p:txBody>
+          <a:bodyPr wrap="square" lIns="0" tIns="114300" rIns="114300" bIns="0" rtlCol="0" anchor="ctr"/>
           <a:lstStyle/>
           <a:p>
             <a:pPr algn="r" indent="0" marL="0">
@@ -3223,17 +3223,17 @@
         </p:nvSpPr>
         <p:spPr>
           <a:xfrm>
-            <a:off x="3606634" y="3764333"/>
-            <a:ext cx="1123303" cy="247650"/>
-          </a:xfrm>
-          <a:prstGeom prst="rect">
-            <a:avLst/>
-          </a:prstGeom>
-          <a:noFill/>
-          <a:ln/>
-        </p:spPr>
-        <p:txBody>
-          <a:bodyPr wrap="square" lIns="38100" tIns="114300" rIns="114300" bIns="38100" rtlCol="0" anchor="ctr"/>
+            <a:off x="3606634" y="3835747"/>
+            <a:ext cx="1123303" cy="133350"/>
+          </a:xfrm>
+          <a:prstGeom prst="rect">
+            <a:avLst/>
+          </a:prstGeom>
+          <a:noFill/>
+          <a:ln/>
+        </p:spPr>
+        <p:txBody>
+          <a:bodyPr wrap="square" lIns="0" tIns="114300" rIns="114300" bIns="0" rtlCol="0" anchor="ctr"/>
           <a:lstStyle/>
           <a:p>
             <a:pPr algn="r" indent="0" marL="0">
@@ -4022,17 +4022,17 @@
         </p:nvSpPr>
         <p:spPr>
           <a:xfrm>
-            <a:off x="6295868" y="2029741"/>
-            <a:ext cx="1675757" cy="347663"/>
-          </a:xfrm>
-          <a:prstGeom prst="rect">
-            <a:avLst/>
-          </a:prstGeom>
-          <a:noFill/>
-          <a:ln/>
-        </p:spPr>
-        <p:txBody>
-          <a:bodyPr wrap="square" lIns="38100" tIns="114300" rIns="114300" bIns="38100" rtlCol="0" anchor="ctr"/>
+            <a:off x="6295868" y="2082105"/>
+            <a:ext cx="1675757" cy="266700"/>
+          </a:xfrm>
+          <a:prstGeom prst="rect">
+            <a:avLst/>
+          </a:prstGeom>
+          <a:noFill/>
+          <a:ln/>
+        </p:spPr>
+        <p:txBody>
+          <a:bodyPr wrap="square" lIns="0" tIns="114300" rIns="114300" bIns="0" rtlCol="0" anchor="ctr"/>
           <a:lstStyle/>
           <a:p>
             <a:pPr algn="l" indent="0" marL="0">
@@ -4075,17 +4075,17 @@
         </p:nvSpPr>
         <p:spPr>
           <a:xfrm>
-            <a:off x="6295868" y="3095797"/>
-            <a:ext cx="1675757" cy="365968"/>
-          </a:xfrm>
-          <a:prstGeom prst="rect">
-            <a:avLst/>
-          </a:prstGeom>
-          <a:noFill/>
-          <a:ln/>
-        </p:spPr>
-        <p:txBody>
-          <a:bodyPr wrap="square" lIns="38100" tIns="114300" rIns="114300" bIns="38100" rtlCol="0" anchor="ctr"/>
+            <a:off x="6295868" y="3152924"/>
+            <a:ext cx="1675757" cy="261193"/>
+          </a:xfrm>
+          <a:prstGeom prst="rect">
+            <a:avLst/>
+          </a:prstGeom>
+          <a:noFill/>
+          <a:ln/>
+        </p:spPr>
+        <p:txBody>
+          <a:bodyPr wrap="square" lIns="0" tIns="114300" rIns="114300" bIns="0" rtlCol="0" anchor="ctr"/>
           <a:lstStyle/>
           <a:p>
             <a:pPr algn="l" indent="0" marL="0">
@@ -4167,17 +4167,17 @@
         </p:nvSpPr>
         <p:spPr>
           <a:xfrm>
-            <a:off x="6295868" y="2377403"/>
-            <a:ext cx="1675757" cy="365968"/>
-          </a:xfrm>
-          <a:prstGeom prst="rect">
-            <a:avLst/>
-          </a:prstGeom>
-          <a:noFill/>
-          <a:ln/>
-        </p:spPr>
-        <p:txBody>
-          <a:bodyPr wrap="square" lIns="38100" tIns="114300" rIns="114300" bIns="38100" rtlCol="0" anchor="ctr"/>
+            <a:off x="6295868" y="2434530"/>
+            <a:ext cx="1675757" cy="261193"/>
+          </a:xfrm>
+          <a:prstGeom prst="rect">
+            <a:avLst/>
+          </a:prstGeom>
+          <a:noFill/>
+          <a:ln/>
+        </p:spPr>
+        <p:txBody>
+          <a:bodyPr wrap="square" lIns="0" tIns="114300" rIns="114300" bIns="0" rtlCol="0" anchor="ctr"/>
           <a:lstStyle/>
           <a:p>
             <a:pPr algn="l" indent="0" marL="0">
@@ -4298,17 +4298,17 @@
         </p:nvSpPr>
         <p:spPr>
           <a:xfrm>
-            <a:off x="6295868" y="2743372"/>
-            <a:ext cx="1675757" cy="352425"/>
-          </a:xfrm>
-          <a:prstGeom prst="rect">
-            <a:avLst/>
-          </a:prstGeom>
-          <a:noFill/>
-          <a:ln/>
-        </p:spPr>
-        <p:txBody>
-          <a:bodyPr wrap="square" lIns="38100" tIns="114300" rIns="114300" bIns="38100" rtlCol="0" anchor="ctr"/>
+            <a:off x="6295868" y="2800499"/>
+            <a:ext cx="1675757" cy="266700"/>
+          </a:xfrm>
+          <a:prstGeom prst="rect">
+            <a:avLst/>
+          </a:prstGeom>
+          <a:noFill/>
+          <a:ln/>
+        </p:spPr>
+        <p:txBody>
+          <a:bodyPr wrap="square" lIns="0" tIns="114300" rIns="114300" bIns="0" rtlCol="0" anchor="ctr"/>
           <a:lstStyle/>
           <a:p>
             <a:pPr algn="l" indent="0" marL="0">
@@ -4546,17 +4546,17 @@
         </p:nvSpPr>
         <p:spPr>
           <a:xfrm>
-            <a:off x="704832" y="5146499"/>
-            <a:ext cx="1645712" cy="180975"/>
-          </a:xfrm>
-          <a:prstGeom prst="rect">
-            <a:avLst/>
-          </a:prstGeom>
-          <a:noFill/>
-          <a:ln/>
-        </p:spPr>
-        <p:txBody>
-          <a:bodyPr wrap="square" lIns="38100" tIns="114300" rIns="114300" bIns="38100" rtlCol="0" anchor="ctr"/>
+            <a:off x="704832" y="5203627"/>
+            <a:ext cx="1645712" cy="95250"/>
+          </a:xfrm>
+          <a:prstGeom prst="rect">
+            <a:avLst/>
+          </a:prstGeom>
+          <a:noFill/>
+          <a:ln/>
+        </p:spPr>
+        <p:txBody>
+          <a:bodyPr wrap="square" lIns="0" tIns="114300" rIns="114300" bIns="0" rtlCol="0" anchor="ctr"/>
           <a:lstStyle/>
           <a:p>
             <a:pPr algn="l" indent="0" marL="0">
@@ -4585,17 +4585,17 @@
         </p:nvSpPr>
         <p:spPr>
           <a:xfrm>
-            <a:off x="2544372" y="1976163"/>
-            <a:ext cx="1234131" cy="228600"/>
-          </a:xfrm>
-          <a:prstGeom prst="rect">
-            <a:avLst/>
-          </a:prstGeom>
-          <a:noFill/>
-          <a:ln/>
-        </p:spPr>
-        <p:txBody>
-          <a:bodyPr wrap="square" lIns="47625" tIns="114300" rIns="114300" bIns="47625" rtlCol="0" anchor="ctr"/>
+            <a:off x="2544372" y="2038052"/>
+            <a:ext cx="1234131" cy="133350"/>
+          </a:xfrm>
+          <a:prstGeom prst="rect">
+            <a:avLst/>
+          </a:prstGeom>
+          <a:noFill/>
+          <a:ln/>
+        </p:spPr>
+        <p:txBody>
+          <a:bodyPr wrap="square" lIns="0" tIns="114300" rIns="114300" bIns="0" rtlCol="0" anchor="ctr"/>
           <a:lstStyle/>
           <a:p>
             <a:pPr algn="r" indent="0" marL="0">
@@ -4663,17 +4663,17 @@
         </p:nvSpPr>
         <p:spPr>
           <a:xfrm>
-            <a:off x="3745683" y="1976163"/>
-            <a:ext cx="1126828" cy="228600"/>
-          </a:xfrm>
-          <a:prstGeom prst="rect">
-            <a:avLst/>
-          </a:prstGeom>
-          <a:noFill/>
-          <a:ln/>
-        </p:spPr>
-        <p:txBody>
-          <a:bodyPr wrap="square" lIns="47625" tIns="114300" rIns="114300" bIns="47625" rtlCol="0" anchor="ctr"/>
+            <a:off x="3745683" y="2038052"/>
+            <a:ext cx="1126828" cy="133350"/>
+          </a:xfrm>
+          <a:prstGeom prst="rect">
+            <a:avLst/>
+          </a:prstGeom>
+          <a:noFill/>
+          <a:ln/>
+        </p:spPr>
+        <p:txBody>
+          <a:bodyPr wrap="square" lIns="0" tIns="114300" rIns="114300" bIns="0" rtlCol="0" anchor="ctr"/>
           <a:lstStyle/>
           <a:p>
             <a:pPr algn="r" indent="0" marL="0">
@@ -4702,17 +4702,17 @@
         </p:nvSpPr>
         <p:spPr>
           <a:xfrm>
-            <a:off x="7890764" y="1801141"/>
-            <a:ext cx="1100463" cy="228600"/>
-          </a:xfrm>
-          <a:prstGeom prst="rect">
-            <a:avLst/>
-          </a:prstGeom>
-          <a:noFill/>
-          <a:ln/>
-        </p:spPr>
-        <p:txBody>
-          <a:bodyPr wrap="square" lIns="47625" tIns="114300" rIns="114300" bIns="47625" rtlCol="0" anchor="ctr"/>
+            <a:off x="7890764" y="1863030"/>
+            <a:ext cx="1100463" cy="133350"/>
+          </a:xfrm>
+          <a:prstGeom prst="rect">
+            <a:avLst/>
+          </a:prstGeom>
+          <a:noFill/>
+          <a:ln/>
+        </p:spPr>
+        <p:txBody>
+          <a:bodyPr wrap="square" lIns="0" tIns="114300" rIns="114300" bIns="0" rtlCol="0" anchor="ctr"/>
           <a:lstStyle/>
           <a:p>
             <a:pPr algn="r" indent="0" marL="0">
@@ -4741,17 +4741,17 @@
         </p:nvSpPr>
         <p:spPr>
           <a:xfrm>
-            <a:off x="8960429" y="1801141"/>
-            <a:ext cx="1057388" cy="228600"/>
-          </a:xfrm>
-          <a:prstGeom prst="rect">
-            <a:avLst/>
-          </a:prstGeom>
-          <a:noFill/>
-          <a:ln/>
-        </p:spPr>
-        <p:txBody>
-          <a:bodyPr wrap="square" lIns="47625" tIns="114300" rIns="114300" bIns="47625" rtlCol="0" anchor="ctr"/>
+            <a:off x="8960429" y="1863030"/>
+            <a:ext cx="1057388" cy="133350"/>
+          </a:xfrm>
+          <a:prstGeom prst="rect">
+            <a:avLst/>
+          </a:prstGeom>
+          <a:noFill/>
+          <a:ln/>
+        </p:spPr>
+        <p:txBody>
+          <a:bodyPr wrap="square" lIns="0" tIns="114300" rIns="114300" bIns="0" rtlCol="0" anchor="ctr"/>
           <a:lstStyle/>
           <a:p>
             <a:pPr algn="r" indent="0" marL="0">
@@ -4780,17 +4780,17 @@
         </p:nvSpPr>
         <p:spPr>
           <a:xfrm>
-            <a:off x="704832" y="4789312"/>
-            <a:ext cx="1645712" cy="176212"/>
-          </a:xfrm>
-          <a:prstGeom prst="rect">
-            <a:avLst/>
-          </a:prstGeom>
-          <a:noFill/>
-          <a:ln/>
-        </p:spPr>
-        <p:txBody>
-          <a:bodyPr wrap="square" lIns="38100" tIns="114300" rIns="114300" bIns="38100" rtlCol="0" anchor="ctr"/>
+            <a:off x="704832" y="4841677"/>
+            <a:ext cx="1645712" cy="95250"/>
+          </a:xfrm>
+          <a:prstGeom prst="rect">
+            <a:avLst/>
+          </a:prstGeom>
+          <a:noFill/>
+          <a:ln/>
+        </p:spPr>
+        <p:txBody>
+          <a:bodyPr wrap="square" lIns="0" tIns="114300" rIns="114300" bIns="0" rtlCol="0" anchor="ctr"/>
           <a:lstStyle/>
           <a:p>
             <a:pPr algn="l" indent="0" marL="0">
@@ -4819,17 +4819,17 @@
         </p:nvSpPr>
         <p:spPr>
           <a:xfrm>
-            <a:off x="2968600" y="4789312"/>
-            <a:ext cx="1645865" cy="176212"/>
-          </a:xfrm>
-          <a:prstGeom prst="rect">
-            <a:avLst/>
-          </a:prstGeom>
-          <a:noFill/>
-          <a:ln/>
-        </p:spPr>
-        <p:txBody>
-          <a:bodyPr wrap="square" lIns="38100" tIns="114300" rIns="114300" bIns="38100" rtlCol="0" anchor="ctr"/>
+            <a:off x="2968600" y="4841677"/>
+            <a:ext cx="1645865" cy="95250"/>
+          </a:xfrm>
+          <a:prstGeom prst="rect">
+            <a:avLst/>
+          </a:prstGeom>
+          <a:noFill/>
+          <a:ln/>
+        </p:spPr>
+        <p:txBody>
+          <a:bodyPr wrap="square" lIns="0" tIns="114300" rIns="114300" bIns="0" rtlCol="0" anchor="ctr"/>
           <a:lstStyle/>
           <a:p>
             <a:pPr algn="l" indent="0" marL="0">
@@ -4858,17 +4858,17 @@
         </p:nvSpPr>
         <p:spPr>
           <a:xfrm>
-            <a:off x="4841240" y="1976163"/>
-            <a:ext cx="1073637" cy="228600"/>
-          </a:xfrm>
-          <a:prstGeom prst="rect">
-            <a:avLst/>
-          </a:prstGeom>
-          <a:noFill/>
-          <a:ln/>
-        </p:spPr>
-        <p:txBody>
-          <a:bodyPr wrap="square" lIns="47625" tIns="114300" rIns="114300" bIns="47625" rtlCol="0" anchor="ctr"/>
+            <a:off x="4841240" y="2038052"/>
+            <a:ext cx="1073637" cy="133350"/>
+          </a:xfrm>
+          <a:prstGeom prst="rect">
+            <a:avLst/>
+          </a:prstGeom>
+          <a:noFill/>
+          <a:ln/>
+        </p:spPr>
+        <p:txBody>
+          <a:bodyPr wrap="square" lIns="0" tIns="114300" rIns="114300" bIns="0" rtlCol="0" anchor="ctr"/>
           <a:lstStyle/>
           <a:p>
             <a:pPr algn="r" indent="0" marL="0">
@@ -4897,17 +4897,17 @@
         </p:nvSpPr>
         <p:spPr>
           <a:xfrm>
-            <a:off x="6295868" y="3461765"/>
-            <a:ext cx="1675757" cy="242888"/>
-          </a:xfrm>
-          <a:prstGeom prst="rect">
-            <a:avLst/>
-          </a:prstGeom>
-          <a:noFill/>
-          <a:ln/>
-        </p:spPr>
-        <p:txBody>
-          <a:bodyPr wrap="square" lIns="38100" tIns="114300" rIns="114300" bIns="38100" rtlCol="0" anchor="ctr"/>
+            <a:off x="6295868" y="3533180"/>
+            <a:ext cx="1675757" cy="133350"/>
+          </a:xfrm>
+          <a:prstGeom prst="rect">
+            <a:avLst/>
+          </a:prstGeom>
+          <a:noFill/>
+          <a:ln/>
+        </p:spPr>
+        <p:txBody>
+          <a:bodyPr wrap="square" lIns="0" tIns="114300" rIns="114300" bIns="0" rtlCol="0" anchor="ctr"/>
           <a:lstStyle/>
           <a:p>
             <a:pPr algn="l" indent="0" marL="0">
@@ -4936,17 +4936,17 @@
         </p:nvSpPr>
         <p:spPr>
           <a:xfrm>
-            <a:off x="704832" y="5508449"/>
-            <a:ext cx="1645712" cy="180975"/>
-          </a:xfrm>
-          <a:prstGeom prst="rect">
-            <a:avLst/>
-          </a:prstGeom>
-          <a:noFill/>
-          <a:ln/>
-        </p:spPr>
-        <p:txBody>
-          <a:bodyPr wrap="square" lIns="38100" tIns="114300" rIns="114300" bIns="38100" rtlCol="0" anchor="ctr"/>
+            <a:off x="704832" y="5565577"/>
+            <a:ext cx="1645712" cy="95250"/>
+          </a:xfrm>
+          <a:prstGeom prst="rect">
+            <a:avLst/>
+          </a:prstGeom>
+          <a:noFill/>
+          <a:ln/>
+        </p:spPr>
+        <p:txBody>
+          <a:bodyPr wrap="square" lIns="0" tIns="114300" rIns="114300" bIns="0" rtlCol="0" anchor="ctr"/>
           <a:lstStyle/>
           <a:p>
             <a:pPr algn="l" indent="0" marL="0">
@@ -5053,17 +5053,17 @@
         </p:nvSpPr>
         <p:spPr>
           <a:xfrm>
-            <a:off x="704832" y="4965524"/>
-            <a:ext cx="1645712" cy="180975"/>
-          </a:xfrm>
-          <a:prstGeom prst="rect">
-            <a:avLst/>
-          </a:prstGeom>
-          <a:noFill/>
-          <a:ln/>
-        </p:spPr>
-        <p:txBody>
-          <a:bodyPr wrap="square" lIns="38100" tIns="114300" rIns="114300" bIns="38100" rtlCol="0" anchor="ctr"/>
+            <a:off x="704832" y="5022652"/>
+            <a:ext cx="1645712" cy="95250"/>
+          </a:xfrm>
+          <a:prstGeom prst="rect">
+            <a:avLst/>
+          </a:prstGeom>
+          <a:noFill/>
+          <a:ln/>
+        </p:spPr>
+        <p:txBody>
+          <a:bodyPr wrap="square" lIns="0" tIns="114300" rIns="114300" bIns="0" rtlCol="0" anchor="ctr"/>
           <a:lstStyle/>
           <a:p>
             <a:pPr algn="l" indent="0" marL="0">
@@ -5092,17 +5092,17 @@
         </p:nvSpPr>
         <p:spPr>
           <a:xfrm>
-            <a:off x="2968600" y="5508449"/>
-            <a:ext cx="1645865" cy="180975"/>
-          </a:xfrm>
-          <a:prstGeom prst="rect">
-            <a:avLst/>
-          </a:prstGeom>
-          <a:noFill/>
-          <a:ln/>
-        </p:spPr>
-        <p:txBody>
-          <a:bodyPr wrap="square" lIns="38100" tIns="114300" rIns="114300" bIns="38100" rtlCol="0" anchor="ctr"/>
+            <a:off x="2968600" y="5565577"/>
+            <a:ext cx="1645865" cy="95250"/>
+          </a:xfrm>
+          <a:prstGeom prst="rect">
+            <a:avLst/>
+          </a:prstGeom>
+          <a:noFill/>
+          <a:ln/>
+        </p:spPr>
+        <p:txBody>
+          <a:bodyPr wrap="square" lIns="0" tIns="114300" rIns="114300" bIns="0" rtlCol="0" anchor="ctr"/>
           <a:lstStyle/>
           <a:p>
             <a:pPr algn="l" indent="0" marL="0">
@@ -5209,17 +5209,17 @@
         </p:nvSpPr>
         <p:spPr>
           <a:xfrm>
-            <a:off x="9992957" y="1801141"/>
-            <a:ext cx="853514" cy="228600"/>
-          </a:xfrm>
-          <a:prstGeom prst="rect">
-            <a:avLst/>
-          </a:prstGeom>
-          <a:noFill/>
-          <a:ln/>
-        </p:spPr>
-        <p:txBody>
-          <a:bodyPr wrap="square" lIns="47625" tIns="114300" rIns="114300" bIns="47625" rtlCol="0" anchor="ctr"/>
+            <a:off x="9992957" y="1863030"/>
+            <a:ext cx="853514" cy="133350"/>
+          </a:xfrm>
+          <a:prstGeom prst="rect">
+            <a:avLst/>
+          </a:prstGeom>
+          <a:noFill/>
+          <a:ln/>
+        </p:spPr>
+        <p:txBody>
+          <a:bodyPr wrap="square" lIns="0" tIns="114300" rIns="114300" bIns="0" rtlCol="0" anchor="ctr"/>
           <a:lstStyle/>
           <a:p>
             <a:pPr algn="r" indent="0" marL="0">
@@ -5248,17 +5248,17 @@
         </p:nvSpPr>
         <p:spPr>
           <a:xfrm>
-            <a:off x="2968600" y="5689424"/>
-            <a:ext cx="1645865" cy="176212"/>
-          </a:xfrm>
-          <a:prstGeom prst="rect">
-            <a:avLst/>
-          </a:prstGeom>
-          <a:noFill/>
-          <a:ln/>
-        </p:spPr>
-        <p:txBody>
-          <a:bodyPr wrap="square" lIns="38100" tIns="114300" rIns="114300" bIns="38100" rtlCol="0" anchor="ctr"/>
+            <a:off x="2968600" y="5746552"/>
+            <a:ext cx="1645865" cy="95250"/>
+          </a:xfrm>
+          <a:prstGeom prst="rect">
+            <a:avLst/>
+          </a:prstGeom>
+          <a:noFill/>
+          <a:ln/>
+        </p:spPr>
+        <p:txBody>
+          <a:bodyPr wrap="square" lIns="0" tIns="114300" rIns="114300" bIns="0" rtlCol="0" anchor="ctr"/>
           <a:lstStyle/>
           <a:p>
             <a:pPr algn="l" indent="0" marL="0">
@@ -5326,17 +5326,17 @@
         </p:nvSpPr>
         <p:spPr>
           <a:xfrm>
-            <a:off x="1507140" y="1976163"/>
-            <a:ext cx="1073177" cy="228600"/>
-          </a:xfrm>
-          <a:prstGeom prst="rect">
-            <a:avLst/>
-          </a:prstGeom>
-          <a:noFill/>
-          <a:ln/>
-        </p:spPr>
-        <p:txBody>
-          <a:bodyPr wrap="square" lIns="47625" tIns="114300" rIns="114300" bIns="47625" rtlCol="0" anchor="ctr"/>
+            <a:off x="1507140" y="2038052"/>
+            <a:ext cx="1073177" cy="133350"/>
+          </a:xfrm>
+          <a:prstGeom prst="rect">
+            <a:avLst/>
+          </a:prstGeom>
+          <a:noFill/>
+          <a:ln/>
+        </p:spPr>
+        <p:txBody>
+          <a:bodyPr wrap="square" lIns="0" tIns="114300" rIns="114300" bIns="0" rtlCol="0" anchor="ctr"/>
           <a:lstStyle/>
           <a:p>
             <a:pPr algn="r" indent="0" marL="0">
@@ -5365,17 +5365,17 @@
         </p:nvSpPr>
         <p:spPr>
           <a:xfrm>
-            <a:off x="704832" y="3685900"/>
-            <a:ext cx="858572" cy="242888"/>
-          </a:xfrm>
-          <a:prstGeom prst="rect">
-            <a:avLst/>
-          </a:prstGeom>
-          <a:noFill/>
-          <a:ln/>
-        </p:spPr>
-        <p:txBody>
-          <a:bodyPr wrap="square" lIns="38100" tIns="114300" rIns="114300" bIns="38100" rtlCol="0" anchor="ctr"/>
+            <a:off x="704832" y="3757315"/>
+            <a:ext cx="858572" cy="133350"/>
+          </a:xfrm>
+          <a:prstGeom prst="rect">
+            <a:avLst/>
+          </a:prstGeom>
+          <a:noFill/>
+          <a:ln/>
+        </p:spPr>
+        <p:txBody>
+          <a:bodyPr wrap="square" lIns="0" tIns="114300" rIns="114300" bIns="0" rtlCol="0" anchor="ctr"/>
           <a:lstStyle/>
           <a:p>
             <a:pPr algn="l" indent="0" marL="0">
@@ -5404,17 +5404,17 @@
         </p:nvSpPr>
         <p:spPr>
           <a:xfrm>
-            <a:off x="2968600" y="4965524"/>
-            <a:ext cx="1645865" cy="180975"/>
-          </a:xfrm>
-          <a:prstGeom prst="rect">
-            <a:avLst/>
-          </a:prstGeom>
-          <a:noFill/>
-          <a:ln/>
-        </p:spPr>
-        <p:txBody>
-          <a:bodyPr wrap="square" lIns="38100" tIns="114300" rIns="114300" bIns="38100" rtlCol="0" anchor="ctr"/>
+            <a:off x="2968600" y="5022652"/>
+            <a:ext cx="1645865" cy="95250"/>
+          </a:xfrm>
+          <a:prstGeom prst="rect">
+            <a:avLst/>
+          </a:prstGeom>
+          <a:noFill/>
+          <a:ln/>
+        </p:spPr>
+        <p:txBody>
+          <a:bodyPr wrap="square" lIns="0" tIns="114300" rIns="114300" bIns="0" rtlCol="0" anchor="ctr"/>
           <a:lstStyle/>
           <a:p>
             <a:pPr algn="l" indent="0" marL="0">
@@ -5443,17 +5443,17 @@
         </p:nvSpPr>
         <p:spPr>
           <a:xfrm>
-            <a:off x="2968600" y="5327474"/>
-            <a:ext cx="1645865" cy="180975"/>
-          </a:xfrm>
-          <a:prstGeom prst="rect">
-            <a:avLst/>
-          </a:prstGeom>
-          <a:noFill/>
-          <a:ln/>
-        </p:spPr>
-        <p:txBody>
-          <a:bodyPr wrap="square" lIns="38100" tIns="114300" rIns="114300" bIns="38100" rtlCol="0" anchor="ctr"/>
+            <a:off x="2968600" y="5384602"/>
+            <a:ext cx="1645865" cy="95250"/>
+          </a:xfrm>
+          <a:prstGeom prst="rect">
+            <a:avLst/>
+          </a:prstGeom>
+          <a:noFill/>
+          <a:ln/>
+        </p:spPr>
+        <p:txBody>
+          <a:bodyPr wrap="square" lIns="0" tIns="114300" rIns="114300" bIns="0" rtlCol="0" anchor="ctr"/>
           <a:lstStyle/>
           <a:p>
             <a:pPr algn="l" indent="0" marL="0">
@@ -5482,17 +5482,17 @@
         </p:nvSpPr>
         <p:spPr>
           <a:xfrm>
-            <a:off x="10827831" y="1801141"/>
-            <a:ext cx="639982" cy="228600"/>
-          </a:xfrm>
-          <a:prstGeom prst="rect">
-            <a:avLst/>
-          </a:prstGeom>
-          <a:noFill/>
-          <a:ln/>
-        </p:spPr>
-        <p:txBody>
-          <a:bodyPr wrap="square" lIns="47625" tIns="114300" rIns="114300" bIns="47625" rtlCol="0" anchor="ctr"/>
+            <a:off x="10827831" y="1863030"/>
+            <a:ext cx="639982" cy="133350"/>
+          </a:xfrm>
+          <a:prstGeom prst="rect">
+            <a:avLst/>
+          </a:prstGeom>
+          <a:noFill/>
+          <a:ln/>
+        </p:spPr>
+        <p:txBody>
+          <a:bodyPr wrap="square" lIns="0" tIns="114300" rIns="114300" bIns="0" rtlCol="0" anchor="ctr"/>
           <a:lstStyle/>
           <a:p>
             <a:pPr algn="r" indent="0" marL="0">
@@ -5521,17 +5521,17 @@
         </p:nvSpPr>
         <p:spPr>
           <a:xfrm>
-            <a:off x="9992957" y="3461765"/>
-            <a:ext cx="853514" cy="242888"/>
-          </a:xfrm>
-          <a:prstGeom prst="rect">
-            <a:avLst/>
-          </a:prstGeom>
-          <a:noFill/>
-          <a:ln/>
-        </p:spPr>
-        <p:txBody>
-          <a:bodyPr wrap="square" lIns="38100" tIns="114300" rIns="114300" bIns="38100" rtlCol="0" anchor="ctr"/>
+            <a:off x="9992957" y="3537942"/>
+            <a:ext cx="853514" cy="123825"/>
+          </a:xfrm>
+          <a:prstGeom prst="rect">
+            <a:avLst/>
+          </a:prstGeom>
+          <a:noFill/>
+          <a:ln/>
+        </p:spPr>
+        <p:txBody>
+          <a:bodyPr wrap="square" lIns="0" tIns="114300" rIns="114300" bIns="0" rtlCol="0" anchor="ctr"/>
           <a:lstStyle/>
           <a:p>
             <a:pPr algn="r" indent="0" marL="0">
@@ -5560,17 +5560,17 @@
         </p:nvSpPr>
         <p:spPr>
           <a:xfrm>
-            <a:off x="6295868" y="1801141"/>
-            <a:ext cx="1675757" cy="228600"/>
-          </a:xfrm>
-          <a:prstGeom prst="rect">
-            <a:avLst/>
-          </a:prstGeom>
-          <a:noFill/>
-          <a:ln/>
-        </p:spPr>
-        <p:txBody>
-          <a:bodyPr wrap="square" lIns="47625" tIns="114300" rIns="114300" bIns="47625" rtlCol="0" anchor="ctr"/>
+            <a:off x="6295868" y="1863030"/>
+            <a:ext cx="1675757" cy="133350"/>
+          </a:xfrm>
+          <a:prstGeom prst="rect">
+            <a:avLst/>
+          </a:prstGeom>
+          <a:noFill/>
+          <a:ln/>
+        </p:spPr>
+        <p:txBody>
+          <a:bodyPr wrap="square" lIns="0" tIns="114300" rIns="114300" bIns="0" rtlCol="0" anchor="ctr"/>
           <a:lstStyle/>
           <a:p>
             <a:pPr algn="l" indent="0" marL="0">
@@ -5599,17 +5599,17 @@
         </p:nvSpPr>
         <p:spPr>
           <a:xfrm>
-            <a:off x="9992957" y="2029741"/>
-            <a:ext cx="853514" cy="347663"/>
-          </a:xfrm>
-          <a:prstGeom prst="rect">
-            <a:avLst/>
-          </a:prstGeom>
-          <a:noFill/>
-          <a:ln/>
-        </p:spPr>
-        <p:txBody>
-          <a:bodyPr wrap="square" lIns="38100" tIns="114300" rIns="114300" bIns="38100" rtlCol="0" anchor="ctr"/>
+            <a:off x="9992957" y="2153543"/>
+            <a:ext cx="853514" cy="123825"/>
+          </a:xfrm>
+          <a:prstGeom prst="rect">
+            <a:avLst/>
+          </a:prstGeom>
+          <a:noFill/>
+          <a:ln/>
+        </p:spPr>
+        <p:txBody>
+          <a:bodyPr wrap="square" lIns="0" tIns="114300" rIns="114300" bIns="0" rtlCol="0" anchor="ctr"/>
           <a:lstStyle/>
           <a:p>
             <a:pPr algn="r" indent="0" marL="0">
@@ -5638,17 +5638,17 @@
         </p:nvSpPr>
         <p:spPr>
           <a:xfrm>
-            <a:off x="704832" y="5689424"/>
-            <a:ext cx="1645712" cy="176212"/>
-          </a:xfrm>
-          <a:prstGeom prst="rect">
-            <a:avLst/>
-          </a:prstGeom>
-          <a:noFill/>
-          <a:ln/>
-        </p:spPr>
-        <p:txBody>
-          <a:bodyPr wrap="square" lIns="38100" tIns="114300" rIns="114300" bIns="38100" rtlCol="0" anchor="ctr"/>
+            <a:off x="704832" y="5746552"/>
+            <a:ext cx="1645712" cy="95250"/>
+          </a:xfrm>
+          <a:prstGeom prst="rect">
+            <a:avLst/>
+          </a:prstGeom>
+          <a:noFill/>
+          <a:ln/>
+        </p:spPr>
+        <p:txBody>
+          <a:bodyPr wrap="square" lIns="0" tIns="114300" rIns="114300" bIns="0" rtlCol="0" anchor="ctr"/>
           <a:lstStyle/>
           <a:p>
             <a:pPr algn="l" indent="0" marL="0">
@@ -5716,17 +5716,17 @@
         </p:nvSpPr>
         <p:spPr>
           <a:xfrm>
-            <a:off x="4841240" y="2204763"/>
-            <a:ext cx="1073637" cy="242888"/>
-          </a:xfrm>
-          <a:prstGeom prst="rect">
-            <a:avLst/>
-          </a:prstGeom>
-          <a:noFill/>
-          <a:ln/>
-        </p:spPr>
-        <p:txBody>
-          <a:bodyPr wrap="square" lIns="38100" tIns="114300" rIns="114300" bIns="38100" rtlCol="0" anchor="ctr"/>
+            <a:off x="4841240" y="2276177"/>
+            <a:ext cx="1073637" cy="123825"/>
+          </a:xfrm>
+          <a:prstGeom prst="rect">
+            <a:avLst/>
+          </a:prstGeom>
+          <a:noFill/>
+          <a:ln/>
+        </p:spPr>
+        <p:txBody>
+          <a:bodyPr wrap="square" lIns="0" tIns="114300" rIns="114300" bIns="0" rtlCol="0" anchor="ctr"/>
           <a:lstStyle/>
           <a:p>
             <a:pPr algn="r" indent="0" marL="0">
@@ -5755,17 +5755,17 @@
         </p:nvSpPr>
         <p:spPr>
           <a:xfrm>
-            <a:off x="4841240" y="2447650"/>
-            <a:ext cx="1073637" cy="247650"/>
-          </a:xfrm>
-          <a:prstGeom prst="rect">
-            <a:avLst/>
-          </a:prstGeom>
-          <a:noFill/>
-          <a:ln/>
-        </p:spPr>
-        <p:txBody>
-          <a:bodyPr wrap="square" lIns="38100" tIns="114300" rIns="114300" bIns="38100" rtlCol="0" anchor="ctr"/>
+            <a:off x="4841240" y="2523827"/>
+            <a:ext cx="1073637" cy="123825"/>
+          </a:xfrm>
+          <a:prstGeom prst="rect">
+            <a:avLst/>
+          </a:prstGeom>
+          <a:noFill/>
+          <a:ln/>
+        </p:spPr>
+        <p:txBody>
+          <a:bodyPr wrap="square" lIns="0" tIns="114300" rIns="114300" bIns="0" rtlCol="0" anchor="ctr"/>
           <a:lstStyle/>
           <a:p>
             <a:pPr algn="r" indent="0" marL="0">
@@ -5794,17 +5794,17 @@
         </p:nvSpPr>
         <p:spPr>
           <a:xfrm>
-            <a:off x="4841240" y="2695300"/>
-            <a:ext cx="1073637" cy="247650"/>
-          </a:xfrm>
-          <a:prstGeom prst="rect">
-            <a:avLst/>
-          </a:prstGeom>
-          <a:noFill/>
-          <a:ln/>
-        </p:spPr>
-        <p:txBody>
-          <a:bodyPr wrap="square" lIns="38100" tIns="114300" rIns="114300" bIns="38100" rtlCol="0" anchor="ctr"/>
+            <a:off x="4841240" y="2771477"/>
+            <a:ext cx="1073637" cy="123825"/>
+          </a:xfrm>
+          <a:prstGeom prst="rect">
+            <a:avLst/>
+          </a:prstGeom>
+          <a:noFill/>
+          <a:ln/>
+        </p:spPr>
+        <p:txBody>
+          <a:bodyPr wrap="square" lIns="0" tIns="114300" rIns="114300" bIns="0" rtlCol="0" anchor="ctr"/>
           <a:lstStyle/>
           <a:p>
             <a:pPr algn="r" indent="0" marL="0">
@@ -5833,17 +5833,17 @@
         </p:nvSpPr>
         <p:spPr>
           <a:xfrm>
-            <a:off x="4841240" y="2942950"/>
-            <a:ext cx="1073637" cy="247650"/>
-          </a:xfrm>
-          <a:prstGeom prst="rect">
-            <a:avLst/>
-          </a:prstGeom>
-          <a:noFill/>
-          <a:ln/>
-        </p:spPr>
-        <p:txBody>
-          <a:bodyPr wrap="square" lIns="38100" tIns="114300" rIns="114300" bIns="38100" rtlCol="0" anchor="ctr"/>
+            <a:off x="4841240" y="3019127"/>
+            <a:ext cx="1073637" cy="123825"/>
+          </a:xfrm>
+          <a:prstGeom prst="rect">
+            <a:avLst/>
+          </a:prstGeom>
+          <a:noFill/>
+          <a:ln/>
+        </p:spPr>
+        <p:txBody>
+          <a:bodyPr wrap="square" lIns="0" tIns="114300" rIns="114300" bIns="0" rtlCol="0" anchor="ctr"/>
           <a:lstStyle/>
           <a:p>
             <a:pPr algn="r" indent="0" marL="0">
@@ -5872,17 +5872,17 @@
         </p:nvSpPr>
         <p:spPr>
           <a:xfrm>
-            <a:off x="4841240" y="3190600"/>
-            <a:ext cx="1073637" cy="247650"/>
-          </a:xfrm>
-          <a:prstGeom prst="rect">
-            <a:avLst/>
-          </a:prstGeom>
-          <a:noFill/>
-          <a:ln/>
-        </p:spPr>
-        <p:txBody>
-          <a:bodyPr wrap="square" lIns="38100" tIns="114300" rIns="114300" bIns="38100" rtlCol="0" anchor="ctr"/>
+            <a:off x="4841240" y="3266777"/>
+            <a:ext cx="1073637" cy="123825"/>
+          </a:xfrm>
+          <a:prstGeom prst="rect">
+            <a:avLst/>
+          </a:prstGeom>
+          <a:noFill/>
+          <a:ln/>
+        </p:spPr>
+        <p:txBody>
+          <a:bodyPr wrap="square" lIns="0" tIns="114300" rIns="114300" bIns="0" rtlCol="0" anchor="ctr"/>
           <a:lstStyle/>
           <a:p>
             <a:pPr algn="r" indent="0" marL="0">
@@ -5911,17 +5911,17 @@
         </p:nvSpPr>
         <p:spPr>
           <a:xfrm>
-            <a:off x="4841240" y="3438250"/>
-            <a:ext cx="1073637" cy="247650"/>
-          </a:xfrm>
-          <a:prstGeom prst="rect">
-            <a:avLst/>
-          </a:prstGeom>
-          <a:noFill/>
-          <a:ln/>
-        </p:spPr>
-        <p:txBody>
-          <a:bodyPr wrap="square" lIns="38100" tIns="114300" rIns="114300" bIns="38100" rtlCol="0" anchor="ctr"/>
+            <a:off x="4841240" y="3514427"/>
+            <a:ext cx="1073637" cy="123825"/>
+          </a:xfrm>
+          <a:prstGeom prst="rect">
+            <a:avLst/>
+          </a:prstGeom>
+          <a:noFill/>
+          <a:ln/>
+        </p:spPr>
+        <p:txBody>
+          <a:bodyPr wrap="square" lIns="0" tIns="114300" rIns="114300" bIns="0" rtlCol="0" anchor="ctr"/>
           <a:lstStyle/>
           <a:p>
             <a:pPr algn="r" indent="0" marL="0">
@@ -5950,17 +5950,17 @@
         </p:nvSpPr>
         <p:spPr>
           <a:xfrm>
-            <a:off x="4841240" y="3685900"/>
-            <a:ext cx="1073637" cy="242888"/>
-          </a:xfrm>
-          <a:prstGeom prst="rect">
-            <a:avLst/>
-          </a:prstGeom>
-          <a:noFill/>
-          <a:ln/>
-        </p:spPr>
-        <p:txBody>
-          <a:bodyPr wrap="square" lIns="38100" tIns="114300" rIns="114300" bIns="38100" rtlCol="0" anchor="ctr"/>
+            <a:off x="4841240" y="3762077"/>
+            <a:ext cx="1073637" cy="123825"/>
+          </a:xfrm>
+          <a:prstGeom prst="rect">
+            <a:avLst/>
+          </a:prstGeom>
+          <a:noFill/>
+          <a:ln/>
+        </p:spPr>
+        <p:txBody>
+          <a:bodyPr wrap="square" lIns="0" tIns="114300" rIns="114300" bIns="0" rtlCol="0" anchor="ctr"/>
           <a:lstStyle/>
           <a:p>
             <a:pPr algn="r" indent="0" marL="0">
@@ -5989,17 +5989,17 @@
         </p:nvSpPr>
         <p:spPr>
           <a:xfrm>
-            <a:off x="9992957" y="2377403"/>
-            <a:ext cx="853514" cy="365968"/>
-          </a:xfrm>
-          <a:prstGeom prst="rect">
-            <a:avLst/>
-          </a:prstGeom>
-          <a:noFill/>
-          <a:ln/>
-        </p:spPr>
-        <p:txBody>
-          <a:bodyPr wrap="square" lIns="38100" tIns="114300" rIns="114300" bIns="38100" rtlCol="0" anchor="ctr"/>
+            <a:off x="9992957" y="2512665"/>
+            <a:ext cx="853514" cy="123825"/>
+          </a:xfrm>
+          <a:prstGeom prst="rect">
+            <a:avLst/>
+          </a:prstGeom>
+          <a:noFill/>
+          <a:ln/>
+        </p:spPr>
+        <p:txBody>
+          <a:bodyPr wrap="square" lIns="0" tIns="114300" rIns="114300" bIns="0" rtlCol="0" anchor="ctr"/>
           <a:lstStyle/>
           <a:p>
             <a:pPr algn="r" indent="0" marL="0">
@@ -6028,17 +6028,17 @@
         </p:nvSpPr>
         <p:spPr>
           <a:xfrm>
-            <a:off x="9992957" y="2743372"/>
-            <a:ext cx="853514" cy="352425"/>
-          </a:xfrm>
-          <a:prstGeom prst="rect">
-            <a:avLst/>
-          </a:prstGeom>
-          <a:noFill/>
-          <a:ln/>
-        </p:spPr>
-        <p:txBody>
-          <a:bodyPr wrap="square" lIns="38100" tIns="114300" rIns="114300" bIns="38100" rtlCol="0" anchor="ctr"/>
+            <a:off x="9992957" y="2871936"/>
+            <a:ext cx="853514" cy="123825"/>
+          </a:xfrm>
+          <a:prstGeom prst="rect">
+            <a:avLst/>
+          </a:prstGeom>
+          <a:noFill/>
+          <a:ln/>
+        </p:spPr>
+        <p:txBody>
+          <a:bodyPr wrap="square" lIns="0" tIns="114300" rIns="114300" bIns="0" rtlCol="0" anchor="ctr"/>
           <a:lstStyle/>
           <a:p>
             <a:pPr algn="r" indent="0" marL="0">
@@ -6067,17 +6067,17 @@
         </p:nvSpPr>
         <p:spPr>
           <a:xfrm>
-            <a:off x="704832" y="5327474"/>
-            <a:ext cx="1645712" cy="180975"/>
-          </a:xfrm>
-          <a:prstGeom prst="rect">
-            <a:avLst/>
-          </a:prstGeom>
-          <a:noFill/>
-          <a:ln/>
-        </p:spPr>
-        <p:txBody>
-          <a:bodyPr wrap="square" lIns="38100" tIns="114300" rIns="114300" bIns="38100" rtlCol="0" anchor="ctr"/>
+            <a:off x="704832" y="5384602"/>
+            <a:ext cx="1645712" cy="95250"/>
+          </a:xfrm>
+          <a:prstGeom prst="rect">
+            <a:avLst/>
+          </a:prstGeom>
+          <a:noFill/>
+          <a:ln/>
+        </p:spPr>
+        <p:txBody>
+          <a:bodyPr wrap="square" lIns="0" tIns="114300" rIns="114300" bIns="0" rtlCol="0" anchor="ctr"/>
           <a:lstStyle/>
           <a:p>
             <a:pPr algn="l" indent="0" marL="0">
@@ -6106,17 +6106,17 @@
         </p:nvSpPr>
         <p:spPr>
           <a:xfrm>
-            <a:off x="9992957" y="3095797"/>
-            <a:ext cx="853514" cy="365968"/>
-          </a:xfrm>
-          <a:prstGeom prst="rect">
-            <a:avLst/>
-          </a:prstGeom>
-          <a:noFill/>
-          <a:ln/>
-        </p:spPr>
-        <p:txBody>
-          <a:bodyPr wrap="square" lIns="38100" tIns="114300" rIns="114300" bIns="38100" rtlCol="0" anchor="ctr"/>
+            <a:off x="9992957" y="3231059"/>
+            <a:ext cx="853514" cy="123825"/>
+          </a:xfrm>
+          <a:prstGeom prst="rect">
+            <a:avLst/>
+          </a:prstGeom>
+          <a:noFill/>
+          <a:ln/>
+        </p:spPr>
+        <p:txBody>
+          <a:bodyPr wrap="square" lIns="0" tIns="114300" rIns="114300" bIns="0" rtlCol="0" anchor="ctr"/>
           <a:lstStyle/>
           <a:p>
             <a:pPr algn="r" indent="0" marL="0">
@@ -6145,17 +6145,17 @@
         </p:nvSpPr>
         <p:spPr>
           <a:xfrm>
-            <a:off x="2968600" y="5146499"/>
-            <a:ext cx="1645865" cy="180975"/>
-          </a:xfrm>
-          <a:prstGeom prst="rect">
-            <a:avLst/>
-          </a:prstGeom>
-          <a:noFill/>
-          <a:ln/>
-        </p:spPr>
-        <p:txBody>
-          <a:bodyPr wrap="square" lIns="38100" tIns="114300" rIns="114300" bIns="38100" rtlCol="0" anchor="ctr"/>
+            <a:off x="2968600" y="5203627"/>
+            <a:ext cx="1645865" cy="95250"/>
+          </a:xfrm>
+          <a:prstGeom prst="rect">
+            <a:avLst/>
+          </a:prstGeom>
+          <a:noFill/>
+          <a:ln/>
+        </p:spPr>
+        <p:txBody>
+          <a:bodyPr wrap="square" lIns="0" tIns="114300" rIns="114300" bIns="0" rtlCol="0" anchor="ctr"/>
           <a:lstStyle/>
           <a:p>
             <a:pPr algn="l" indent="0" marL="0">
@@ -6184,17 +6184,17 @@
         </p:nvSpPr>
         <p:spPr>
           <a:xfrm>
-            <a:off x="704832" y="1976163"/>
-            <a:ext cx="858572" cy="228600"/>
-          </a:xfrm>
-          <a:prstGeom prst="rect">
-            <a:avLst/>
-          </a:prstGeom>
-          <a:noFill/>
-          <a:ln/>
-        </p:spPr>
-        <p:txBody>
-          <a:bodyPr wrap="square" lIns="47625" tIns="114300" rIns="114300" bIns="47625" rtlCol="0" anchor="ctr"/>
+            <a:off x="704832" y="2038052"/>
+            <a:ext cx="858572" cy="133350"/>
+          </a:xfrm>
+          <a:prstGeom prst="rect">
+            <a:avLst/>
+          </a:prstGeom>
+          <a:noFill/>
+          <a:ln/>
+        </p:spPr>
+        <p:txBody>
+          <a:bodyPr wrap="square" lIns="0" tIns="114300" rIns="114300" bIns="0" rtlCol="0" anchor="ctr"/>
           <a:lstStyle/>
           <a:p>
             <a:pPr algn="l" indent="0" marL="0">
@@ -6223,17 +6223,17 @@
         </p:nvSpPr>
         <p:spPr>
           <a:xfrm>
-            <a:off x="704832" y="2204763"/>
-            <a:ext cx="858572" cy="242888"/>
-          </a:xfrm>
-          <a:prstGeom prst="rect">
-            <a:avLst/>
-          </a:prstGeom>
-          <a:noFill/>
-          <a:ln/>
-        </p:spPr>
-        <p:txBody>
-          <a:bodyPr wrap="square" lIns="38100" tIns="114300" rIns="114300" bIns="38100" rtlCol="0" anchor="ctr"/>
+            <a:off x="704832" y="2271415"/>
+            <a:ext cx="858572" cy="133350"/>
+          </a:xfrm>
+          <a:prstGeom prst="rect">
+            <a:avLst/>
+          </a:prstGeom>
+          <a:noFill/>
+          <a:ln/>
+        </p:spPr>
+        <p:txBody>
+          <a:bodyPr wrap="square" lIns="0" tIns="114300" rIns="114300" bIns="0" rtlCol="0" anchor="ctr"/>
           <a:lstStyle/>
           <a:p>
             <a:pPr algn="l" indent="0" marL="0">
@@ -6262,17 +6262,17 @@
         </p:nvSpPr>
         <p:spPr>
           <a:xfrm>
-            <a:off x="1507140" y="2204763"/>
-            <a:ext cx="1073177" cy="242888"/>
-          </a:xfrm>
-          <a:prstGeom prst="rect">
-            <a:avLst/>
-          </a:prstGeom>
-          <a:noFill/>
-          <a:ln/>
-        </p:spPr>
-        <p:txBody>
-          <a:bodyPr wrap="square" lIns="38100" tIns="114300" rIns="114300" bIns="38100" rtlCol="0" anchor="ctr"/>
+            <a:off x="1507140" y="2271415"/>
+            <a:ext cx="1073177" cy="133350"/>
+          </a:xfrm>
+          <a:prstGeom prst="rect">
+            <a:avLst/>
+          </a:prstGeom>
+          <a:noFill/>
+          <a:ln/>
+        </p:spPr>
+        <p:txBody>
+          <a:bodyPr wrap="square" lIns="0" tIns="114300" rIns="114300" bIns="0" rtlCol="0" anchor="ctr"/>
           <a:lstStyle/>
           <a:p>
             <a:pPr algn="r" indent="0" marL="0">
@@ -6301,17 +6301,17 @@
         </p:nvSpPr>
         <p:spPr>
           <a:xfrm>
-            <a:off x="704832" y="2447650"/>
-            <a:ext cx="858572" cy="247650"/>
-          </a:xfrm>
-          <a:prstGeom prst="rect">
-            <a:avLst/>
-          </a:prstGeom>
-          <a:noFill/>
-          <a:ln/>
-        </p:spPr>
-        <p:txBody>
-          <a:bodyPr wrap="square" lIns="38100" tIns="114300" rIns="114300" bIns="38100" rtlCol="0" anchor="ctr"/>
+            <a:off x="704832" y="2519065"/>
+            <a:ext cx="858572" cy="133350"/>
+          </a:xfrm>
+          <a:prstGeom prst="rect">
+            <a:avLst/>
+          </a:prstGeom>
+          <a:noFill/>
+          <a:ln/>
+        </p:spPr>
+        <p:txBody>
+          <a:bodyPr wrap="square" lIns="0" tIns="114300" rIns="114300" bIns="0" rtlCol="0" anchor="ctr"/>
           <a:lstStyle/>
           <a:p>
             <a:pPr algn="l" indent="0" marL="0">
@@ -6340,17 +6340,17 @@
         </p:nvSpPr>
         <p:spPr>
           <a:xfrm>
-            <a:off x="1507140" y="2447650"/>
-            <a:ext cx="1073177" cy="247650"/>
-          </a:xfrm>
-          <a:prstGeom prst="rect">
-            <a:avLst/>
-          </a:prstGeom>
-          <a:noFill/>
-          <a:ln/>
-        </p:spPr>
-        <p:txBody>
-          <a:bodyPr wrap="square" lIns="38100" tIns="114300" rIns="114300" bIns="38100" rtlCol="0" anchor="ctr"/>
+            <a:off x="1507140" y="2519065"/>
+            <a:ext cx="1073177" cy="133350"/>
+          </a:xfrm>
+          <a:prstGeom prst="rect">
+            <a:avLst/>
+          </a:prstGeom>
+          <a:noFill/>
+          <a:ln/>
+        </p:spPr>
+        <p:txBody>
+          <a:bodyPr wrap="square" lIns="0" tIns="114300" rIns="114300" bIns="0" rtlCol="0" anchor="ctr"/>
           <a:lstStyle/>
           <a:p>
             <a:pPr algn="r" indent="0" marL="0">
@@ -6379,17 +6379,17 @@
         </p:nvSpPr>
         <p:spPr>
           <a:xfrm>
-            <a:off x="704832" y="2695300"/>
-            <a:ext cx="858572" cy="247650"/>
-          </a:xfrm>
-          <a:prstGeom prst="rect">
-            <a:avLst/>
-          </a:prstGeom>
-          <a:noFill/>
-          <a:ln/>
-        </p:spPr>
-        <p:txBody>
-          <a:bodyPr wrap="square" lIns="38100" tIns="114300" rIns="114300" bIns="38100" rtlCol="0" anchor="ctr"/>
+            <a:off x="704832" y="2766715"/>
+            <a:ext cx="858572" cy="133350"/>
+          </a:xfrm>
+          <a:prstGeom prst="rect">
+            <a:avLst/>
+          </a:prstGeom>
+          <a:noFill/>
+          <a:ln/>
+        </p:spPr>
+        <p:txBody>
+          <a:bodyPr wrap="square" lIns="0" tIns="114300" rIns="114300" bIns="0" rtlCol="0" anchor="ctr"/>
           <a:lstStyle/>
           <a:p>
             <a:pPr algn="l" indent="0" marL="0">
@@ -6418,17 +6418,17 @@
         </p:nvSpPr>
         <p:spPr>
           <a:xfrm>
-            <a:off x="1507140" y="2695300"/>
-            <a:ext cx="1073177" cy="247650"/>
-          </a:xfrm>
-          <a:prstGeom prst="rect">
-            <a:avLst/>
-          </a:prstGeom>
-          <a:noFill/>
-          <a:ln/>
-        </p:spPr>
-        <p:txBody>
-          <a:bodyPr wrap="square" lIns="38100" tIns="114300" rIns="114300" bIns="38100" rtlCol="0" anchor="ctr"/>
+            <a:off x="1507140" y="2766715"/>
+            <a:ext cx="1073177" cy="133350"/>
+          </a:xfrm>
+          <a:prstGeom prst="rect">
+            <a:avLst/>
+          </a:prstGeom>
+          <a:noFill/>
+          <a:ln/>
+        </p:spPr>
+        <p:txBody>
+          <a:bodyPr wrap="square" lIns="0" tIns="114300" rIns="114300" bIns="0" rtlCol="0" anchor="ctr"/>
           <a:lstStyle/>
           <a:p>
             <a:pPr algn="r" indent="0" marL="0">
@@ -6457,17 +6457,17 @@
         </p:nvSpPr>
         <p:spPr>
           <a:xfrm>
-            <a:off x="704832" y="2942950"/>
-            <a:ext cx="858572" cy="247650"/>
-          </a:xfrm>
-          <a:prstGeom prst="rect">
-            <a:avLst/>
-          </a:prstGeom>
-          <a:noFill/>
-          <a:ln/>
-        </p:spPr>
-        <p:txBody>
-          <a:bodyPr wrap="square" lIns="38100" tIns="114300" rIns="114300" bIns="38100" rtlCol="0" anchor="ctr"/>
+            <a:off x="704832" y="3014365"/>
+            <a:ext cx="858572" cy="133350"/>
+          </a:xfrm>
+          <a:prstGeom prst="rect">
+            <a:avLst/>
+          </a:prstGeom>
+          <a:noFill/>
+          <a:ln/>
+        </p:spPr>
+        <p:txBody>
+          <a:bodyPr wrap="square" lIns="0" tIns="114300" rIns="114300" bIns="0" rtlCol="0" anchor="ctr"/>
           <a:lstStyle/>
           <a:p>
             <a:pPr algn="l" indent="0" marL="0">
@@ -6496,17 +6496,17 @@
         </p:nvSpPr>
         <p:spPr>
           <a:xfrm>
-            <a:off x="1507140" y="2942950"/>
-            <a:ext cx="1073177" cy="247650"/>
-          </a:xfrm>
-          <a:prstGeom prst="rect">
-            <a:avLst/>
-          </a:prstGeom>
-          <a:noFill/>
-          <a:ln/>
-        </p:spPr>
-        <p:txBody>
-          <a:bodyPr wrap="square" lIns="38100" tIns="114300" rIns="114300" bIns="38100" rtlCol="0" anchor="ctr"/>
+            <a:off x="1507140" y="3014365"/>
+            <a:ext cx="1073177" cy="133350"/>
+          </a:xfrm>
+          <a:prstGeom prst="rect">
+            <a:avLst/>
+          </a:prstGeom>
+          <a:noFill/>
+          <a:ln/>
+        </p:spPr>
+        <p:txBody>
+          <a:bodyPr wrap="square" lIns="0" tIns="114300" rIns="114300" bIns="0" rtlCol="0" anchor="ctr"/>
           <a:lstStyle/>
           <a:p>
             <a:pPr algn="r" indent="0" marL="0">
@@ -6535,17 +6535,17 @@
         </p:nvSpPr>
         <p:spPr>
           <a:xfrm>
-            <a:off x="704832" y="3190600"/>
-            <a:ext cx="858572" cy="247650"/>
-          </a:xfrm>
-          <a:prstGeom prst="rect">
-            <a:avLst/>
-          </a:prstGeom>
-          <a:noFill/>
-          <a:ln/>
-        </p:spPr>
-        <p:txBody>
-          <a:bodyPr wrap="square" lIns="38100" tIns="114300" rIns="114300" bIns="38100" rtlCol="0" anchor="ctr"/>
+            <a:off x="704832" y="3262015"/>
+            <a:ext cx="858572" cy="133350"/>
+          </a:xfrm>
+          <a:prstGeom prst="rect">
+            <a:avLst/>
+          </a:prstGeom>
+          <a:noFill/>
+          <a:ln/>
+        </p:spPr>
+        <p:txBody>
+          <a:bodyPr wrap="square" lIns="0" tIns="114300" rIns="114300" bIns="0" rtlCol="0" anchor="ctr"/>
           <a:lstStyle/>
           <a:p>
             <a:pPr algn="l" indent="0" marL="0">
@@ -6574,17 +6574,17 @@
         </p:nvSpPr>
         <p:spPr>
           <a:xfrm>
-            <a:off x="704832" y="3438250"/>
-            <a:ext cx="858572" cy="247650"/>
-          </a:xfrm>
-          <a:prstGeom prst="rect">
-            <a:avLst/>
-          </a:prstGeom>
-          <a:noFill/>
-          <a:ln/>
-        </p:spPr>
-        <p:txBody>
-          <a:bodyPr wrap="square" lIns="38100" tIns="114300" rIns="114300" bIns="38100" rtlCol="0" anchor="ctr"/>
+            <a:off x="704832" y="3509665"/>
+            <a:ext cx="858572" cy="133350"/>
+          </a:xfrm>
+          <a:prstGeom prst="rect">
+            <a:avLst/>
+          </a:prstGeom>
+          <a:noFill/>
+          <a:ln/>
+        </p:spPr>
+        <p:txBody>
+          <a:bodyPr wrap="square" lIns="0" tIns="114300" rIns="114300" bIns="0" rtlCol="0" anchor="ctr"/>
           <a:lstStyle/>
           <a:p>
             <a:pPr algn="l" indent="0" marL="0">
@@ -6613,17 +6613,17 @@
         </p:nvSpPr>
         <p:spPr>
           <a:xfrm>
-            <a:off x="1507140" y="3685900"/>
-            <a:ext cx="1073177" cy="242888"/>
-          </a:xfrm>
-          <a:prstGeom prst="rect">
-            <a:avLst/>
-          </a:prstGeom>
-          <a:noFill/>
-          <a:ln/>
-        </p:spPr>
-        <p:txBody>
-          <a:bodyPr wrap="square" lIns="38100" tIns="114300" rIns="114300" bIns="38100" rtlCol="0" anchor="ctr"/>
+            <a:off x="1507140" y="3757315"/>
+            <a:ext cx="1073177" cy="133350"/>
+          </a:xfrm>
+          <a:prstGeom prst="rect">
+            <a:avLst/>
+          </a:prstGeom>
+          <a:noFill/>
+          <a:ln/>
+        </p:spPr>
+        <p:txBody>
+          <a:bodyPr wrap="square" lIns="0" tIns="114300" rIns="114300" bIns="0" rtlCol="0" anchor="ctr"/>
           <a:lstStyle/>
           <a:p>
             <a:pPr algn="r" indent="0" marL="0">
@@ -6652,17 +6652,17 @@
         </p:nvSpPr>
         <p:spPr>
           <a:xfrm>
-            <a:off x="10827831" y="2029741"/>
-            <a:ext cx="639982" cy="347663"/>
-          </a:xfrm>
-          <a:prstGeom prst="rect">
-            <a:avLst/>
-          </a:prstGeom>
-          <a:noFill/>
-          <a:ln/>
-        </p:spPr>
-        <p:txBody>
-          <a:bodyPr wrap="square" lIns="38100" tIns="114300" rIns="114300" bIns="38100" rtlCol="0" anchor="ctr"/>
+            <a:off x="10827831" y="2148780"/>
+            <a:ext cx="639982" cy="133350"/>
+          </a:xfrm>
+          <a:prstGeom prst="rect">
+            <a:avLst/>
+          </a:prstGeom>
+          <a:noFill/>
+          <a:ln/>
+        </p:spPr>
+        <p:txBody>
+          <a:bodyPr wrap="square" lIns="0" tIns="114300" rIns="114300" bIns="0" rtlCol="0" anchor="ctr"/>
           <a:lstStyle/>
           <a:p>
             <a:pPr algn="r" indent="0" marL="0">
@@ -6691,17 +6691,17 @@
         </p:nvSpPr>
         <p:spPr>
           <a:xfrm>
-            <a:off x="7890764" y="3461765"/>
-            <a:ext cx="1100463" cy="242888"/>
-          </a:xfrm>
-          <a:prstGeom prst="rect">
-            <a:avLst/>
-          </a:prstGeom>
-          <a:noFill/>
-          <a:ln/>
-        </p:spPr>
-        <p:txBody>
-          <a:bodyPr wrap="square" lIns="38100" tIns="114300" rIns="114300" bIns="38100" rtlCol="0" anchor="ctr"/>
+            <a:off x="7890764" y="3533180"/>
+            <a:ext cx="1100463" cy="133350"/>
+          </a:xfrm>
+          <a:prstGeom prst="rect">
+            <a:avLst/>
+          </a:prstGeom>
+          <a:noFill/>
+          <a:ln/>
+        </p:spPr>
+        <p:txBody>
+          <a:bodyPr wrap="square" lIns="0" tIns="114300" rIns="114300" bIns="0" rtlCol="0" anchor="ctr"/>
           <a:lstStyle/>
           <a:p>
             <a:pPr algn="r" indent="0" marL="0">
@@ -6730,17 +6730,17 @@
         </p:nvSpPr>
         <p:spPr>
           <a:xfrm>
-            <a:off x="8960429" y="3461765"/>
-            <a:ext cx="1057388" cy="242888"/>
-          </a:xfrm>
-          <a:prstGeom prst="rect">
-            <a:avLst/>
-          </a:prstGeom>
-          <a:noFill/>
-          <a:ln/>
-        </p:spPr>
-        <p:txBody>
-          <a:bodyPr wrap="square" lIns="38100" tIns="114300" rIns="114300" bIns="38100" rtlCol="0" anchor="ctr"/>
+            <a:off x="8960429" y="3533180"/>
+            <a:ext cx="1057388" cy="133350"/>
+          </a:xfrm>
+          <a:prstGeom prst="rect">
+            <a:avLst/>
+          </a:prstGeom>
+          <a:noFill/>
+          <a:ln/>
+        </p:spPr>
+        <p:txBody>
+          <a:bodyPr wrap="square" lIns="0" tIns="114300" rIns="114300" bIns="0" rtlCol="0" anchor="ctr"/>
           <a:lstStyle/>
           <a:p>
             <a:pPr algn="r" indent="0" marL="0">
@@ -6769,17 +6769,17 @@
         </p:nvSpPr>
         <p:spPr>
           <a:xfrm>
-            <a:off x="10827831" y="3461765"/>
-            <a:ext cx="639982" cy="242888"/>
-          </a:xfrm>
-          <a:prstGeom prst="rect">
-            <a:avLst/>
-          </a:prstGeom>
-          <a:noFill/>
-          <a:ln/>
-        </p:spPr>
-        <p:txBody>
-          <a:bodyPr wrap="square" lIns="38100" tIns="114300" rIns="114300" bIns="38100" rtlCol="0" anchor="ctr"/>
+            <a:off x="10827831" y="3533180"/>
+            <a:ext cx="639982" cy="133350"/>
+          </a:xfrm>
+          <a:prstGeom prst="rect">
+            <a:avLst/>
+          </a:prstGeom>
+          <a:noFill/>
+          <a:ln/>
+        </p:spPr>
+        <p:txBody>
+          <a:bodyPr wrap="square" lIns="0" tIns="114300" rIns="114300" bIns="0" rtlCol="0" anchor="ctr"/>
           <a:lstStyle/>
           <a:p>
             <a:pPr algn="r" indent="0" marL="0">
@@ -6808,17 +6808,17 @@
         </p:nvSpPr>
         <p:spPr>
           <a:xfrm>
-            <a:off x="2286632" y="4789312"/>
-            <a:ext cx="548622" cy="176212"/>
-          </a:xfrm>
-          <a:prstGeom prst="rect">
-            <a:avLst/>
-          </a:prstGeom>
-          <a:noFill/>
-          <a:ln/>
-        </p:spPr>
-        <p:txBody>
-          <a:bodyPr wrap="square" lIns="38100" tIns="114300" rIns="114300" bIns="38100" rtlCol="0" anchor="ctr"/>
+            <a:off x="2286632" y="4841677"/>
+            <a:ext cx="548622" cy="95250"/>
+          </a:xfrm>
+          <a:prstGeom prst="rect">
+            <a:avLst/>
+          </a:prstGeom>
+          <a:noFill/>
+          <a:ln/>
+        </p:spPr>
+        <p:txBody>
+          <a:bodyPr wrap="square" lIns="0" tIns="114300" rIns="114300" bIns="0" rtlCol="0" anchor="ctr"/>
           <a:lstStyle/>
           <a:p>
             <a:pPr algn="r" indent="0" marL="0">
@@ -6886,17 +6886,17 @@
         </p:nvSpPr>
         <p:spPr>
           <a:xfrm>
-            <a:off x="2544372" y="2204763"/>
-            <a:ext cx="1234131" cy="242888"/>
-          </a:xfrm>
-          <a:prstGeom prst="rect">
-            <a:avLst/>
-          </a:prstGeom>
-          <a:noFill/>
-          <a:ln/>
-        </p:spPr>
-        <p:txBody>
-          <a:bodyPr wrap="square" lIns="38100" tIns="114300" rIns="114300" bIns="38100" rtlCol="0" anchor="ctr"/>
+            <a:off x="2544372" y="2271415"/>
+            <a:ext cx="1234131" cy="133350"/>
+          </a:xfrm>
+          <a:prstGeom prst="rect">
+            <a:avLst/>
+          </a:prstGeom>
+          <a:noFill/>
+          <a:ln/>
+        </p:spPr>
+        <p:txBody>
+          <a:bodyPr wrap="square" lIns="0" tIns="114300" rIns="114300" bIns="0" rtlCol="0" anchor="ctr"/>
           <a:lstStyle/>
           <a:p>
             <a:pPr algn="r" indent="0" marL="0">
@@ -6925,17 +6925,17 @@
         </p:nvSpPr>
         <p:spPr>
           <a:xfrm>
-            <a:off x="3745683" y="2204763"/>
-            <a:ext cx="1126828" cy="242888"/>
-          </a:xfrm>
-          <a:prstGeom prst="rect">
-            <a:avLst/>
-          </a:prstGeom>
-          <a:noFill/>
-          <a:ln/>
-        </p:spPr>
-        <p:txBody>
-          <a:bodyPr wrap="square" lIns="38100" tIns="114300" rIns="114300" bIns="38100" rtlCol="0" anchor="ctr"/>
+            <a:off x="3745683" y="2271415"/>
+            <a:ext cx="1126828" cy="133350"/>
+          </a:xfrm>
+          <a:prstGeom prst="rect">
+            <a:avLst/>
+          </a:prstGeom>
+          <a:noFill/>
+          <a:ln/>
+        </p:spPr>
+        <p:txBody>
+          <a:bodyPr wrap="square" lIns="0" tIns="114300" rIns="114300" bIns="0" rtlCol="0" anchor="ctr"/>
           <a:lstStyle/>
           <a:p>
             <a:pPr algn="r" indent="0" marL="0">
@@ -6964,17 +6964,17 @@
         </p:nvSpPr>
         <p:spPr>
           <a:xfrm>
-            <a:off x="2544372" y="2447650"/>
-            <a:ext cx="1234131" cy="247650"/>
-          </a:xfrm>
-          <a:prstGeom prst="rect">
-            <a:avLst/>
-          </a:prstGeom>
-          <a:noFill/>
-          <a:ln/>
-        </p:spPr>
-        <p:txBody>
-          <a:bodyPr wrap="square" lIns="38100" tIns="114300" rIns="114300" bIns="38100" rtlCol="0" anchor="ctr"/>
+            <a:off x="2544372" y="2519065"/>
+            <a:ext cx="1234131" cy="133350"/>
+          </a:xfrm>
+          <a:prstGeom prst="rect">
+            <a:avLst/>
+          </a:prstGeom>
+          <a:noFill/>
+          <a:ln/>
+        </p:spPr>
+        <p:txBody>
+          <a:bodyPr wrap="square" lIns="0" tIns="114300" rIns="114300" bIns="0" rtlCol="0" anchor="ctr"/>
           <a:lstStyle/>
           <a:p>
             <a:pPr algn="r" indent="0" marL="0">
@@ -7003,17 +7003,17 @@
         </p:nvSpPr>
         <p:spPr>
           <a:xfrm>
-            <a:off x="3745683" y="2447650"/>
-            <a:ext cx="1126828" cy="247650"/>
-          </a:xfrm>
-          <a:prstGeom prst="rect">
-            <a:avLst/>
-          </a:prstGeom>
-          <a:noFill/>
-          <a:ln/>
-        </p:spPr>
-        <p:txBody>
-          <a:bodyPr wrap="square" lIns="38100" tIns="114300" rIns="114300" bIns="38100" rtlCol="0" anchor="ctr"/>
+            <a:off x="3745683" y="2519065"/>
+            <a:ext cx="1126828" cy="133350"/>
+          </a:xfrm>
+          <a:prstGeom prst="rect">
+            <a:avLst/>
+          </a:prstGeom>
+          <a:noFill/>
+          <a:ln/>
+        </p:spPr>
+        <p:txBody>
+          <a:bodyPr wrap="square" lIns="0" tIns="114300" rIns="114300" bIns="0" rtlCol="0" anchor="ctr"/>
           <a:lstStyle/>
           <a:p>
             <a:pPr algn="r" indent="0" marL="0">
@@ -7042,17 +7042,17 @@
         </p:nvSpPr>
         <p:spPr>
           <a:xfrm>
-            <a:off x="2544372" y="2695300"/>
-            <a:ext cx="1234131" cy="247650"/>
-          </a:xfrm>
-          <a:prstGeom prst="rect">
-            <a:avLst/>
-          </a:prstGeom>
-          <a:noFill/>
-          <a:ln/>
-        </p:spPr>
-        <p:txBody>
-          <a:bodyPr wrap="square" lIns="38100" tIns="114300" rIns="114300" bIns="38100" rtlCol="0" anchor="ctr"/>
+            <a:off x="2544372" y="2766715"/>
+            <a:ext cx="1234131" cy="133350"/>
+          </a:xfrm>
+          <a:prstGeom prst="rect">
+            <a:avLst/>
+          </a:prstGeom>
+          <a:noFill/>
+          <a:ln/>
+        </p:spPr>
+        <p:txBody>
+          <a:bodyPr wrap="square" lIns="0" tIns="114300" rIns="114300" bIns="0" rtlCol="0" anchor="ctr"/>
           <a:lstStyle/>
           <a:p>
             <a:pPr algn="r" indent="0" marL="0">
@@ -7081,17 +7081,17 @@
         </p:nvSpPr>
         <p:spPr>
           <a:xfrm>
-            <a:off x="3745683" y="2695300"/>
-            <a:ext cx="1126828" cy="247650"/>
-          </a:xfrm>
-          <a:prstGeom prst="rect">
-            <a:avLst/>
-          </a:prstGeom>
-          <a:noFill/>
-          <a:ln/>
-        </p:spPr>
-        <p:txBody>
-          <a:bodyPr wrap="square" lIns="38100" tIns="114300" rIns="114300" bIns="38100" rtlCol="0" anchor="ctr"/>
+            <a:off x="3745683" y="2766715"/>
+            <a:ext cx="1126828" cy="133350"/>
+          </a:xfrm>
+          <a:prstGeom prst="rect">
+            <a:avLst/>
+          </a:prstGeom>
+          <a:noFill/>
+          <a:ln/>
+        </p:spPr>
+        <p:txBody>
+          <a:bodyPr wrap="square" lIns="0" tIns="114300" rIns="114300" bIns="0" rtlCol="0" anchor="ctr"/>
           <a:lstStyle/>
           <a:p>
             <a:pPr algn="r" indent="0" marL="0">
@@ -7120,17 +7120,17 @@
         </p:nvSpPr>
         <p:spPr>
           <a:xfrm>
-            <a:off x="2544372" y="2942950"/>
-            <a:ext cx="1234131" cy="247650"/>
-          </a:xfrm>
-          <a:prstGeom prst="rect">
-            <a:avLst/>
-          </a:prstGeom>
-          <a:noFill/>
-          <a:ln/>
-        </p:spPr>
-        <p:txBody>
-          <a:bodyPr wrap="square" lIns="38100" tIns="114300" rIns="114300" bIns="38100" rtlCol="0" anchor="ctr"/>
+            <a:off x="2544372" y="3014365"/>
+            <a:ext cx="1234131" cy="133350"/>
+          </a:xfrm>
+          <a:prstGeom prst="rect">
+            <a:avLst/>
+          </a:prstGeom>
+          <a:noFill/>
+          <a:ln/>
+        </p:spPr>
+        <p:txBody>
+          <a:bodyPr wrap="square" lIns="0" tIns="114300" rIns="114300" bIns="0" rtlCol="0" anchor="ctr"/>
           <a:lstStyle/>
           <a:p>
             <a:pPr algn="r" indent="0" marL="0">
@@ -7159,17 +7159,17 @@
         </p:nvSpPr>
         <p:spPr>
           <a:xfrm>
-            <a:off x="3745683" y="2942950"/>
-            <a:ext cx="1126828" cy="247650"/>
-          </a:xfrm>
-          <a:prstGeom prst="rect">
-            <a:avLst/>
-          </a:prstGeom>
-          <a:noFill/>
-          <a:ln/>
-        </p:spPr>
-        <p:txBody>
-          <a:bodyPr wrap="square" lIns="38100" tIns="114300" rIns="114300" bIns="38100" rtlCol="0" anchor="ctr"/>
+            <a:off x="3745683" y="3014365"/>
+            <a:ext cx="1126828" cy="133350"/>
+          </a:xfrm>
+          <a:prstGeom prst="rect">
+            <a:avLst/>
+          </a:prstGeom>
+          <a:noFill/>
+          <a:ln/>
+        </p:spPr>
+        <p:txBody>
+          <a:bodyPr wrap="square" lIns="0" tIns="114300" rIns="114300" bIns="0" rtlCol="0" anchor="ctr"/>
           <a:lstStyle/>
           <a:p>
             <a:pPr algn="r" indent="0" marL="0">
@@ -7198,17 +7198,17 @@
         </p:nvSpPr>
         <p:spPr>
           <a:xfrm>
-            <a:off x="1507140" y="3190600"/>
-            <a:ext cx="1073177" cy="247650"/>
-          </a:xfrm>
-          <a:prstGeom prst="rect">
-            <a:avLst/>
-          </a:prstGeom>
-          <a:noFill/>
-          <a:ln/>
-        </p:spPr>
-        <p:txBody>
-          <a:bodyPr wrap="square" lIns="38100" tIns="114300" rIns="114300" bIns="38100" rtlCol="0" anchor="ctr"/>
+            <a:off x="1507140" y="3262015"/>
+            <a:ext cx="1073177" cy="133350"/>
+          </a:xfrm>
+          <a:prstGeom prst="rect">
+            <a:avLst/>
+          </a:prstGeom>
+          <a:noFill/>
+          <a:ln/>
+        </p:spPr>
+        <p:txBody>
+          <a:bodyPr wrap="square" lIns="0" tIns="114300" rIns="114300" bIns="0" rtlCol="0" anchor="ctr"/>
           <a:lstStyle/>
           <a:p>
             <a:pPr algn="r" indent="0" marL="0">
@@ -7237,17 +7237,17 @@
         </p:nvSpPr>
         <p:spPr>
           <a:xfrm>
-            <a:off x="2544372" y="3190600"/>
-            <a:ext cx="1234131" cy="247650"/>
-          </a:xfrm>
-          <a:prstGeom prst="rect">
-            <a:avLst/>
-          </a:prstGeom>
-          <a:noFill/>
-          <a:ln/>
-        </p:spPr>
-        <p:txBody>
-          <a:bodyPr wrap="square" lIns="38100" tIns="114300" rIns="114300" bIns="38100" rtlCol="0" anchor="ctr"/>
+            <a:off x="2544372" y="3262015"/>
+            <a:ext cx="1234131" cy="133350"/>
+          </a:xfrm>
+          <a:prstGeom prst="rect">
+            <a:avLst/>
+          </a:prstGeom>
+          <a:noFill/>
+          <a:ln/>
+        </p:spPr>
+        <p:txBody>
+          <a:bodyPr wrap="square" lIns="0" tIns="114300" rIns="114300" bIns="0" rtlCol="0" anchor="ctr"/>
           <a:lstStyle/>
           <a:p>
             <a:pPr algn="r" indent="0" marL="0">
@@ -7276,17 +7276,17 @@
         </p:nvSpPr>
         <p:spPr>
           <a:xfrm>
-            <a:off x="3745683" y="3190600"/>
-            <a:ext cx="1126828" cy="247650"/>
-          </a:xfrm>
-          <a:prstGeom prst="rect">
-            <a:avLst/>
-          </a:prstGeom>
-          <a:noFill/>
-          <a:ln/>
-        </p:spPr>
-        <p:txBody>
-          <a:bodyPr wrap="square" lIns="38100" tIns="114300" rIns="114300" bIns="38100" rtlCol="0" anchor="ctr"/>
+            <a:off x="3745683" y="3262015"/>
+            <a:ext cx="1126828" cy="133350"/>
+          </a:xfrm>
+          <a:prstGeom prst="rect">
+            <a:avLst/>
+          </a:prstGeom>
+          <a:noFill/>
+          <a:ln/>
+        </p:spPr>
+        <p:txBody>
+          <a:bodyPr wrap="square" lIns="0" tIns="114300" rIns="114300" bIns="0" rtlCol="0" anchor="ctr"/>
           <a:lstStyle/>
           <a:p>
             <a:pPr algn="r" indent="0" marL="0">
@@ -7315,17 +7315,17 @@
         </p:nvSpPr>
         <p:spPr>
           <a:xfrm>
-            <a:off x="1507140" y="3438250"/>
-            <a:ext cx="1073177" cy="247650"/>
-          </a:xfrm>
-          <a:prstGeom prst="rect">
-            <a:avLst/>
-          </a:prstGeom>
-          <a:noFill/>
-          <a:ln/>
-        </p:spPr>
-        <p:txBody>
-          <a:bodyPr wrap="square" lIns="38100" tIns="114300" rIns="114300" bIns="38100" rtlCol="0" anchor="ctr"/>
+            <a:off x="1507140" y="3509665"/>
+            <a:ext cx="1073177" cy="133350"/>
+          </a:xfrm>
+          <a:prstGeom prst="rect">
+            <a:avLst/>
+          </a:prstGeom>
+          <a:noFill/>
+          <a:ln/>
+        </p:spPr>
+        <p:txBody>
+          <a:bodyPr wrap="square" lIns="0" tIns="114300" rIns="114300" bIns="0" rtlCol="0" anchor="ctr"/>
           <a:lstStyle/>
           <a:p>
             <a:pPr algn="r" indent="0" marL="0">
@@ -7354,17 +7354,17 @@
         </p:nvSpPr>
         <p:spPr>
           <a:xfrm>
-            <a:off x="2544372" y="3438250"/>
-            <a:ext cx="1234131" cy="247650"/>
-          </a:xfrm>
-          <a:prstGeom prst="rect">
-            <a:avLst/>
-          </a:prstGeom>
-          <a:noFill/>
-          <a:ln/>
-        </p:spPr>
-        <p:txBody>
-          <a:bodyPr wrap="square" lIns="38100" tIns="114300" rIns="114300" bIns="38100" rtlCol="0" anchor="ctr"/>
+            <a:off x="2544372" y="3509665"/>
+            <a:ext cx="1234131" cy="133350"/>
+          </a:xfrm>
+          <a:prstGeom prst="rect">
+            <a:avLst/>
+          </a:prstGeom>
+          <a:noFill/>
+          <a:ln/>
+        </p:spPr>
+        <p:txBody>
+          <a:bodyPr wrap="square" lIns="0" tIns="114300" rIns="114300" bIns="0" rtlCol="0" anchor="ctr"/>
           <a:lstStyle/>
           <a:p>
             <a:pPr algn="r" indent="0" marL="0">
@@ -7393,17 +7393,17 @@
         </p:nvSpPr>
         <p:spPr>
           <a:xfrm>
-            <a:off x="3745683" y="3438250"/>
-            <a:ext cx="1126828" cy="247650"/>
-          </a:xfrm>
-          <a:prstGeom prst="rect">
-            <a:avLst/>
-          </a:prstGeom>
-          <a:noFill/>
-          <a:ln/>
-        </p:spPr>
-        <p:txBody>
-          <a:bodyPr wrap="square" lIns="38100" tIns="114300" rIns="114300" bIns="38100" rtlCol="0" anchor="ctr"/>
+            <a:off x="3745683" y="3509665"/>
+            <a:ext cx="1126828" cy="133350"/>
+          </a:xfrm>
+          <a:prstGeom prst="rect">
+            <a:avLst/>
+          </a:prstGeom>
+          <a:noFill/>
+          <a:ln/>
+        </p:spPr>
+        <p:txBody>
+          <a:bodyPr wrap="square" lIns="0" tIns="114300" rIns="114300" bIns="0" rtlCol="0" anchor="ctr"/>
           <a:lstStyle/>
           <a:p>
             <a:pPr algn="r" indent="0" marL="0">
@@ -7432,17 +7432,17 @@
         </p:nvSpPr>
         <p:spPr>
           <a:xfrm>
-            <a:off x="2544372" y="3685900"/>
-            <a:ext cx="1234131" cy="242888"/>
-          </a:xfrm>
-          <a:prstGeom prst="rect">
-            <a:avLst/>
-          </a:prstGeom>
-          <a:noFill/>
-          <a:ln/>
-        </p:spPr>
-        <p:txBody>
-          <a:bodyPr wrap="square" lIns="38100" tIns="114300" rIns="114300" bIns="38100" rtlCol="0" anchor="ctr"/>
+            <a:off x="2544372" y="3757315"/>
+            <a:ext cx="1234131" cy="133350"/>
+          </a:xfrm>
+          <a:prstGeom prst="rect">
+            <a:avLst/>
+          </a:prstGeom>
+          <a:noFill/>
+          <a:ln/>
+        </p:spPr>
+        <p:txBody>
+          <a:bodyPr wrap="square" lIns="0" tIns="114300" rIns="114300" bIns="0" rtlCol="0" anchor="ctr"/>
           <a:lstStyle/>
           <a:p>
             <a:pPr algn="r" indent="0" marL="0">
@@ -7471,17 +7471,17 @@
         </p:nvSpPr>
         <p:spPr>
           <a:xfrm>
-            <a:off x="3745683" y="3685900"/>
-            <a:ext cx="1126828" cy="242888"/>
-          </a:xfrm>
-          <a:prstGeom prst="rect">
-            <a:avLst/>
-          </a:prstGeom>
-          <a:noFill/>
-          <a:ln/>
-        </p:spPr>
-        <p:txBody>
-          <a:bodyPr wrap="square" lIns="38100" tIns="114300" rIns="114300" bIns="38100" rtlCol="0" anchor="ctr"/>
+            <a:off x="3745683" y="3757315"/>
+            <a:ext cx="1126828" cy="133350"/>
+          </a:xfrm>
+          <a:prstGeom prst="rect">
+            <a:avLst/>
+          </a:prstGeom>
+          <a:noFill/>
+          <a:ln/>
+        </p:spPr>
+        <p:txBody>
+          <a:bodyPr wrap="square" lIns="0" tIns="114300" rIns="114300" bIns="0" rtlCol="0" anchor="ctr"/>
           <a:lstStyle/>
           <a:p>
             <a:pPr algn="r" indent="0" marL="0">
@@ -7510,17 +7510,17 @@
         </p:nvSpPr>
         <p:spPr>
           <a:xfrm>
-            <a:off x="7890764" y="2029741"/>
-            <a:ext cx="1100463" cy="347663"/>
-          </a:xfrm>
-          <a:prstGeom prst="rect">
-            <a:avLst/>
-          </a:prstGeom>
-          <a:noFill/>
-          <a:ln/>
-        </p:spPr>
-        <p:txBody>
-          <a:bodyPr wrap="square" lIns="38100" tIns="114300" rIns="114300" bIns="38100" rtlCol="0" anchor="ctr"/>
+            <a:off x="7890764" y="2148780"/>
+            <a:ext cx="1100463" cy="133350"/>
+          </a:xfrm>
+          <a:prstGeom prst="rect">
+            <a:avLst/>
+          </a:prstGeom>
+          <a:noFill/>
+          <a:ln/>
+        </p:spPr>
+        <p:txBody>
+          <a:bodyPr wrap="square" lIns="0" tIns="114300" rIns="114300" bIns="0" rtlCol="0" anchor="ctr"/>
           <a:lstStyle/>
           <a:p>
             <a:pPr algn="r" indent="0" marL="0">
@@ -7549,17 +7549,17 @@
         </p:nvSpPr>
         <p:spPr>
           <a:xfrm>
-            <a:off x="8960429" y="2029741"/>
-            <a:ext cx="1057388" cy="347663"/>
-          </a:xfrm>
-          <a:prstGeom prst="rect">
-            <a:avLst/>
-          </a:prstGeom>
-          <a:noFill/>
-          <a:ln/>
-        </p:spPr>
-        <p:txBody>
-          <a:bodyPr wrap="square" lIns="38100" tIns="114300" rIns="114300" bIns="38100" rtlCol="0" anchor="ctr"/>
+            <a:off x="8960429" y="2148780"/>
+            <a:ext cx="1057388" cy="133350"/>
+          </a:xfrm>
+          <a:prstGeom prst="rect">
+            <a:avLst/>
+          </a:prstGeom>
+          <a:noFill/>
+          <a:ln/>
+        </p:spPr>
+        <p:txBody>
+          <a:bodyPr wrap="square" lIns="0" tIns="114300" rIns="114300" bIns="0" rtlCol="0" anchor="ctr"/>
           <a:lstStyle/>
           <a:p>
             <a:pPr algn="r" indent="0" marL="0">
@@ -7588,17 +7588,17 @@
         </p:nvSpPr>
         <p:spPr>
           <a:xfrm>
-            <a:off x="7890764" y="2377403"/>
-            <a:ext cx="1100463" cy="365968"/>
-          </a:xfrm>
-          <a:prstGeom prst="rect">
-            <a:avLst/>
-          </a:prstGeom>
-          <a:noFill/>
-          <a:ln/>
-        </p:spPr>
-        <p:txBody>
-          <a:bodyPr wrap="square" lIns="38100" tIns="114300" rIns="114300" bIns="38100" rtlCol="0" anchor="ctr"/>
+            <a:off x="7890764" y="2507903"/>
+            <a:ext cx="1100463" cy="133350"/>
+          </a:xfrm>
+          <a:prstGeom prst="rect">
+            <a:avLst/>
+          </a:prstGeom>
+          <a:noFill/>
+          <a:ln/>
+        </p:spPr>
+        <p:txBody>
+          <a:bodyPr wrap="square" lIns="0" tIns="114300" rIns="114300" bIns="0" rtlCol="0" anchor="ctr"/>
           <a:lstStyle/>
           <a:p>
             <a:pPr algn="r" indent="0" marL="0">
@@ -7627,17 +7627,17 @@
         </p:nvSpPr>
         <p:spPr>
           <a:xfrm>
-            <a:off x="8960429" y="2377403"/>
-            <a:ext cx="1057388" cy="365968"/>
-          </a:xfrm>
-          <a:prstGeom prst="rect">
-            <a:avLst/>
-          </a:prstGeom>
-          <a:noFill/>
-          <a:ln/>
-        </p:spPr>
-        <p:txBody>
-          <a:bodyPr wrap="square" lIns="38100" tIns="114300" rIns="114300" bIns="38100" rtlCol="0" anchor="ctr"/>
+            <a:off x="8960429" y="2507903"/>
+            <a:ext cx="1057388" cy="133350"/>
+          </a:xfrm>
+          <a:prstGeom prst="rect">
+            <a:avLst/>
+          </a:prstGeom>
+          <a:noFill/>
+          <a:ln/>
+        </p:spPr>
+        <p:txBody>
+          <a:bodyPr wrap="square" lIns="0" tIns="114300" rIns="114300" bIns="0" rtlCol="0" anchor="ctr"/>
           <a:lstStyle/>
           <a:p>
             <a:pPr algn="r" indent="0" marL="0">
@@ -7666,17 +7666,17 @@
         </p:nvSpPr>
         <p:spPr>
           <a:xfrm>
-            <a:off x="10827831" y="2377403"/>
-            <a:ext cx="639982" cy="365968"/>
-          </a:xfrm>
-          <a:prstGeom prst="rect">
-            <a:avLst/>
-          </a:prstGeom>
-          <a:noFill/>
-          <a:ln/>
-        </p:spPr>
-        <p:txBody>
-          <a:bodyPr wrap="square" lIns="38100" tIns="114300" rIns="114300" bIns="38100" rtlCol="0" anchor="ctr"/>
+            <a:off x="10827831" y="2507903"/>
+            <a:ext cx="639982" cy="133350"/>
+          </a:xfrm>
+          <a:prstGeom prst="rect">
+            <a:avLst/>
+          </a:prstGeom>
+          <a:noFill/>
+          <a:ln/>
+        </p:spPr>
+        <p:txBody>
+          <a:bodyPr wrap="square" lIns="0" tIns="114300" rIns="114300" bIns="0" rtlCol="0" anchor="ctr"/>
           <a:lstStyle/>
           <a:p>
             <a:pPr algn="r" indent="0" marL="0">
@@ -7705,17 +7705,17 @@
         </p:nvSpPr>
         <p:spPr>
           <a:xfrm>
-            <a:off x="7890764" y="2743372"/>
-            <a:ext cx="1100463" cy="352425"/>
-          </a:xfrm>
-          <a:prstGeom prst="rect">
-            <a:avLst/>
-          </a:prstGeom>
-          <a:noFill/>
-          <a:ln/>
-        </p:spPr>
-        <p:txBody>
-          <a:bodyPr wrap="square" lIns="38100" tIns="114300" rIns="114300" bIns="38100" rtlCol="0" anchor="ctr"/>
+            <a:off x="7890764" y="2867174"/>
+            <a:ext cx="1100463" cy="133350"/>
+          </a:xfrm>
+          <a:prstGeom prst="rect">
+            <a:avLst/>
+          </a:prstGeom>
+          <a:noFill/>
+          <a:ln/>
+        </p:spPr>
+        <p:txBody>
+          <a:bodyPr wrap="square" lIns="0" tIns="114300" rIns="114300" bIns="0" rtlCol="0" anchor="ctr"/>
           <a:lstStyle/>
           <a:p>
             <a:pPr algn="r" indent="0" marL="0">
@@ -7744,17 +7744,17 @@
         </p:nvSpPr>
         <p:spPr>
           <a:xfrm>
-            <a:off x="8960429" y="2743372"/>
-            <a:ext cx="1057388" cy="352425"/>
-          </a:xfrm>
-          <a:prstGeom prst="rect">
-            <a:avLst/>
-          </a:prstGeom>
-          <a:noFill/>
-          <a:ln/>
-        </p:spPr>
-        <p:txBody>
-          <a:bodyPr wrap="square" lIns="38100" tIns="114300" rIns="114300" bIns="38100" rtlCol="0" anchor="ctr"/>
+            <a:off x="8960429" y="2867174"/>
+            <a:ext cx="1057388" cy="133350"/>
+          </a:xfrm>
+          <a:prstGeom prst="rect">
+            <a:avLst/>
+          </a:prstGeom>
+          <a:noFill/>
+          <a:ln/>
+        </p:spPr>
+        <p:txBody>
+          <a:bodyPr wrap="square" lIns="0" tIns="114300" rIns="114300" bIns="0" rtlCol="0" anchor="ctr"/>
           <a:lstStyle/>
           <a:p>
             <a:pPr algn="r" indent="0" marL="0">
@@ -7783,17 +7783,17 @@
         </p:nvSpPr>
         <p:spPr>
           <a:xfrm>
-            <a:off x="10827831" y="2743372"/>
-            <a:ext cx="639982" cy="352425"/>
-          </a:xfrm>
-          <a:prstGeom prst="rect">
-            <a:avLst/>
-          </a:prstGeom>
-          <a:noFill/>
-          <a:ln/>
-        </p:spPr>
-        <p:txBody>
-          <a:bodyPr wrap="square" lIns="38100" tIns="114300" rIns="114300" bIns="38100" rtlCol="0" anchor="ctr"/>
+            <a:off x="10827831" y="2867174"/>
+            <a:ext cx="639982" cy="133350"/>
+          </a:xfrm>
+          <a:prstGeom prst="rect">
+            <a:avLst/>
+          </a:prstGeom>
+          <a:noFill/>
+          <a:ln/>
+        </p:spPr>
+        <p:txBody>
+          <a:bodyPr wrap="square" lIns="0" tIns="114300" rIns="114300" bIns="0" rtlCol="0" anchor="ctr"/>
           <a:lstStyle/>
           <a:p>
             <a:pPr algn="r" indent="0" marL="0">
@@ -7822,17 +7822,17 @@
         </p:nvSpPr>
         <p:spPr>
           <a:xfrm>
-            <a:off x="2286632" y="4965524"/>
-            <a:ext cx="548622" cy="180975"/>
-          </a:xfrm>
-          <a:prstGeom prst="rect">
-            <a:avLst/>
-          </a:prstGeom>
-          <a:noFill/>
-          <a:ln/>
-        </p:spPr>
-        <p:txBody>
-          <a:bodyPr wrap="square" lIns="38100" tIns="114300" rIns="114300" bIns="38100" rtlCol="0" anchor="ctr"/>
+            <a:off x="2286632" y="5022652"/>
+            <a:ext cx="548622" cy="95250"/>
+          </a:xfrm>
+          <a:prstGeom prst="rect">
+            <a:avLst/>
+          </a:prstGeom>
+          <a:noFill/>
+          <a:ln/>
+        </p:spPr>
+        <p:txBody>
+          <a:bodyPr wrap="square" lIns="0" tIns="114300" rIns="114300" bIns="0" rtlCol="0" anchor="ctr"/>
           <a:lstStyle/>
           <a:p>
             <a:pPr algn="r" indent="0" marL="0">
@@ -7861,17 +7861,17 @@
         </p:nvSpPr>
         <p:spPr>
           <a:xfrm>
-            <a:off x="2286632" y="5146499"/>
-            <a:ext cx="548622" cy="180975"/>
-          </a:xfrm>
-          <a:prstGeom prst="rect">
-            <a:avLst/>
-          </a:prstGeom>
-          <a:noFill/>
-          <a:ln/>
-        </p:spPr>
-        <p:txBody>
-          <a:bodyPr wrap="square" lIns="38100" tIns="114300" rIns="114300" bIns="38100" rtlCol="0" anchor="ctr"/>
+            <a:off x="2286632" y="5203627"/>
+            <a:ext cx="548622" cy="95250"/>
+          </a:xfrm>
+          <a:prstGeom prst="rect">
+            <a:avLst/>
+          </a:prstGeom>
+          <a:noFill/>
+          <a:ln/>
+        </p:spPr>
+        <p:txBody>
+          <a:bodyPr wrap="square" lIns="0" tIns="114300" rIns="114300" bIns="0" rtlCol="0" anchor="ctr"/>
           <a:lstStyle/>
           <a:p>
             <a:pPr algn="r" indent="0" marL="0">
@@ -7900,17 +7900,17 @@
         </p:nvSpPr>
         <p:spPr>
           <a:xfrm>
-            <a:off x="2286632" y="5327474"/>
-            <a:ext cx="548622" cy="180975"/>
-          </a:xfrm>
-          <a:prstGeom prst="rect">
-            <a:avLst/>
-          </a:prstGeom>
-          <a:noFill/>
-          <a:ln/>
-        </p:spPr>
-        <p:txBody>
-          <a:bodyPr wrap="square" lIns="38100" tIns="114300" rIns="114300" bIns="38100" rtlCol="0" anchor="ctr"/>
+            <a:off x="2286632" y="5384602"/>
+            <a:ext cx="548622" cy="95250"/>
+          </a:xfrm>
+          <a:prstGeom prst="rect">
+            <a:avLst/>
+          </a:prstGeom>
+          <a:noFill/>
+          <a:ln/>
+        </p:spPr>
+        <p:txBody>
+          <a:bodyPr wrap="square" lIns="0" tIns="114300" rIns="114300" bIns="0" rtlCol="0" anchor="ctr"/>
           <a:lstStyle/>
           <a:p>
             <a:pPr algn="r" indent="0" marL="0">
@@ -7939,17 +7939,17 @@
         </p:nvSpPr>
         <p:spPr>
           <a:xfrm>
-            <a:off x="2286632" y="5508449"/>
-            <a:ext cx="548622" cy="180975"/>
-          </a:xfrm>
-          <a:prstGeom prst="rect">
-            <a:avLst/>
-          </a:prstGeom>
-          <a:noFill/>
-          <a:ln/>
-        </p:spPr>
-        <p:txBody>
-          <a:bodyPr wrap="square" lIns="38100" tIns="114300" rIns="114300" bIns="38100" rtlCol="0" anchor="ctr"/>
+            <a:off x="2286632" y="5565577"/>
+            <a:ext cx="548622" cy="95250"/>
+          </a:xfrm>
+          <a:prstGeom prst="rect">
+            <a:avLst/>
+          </a:prstGeom>
+          <a:noFill/>
+          <a:ln/>
+        </p:spPr>
+        <p:txBody>
+          <a:bodyPr wrap="square" lIns="0" tIns="114300" rIns="114300" bIns="0" rtlCol="0" anchor="ctr"/>
           <a:lstStyle/>
           <a:p>
             <a:pPr algn="r" indent="0" marL="0">
@@ -7978,17 +7978,17 @@
         </p:nvSpPr>
         <p:spPr>
           <a:xfrm>
-            <a:off x="2286632" y="5689424"/>
-            <a:ext cx="548622" cy="176212"/>
-          </a:xfrm>
-          <a:prstGeom prst="rect">
-            <a:avLst/>
-          </a:prstGeom>
-          <a:noFill/>
-          <a:ln/>
-        </p:spPr>
-        <p:txBody>
-          <a:bodyPr wrap="square" lIns="38100" tIns="114300" rIns="114300" bIns="38100" rtlCol="0" anchor="ctr"/>
+            <a:off x="2286632" y="5746552"/>
+            <a:ext cx="548622" cy="95250"/>
+          </a:xfrm>
+          <a:prstGeom prst="rect">
+            <a:avLst/>
+          </a:prstGeom>
+          <a:noFill/>
+          <a:ln/>
+        </p:spPr>
+        <p:txBody>
+          <a:bodyPr wrap="square" lIns="0" tIns="114300" rIns="114300" bIns="0" rtlCol="0" anchor="ctr"/>
           <a:lstStyle/>
           <a:p>
             <a:pPr algn="r" indent="0" marL="0">
@@ -8017,17 +8017,17 @@
         </p:nvSpPr>
         <p:spPr>
           <a:xfrm>
-            <a:off x="4550549" y="4789312"/>
-            <a:ext cx="548622" cy="176212"/>
-          </a:xfrm>
-          <a:prstGeom prst="rect">
-            <a:avLst/>
-          </a:prstGeom>
-          <a:noFill/>
-          <a:ln/>
-        </p:spPr>
-        <p:txBody>
-          <a:bodyPr wrap="square" lIns="38100" tIns="114300" rIns="114300" bIns="38100" rtlCol="0" anchor="ctr"/>
+            <a:off x="4550549" y="4841677"/>
+            <a:ext cx="548622" cy="95250"/>
+          </a:xfrm>
+          <a:prstGeom prst="rect">
+            <a:avLst/>
+          </a:prstGeom>
+          <a:noFill/>
+          <a:ln/>
+        </p:spPr>
+        <p:txBody>
+          <a:bodyPr wrap="square" lIns="0" tIns="114300" rIns="114300" bIns="0" rtlCol="0" anchor="ctr"/>
           <a:lstStyle/>
           <a:p>
             <a:pPr algn="r" indent="0" marL="0">
@@ -8056,17 +8056,17 @@
         </p:nvSpPr>
         <p:spPr>
           <a:xfrm>
-            <a:off x="4550549" y="4965524"/>
-            <a:ext cx="548622" cy="180975"/>
-          </a:xfrm>
-          <a:prstGeom prst="rect">
-            <a:avLst/>
-          </a:prstGeom>
-          <a:noFill/>
-          <a:ln/>
-        </p:spPr>
-        <p:txBody>
-          <a:bodyPr wrap="square" lIns="38100" tIns="114300" rIns="114300" bIns="38100" rtlCol="0" anchor="ctr"/>
+            <a:off x="4550549" y="5022652"/>
+            <a:ext cx="548622" cy="95250"/>
+          </a:xfrm>
+          <a:prstGeom prst="rect">
+            <a:avLst/>
+          </a:prstGeom>
+          <a:noFill/>
+          <a:ln/>
+        </p:spPr>
+        <p:txBody>
+          <a:bodyPr wrap="square" lIns="0" tIns="114300" rIns="114300" bIns="0" rtlCol="0" anchor="ctr"/>
           <a:lstStyle/>
           <a:p>
             <a:pPr algn="r" indent="0" marL="0">
@@ -8277,6 +8277,357 @@
                 <a:cs typeface="Raleway" pitchFamily="34" charset="-120"/>
               </a:rPr>
               <a:t>20</a:t>
+            </a:r>
+            <a:endParaRPr lang="en-US" sz="1080" dirty="0"/>
+          </a:p>
+        </p:txBody>
+      </p:sp>
+      <p:sp>
+        <p:nvSpPr>
+          <p:cNvPr id="120" name="Text 117"/>
+          <p:cNvSpPr/>
+          <p:nvPr/>
+        </p:nvSpPr>
+        <p:spPr>
+          <a:xfrm>
+            <a:off x="7890764" y="3226296"/>
+            <a:ext cx="1100463" cy="133350"/>
+          </a:xfrm>
+          <a:prstGeom prst="rect">
+            <a:avLst/>
+          </a:prstGeom>
+          <a:noFill/>
+          <a:ln/>
+        </p:spPr>
+        <p:txBody>
+          <a:bodyPr wrap="square" lIns="0" tIns="114300" rIns="114300" bIns="0" rtlCol="0" anchor="ctr"/>
+          <a:lstStyle/>
+          <a:p>
+            <a:pPr algn="r" indent="0" marL="0">
+              <a:buNone/>
+            </a:pPr>
+            <a:r>
+              <a:rPr lang="en-US" sz="888" dirty="0">
+                <a:solidFill>
+                  <a:srgbClr val="333333"/>
+                </a:solidFill>
+                <a:latin typeface="Raleway" pitchFamily="34" charset="0"/>
+                <a:ea typeface="Raleway" pitchFamily="34" charset="-122"/>
+                <a:cs typeface="Raleway" pitchFamily="34" charset="-120"/>
+              </a:rPr>
+              <a:t>6</a:t>
+            </a:r>
+            <a:endParaRPr lang="en-US" sz="888" dirty="0"/>
+          </a:p>
+        </p:txBody>
+      </p:sp>
+      <p:sp>
+        <p:nvSpPr>
+          <p:cNvPr id="121" name="Text 118"/>
+          <p:cNvSpPr/>
+          <p:nvPr/>
+        </p:nvSpPr>
+        <p:spPr>
+          <a:xfrm>
+            <a:off x="8960429" y="3226296"/>
+            <a:ext cx="1057388" cy="133350"/>
+          </a:xfrm>
+          <a:prstGeom prst="rect">
+            <a:avLst/>
+          </a:prstGeom>
+          <a:noFill/>
+          <a:ln/>
+        </p:spPr>
+        <p:txBody>
+          <a:bodyPr wrap="square" lIns="0" tIns="114300" rIns="114300" bIns="0" rtlCol="0" anchor="ctr"/>
+          <a:lstStyle/>
+          <a:p>
+            <a:pPr algn="r" indent="0" marL="0">
+              <a:buNone/>
+            </a:pPr>
+            <a:r>
+              <a:rPr lang="en-US" sz="888" dirty="0">
+                <a:solidFill>
+                  <a:srgbClr val="333333"/>
+                </a:solidFill>
+                <a:latin typeface="Raleway" pitchFamily="34" charset="0"/>
+                <a:ea typeface="Raleway" pitchFamily="34" charset="-122"/>
+                <a:cs typeface="Raleway" pitchFamily="34" charset="-120"/>
+              </a:rPr>
+              <a:t>3</a:t>
+            </a:r>
+            <a:endParaRPr lang="en-US" sz="888" dirty="0"/>
+          </a:p>
+        </p:txBody>
+      </p:sp>
+      <p:sp>
+        <p:nvSpPr>
+          <p:cNvPr id="122" name="Text 119"/>
+          <p:cNvSpPr/>
+          <p:nvPr/>
+        </p:nvSpPr>
+        <p:spPr>
+          <a:xfrm>
+            <a:off x="10827831" y="3226296"/>
+            <a:ext cx="639982" cy="133350"/>
+          </a:xfrm>
+          <a:prstGeom prst="rect">
+            <a:avLst/>
+          </a:prstGeom>
+          <a:noFill/>
+          <a:ln/>
+        </p:spPr>
+        <p:txBody>
+          <a:bodyPr wrap="square" lIns="0" tIns="114300" rIns="114300" bIns="0" rtlCol="0" anchor="ctr"/>
+          <a:lstStyle/>
+          <a:p>
+            <a:pPr algn="r" indent="0" marL="0">
+              <a:buNone/>
+            </a:pPr>
+            <a:r>
+              <a:rPr lang="en-US" sz="888" dirty="0">
+                <a:solidFill>
+                  <a:srgbClr val="333333"/>
+                </a:solidFill>
+                <a:latin typeface="Raleway" pitchFamily="34" charset="0"/>
+                <a:ea typeface="Raleway" pitchFamily="34" charset="-122"/>
+                <a:cs typeface="Raleway" pitchFamily="34" charset="-120"/>
+              </a:rPr>
+              <a:t>4</a:t>
+            </a:r>
+            <a:endParaRPr lang="en-US" sz="888" dirty="0"/>
+          </a:p>
+        </p:txBody>
+      </p:sp>
+      <p:sp>
+        <p:nvSpPr>
+          <p:cNvPr id="123" name="Text 120"/>
+          <p:cNvSpPr/>
+          <p:nvPr/>
+        </p:nvSpPr>
+        <p:spPr>
+          <a:xfrm>
+            <a:off x="4550549" y="5203627"/>
+            <a:ext cx="548622" cy="95250"/>
+          </a:xfrm>
+          <a:prstGeom prst="rect">
+            <a:avLst/>
+          </a:prstGeom>
+          <a:noFill/>
+          <a:ln/>
+        </p:spPr>
+        <p:txBody>
+          <a:bodyPr wrap="square" lIns="0" tIns="114300" rIns="114300" bIns="0" rtlCol="0" anchor="ctr"/>
+          <a:lstStyle/>
+          <a:p>
+            <a:pPr algn="r" indent="0" marL="0">
+              <a:buNone/>
+            </a:pPr>
+            <a:r>
+              <a:rPr lang="en-US" sz="672" dirty="0">
+                <a:solidFill>
+                  <a:srgbClr val="00CD93"/>
+                </a:solidFill>
+                <a:latin typeface="Raleway" pitchFamily="34" charset="0"/>
+                <a:ea typeface="Raleway" pitchFamily="34" charset="-122"/>
+                <a:cs typeface="Raleway" pitchFamily="34" charset="-120"/>
+              </a:rPr>
+              <a:t>8</a:t>
+            </a:r>
+            <a:endParaRPr lang="en-US" sz="672" dirty="0"/>
+          </a:p>
+        </p:txBody>
+      </p:sp>
+      <p:sp>
+        <p:nvSpPr>
+          <p:cNvPr id="124" name="Text 121"/>
+          <p:cNvSpPr/>
+          <p:nvPr/>
+        </p:nvSpPr>
+        <p:spPr>
+          <a:xfrm>
+            <a:off x="4550549" y="5384602"/>
+            <a:ext cx="548622" cy="95250"/>
+          </a:xfrm>
+          <a:prstGeom prst="rect">
+            <a:avLst/>
+          </a:prstGeom>
+          <a:noFill/>
+          <a:ln/>
+        </p:spPr>
+        <p:txBody>
+          <a:bodyPr wrap="square" lIns="0" tIns="114300" rIns="114300" bIns="0" rtlCol="0" anchor="ctr"/>
+          <a:lstStyle/>
+          <a:p>
+            <a:pPr algn="r" indent="0" marL="0">
+              <a:buNone/>
+            </a:pPr>
+            <a:r>
+              <a:rPr lang="en-US" sz="672" dirty="0">
+                <a:solidFill>
+                  <a:srgbClr val="00CD93"/>
+                </a:solidFill>
+                <a:latin typeface="Raleway" pitchFamily="34" charset="0"/>
+                <a:ea typeface="Raleway" pitchFamily="34" charset="-122"/>
+                <a:cs typeface="Raleway" pitchFamily="34" charset="-120"/>
+              </a:rPr>
+              <a:t>8</a:t>
+            </a:r>
+            <a:endParaRPr lang="en-US" sz="672" dirty="0"/>
+          </a:p>
+        </p:txBody>
+      </p:sp>
+      <p:sp>
+        <p:nvSpPr>
+          <p:cNvPr id="125" name="Text 122"/>
+          <p:cNvSpPr/>
+          <p:nvPr/>
+        </p:nvSpPr>
+        <p:spPr>
+          <a:xfrm>
+            <a:off x="4550549" y="5565577"/>
+            <a:ext cx="548622" cy="95250"/>
+          </a:xfrm>
+          <a:prstGeom prst="rect">
+            <a:avLst/>
+          </a:prstGeom>
+          <a:noFill/>
+          <a:ln/>
+        </p:spPr>
+        <p:txBody>
+          <a:bodyPr wrap="square" lIns="0" tIns="114300" rIns="114300" bIns="0" rtlCol="0" anchor="ctr"/>
+          <a:lstStyle/>
+          <a:p>
+            <a:pPr algn="r" indent="0" marL="0">
+              <a:buNone/>
+            </a:pPr>
+            <a:r>
+              <a:rPr lang="en-US" sz="672" dirty="0">
+                <a:solidFill>
+                  <a:srgbClr val="00CD93"/>
+                </a:solidFill>
+                <a:latin typeface="Raleway" pitchFamily="34" charset="0"/>
+                <a:ea typeface="Raleway" pitchFamily="34" charset="-122"/>
+                <a:cs typeface="Raleway" pitchFamily="34" charset="-120"/>
+              </a:rPr>
+              <a:t>6</a:t>
+            </a:r>
+            <a:endParaRPr lang="en-US" sz="672" dirty="0"/>
+          </a:p>
+        </p:txBody>
+      </p:sp>
+      <p:sp>
+        <p:nvSpPr>
+          <p:cNvPr id="126" name="Text 123"/>
+          <p:cNvSpPr/>
+          <p:nvPr/>
+        </p:nvSpPr>
+        <p:spPr>
+          <a:xfrm>
+            <a:off x="4550549" y="5746552"/>
+            <a:ext cx="548622" cy="95250"/>
+          </a:xfrm>
+          <a:prstGeom prst="rect">
+            <a:avLst/>
+          </a:prstGeom>
+          <a:noFill/>
+          <a:ln/>
+        </p:spPr>
+        <p:txBody>
+          <a:bodyPr wrap="square" lIns="0" tIns="114300" rIns="114300" bIns="0" rtlCol="0" anchor="ctr"/>
+          <a:lstStyle/>
+          <a:p>
+            <a:pPr algn="r" indent="0" marL="0">
+              <a:buNone/>
+            </a:pPr>
+            <a:r>
+              <a:rPr lang="en-US" sz="672" dirty="0">
+                <a:solidFill>
+                  <a:srgbClr val="00CD93"/>
+                </a:solidFill>
+                <a:latin typeface="Raleway" pitchFamily="34" charset="0"/>
+                <a:ea typeface="Raleway" pitchFamily="34" charset="-122"/>
+                <a:cs typeface="Raleway" pitchFamily="34" charset="-120"/>
+              </a:rPr>
+              <a:t>6</a:t>
+            </a:r>
+            <a:endParaRPr lang="en-US" sz="672" dirty="0"/>
+          </a:p>
+        </p:txBody>
+      </p:sp>
+      <p:sp>
+        <p:nvSpPr>
+          <p:cNvPr id="127" name="Text 124"/>
+          <p:cNvSpPr/>
+          <p:nvPr/>
+        </p:nvSpPr>
+        <p:spPr>
+          <a:xfrm>
+            <a:off x="9637084" y="5254228"/>
+            <a:ext cx="274320" cy="166783"/>
+          </a:xfrm>
+          <a:prstGeom prst="rect">
+            <a:avLst/>
+          </a:prstGeom>
+          <a:noFill/>
+          <a:ln/>
+        </p:spPr>
+        <p:txBody>
+          <a:bodyPr wrap="square" lIns="0" tIns="0" rIns="0" bIns="0" rtlCol="0" anchor="t"/>
+          <a:lstStyle/>
+          <a:p>
+            <a:pPr algn="ctr" indent="0" marL="0">
+              <a:buNone/>
+            </a:pPr>
+            <a:r>
+              <a:rPr lang="en-US" sz="1080" b="1" dirty="0">
+                <a:solidFill>
+                  <a:srgbClr val="120180"/>
+                </a:solidFill>
+                <a:latin typeface="Raleway" pitchFamily="34" charset="0"/>
+                <a:ea typeface="Raleway" pitchFamily="34" charset="-122"/>
+                <a:cs typeface="Raleway" pitchFamily="34" charset="-120"/>
+              </a:rPr>
+              <a:t>6</a:t>
+            </a:r>
+            <a:endParaRPr lang="en-US" sz="1080" dirty="0"/>
+          </a:p>
+        </p:txBody>
+      </p:sp>
+      <p:sp>
+        <p:nvSpPr>
+          <p:cNvPr id="128" name="Text 125"/>
+          <p:cNvSpPr/>
+          <p:nvPr/>
+        </p:nvSpPr>
+        <p:spPr>
+          <a:xfrm>
+            <a:off x="10855932" y="5254228"/>
+            <a:ext cx="274320" cy="166783"/>
+          </a:xfrm>
+          <a:prstGeom prst="rect">
+            <a:avLst/>
+          </a:prstGeom>
+          <a:noFill/>
+          <a:ln/>
+        </p:spPr>
+        <p:txBody>
+          <a:bodyPr wrap="square" lIns="0" tIns="0" rIns="0" bIns="0" rtlCol="0" anchor="t"/>
+          <a:lstStyle/>
+          <a:p>
+            <a:pPr algn="ctr" indent="0" marL="0">
+              <a:buNone/>
+            </a:pPr>
+            <a:r>
+              <a:rPr lang="en-US" sz="1080" b="1" dirty="0">
+                <a:solidFill>
+                  <a:srgbClr val="9098B0"/>
+                </a:solidFill>
+                <a:latin typeface="Raleway" pitchFamily="34" charset="0"/>
+                <a:ea typeface="Raleway" pitchFamily="34" charset="-122"/>
+                <a:cs typeface="Raleway" pitchFamily="34" charset="-120"/>
+              </a:rPr>
+              <a:t>4</a:t>
             </a:r>
             <a:endParaRPr lang="en-US" sz="1080" dirty="0"/>
           </a:p>
@@ -8846,17 +9197,17 @@
         </p:nvSpPr>
         <p:spPr>
           <a:xfrm>
-            <a:off x="4040834" y="1982116"/>
-            <a:ext cx="1008183" cy="228600"/>
-          </a:xfrm>
-          <a:prstGeom prst="rect">
-            <a:avLst/>
-          </a:prstGeom>
-          <a:noFill/>
-          <a:ln/>
-        </p:spPr>
-        <p:txBody>
-          <a:bodyPr wrap="square" lIns="47625" tIns="114300" rIns="114300" bIns="47625" rtlCol="0" anchor="ctr"/>
+            <a:off x="4040834" y="2044005"/>
+            <a:ext cx="1008183" cy="133350"/>
+          </a:xfrm>
+          <a:prstGeom prst="rect">
+            <a:avLst/>
+          </a:prstGeom>
+          <a:noFill/>
+          <a:ln/>
+        </p:spPr>
+        <p:txBody>
+          <a:bodyPr wrap="square" lIns="0" tIns="114300" rIns="114300" bIns="0" rtlCol="0" anchor="ctr"/>
           <a:lstStyle/>
           <a:p>
             <a:pPr algn="r" indent="0" marL="0">
@@ -8885,17 +9236,17 @@
         </p:nvSpPr>
         <p:spPr>
           <a:xfrm>
-            <a:off x="9370044" y="1982116"/>
-            <a:ext cx="1137405" cy="228600"/>
-          </a:xfrm>
-          <a:prstGeom prst="rect">
-            <a:avLst/>
-          </a:prstGeom>
-          <a:noFill/>
-          <a:ln/>
-        </p:spPr>
-        <p:txBody>
-          <a:bodyPr wrap="square" lIns="47625" tIns="114300" rIns="114300" bIns="47625" rtlCol="0" anchor="ctr"/>
+            <a:off x="9370044" y="2044005"/>
+            <a:ext cx="1137405" cy="133350"/>
+          </a:xfrm>
+          <a:prstGeom prst="rect">
+            <a:avLst/>
+          </a:prstGeom>
+          <a:noFill/>
+          <a:ln/>
+        </p:spPr>
+        <p:txBody>
+          <a:bodyPr wrap="square" lIns="0" tIns="114300" rIns="114300" bIns="0" rtlCol="0" anchor="ctr"/>
           <a:lstStyle/>
           <a:p>
             <a:pPr algn="r" indent="0" marL="0">
@@ -8924,17 +9275,17 @@
         </p:nvSpPr>
         <p:spPr>
           <a:xfrm>
-            <a:off x="1490284" y="1982116"/>
-            <a:ext cx="987642" cy="228600"/>
-          </a:xfrm>
-          <a:prstGeom prst="rect">
-            <a:avLst/>
-          </a:prstGeom>
-          <a:noFill/>
-          <a:ln/>
-        </p:spPr>
-        <p:txBody>
-          <a:bodyPr wrap="square" lIns="47625" tIns="114300" rIns="114300" bIns="47625" rtlCol="0" anchor="ctr"/>
+            <a:off x="1490284" y="2044005"/>
+            <a:ext cx="987642" cy="133350"/>
+          </a:xfrm>
+          <a:prstGeom prst="rect">
+            <a:avLst/>
+          </a:prstGeom>
+          <a:noFill/>
+          <a:ln/>
+        </p:spPr>
+        <p:txBody>
+          <a:bodyPr wrap="square" lIns="0" tIns="114300" rIns="114300" bIns="0" rtlCol="0" anchor="ctr"/>
           <a:lstStyle/>
           <a:p>
             <a:pPr algn="r" indent="0" marL="0">
@@ -8963,17 +9314,17 @@
         </p:nvSpPr>
         <p:spPr>
           <a:xfrm>
-            <a:off x="3044234" y="1982116"/>
-            <a:ext cx="1025964" cy="228600"/>
-          </a:xfrm>
-          <a:prstGeom prst="rect">
-            <a:avLst/>
-          </a:prstGeom>
-          <a:noFill/>
-          <a:ln/>
-        </p:spPr>
-        <p:txBody>
-          <a:bodyPr wrap="square" lIns="47625" tIns="114300" rIns="114300" bIns="47625" rtlCol="0" anchor="ctr"/>
+            <a:off x="3044234" y="2044005"/>
+            <a:ext cx="1025964" cy="133350"/>
+          </a:xfrm>
+          <a:prstGeom prst="rect">
+            <a:avLst/>
+          </a:prstGeom>
+          <a:noFill/>
+          <a:ln/>
+        </p:spPr>
+        <p:txBody>
+          <a:bodyPr wrap="square" lIns="0" tIns="114300" rIns="114300" bIns="0" rtlCol="0" anchor="ctr"/>
           <a:lstStyle/>
           <a:p>
             <a:pPr algn="r" indent="0" marL="0">
@@ -9002,17 +9353,17 @@
         </p:nvSpPr>
         <p:spPr>
           <a:xfrm>
-            <a:off x="5022469" y="1982116"/>
-            <a:ext cx="911457" cy="228600"/>
-          </a:xfrm>
-          <a:prstGeom prst="rect">
-            <a:avLst/>
-          </a:prstGeom>
-          <a:noFill/>
-          <a:ln/>
-        </p:spPr>
-        <p:txBody>
-          <a:bodyPr wrap="square" lIns="47625" tIns="114300" rIns="114300" bIns="47625" rtlCol="0" anchor="ctr"/>
+            <a:off x="5022469" y="2044005"/>
+            <a:ext cx="911457" cy="133350"/>
+          </a:xfrm>
+          <a:prstGeom prst="rect">
+            <a:avLst/>
+          </a:prstGeom>
+          <a:noFill/>
+          <a:ln/>
+        </p:spPr>
+        <p:txBody>
+          <a:bodyPr wrap="square" lIns="0" tIns="114300" rIns="114300" bIns="0" rtlCol="0" anchor="ctr"/>
           <a:lstStyle/>
           <a:p>
             <a:pPr algn="r" indent="0" marL="0">
@@ -9041,17 +9392,17 @@
         </p:nvSpPr>
         <p:spPr>
           <a:xfrm>
-            <a:off x="685783" y="5227164"/>
-            <a:ext cx="858266" cy="459879"/>
-          </a:xfrm>
-          <a:prstGeom prst="rect">
-            <a:avLst/>
-          </a:prstGeom>
-          <a:noFill/>
-          <a:ln/>
-        </p:spPr>
-        <p:txBody>
-          <a:bodyPr wrap="square" lIns="38100" tIns="114300" rIns="114300" bIns="38100" rtlCol="0" anchor="ctr"/>
+            <a:off x="685783" y="5407075"/>
+            <a:ext cx="858266" cy="133350"/>
+          </a:xfrm>
+          <a:prstGeom prst="rect">
+            <a:avLst/>
+          </a:prstGeom>
+          <a:noFill/>
+          <a:ln/>
+        </p:spPr>
+        <p:txBody>
+          <a:bodyPr wrap="square" lIns="0" tIns="114300" rIns="114300" bIns="0" rtlCol="0" anchor="ctr"/>
           <a:lstStyle/>
           <a:p>
             <a:pPr algn="l" indent="0" marL="0">
@@ -9080,17 +9431,17 @@
         </p:nvSpPr>
         <p:spPr>
           <a:xfrm>
-            <a:off x="7165294" y="1982116"/>
-            <a:ext cx="1114105" cy="228600"/>
-          </a:xfrm>
-          <a:prstGeom prst="rect">
-            <a:avLst/>
-          </a:prstGeom>
-          <a:noFill/>
-          <a:ln/>
-        </p:spPr>
-        <p:txBody>
-          <a:bodyPr wrap="square" lIns="47625" tIns="114300" rIns="114300" bIns="47625" rtlCol="0" anchor="ctr"/>
+            <a:off x="7165294" y="2044005"/>
+            <a:ext cx="1114105" cy="133350"/>
+          </a:xfrm>
+          <a:prstGeom prst="rect">
+            <a:avLst/>
+          </a:prstGeom>
+          <a:noFill/>
+          <a:ln/>
+        </p:spPr>
+        <p:txBody>
+          <a:bodyPr wrap="square" lIns="0" tIns="114300" rIns="114300" bIns="0" rtlCol="0" anchor="ctr"/>
           <a:lstStyle/>
           <a:p>
             <a:pPr algn="r" indent="0" marL="0">
@@ -9119,17 +9470,17 @@
         </p:nvSpPr>
         <p:spPr>
           <a:xfrm>
-            <a:off x="8245686" y="1982116"/>
-            <a:ext cx="1157486" cy="228600"/>
-          </a:xfrm>
-          <a:prstGeom prst="rect">
-            <a:avLst/>
-          </a:prstGeom>
-          <a:noFill/>
-          <a:ln/>
-        </p:spPr>
-        <p:txBody>
-          <a:bodyPr wrap="square" lIns="47625" tIns="114300" rIns="114300" bIns="47625" rtlCol="0" anchor="ctr"/>
+            <a:off x="8245686" y="2044005"/>
+            <a:ext cx="1157486" cy="133350"/>
+          </a:xfrm>
+          <a:prstGeom prst="rect">
+            <a:avLst/>
+          </a:prstGeom>
+          <a:noFill/>
+          <a:ln/>
+        </p:spPr>
+        <p:txBody>
+          <a:bodyPr wrap="square" lIns="0" tIns="114300" rIns="114300" bIns="0" rtlCol="0" anchor="ctr"/>
           <a:lstStyle/>
           <a:p>
             <a:pPr algn="r" indent="0" marL="0">
@@ -9158,17 +9509,17 @@
         </p:nvSpPr>
         <p:spPr>
           <a:xfrm>
-            <a:off x="10477496" y="1982116"/>
-            <a:ext cx="1028417" cy="228600"/>
-          </a:xfrm>
-          <a:prstGeom prst="rect">
-            <a:avLst/>
-          </a:prstGeom>
-          <a:noFill/>
-          <a:ln/>
-        </p:spPr>
-        <p:txBody>
-          <a:bodyPr wrap="square" lIns="47625" tIns="114300" rIns="114300" bIns="47625" rtlCol="0" anchor="ctr"/>
+            <a:off x="10477496" y="2044005"/>
+            <a:ext cx="1028417" cy="133350"/>
+          </a:xfrm>
+          <a:prstGeom prst="rect">
+            <a:avLst/>
+          </a:prstGeom>
+          <a:noFill/>
+          <a:ln/>
+        </p:spPr>
+        <p:txBody>
+          <a:bodyPr wrap="square" lIns="0" tIns="114300" rIns="114300" bIns="0" rtlCol="0" anchor="ctr"/>
           <a:lstStyle/>
           <a:p>
             <a:pPr algn="r" indent="0" marL="0">
@@ -9197,17 +9548,17 @@
         </p:nvSpPr>
         <p:spPr>
           <a:xfrm>
-            <a:off x="6257769" y="5227164"/>
-            <a:ext cx="968174" cy="459879"/>
-          </a:xfrm>
-          <a:prstGeom prst="rect">
-            <a:avLst/>
-          </a:prstGeom>
-          <a:noFill/>
-          <a:ln/>
-        </p:spPr>
-        <p:txBody>
-          <a:bodyPr wrap="square" lIns="38100" tIns="114300" rIns="114300" bIns="38100" rtlCol="0" anchor="ctr"/>
+            <a:off x="6257769" y="5407075"/>
+            <a:ext cx="968174" cy="133350"/>
+          </a:xfrm>
+          <a:prstGeom prst="rect">
+            <a:avLst/>
+          </a:prstGeom>
+          <a:noFill/>
+          <a:ln/>
+        </p:spPr>
+        <p:txBody>
+          <a:bodyPr wrap="square" lIns="0" tIns="114300" rIns="114300" bIns="0" rtlCol="0" anchor="ctr"/>
           <a:lstStyle/>
           <a:p>
             <a:pPr algn="l" indent="0" marL="0">
@@ -9236,17 +9587,17 @@
         </p:nvSpPr>
         <p:spPr>
           <a:xfrm>
-            <a:off x="3044234" y="5227164"/>
-            <a:ext cx="1025964" cy="459879"/>
-          </a:xfrm>
-          <a:prstGeom prst="rect">
-            <a:avLst/>
-          </a:prstGeom>
-          <a:noFill/>
-          <a:ln/>
-        </p:spPr>
-        <p:txBody>
-          <a:bodyPr wrap="square" lIns="38100" tIns="114300" rIns="114300" bIns="38100" rtlCol="0" anchor="ctr"/>
+            <a:off x="3044234" y="5407075"/>
+            <a:ext cx="1025964" cy="133350"/>
+          </a:xfrm>
+          <a:prstGeom prst="rect">
+            <a:avLst/>
+          </a:prstGeom>
+          <a:noFill/>
+          <a:ln/>
+        </p:spPr>
+        <p:txBody>
+          <a:bodyPr wrap="square" lIns="0" tIns="114300" rIns="114300" bIns="0" rtlCol="0" anchor="ctr"/>
           <a:lstStyle/>
           <a:p>
             <a:pPr algn="r" indent="0" marL="0">
@@ -9275,17 +9626,17 @@
         </p:nvSpPr>
         <p:spPr>
           <a:xfrm>
-            <a:off x="4040834" y="5227164"/>
-            <a:ext cx="1008183" cy="459879"/>
-          </a:xfrm>
-          <a:prstGeom prst="rect">
-            <a:avLst/>
-          </a:prstGeom>
-          <a:noFill/>
-          <a:ln/>
-        </p:spPr>
-        <p:txBody>
-          <a:bodyPr wrap="square" lIns="38100" tIns="114300" rIns="114300" bIns="38100" rtlCol="0" anchor="ctr"/>
+            <a:off x="4040834" y="5407075"/>
+            <a:ext cx="1008183" cy="133350"/>
+          </a:xfrm>
+          <a:prstGeom prst="rect">
+            <a:avLst/>
+          </a:prstGeom>
+          <a:noFill/>
+          <a:ln/>
+        </p:spPr>
+        <p:txBody>
+          <a:bodyPr wrap="square" lIns="0" tIns="114300" rIns="114300" bIns="0" rtlCol="0" anchor="ctr"/>
           <a:lstStyle/>
           <a:p>
             <a:pPr algn="r" indent="0" marL="0">
@@ -9353,17 +9704,17 @@
         </p:nvSpPr>
         <p:spPr>
           <a:xfrm>
-            <a:off x="3044234" y="2210716"/>
-            <a:ext cx="1025964" cy="495300"/>
-          </a:xfrm>
-          <a:prstGeom prst="rect">
-            <a:avLst/>
-          </a:prstGeom>
-          <a:noFill/>
-          <a:ln/>
-        </p:spPr>
-        <p:txBody>
-          <a:bodyPr wrap="square" lIns="38100" tIns="114300" rIns="114300" bIns="38100" rtlCol="0" anchor="ctr"/>
+            <a:off x="3044234" y="2403574"/>
+            <a:ext cx="1025964" cy="133350"/>
+          </a:xfrm>
+          <a:prstGeom prst="rect">
+            <a:avLst/>
+          </a:prstGeom>
+          <a:noFill/>
+          <a:ln/>
+        </p:spPr>
+        <p:txBody>
+          <a:bodyPr wrap="square" lIns="0" tIns="114300" rIns="114300" bIns="0" rtlCol="0" anchor="ctr"/>
           <a:lstStyle/>
           <a:p>
             <a:pPr algn="r" indent="0" marL="0">
@@ -9392,17 +9743,17 @@
         </p:nvSpPr>
         <p:spPr>
           <a:xfrm>
-            <a:off x="4040834" y="2210716"/>
-            <a:ext cx="1008183" cy="495300"/>
-          </a:xfrm>
-          <a:prstGeom prst="rect">
-            <a:avLst/>
-          </a:prstGeom>
-          <a:noFill/>
-          <a:ln/>
-        </p:spPr>
-        <p:txBody>
-          <a:bodyPr wrap="square" lIns="38100" tIns="114300" rIns="114300" bIns="38100" rtlCol="0" anchor="ctr"/>
+            <a:off x="4040834" y="2379762"/>
+            <a:ext cx="1008183" cy="133350"/>
+          </a:xfrm>
+          <a:prstGeom prst="rect">
+            <a:avLst/>
+          </a:prstGeom>
+          <a:noFill/>
+          <a:ln/>
+        </p:spPr>
+        <p:txBody>
+          <a:bodyPr wrap="square" lIns="0" tIns="114300" rIns="114300" bIns="0" rtlCol="0" anchor="ctr"/>
           <a:lstStyle/>
           <a:p>
             <a:pPr algn="r" indent="0" marL="0">
@@ -9431,17 +9782,17 @@
         </p:nvSpPr>
         <p:spPr>
           <a:xfrm>
-            <a:off x="5022469" y="2210716"/>
-            <a:ext cx="911457" cy="495300"/>
-          </a:xfrm>
-          <a:prstGeom prst="rect">
-            <a:avLst/>
-          </a:prstGeom>
-          <a:noFill/>
-          <a:ln/>
-        </p:spPr>
-        <p:txBody>
-          <a:bodyPr wrap="square" lIns="38100" tIns="114300" rIns="114300" bIns="38100" rtlCol="0" anchor="ctr"/>
+            <a:off x="5022469" y="2408337"/>
+            <a:ext cx="911457" cy="123825"/>
+          </a:xfrm>
+          <a:prstGeom prst="rect">
+            <a:avLst/>
+          </a:prstGeom>
+          <a:noFill/>
+          <a:ln/>
+        </p:spPr>
+        <p:txBody>
+          <a:bodyPr wrap="square" lIns="0" tIns="114300" rIns="114300" bIns="0" rtlCol="0" anchor="ctr"/>
           <a:lstStyle/>
           <a:p>
             <a:pPr algn="r" indent="0" marL="0">
@@ -9470,17 +9821,17 @@
         </p:nvSpPr>
         <p:spPr>
           <a:xfrm>
-            <a:off x="3044234" y="2706016"/>
-            <a:ext cx="1025964" cy="504230"/>
-          </a:xfrm>
-          <a:prstGeom prst="rect">
-            <a:avLst/>
-          </a:prstGeom>
-          <a:noFill/>
-          <a:ln/>
-        </p:spPr>
-        <p:txBody>
-          <a:bodyPr wrap="square" lIns="38100" tIns="114300" rIns="114300" bIns="38100" rtlCol="0" anchor="ctr"/>
+            <a:off x="3044234" y="2905720"/>
+            <a:ext cx="1025964" cy="133350"/>
+          </a:xfrm>
+          <a:prstGeom prst="rect">
+            <a:avLst/>
+          </a:prstGeom>
+          <a:noFill/>
+          <a:ln/>
+        </p:spPr>
+        <p:txBody>
+          <a:bodyPr wrap="square" lIns="0" tIns="114300" rIns="114300" bIns="0" rtlCol="0" anchor="ctr"/>
           <a:lstStyle/>
           <a:p>
             <a:pPr algn="r" indent="0" marL="0">
@@ -9509,17 +9860,17 @@
         </p:nvSpPr>
         <p:spPr>
           <a:xfrm>
-            <a:off x="4040834" y="2706016"/>
-            <a:ext cx="1008183" cy="504230"/>
-          </a:xfrm>
-          <a:prstGeom prst="rect">
-            <a:avLst/>
-          </a:prstGeom>
-          <a:noFill/>
-          <a:ln/>
-        </p:spPr>
-        <p:txBody>
-          <a:bodyPr wrap="square" lIns="38100" tIns="114300" rIns="114300" bIns="38100" rtlCol="0" anchor="ctr"/>
+            <a:off x="4040834" y="2881908"/>
+            <a:ext cx="1008183" cy="133350"/>
+          </a:xfrm>
+          <a:prstGeom prst="rect">
+            <a:avLst/>
+          </a:prstGeom>
+          <a:noFill/>
+          <a:ln/>
+        </p:spPr>
+        <p:txBody>
+          <a:bodyPr wrap="square" lIns="0" tIns="114300" rIns="114300" bIns="0" rtlCol="0" anchor="ctr"/>
           <a:lstStyle/>
           <a:p>
             <a:pPr algn="r" indent="0" marL="0">
@@ -9548,17 +9899,17 @@
         </p:nvSpPr>
         <p:spPr>
           <a:xfrm>
-            <a:off x="5022469" y="2706016"/>
-            <a:ext cx="911457" cy="504230"/>
-          </a:xfrm>
-          <a:prstGeom prst="rect">
-            <a:avLst/>
-          </a:prstGeom>
-          <a:noFill/>
-          <a:ln/>
-        </p:spPr>
-        <p:txBody>
-          <a:bodyPr wrap="square" lIns="38100" tIns="114300" rIns="114300" bIns="38100" rtlCol="0" anchor="ctr"/>
+            <a:off x="5022469" y="2910483"/>
+            <a:ext cx="911457" cy="123825"/>
+          </a:xfrm>
+          <a:prstGeom prst="rect">
+            <a:avLst/>
+          </a:prstGeom>
+          <a:noFill/>
+          <a:ln/>
+        </p:spPr>
+        <p:txBody>
+          <a:bodyPr wrap="square" lIns="0" tIns="114300" rIns="114300" bIns="0" rtlCol="0" anchor="ctr"/>
           <a:lstStyle/>
           <a:p>
             <a:pPr algn="r" indent="0" marL="0">
@@ -9587,17 +9938,17 @@
         </p:nvSpPr>
         <p:spPr>
           <a:xfrm>
-            <a:off x="3044234" y="3210246"/>
-            <a:ext cx="1025964" cy="504230"/>
-          </a:xfrm>
-          <a:prstGeom prst="rect">
-            <a:avLst/>
-          </a:prstGeom>
-          <a:noFill/>
-          <a:ln/>
-        </p:spPr>
-        <p:txBody>
-          <a:bodyPr wrap="square" lIns="38100" tIns="114300" rIns="114300" bIns="38100" rtlCol="0" anchor="ctr"/>
+            <a:off x="3044234" y="3409950"/>
+            <a:ext cx="1025964" cy="133350"/>
+          </a:xfrm>
+          <a:prstGeom prst="rect">
+            <a:avLst/>
+          </a:prstGeom>
+          <a:noFill/>
+          <a:ln/>
+        </p:spPr>
+        <p:txBody>
+          <a:bodyPr wrap="square" lIns="0" tIns="114300" rIns="114300" bIns="0" rtlCol="0" anchor="ctr"/>
           <a:lstStyle/>
           <a:p>
             <a:pPr algn="r" indent="0" marL="0">
@@ -9626,17 +9977,17 @@
         </p:nvSpPr>
         <p:spPr>
           <a:xfrm>
-            <a:off x="4040834" y="3210246"/>
-            <a:ext cx="1008183" cy="504230"/>
-          </a:xfrm>
-          <a:prstGeom prst="rect">
-            <a:avLst/>
-          </a:prstGeom>
-          <a:noFill/>
-          <a:ln/>
-        </p:spPr>
-        <p:txBody>
-          <a:bodyPr wrap="square" lIns="38100" tIns="114300" rIns="114300" bIns="38100" rtlCol="0" anchor="ctr"/>
+            <a:off x="4040834" y="3386138"/>
+            <a:ext cx="1008183" cy="133350"/>
+          </a:xfrm>
+          <a:prstGeom prst="rect">
+            <a:avLst/>
+          </a:prstGeom>
+          <a:noFill/>
+          <a:ln/>
+        </p:spPr>
+        <p:txBody>
+          <a:bodyPr wrap="square" lIns="0" tIns="114300" rIns="114300" bIns="0" rtlCol="0" anchor="ctr"/>
           <a:lstStyle/>
           <a:p>
             <a:pPr algn="r" indent="0" marL="0">
@@ -9665,17 +10016,17 @@
         </p:nvSpPr>
         <p:spPr>
           <a:xfrm>
-            <a:off x="5022469" y="3210246"/>
-            <a:ext cx="911457" cy="504230"/>
-          </a:xfrm>
-          <a:prstGeom prst="rect">
-            <a:avLst/>
-          </a:prstGeom>
-          <a:noFill/>
-          <a:ln/>
-        </p:spPr>
-        <p:txBody>
-          <a:bodyPr wrap="square" lIns="38100" tIns="114300" rIns="114300" bIns="38100" rtlCol="0" anchor="ctr"/>
+            <a:off x="5022469" y="3414713"/>
+            <a:ext cx="911457" cy="123825"/>
+          </a:xfrm>
+          <a:prstGeom prst="rect">
+            <a:avLst/>
+          </a:prstGeom>
+          <a:noFill/>
+          <a:ln/>
+        </p:spPr>
+        <p:txBody>
+          <a:bodyPr wrap="square" lIns="0" tIns="114300" rIns="114300" bIns="0" rtlCol="0" anchor="ctr"/>
           <a:lstStyle/>
           <a:p>
             <a:pPr algn="r" indent="0" marL="0">
@@ -9704,17 +10055,17 @@
         </p:nvSpPr>
         <p:spPr>
           <a:xfrm>
-            <a:off x="3044234" y="3714475"/>
-            <a:ext cx="1025964" cy="504230"/>
-          </a:xfrm>
-          <a:prstGeom prst="rect">
-            <a:avLst/>
-          </a:prstGeom>
-          <a:noFill/>
-          <a:ln/>
-        </p:spPr>
-        <p:txBody>
-          <a:bodyPr wrap="square" lIns="38100" tIns="114300" rIns="114300" bIns="38100" rtlCol="0" anchor="ctr"/>
+            <a:off x="3044234" y="3914180"/>
+            <a:ext cx="1025964" cy="133350"/>
+          </a:xfrm>
+          <a:prstGeom prst="rect">
+            <a:avLst/>
+          </a:prstGeom>
+          <a:noFill/>
+          <a:ln/>
+        </p:spPr>
+        <p:txBody>
+          <a:bodyPr wrap="square" lIns="0" tIns="114300" rIns="114300" bIns="0" rtlCol="0" anchor="ctr"/>
           <a:lstStyle/>
           <a:p>
             <a:pPr algn="r" indent="0" marL="0">
@@ -9743,17 +10094,17 @@
         </p:nvSpPr>
         <p:spPr>
           <a:xfrm>
-            <a:off x="4040834" y="3714475"/>
-            <a:ext cx="1008183" cy="504230"/>
-          </a:xfrm>
-          <a:prstGeom prst="rect">
-            <a:avLst/>
-          </a:prstGeom>
-          <a:noFill/>
-          <a:ln/>
-        </p:spPr>
-        <p:txBody>
-          <a:bodyPr wrap="square" lIns="38100" tIns="114300" rIns="114300" bIns="38100" rtlCol="0" anchor="ctr"/>
+            <a:off x="4040834" y="3890367"/>
+            <a:ext cx="1008183" cy="133350"/>
+          </a:xfrm>
+          <a:prstGeom prst="rect">
+            <a:avLst/>
+          </a:prstGeom>
+          <a:noFill/>
+          <a:ln/>
+        </p:spPr>
+        <p:txBody>
+          <a:bodyPr wrap="square" lIns="0" tIns="114300" rIns="114300" bIns="0" rtlCol="0" anchor="ctr"/>
           <a:lstStyle/>
           <a:p>
             <a:pPr algn="r" indent="0" marL="0">
@@ -9782,17 +10133,17 @@
         </p:nvSpPr>
         <p:spPr>
           <a:xfrm>
-            <a:off x="5022469" y="3714475"/>
-            <a:ext cx="911457" cy="504230"/>
-          </a:xfrm>
-          <a:prstGeom prst="rect">
-            <a:avLst/>
-          </a:prstGeom>
-          <a:noFill/>
-          <a:ln/>
-        </p:spPr>
-        <p:txBody>
-          <a:bodyPr wrap="square" lIns="38100" tIns="114300" rIns="114300" bIns="38100" rtlCol="0" anchor="ctr"/>
+            <a:off x="5022469" y="3918942"/>
+            <a:ext cx="911457" cy="123825"/>
+          </a:xfrm>
+          <a:prstGeom prst="rect">
+            <a:avLst/>
+          </a:prstGeom>
+          <a:noFill/>
+          <a:ln/>
+        </p:spPr>
+        <p:txBody>
+          <a:bodyPr wrap="square" lIns="0" tIns="114300" rIns="114300" bIns="0" rtlCol="0" anchor="ctr"/>
           <a:lstStyle/>
           <a:p>
             <a:pPr algn="r" indent="0" marL="0">
@@ -9821,17 +10172,17 @@
         </p:nvSpPr>
         <p:spPr>
           <a:xfrm>
-            <a:off x="3044234" y="4218705"/>
-            <a:ext cx="1025964" cy="504230"/>
-          </a:xfrm>
-          <a:prstGeom prst="rect">
-            <a:avLst/>
-          </a:prstGeom>
-          <a:noFill/>
-          <a:ln/>
-        </p:spPr>
-        <p:txBody>
-          <a:bodyPr wrap="square" lIns="38100" tIns="114300" rIns="114300" bIns="38100" rtlCol="0" anchor="ctr"/>
+            <a:off x="3044234" y="4418409"/>
+            <a:ext cx="1025964" cy="133350"/>
+          </a:xfrm>
+          <a:prstGeom prst="rect">
+            <a:avLst/>
+          </a:prstGeom>
+          <a:noFill/>
+          <a:ln/>
+        </p:spPr>
+        <p:txBody>
+          <a:bodyPr wrap="square" lIns="0" tIns="114300" rIns="114300" bIns="0" rtlCol="0" anchor="ctr"/>
           <a:lstStyle/>
           <a:p>
             <a:pPr algn="r" indent="0" marL="0">
@@ -9860,17 +10211,17 @@
         </p:nvSpPr>
         <p:spPr>
           <a:xfrm>
-            <a:off x="4040834" y="4218705"/>
-            <a:ext cx="1008183" cy="504230"/>
-          </a:xfrm>
-          <a:prstGeom prst="rect">
-            <a:avLst/>
-          </a:prstGeom>
-          <a:noFill/>
-          <a:ln/>
-        </p:spPr>
-        <p:txBody>
-          <a:bodyPr wrap="square" lIns="38100" tIns="114300" rIns="114300" bIns="38100" rtlCol="0" anchor="ctr"/>
+            <a:off x="4040834" y="4394597"/>
+            <a:ext cx="1008183" cy="133350"/>
+          </a:xfrm>
+          <a:prstGeom prst="rect">
+            <a:avLst/>
+          </a:prstGeom>
+          <a:noFill/>
+          <a:ln/>
+        </p:spPr>
+        <p:txBody>
+          <a:bodyPr wrap="square" lIns="0" tIns="114300" rIns="114300" bIns="0" rtlCol="0" anchor="ctr"/>
           <a:lstStyle/>
           <a:p>
             <a:pPr algn="r" indent="0" marL="0">
@@ -9899,17 +10250,17 @@
         </p:nvSpPr>
         <p:spPr>
           <a:xfrm>
-            <a:off x="5022469" y="4218705"/>
-            <a:ext cx="911457" cy="504230"/>
-          </a:xfrm>
-          <a:prstGeom prst="rect">
-            <a:avLst/>
-          </a:prstGeom>
-          <a:noFill/>
-          <a:ln/>
-        </p:spPr>
-        <p:txBody>
-          <a:bodyPr wrap="square" lIns="38100" tIns="114300" rIns="114300" bIns="38100" rtlCol="0" anchor="ctr"/>
+            <a:off x="5022469" y="4423172"/>
+            <a:ext cx="911457" cy="123825"/>
+          </a:xfrm>
+          <a:prstGeom prst="rect">
+            <a:avLst/>
+          </a:prstGeom>
+          <a:noFill/>
+          <a:ln/>
+        </p:spPr>
+        <p:txBody>
+          <a:bodyPr wrap="square" lIns="0" tIns="114300" rIns="114300" bIns="0" rtlCol="0" anchor="ctr"/>
           <a:lstStyle/>
           <a:p>
             <a:pPr algn="r" indent="0" marL="0">
@@ -9938,17 +10289,17 @@
         </p:nvSpPr>
         <p:spPr>
           <a:xfrm>
-            <a:off x="3044234" y="4722935"/>
-            <a:ext cx="1025964" cy="504230"/>
-          </a:xfrm>
-          <a:prstGeom prst="rect">
-            <a:avLst/>
-          </a:prstGeom>
-          <a:noFill/>
-          <a:ln/>
-        </p:spPr>
-        <p:txBody>
-          <a:bodyPr wrap="square" lIns="38100" tIns="114300" rIns="114300" bIns="38100" rtlCol="0" anchor="ctr"/>
+            <a:off x="3044234" y="4922639"/>
+            <a:ext cx="1025964" cy="133350"/>
+          </a:xfrm>
+          <a:prstGeom prst="rect">
+            <a:avLst/>
+          </a:prstGeom>
+          <a:noFill/>
+          <a:ln/>
+        </p:spPr>
+        <p:txBody>
+          <a:bodyPr wrap="square" lIns="0" tIns="114300" rIns="114300" bIns="0" rtlCol="0" anchor="ctr"/>
           <a:lstStyle/>
           <a:p>
             <a:pPr algn="r" indent="0" marL="0">
@@ -9977,17 +10328,17 @@
         </p:nvSpPr>
         <p:spPr>
           <a:xfrm>
-            <a:off x="4040834" y="4722935"/>
-            <a:ext cx="1008183" cy="504230"/>
-          </a:xfrm>
-          <a:prstGeom prst="rect">
-            <a:avLst/>
-          </a:prstGeom>
-          <a:noFill/>
-          <a:ln/>
-        </p:spPr>
-        <p:txBody>
-          <a:bodyPr wrap="square" lIns="38100" tIns="114300" rIns="114300" bIns="38100" rtlCol="0" anchor="ctr"/>
+            <a:off x="4040834" y="4898827"/>
+            <a:ext cx="1008183" cy="133350"/>
+          </a:xfrm>
+          <a:prstGeom prst="rect">
+            <a:avLst/>
+          </a:prstGeom>
+          <a:noFill/>
+          <a:ln/>
+        </p:spPr>
+        <p:txBody>
+          <a:bodyPr wrap="square" lIns="0" tIns="114300" rIns="114300" bIns="0" rtlCol="0" anchor="ctr"/>
           <a:lstStyle/>
           <a:p>
             <a:pPr algn="r" indent="0" marL="0">
@@ -10016,17 +10367,17 @@
         </p:nvSpPr>
         <p:spPr>
           <a:xfrm>
-            <a:off x="5022469" y="4722935"/>
-            <a:ext cx="911457" cy="504230"/>
-          </a:xfrm>
-          <a:prstGeom prst="rect">
-            <a:avLst/>
-          </a:prstGeom>
-          <a:noFill/>
-          <a:ln/>
-        </p:spPr>
-        <p:txBody>
-          <a:bodyPr wrap="square" lIns="38100" tIns="114300" rIns="114300" bIns="38100" rtlCol="0" anchor="ctr"/>
+            <a:off x="5022469" y="4927402"/>
+            <a:ext cx="911457" cy="123825"/>
+          </a:xfrm>
+          <a:prstGeom prst="rect">
+            <a:avLst/>
+          </a:prstGeom>
+          <a:noFill/>
+          <a:ln/>
+        </p:spPr>
+        <p:txBody>
+          <a:bodyPr wrap="square" lIns="0" tIns="114300" rIns="114300" bIns="0" rtlCol="0" anchor="ctr"/>
           <a:lstStyle/>
           <a:p>
             <a:pPr algn="r" indent="0" marL="0">
@@ -10055,17 +10406,17 @@
         </p:nvSpPr>
         <p:spPr>
           <a:xfrm>
-            <a:off x="5022469" y="5227164"/>
-            <a:ext cx="911457" cy="459879"/>
-          </a:xfrm>
-          <a:prstGeom prst="rect">
-            <a:avLst/>
-          </a:prstGeom>
-          <a:noFill/>
-          <a:ln/>
-        </p:spPr>
-        <p:txBody>
-          <a:bodyPr wrap="square" lIns="38100" tIns="114300" rIns="114300" bIns="38100" rtlCol="0" anchor="ctr"/>
+            <a:off x="5022469" y="5411837"/>
+            <a:ext cx="911457" cy="123825"/>
+          </a:xfrm>
+          <a:prstGeom prst="rect">
+            <a:avLst/>
+          </a:prstGeom>
+          <a:noFill/>
+          <a:ln/>
+        </p:spPr>
+        <p:txBody>
+          <a:bodyPr wrap="square" lIns="0" tIns="114300" rIns="114300" bIns="0" rtlCol="0" anchor="ctr"/>
           <a:lstStyle/>
           <a:p>
             <a:pPr algn="r" indent="0" marL="0">
@@ -10094,17 +10445,17 @@
         </p:nvSpPr>
         <p:spPr>
           <a:xfrm>
-            <a:off x="10477496" y="2210716"/>
-            <a:ext cx="1028417" cy="495300"/>
-          </a:xfrm>
-          <a:prstGeom prst="rect">
-            <a:avLst/>
-          </a:prstGeom>
-          <a:noFill/>
-          <a:ln/>
-        </p:spPr>
-        <p:txBody>
-          <a:bodyPr wrap="square" lIns="38100" tIns="114300" rIns="114300" bIns="38100" rtlCol="0" anchor="ctr"/>
+            <a:off x="10477496" y="2408337"/>
+            <a:ext cx="1028417" cy="123825"/>
+          </a:xfrm>
+          <a:prstGeom prst="rect">
+            <a:avLst/>
+          </a:prstGeom>
+          <a:noFill/>
+          <a:ln/>
+        </p:spPr>
+        <p:txBody>
+          <a:bodyPr wrap="square" lIns="0" tIns="114300" rIns="114300" bIns="0" rtlCol="0" anchor="ctr"/>
           <a:lstStyle/>
           <a:p>
             <a:pPr algn="r" indent="0" marL="0">
@@ -10133,17 +10484,17 @@
         </p:nvSpPr>
         <p:spPr>
           <a:xfrm>
-            <a:off x="10477496" y="2706016"/>
-            <a:ext cx="1028417" cy="504230"/>
-          </a:xfrm>
-          <a:prstGeom prst="rect">
-            <a:avLst/>
-          </a:prstGeom>
-          <a:noFill/>
-          <a:ln/>
-        </p:spPr>
-        <p:txBody>
-          <a:bodyPr wrap="square" lIns="38100" tIns="114300" rIns="114300" bIns="38100" rtlCol="0" anchor="ctr"/>
+            <a:off x="10477496" y="2910483"/>
+            <a:ext cx="1028417" cy="123825"/>
+          </a:xfrm>
+          <a:prstGeom prst="rect">
+            <a:avLst/>
+          </a:prstGeom>
+          <a:noFill/>
+          <a:ln/>
+        </p:spPr>
+        <p:txBody>
+          <a:bodyPr wrap="square" lIns="0" tIns="114300" rIns="114300" bIns="0" rtlCol="0" anchor="ctr"/>
           <a:lstStyle/>
           <a:p>
             <a:pPr algn="r" indent="0" marL="0">
@@ -10172,17 +10523,17 @@
         </p:nvSpPr>
         <p:spPr>
           <a:xfrm>
-            <a:off x="10477496" y="3210246"/>
-            <a:ext cx="1028417" cy="504230"/>
-          </a:xfrm>
-          <a:prstGeom prst="rect">
-            <a:avLst/>
-          </a:prstGeom>
-          <a:noFill/>
-          <a:ln/>
-        </p:spPr>
-        <p:txBody>
-          <a:bodyPr wrap="square" lIns="38100" tIns="114300" rIns="114300" bIns="38100" rtlCol="0" anchor="ctr"/>
+            <a:off x="10477496" y="3414713"/>
+            <a:ext cx="1028417" cy="123825"/>
+          </a:xfrm>
+          <a:prstGeom prst="rect">
+            <a:avLst/>
+          </a:prstGeom>
+          <a:noFill/>
+          <a:ln/>
+        </p:spPr>
+        <p:txBody>
+          <a:bodyPr wrap="square" lIns="0" tIns="114300" rIns="114300" bIns="0" rtlCol="0" anchor="ctr"/>
           <a:lstStyle/>
           <a:p>
             <a:pPr algn="r" indent="0" marL="0">
@@ -10211,17 +10562,17 @@
         </p:nvSpPr>
         <p:spPr>
           <a:xfrm>
-            <a:off x="10477496" y="3714475"/>
-            <a:ext cx="1028417" cy="504230"/>
-          </a:xfrm>
-          <a:prstGeom prst="rect">
-            <a:avLst/>
-          </a:prstGeom>
-          <a:noFill/>
-          <a:ln/>
-        </p:spPr>
-        <p:txBody>
-          <a:bodyPr wrap="square" lIns="38100" tIns="114300" rIns="114300" bIns="38100" rtlCol="0" anchor="ctr"/>
+            <a:off x="10477496" y="3918942"/>
+            <a:ext cx="1028417" cy="123825"/>
+          </a:xfrm>
+          <a:prstGeom prst="rect">
+            <a:avLst/>
+          </a:prstGeom>
+          <a:noFill/>
+          <a:ln/>
+        </p:spPr>
+        <p:txBody>
+          <a:bodyPr wrap="square" lIns="0" tIns="114300" rIns="114300" bIns="0" rtlCol="0" anchor="ctr"/>
           <a:lstStyle/>
           <a:p>
             <a:pPr algn="r" indent="0" marL="0">
@@ -10250,17 +10601,17 @@
         </p:nvSpPr>
         <p:spPr>
           <a:xfrm>
-            <a:off x="10477496" y="4218705"/>
-            <a:ext cx="1028417" cy="504230"/>
-          </a:xfrm>
-          <a:prstGeom prst="rect">
-            <a:avLst/>
-          </a:prstGeom>
-          <a:noFill/>
-          <a:ln/>
-        </p:spPr>
-        <p:txBody>
-          <a:bodyPr wrap="square" lIns="38100" tIns="114300" rIns="114300" bIns="38100" rtlCol="0" anchor="ctr"/>
+            <a:off x="10477496" y="4423172"/>
+            <a:ext cx="1028417" cy="123825"/>
+          </a:xfrm>
+          <a:prstGeom prst="rect">
+            <a:avLst/>
+          </a:prstGeom>
+          <a:noFill/>
+          <a:ln/>
+        </p:spPr>
+        <p:txBody>
+          <a:bodyPr wrap="square" lIns="0" tIns="114300" rIns="114300" bIns="0" rtlCol="0" anchor="ctr"/>
           <a:lstStyle/>
           <a:p>
             <a:pPr algn="r" indent="0" marL="0">
@@ -10289,17 +10640,17 @@
         </p:nvSpPr>
         <p:spPr>
           <a:xfrm>
-            <a:off x="10477496" y="4722935"/>
-            <a:ext cx="1028417" cy="504230"/>
-          </a:xfrm>
-          <a:prstGeom prst="rect">
-            <a:avLst/>
-          </a:prstGeom>
-          <a:noFill/>
-          <a:ln/>
-        </p:spPr>
-        <p:txBody>
-          <a:bodyPr wrap="square" lIns="38100" tIns="114300" rIns="114300" bIns="38100" rtlCol="0" anchor="ctr"/>
+            <a:off x="10477496" y="4927402"/>
+            <a:ext cx="1028417" cy="123825"/>
+          </a:xfrm>
+          <a:prstGeom prst="rect">
+            <a:avLst/>
+          </a:prstGeom>
+          <a:noFill/>
+          <a:ln/>
+        </p:spPr>
+        <p:txBody>
+          <a:bodyPr wrap="square" lIns="0" tIns="114300" rIns="114300" bIns="0" rtlCol="0" anchor="ctr"/>
           <a:lstStyle/>
           <a:p>
             <a:pPr algn="r" indent="0" marL="0">
@@ -10328,17 +10679,17 @@
         </p:nvSpPr>
         <p:spPr>
           <a:xfrm>
-            <a:off x="10477496" y="5227164"/>
-            <a:ext cx="1028417" cy="459879"/>
-          </a:xfrm>
-          <a:prstGeom prst="rect">
-            <a:avLst/>
-          </a:prstGeom>
-          <a:noFill/>
-          <a:ln/>
-        </p:spPr>
-        <p:txBody>
-          <a:bodyPr wrap="square" lIns="38100" tIns="114300" rIns="114300" bIns="38100" rtlCol="0" anchor="ctr"/>
+            <a:off x="10477496" y="5411837"/>
+            <a:ext cx="1028417" cy="123825"/>
+          </a:xfrm>
+          <a:prstGeom prst="rect">
+            <a:avLst/>
+          </a:prstGeom>
+          <a:noFill/>
+          <a:ln/>
+        </p:spPr>
+        <p:txBody>
+          <a:bodyPr wrap="square" lIns="0" tIns="114300" rIns="114300" bIns="0" rtlCol="0" anchor="ctr"/>
           <a:lstStyle/>
           <a:p>
             <a:pPr algn="r" indent="0" marL="0">
@@ -10445,17 +10796,17 @@
         </p:nvSpPr>
         <p:spPr>
           <a:xfrm>
-            <a:off x="1490284" y="5227164"/>
-            <a:ext cx="987642" cy="459879"/>
-          </a:xfrm>
-          <a:prstGeom prst="rect">
-            <a:avLst/>
-          </a:prstGeom>
-          <a:noFill/>
-          <a:ln/>
-        </p:spPr>
-        <p:txBody>
-          <a:bodyPr wrap="square" lIns="38100" tIns="114300" rIns="114300" bIns="38100" rtlCol="0" anchor="ctr"/>
+            <a:off x="1490284" y="5407075"/>
+            <a:ext cx="987642" cy="133350"/>
+          </a:xfrm>
+          <a:prstGeom prst="rect">
+            <a:avLst/>
+          </a:prstGeom>
+          <a:noFill/>
+          <a:ln/>
+        </p:spPr>
+        <p:txBody>
+          <a:bodyPr wrap="square" lIns="0" tIns="114300" rIns="114300" bIns="0" rtlCol="0" anchor="ctr"/>
           <a:lstStyle/>
           <a:p>
             <a:pPr algn="r" indent="0" marL="0">
@@ -10484,17 +10835,17 @@
         </p:nvSpPr>
         <p:spPr>
           <a:xfrm>
-            <a:off x="7165294" y="5227164"/>
-            <a:ext cx="1114105" cy="459879"/>
-          </a:xfrm>
-          <a:prstGeom prst="rect">
-            <a:avLst/>
-          </a:prstGeom>
-          <a:noFill/>
-          <a:ln/>
-        </p:spPr>
-        <p:txBody>
-          <a:bodyPr wrap="square" lIns="38100" tIns="114300" rIns="114300" bIns="38100" rtlCol="0" anchor="ctr"/>
+            <a:off x="7165294" y="5407075"/>
+            <a:ext cx="1114105" cy="133350"/>
+          </a:xfrm>
+          <a:prstGeom prst="rect">
+            <a:avLst/>
+          </a:prstGeom>
+          <a:noFill/>
+          <a:ln/>
+        </p:spPr>
+        <p:txBody>
+          <a:bodyPr wrap="square" lIns="0" tIns="114300" rIns="114300" bIns="0" rtlCol="0" anchor="ctr"/>
           <a:lstStyle/>
           <a:p>
             <a:pPr algn="r" indent="0" marL="0">
@@ -10523,17 +10874,17 @@
         </p:nvSpPr>
         <p:spPr>
           <a:xfrm>
-            <a:off x="685783" y="1982116"/>
-            <a:ext cx="858266" cy="228600"/>
-          </a:xfrm>
-          <a:prstGeom prst="rect">
-            <a:avLst/>
-          </a:prstGeom>
-          <a:noFill/>
-          <a:ln/>
-        </p:spPr>
-        <p:txBody>
-          <a:bodyPr wrap="square" lIns="47625" tIns="114300" rIns="114300" bIns="47625" rtlCol="0" anchor="ctr"/>
+            <a:off x="685783" y="2044005"/>
+            <a:ext cx="858266" cy="133350"/>
+          </a:xfrm>
+          <a:prstGeom prst="rect">
+            <a:avLst/>
+          </a:prstGeom>
+          <a:noFill/>
+          <a:ln/>
+        </p:spPr>
+        <p:txBody>
+          <a:bodyPr wrap="square" lIns="0" tIns="114300" rIns="114300" bIns="0" rtlCol="0" anchor="ctr"/>
           <a:lstStyle/>
           <a:p>
             <a:pPr algn="l" indent="0" marL="0">
@@ -10562,17 +10913,17 @@
         </p:nvSpPr>
         <p:spPr>
           <a:xfrm>
-            <a:off x="2460041" y="1982116"/>
-            <a:ext cx="614076" cy="228600"/>
-          </a:xfrm>
-          <a:prstGeom prst="rect">
-            <a:avLst/>
-          </a:prstGeom>
-          <a:noFill/>
-          <a:ln/>
-        </p:spPr>
-        <p:txBody>
-          <a:bodyPr wrap="square" lIns="47625" tIns="114300" rIns="114300" bIns="47625" rtlCol="0" anchor="ctr"/>
+            <a:off x="2460041" y="2044005"/>
+            <a:ext cx="614076" cy="133350"/>
+          </a:xfrm>
+          <a:prstGeom prst="rect">
+            <a:avLst/>
+          </a:prstGeom>
+          <a:noFill/>
+          <a:ln/>
+        </p:spPr>
+        <p:txBody>
+          <a:bodyPr wrap="square" lIns="0" tIns="114300" rIns="114300" bIns="0" rtlCol="0" anchor="ctr"/>
           <a:lstStyle/>
           <a:p>
             <a:pPr algn="r" indent="0" marL="0">
@@ -10601,17 +10952,17 @@
         </p:nvSpPr>
         <p:spPr>
           <a:xfrm>
-            <a:off x="685783" y="2210716"/>
-            <a:ext cx="858266" cy="495300"/>
-          </a:xfrm>
-          <a:prstGeom prst="rect">
-            <a:avLst/>
-          </a:prstGeom>
-          <a:noFill/>
-          <a:ln/>
-        </p:spPr>
-        <p:txBody>
-          <a:bodyPr wrap="square" lIns="38100" tIns="114300" rIns="114300" bIns="38100" rtlCol="0" anchor="ctr"/>
+            <a:off x="685783" y="2403574"/>
+            <a:ext cx="858266" cy="133350"/>
+          </a:xfrm>
+          <a:prstGeom prst="rect">
+            <a:avLst/>
+          </a:prstGeom>
+          <a:noFill/>
+          <a:ln/>
+        </p:spPr>
+        <p:txBody>
+          <a:bodyPr wrap="square" lIns="0" tIns="114300" rIns="114300" bIns="0" rtlCol="0" anchor="ctr"/>
           <a:lstStyle/>
           <a:p>
             <a:pPr algn="l" indent="0" marL="0">
@@ -10640,17 +10991,17 @@
         </p:nvSpPr>
         <p:spPr>
           <a:xfrm>
-            <a:off x="1490284" y="2210716"/>
-            <a:ext cx="987642" cy="495300"/>
-          </a:xfrm>
-          <a:prstGeom prst="rect">
-            <a:avLst/>
-          </a:prstGeom>
-          <a:noFill/>
-          <a:ln/>
-        </p:spPr>
-        <p:txBody>
-          <a:bodyPr wrap="square" lIns="38100" tIns="114300" rIns="114300" bIns="38100" rtlCol="0" anchor="ctr"/>
+            <a:off x="1490284" y="2403574"/>
+            <a:ext cx="987642" cy="133350"/>
+          </a:xfrm>
+          <a:prstGeom prst="rect">
+            <a:avLst/>
+          </a:prstGeom>
+          <a:noFill/>
+          <a:ln/>
+        </p:spPr>
+        <p:txBody>
+          <a:bodyPr wrap="square" lIns="0" tIns="114300" rIns="114300" bIns="0" rtlCol="0" anchor="ctr"/>
           <a:lstStyle/>
           <a:p>
             <a:pPr algn="r" indent="0" marL="0">
@@ -10679,17 +11030,17 @@
         </p:nvSpPr>
         <p:spPr>
           <a:xfrm>
-            <a:off x="685783" y="2706016"/>
-            <a:ext cx="858266" cy="504230"/>
-          </a:xfrm>
-          <a:prstGeom prst="rect">
-            <a:avLst/>
-          </a:prstGeom>
-          <a:noFill/>
-          <a:ln/>
-        </p:spPr>
-        <p:txBody>
-          <a:bodyPr wrap="square" lIns="38100" tIns="114300" rIns="114300" bIns="38100" rtlCol="0" anchor="ctr"/>
+            <a:off x="685783" y="2905720"/>
+            <a:ext cx="858266" cy="133350"/>
+          </a:xfrm>
+          <a:prstGeom prst="rect">
+            <a:avLst/>
+          </a:prstGeom>
+          <a:noFill/>
+          <a:ln/>
+        </p:spPr>
+        <p:txBody>
+          <a:bodyPr wrap="square" lIns="0" tIns="114300" rIns="114300" bIns="0" rtlCol="0" anchor="ctr"/>
           <a:lstStyle/>
           <a:p>
             <a:pPr algn="l" indent="0" marL="0">
@@ -10718,17 +11069,17 @@
         </p:nvSpPr>
         <p:spPr>
           <a:xfrm>
-            <a:off x="1490284" y="2706016"/>
-            <a:ext cx="987642" cy="504230"/>
-          </a:xfrm>
-          <a:prstGeom prst="rect">
-            <a:avLst/>
-          </a:prstGeom>
-          <a:noFill/>
-          <a:ln/>
-        </p:spPr>
-        <p:txBody>
-          <a:bodyPr wrap="square" lIns="38100" tIns="114300" rIns="114300" bIns="38100" rtlCol="0" anchor="ctr"/>
+            <a:off x="1490284" y="2905720"/>
+            <a:ext cx="987642" cy="133350"/>
+          </a:xfrm>
+          <a:prstGeom prst="rect">
+            <a:avLst/>
+          </a:prstGeom>
+          <a:noFill/>
+          <a:ln/>
+        </p:spPr>
+        <p:txBody>
+          <a:bodyPr wrap="square" lIns="0" tIns="114300" rIns="114300" bIns="0" rtlCol="0" anchor="ctr"/>
           <a:lstStyle/>
           <a:p>
             <a:pPr algn="r" indent="0" marL="0">
@@ -10757,17 +11108,17 @@
         </p:nvSpPr>
         <p:spPr>
           <a:xfrm>
-            <a:off x="685783" y="3210246"/>
-            <a:ext cx="858266" cy="504230"/>
-          </a:xfrm>
-          <a:prstGeom prst="rect">
-            <a:avLst/>
-          </a:prstGeom>
-          <a:noFill/>
-          <a:ln/>
-        </p:spPr>
-        <p:txBody>
-          <a:bodyPr wrap="square" lIns="38100" tIns="114300" rIns="114300" bIns="38100" rtlCol="0" anchor="ctr"/>
+            <a:off x="685783" y="3409950"/>
+            <a:ext cx="858266" cy="133350"/>
+          </a:xfrm>
+          <a:prstGeom prst="rect">
+            <a:avLst/>
+          </a:prstGeom>
+          <a:noFill/>
+          <a:ln/>
+        </p:spPr>
+        <p:txBody>
+          <a:bodyPr wrap="square" lIns="0" tIns="114300" rIns="114300" bIns="0" rtlCol="0" anchor="ctr"/>
           <a:lstStyle/>
           <a:p>
             <a:pPr algn="l" indent="0" marL="0">
@@ -10796,17 +11147,17 @@
         </p:nvSpPr>
         <p:spPr>
           <a:xfrm>
-            <a:off x="1490284" y="3210246"/>
-            <a:ext cx="987642" cy="504230"/>
-          </a:xfrm>
-          <a:prstGeom prst="rect">
-            <a:avLst/>
-          </a:prstGeom>
-          <a:noFill/>
-          <a:ln/>
-        </p:spPr>
-        <p:txBody>
-          <a:bodyPr wrap="square" lIns="38100" tIns="114300" rIns="114300" bIns="38100" rtlCol="0" anchor="ctr"/>
+            <a:off x="1490284" y="3409950"/>
+            <a:ext cx="987642" cy="133350"/>
+          </a:xfrm>
+          <a:prstGeom prst="rect">
+            <a:avLst/>
+          </a:prstGeom>
+          <a:noFill/>
+          <a:ln/>
+        </p:spPr>
+        <p:txBody>
+          <a:bodyPr wrap="square" lIns="0" tIns="114300" rIns="114300" bIns="0" rtlCol="0" anchor="ctr"/>
           <a:lstStyle/>
           <a:p>
             <a:pPr algn="r" indent="0" marL="0">
@@ -10835,17 +11186,17 @@
         </p:nvSpPr>
         <p:spPr>
           <a:xfrm>
-            <a:off x="685783" y="3714475"/>
-            <a:ext cx="858266" cy="504230"/>
-          </a:xfrm>
-          <a:prstGeom prst="rect">
-            <a:avLst/>
-          </a:prstGeom>
-          <a:noFill/>
-          <a:ln/>
-        </p:spPr>
-        <p:txBody>
-          <a:bodyPr wrap="square" lIns="38100" tIns="114300" rIns="114300" bIns="38100" rtlCol="0" anchor="ctr"/>
+            <a:off x="685783" y="3914180"/>
+            <a:ext cx="858266" cy="133350"/>
+          </a:xfrm>
+          <a:prstGeom prst="rect">
+            <a:avLst/>
+          </a:prstGeom>
+          <a:noFill/>
+          <a:ln/>
+        </p:spPr>
+        <p:txBody>
+          <a:bodyPr wrap="square" lIns="0" tIns="114300" rIns="114300" bIns="0" rtlCol="0" anchor="ctr"/>
           <a:lstStyle/>
           <a:p>
             <a:pPr algn="l" indent="0" marL="0">
@@ -10874,17 +11225,17 @@
         </p:nvSpPr>
         <p:spPr>
           <a:xfrm>
-            <a:off x="1490284" y="3714475"/>
-            <a:ext cx="987642" cy="504230"/>
-          </a:xfrm>
-          <a:prstGeom prst="rect">
-            <a:avLst/>
-          </a:prstGeom>
-          <a:noFill/>
-          <a:ln/>
-        </p:spPr>
-        <p:txBody>
-          <a:bodyPr wrap="square" lIns="38100" tIns="114300" rIns="114300" bIns="38100" rtlCol="0" anchor="ctr"/>
+            <a:off x="1490284" y="3914180"/>
+            <a:ext cx="987642" cy="133350"/>
+          </a:xfrm>
+          <a:prstGeom prst="rect">
+            <a:avLst/>
+          </a:prstGeom>
+          <a:noFill/>
+          <a:ln/>
+        </p:spPr>
+        <p:txBody>
+          <a:bodyPr wrap="square" lIns="0" tIns="114300" rIns="114300" bIns="0" rtlCol="0" anchor="ctr"/>
           <a:lstStyle/>
           <a:p>
             <a:pPr algn="r" indent="0" marL="0">
@@ -10913,17 +11264,17 @@
         </p:nvSpPr>
         <p:spPr>
           <a:xfrm>
-            <a:off x="685783" y="4218705"/>
-            <a:ext cx="858266" cy="504230"/>
-          </a:xfrm>
-          <a:prstGeom prst="rect">
-            <a:avLst/>
-          </a:prstGeom>
-          <a:noFill/>
-          <a:ln/>
-        </p:spPr>
-        <p:txBody>
-          <a:bodyPr wrap="square" lIns="38100" tIns="114300" rIns="114300" bIns="38100" rtlCol="0" anchor="ctr"/>
+            <a:off x="685783" y="4418409"/>
+            <a:ext cx="858266" cy="133350"/>
+          </a:xfrm>
+          <a:prstGeom prst="rect">
+            <a:avLst/>
+          </a:prstGeom>
+          <a:noFill/>
+          <a:ln/>
+        </p:spPr>
+        <p:txBody>
+          <a:bodyPr wrap="square" lIns="0" tIns="114300" rIns="114300" bIns="0" rtlCol="0" anchor="ctr"/>
           <a:lstStyle/>
           <a:p>
             <a:pPr algn="l" indent="0" marL="0">
@@ -10952,17 +11303,17 @@
         </p:nvSpPr>
         <p:spPr>
           <a:xfrm>
-            <a:off x="685783" y="4722935"/>
-            <a:ext cx="858266" cy="504230"/>
-          </a:xfrm>
-          <a:prstGeom prst="rect">
-            <a:avLst/>
-          </a:prstGeom>
-          <a:noFill/>
-          <a:ln/>
-        </p:spPr>
-        <p:txBody>
-          <a:bodyPr wrap="square" lIns="38100" tIns="114300" rIns="114300" bIns="38100" rtlCol="0" anchor="ctr"/>
+            <a:off x="685783" y="4922639"/>
+            <a:ext cx="858266" cy="133350"/>
+          </a:xfrm>
+          <a:prstGeom prst="rect">
+            <a:avLst/>
+          </a:prstGeom>
+          <a:noFill/>
+          <a:ln/>
+        </p:spPr>
+        <p:txBody>
+          <a:bodyPr wrap="square" lIns="0" tIns="114300" rIns="114300" bIns="0" rtlCol="0" anchor="ctr"/>
           <a:lstStyle/>
           <a:p>
             <a:pPr algn="l" indent="0" marL="0">
@@ -10991,17 +11342,17 @@
         </p:nvSpPr>
         <p:spPr>
           <a:xfrm>
-            <a:off x="2460041" y="5227164"/>
-            <a:ext cx="614076" cy="459879"/>
-          </a:xfrm>
-          <a:prstGeom prst="rect">
-            <a:avLst/>
-          </a:prstGeom>
-          <a:noFill/>
-          <a:ln/>
-        </p:spPr>
-        <p:txBody>
-          <a:bodyPr wrap="square" lIns="38100" tIns="114300" rIns="114300" bIns="38100" rtlCol="0" anchor="ctr"/>
+            <a:off x="2460041" y="5407075"/>
+            <a:ext cx="614076" cy="133350"/>
+          </a:xfrm>
+          <a:prstGeom prst="rect">
+            <a:avLst/>
+          </a:prstGeom>
+          <a:noFill/>
+          <a:ln/>
+        </p:spPr>
+        <p:txBody>
+          <a:bodyPr wrap="square" lIns="0" tIns="114300" rIns="114300" bIns="0" rtlCol="0" anchor="ctr"/>
           <a:lstStyle/>
           <a:p>
             <a:pPr algn="r" indent="0" marL="0">
@@ -11030,17 +11381,17 @@
         </p:nvSpPr>
         <p:spPr>
           <a:xfrm>
-            <a:off x="6257769" y="1982116"/>
-            <a:ext cx="968174" cy="228600"/>
-          </a:xfrm>
-          <a:prstGeom prst="rect">
-            <a:avLst/>
-          </a:prstGeom>
-          <a:noFill/>
-          <a:ln/>
-        </p:spPr>
-        <p:txBody>
-          <a:bodyPr wrap="square" lIns="47625" tIns="114300" rIns="114300" bIns="47625" rtlCol="0" anchor="ctr"/>
+            <a:off x="6257769" y="2044005"/>
+            <a:ext cx="968174" cy="133350"/>
+          </a:xfrm>
+          <a:prstGeom prst="rect">
+            <a:avLst/>
+          </a:prstGeom>
+          <a:noFill/>
+          <a:ln/>
+        </p:spPr>
+        <p:txBody>
+          <a:bodyPr wrap="square" lIns="0" tIns="114300" rIns="114300" bIns="0" rtlCol="0" anchor="ctr"/>
           <a:lstStyle/>
           <a:p>
             <a:pPr algn="l" indent="0" marL="0">
@@ -11069,17 +11420,17 @@
         </p:nvSpPr>
         <p:spPr>
           <a:xfrm>
-            <a:off x="6257769" y="2210716"/>
-            <a:ext cx="968174" cy="495300"/>
-          </a:xfrm>
-          <a:prstGeom prst="rect">
-            <a:avLst/>
-          </a:prstGeom>
-          <a:noFill/>
-          <a:ln/>
-        </p:spPr>
-        <p:txBody>
-          <a:bodyPr wrap="square" lIns="38100" tIns="114300" rIns="114300" bIns="38100" rtlCol="0" anchor="ctr"/>
+            <a:off x="6257769" y="2403574"/>
+            <a:ext cx="968174" cy="133350"/>
+          </a:xfrm>
+          <a:prstGeom prst="rect">
+            <a:avLst/>
+          </a:prstGeom>
+          <a:noFill/>
+          <a:ln/>
+        </p:spPr>
+        <p:txBody>
+          <a:bodyPr wrap="square" lIns="0" tIns="114300" rIns="114300" bIns="0" rtlCol="0" anchor="ctr"/>
           <a:lstStyle/>
           <a:p>
             <a:pPr algn="l" indent="0" marL="0">
@@ -11108,17 +11459,17 @@
         </p:nvSpPr>
         <p:spPr>
           <a:xfrm>
-            <a:off x="7165294" y="2210716"/>
-            <a:ext cx="1114105" cy="495300"/>
-          </a:xfrm>
-          <a:prstGeom prst="rect">
-            <a:avLst/>
-          </a:prstGeom>
-          <a:noFill/>
-          <a:ln/>
-        </p:spPr>
-        <p:txBody>
-          <a:bodyPr wrap="square" lIns="38100" tIns="114300" rIns="114300" bIns="38100" rtlCol="0" anchor="ctr"/>
+            <a:off x="7165294" y="2403574"/>
+            <a:ext cx="1114105" cy="133350"/>
+          </a:xfrm>
+          <a:prstGeom prst="rect">
+            <a:avLst/>
+          </a:prstGeom>
+          <a:noFill/>
+          <a:ln/>
+        </p:spPr>
+        <p:txBody>
+          <a:bodyPr wrap="square" lIns="0" tIns="114300" rIns="114300" bIns="0" rtlCol="0" anchor="ctr"/>
           <a:lstStyle/>
           <a:p>
             <a:pPr algn="r" indent="0" marL="0">
@@ -11147,17 +11498,17 @@
         </p:nvSpPr>
         <p:spPr>
           <a:xfrm>
-            <a:off x="6257769" y="2706016"/>
-            <a:ext cx="968174" cy="504230"/>
-          </a:xfrm>
-          <a:prstGeom prst="rect">
-            <a:avLst/>
-          </a:prstGeom>
-          <a:noFill/>
-          <a:ln/>
-        </p:spPr>
-        <p:txBody>
-          <a:bodyPr wrap="square" lIns="38100" tIns="114300" rIns="114300" bIns="38100" rtlCol="0" anchor="ctr"/>
+            <a:off x="6257769" y="2905720"/>
+            <a:ext cx="968174" cy="133350"/>
+          </a:xfrm>
+          <a:prstGeom prst="rect">
+            <a:avLst/>
+          </a:prstGeom>
+          <a:noFill/>
+          <a:ln/>
+        </p:spPr>
+        <p:txBody>
+          <a:bodyPr wrap="square" lIns="0" tIns="114300" rIns="114300" bIns="0" rtlCol="0" anchor="ctr"/>
           <a:lstStyle/>
           <a:p>
             <a:pPr algn="l" indent="0" marL="0">
@@ -11186,17 +11537,17 @@
         </p:nvSpPr>
         <p:spPr>
           <a:xfrm>
-            <a:off x="7165294" y="2706016"/>
-            <a:ext cx="1114105" cy="504230"/>
-          </a:xfrm>
-          <a:prstGeom prst="rect">
-            <a:avLst/>
-          </a:prstGeom>
-          <a:noFill/>
-          <a:ln/>
-        </p:spPr>
-        <p:txBody>
-          <a:bodyPr wrap="square" lIns="38100" tIns="114300" rIns="114300" bIns="38100" rtlCol="0" anchor="ctr"/>
+            <a:off x="7165294" y="2905720"/>
+            <a:ext cx="1114105" cy="133350"/>
+          </a:xfrm>
+          <a:prstGeom prst="rect">
+            <a:avLst/>
+          </a:prstGeom>
+          <a:noFill/>
+          <a:ln/>
+        </p:spPr>
+        <p:txBody>
+          <a:bodyPr wrap="square" lIns="0" tIns="114300" rIns="114300" bIns="0" rtlCol="0" anchor="ctr"/>
           <a:lstStyle/>
           <a:p>
             <a:pPr algn="r" indent="0" marL="0">
@@ -11225,17 +11576,17 @@
         </p:nvSpPr>
         <p:spPr>
           <a:xfrm>
-            <a:off x="8245686" y="2706016"/>
-            <a:ext cx="1157486" cy="504230"/>
-          </a:xfrm>
-          <a:prstGeom prst="rect">
-            <a:avLst/>
-          </a:prstGeom>
-          <a:noFill/>
-          <a:ln/>
-        </p:spPr>
-        <p:txBody>
-          <a:bodyPr wrap="square" lIns="38100" tIns="114300" rIns="114300" bIns="38100" rtlCol="0" anchor="ctr"/>
+            <a:off x="8245686" y="2905720"/>
+            <a:ext cx="1157486" cy="133350"/>
+          </a:xfrm>
+          <a:prstGeom prst="rect">
+            <a:avLst/>
+          </a:prstGeom>
+          <a:noFill/>
+          <a:ln/>
+        </p:spPr>
+        <p:txBody>
+          <a:bodyPr wrap="square" lIns="0" tIns="114300" rIns="114300" bIns="0" rtlCol="0" anchor="ctr"/>
           <a:lstStyle/>
           <a:p>
             <a:pPr algn="r" indent="0" marL="0">
@@ -11264,17 +11615,17 @@
         </p:nvSpPr>
         <p:spPr>
           <a:xfrm>
-            <a:off x="6257769" y="3210246"/>
-            <a:ext cx="968174" cy="504230"/>
-          </a:xfrm>
-          <a:prstGeom prst="rect">
-            <a:avLst/>
-          </a:prstGeom>
-          <a:noFill/>
-          <a:ln/>
-        </p:spPr>
-        <p:txBody>
-          <a:bodyPr wrap="square" lIns="38100" tIns="114300" rIns="114300" bIns="38100" rtlCol="0" anchor="ctr"/>
+            <a:off x="6257769" y="3409950"/>
+            <a:ext cx="968174" cy="133350"/>
+          </a:xfrm>
+          <a:prstGeom prst="rect">
+            <a:avLst/>
+          </a:prstGeom>
+          <a:noFill/>
+          <a:ln/>
+        </p:spPr>
+        <p:txBody>
+          <a:bodyPr wrap="square" lIns="0" tIns="114300" rIns="114300" bIns="0" rtlCol="0" anchor="ctr"/>
           <a:lstStyle/>
           <a:p>
             <a:pPr algn="l" indent="0" marL="0">
@@ -11303,17 +11654,17 @@
         </p:nvSpPr>
         <p:spPr>
           <a:xfrm>
-            <a:off x="7165294" y="3210246"/>
-            <a:ext cx="1114105" cy="504230"/>
-          </a:xfrm>
-          <a:prstGeom prst="rect">
-            <a:avLst/>
-          </a:prstGeom>
-          <a:noFill/>
-          <a:ln/>
-        </p:spPr>
-        <p:txBody>
-          <a:bodyPr wrap="square" lIns="38100" tIns="114300" rIns="114300" bIns="38100" rtlCol="0" anchor="ctr"/>
+            <a:off x="7165294" y="3409950"/>
+            <a:ext cx="1114105" cy="133350"/>
+          </a:xfrm>
+          <a:prstGeom prst="rect">
+            <a:avLst/>
+          </a:prstGeom>
+          <a:noFill/>
+          <a:ln/>
+        </p:spPr>
+        <p:txBody>
+          <a:bodyPr wrap="square" lIns="0" tIns="114300" rIns="114300" bIns="0" rtlCol="0" anchor="ctr"/>
           <a:lstStyle/>
           <a:p>
             <a:pPr algn="r" indent="0" marL="0">
@@ -11342,17 +11693,17 @@
         </p:nvSpPr>
         <p:spPr>
           <a:xfrm>
-            <a:off x="8245686" y="3210246"/>
-            <a:ext cx="1157486" cy="504230"/>
-          </a:xfrm>
-          <a:prstGeom prst="rect">
-            <a:avLst/>
-          </a:prstGeom>
-          <a:noFill/>
-          <a:ln/>
-        </p:spPr>
-        <p:txBody>
-          <a:bodyPr wrap="square" lIns="38100" tIns="114300" rIns="114300" bIns="38100" rtlCol="0" anchor="ctr"/>
+            <a:off x="8245686" y="3409950"/>
+            <a:ext cx="1157486" cy="133350"/>
+          </a:xfrm>
+          <a:prstGeom prst="rect">
+            <a:avLst/>
+          </a:prstGeom>
+          <a:noFill/>
+          <a:ln/>
+        </p:spPr>
+        <p:txBody>
+          <a:bodyPr wrap="square" lIns="0" tIns="114300" rIns="114300" bIns="0" rtlCol="0" anchor="ctr"/>
           <a:lstStyle/>
           <a:p>
             <a:pPr algn="r" indent="0" marL="0">
@@ -11381,17 +11732,17 @@
         </p:nvSpPr>
         <p:spPr>
           <a:xfrm>
-            <a:off x="9370044" y="3210246"/>
-            <a:ext cx="1137405" cy="504230"/>
-          </a:xfrm>
-          <a:prstGeom prst="rect">
-            <a:avLst/>
-          </a:prstGeom>
-          <a:noFill/>
-          <a:ln/>
-        </p:spPr>
-        <p:txBody>
-          <a:bodyPr wrap="square" lIns="38100" tIns="114300" rIns="114300" bIns="38100" rtlCol="0" anchor="ctr"/>
+            <a:off x="9370044" y="3386138"/>
+            <a:ext cx="1137405" cy="133350"/>
+          </a:xfrm>
+          <a:prstGeom prst="rect">
+            <a:avLst/>
+          </a:prstGeom>
+          <a:noFill/>
+          <a:ln/>
+        </p:spPr>
+        <p:txBody>
+          <a:bodyPr wrap="square" lIns="0" tIns="114300" rIns="114300" bIns="0" rtlCol="0" anchor="ctr"/>
           <a:lstStyle/>
           <a:p>
             <a:pPr algn="r" indent="0" marL="0">
@@ -11420,17 +11771,17 @@
         </p:nvSpPr>
         <p:spPr>
           <a:xfrm>
-            <a:off x="6257769" y="3714475"/>
-            <a:ext cx="968174" cy="504230"/>
-          </a:xfrm>
-          <a:prstGeom prst="rect">
-            <a:avLst/>
-          </a:prstGeom>
-          <a:noFill/>
-          <a:ln/>
-        </p:spPr>
-        <p:txBody>
-          <a:bodyPr wrap="square" lIns="38100" tIns="114300" rIns="114300" bIns="38100" rtlCol="0" anchor="ctr"/>
+            <a:off x="6257769" y="3914180"/>
+            <a:ext cx="968174" cy="133350"/>
+          </a:xfrm>
+          <a:prstGeom prst="rect">
+            <a:avLst/>
+          </a:prstGeom>
+          <a:noFill/>
+          <a:ln/>
+        </p:spPr>
+        <p:txBody>
+          <a:bodyPr wrap="square" lIns="0" tIns="114300" rIns="114300" bIns="0" rtlCol="0" anchor="ctr"/>
           <a:lstStyle/>
           <a:p>
             <a:pPr algn="l" indent="0" marL="0">
@@ -11459,17 +11810,17 @@
         </p:nvSpPr>
         <p:spPr>
           <a:xfrm>
-            <a:off x="7165294" y="3714475"/>
-            <a:ext cx="1114105" cy="504230"/>
-          </a:xfrm>
-          <a:prstGeom prst="rect">
-            <a:avLst/>
-          </a:prstGeom>
-          <a:noFill/>
-          <a:ln/>
-        </p:spPr>
-        <p:txBody>
-          <a:bodyPr wrap="square" lIns="38100" tIns="114300" rIns="114300" bIns="38100" rtlCol="0" anchor="ctr"/>
+            <a:off x="7165294" y="3914180"/>
+            <a:ext cx="1114105" cy="133350"/>
+          </a:xfrm>
+          <a:prstGeom prst="rect">
+            <a:avLst/>
+          </a:prstGeom>
+          <a:noFill/>
+          <a:ln/>
+        </p:spPr>
+        <p:txBody>
+          <a:bodyPr wrap="square" lIns="0" tIns="114300" rIns="114300" bIns="0" rtlCol="0" anchor="ctr"/>
           <a:lstStyle/>
           <a:p>
             <a:pPr algn="r" indent="0" marL="0">
@@ -11498,17 +11849,17 @@
         </p:nvSpPr>
         <p:spPr>
           <a:xfrm>
-            <a:off x="8245686" y="3714475"/>
-            <a:ext cx="1157486" cy="504230"/>
-          </a:xfrm>
-          <a:prstGeom prst="rect">
-            <a:avLst/>
-          </a:prstGeom>
-          <a:noFill/>
-          <a:ln/>
-        </p:spPr>
-        <p:txBody>
-          <a:bodyPr wrap="square" lIns="38100" tIns="114300" rIns="114300" bIns="38100" rtlCol="0" anchor="ctr"/>
+            <a:off x="8245686" y="3914180"/>
+            <a:ext cx="1157486" cy="133350"/>
+          </a:xfrm>
+          <a:prstGeom prst="rect">
+            <a:avLst/>
+          </a:prstGeom>
+          <a:noFill/>
+          <a:ln/>
+        </p:spPr>
+        <p:txBody>
+          <a:bodyPr wrap="square" lIns="0" tIns="114300" rIns="114300" bIns="0" rtlCol="0" anchor="ctr"/>
           <a:lstStyle/>
           <a:p>
             <a:pPr algn="r" indent="0" marL="0">
@@ -11537,17 +11888,17 @@
         </p:nvSpPr>
         <p:spPr>
           <a:xfrm>
-            <a:off x="6257769" y="4218705"/>
-            <a:ext cx="968174" cy="504230"/>
-          </a:xfrm>
-          <a:prstGeom prst="rect">
-            <a:avLst/>
-          </a:prstGeom>
-          <a:noFill/>
-          <a:ln/>
-        </p:spPr>
-        <p:txBody>
-          <a:bodyPr wrap="square" lIns="38100" tIns="114300" rIns="114300" bIns="38100" rtlCol="0" anchor="ctr"/>
+            <a:off x="6257769" y="4418409"/>
+            <a:ext cx="968174" cy="133350"/>
+          </a:xfrm>
+          <a:prstGeom prst="rect">
+            <a:avLst/>
+          </a:prstGeom>
+          <a:noFill/>
+          <a:ln/>
+        </p:spPr>
+        <p:txBody>
+          <a:bodyPr wrap="square" lIns="0" tIns="114300" rIns="114300" bIns="0" rtlCol="0" anchor="ctr"/>
           <a:lstStyle/>
           <a:p>
             <a:pPr algn="l" indent="0" marL="0">
@@ -11576,17 +11927,17 @@
         </p:nvSpPr>
         <p:spPr>
           <a:xfrm>
-            <a:off x="8245686" y="4218705"/>
-            <a:ext cx="1157486" cy="504230"/>
-          </a:xfrm>
-          <a:prstGeom prst="rect">
-            <a:avLst/>
-          </a:prstGeom>
-          <a:noFill/>
-          <a:ln/>
-        </p:spPr>
-        <p:txBody>
-          <a:bodyPr wrap="square" lIns="38100" tIns="114300" rIns="114300" bIns="38100" rtlCol="0" anchor="ctr"/>
+            <a:off x="8245686" y="4418409"/>
+            <a:ext cx="1157486" cy="133350"/>
+          </a:xfrm>
+          <a:prstGeom prst="rect">
+            <a:avLst/>
+          </a:prstGeom>
+          <a:noFill/>
+          <a:ln/>
+        </p:spPr>
+        <p:txBody>
+          <a:bodyPr wrap="square" lIns="0" tIns="114300" rIns="114300" bIns="0" rtlCol="0" anchor="ctr"/>
           <a:lstStyle/>
           <a:p>
             <a:pPr algn="r" indent="0" marL="0">
@@ -11615,17 +11966,17 @@
         </p:nvSpPr>
         <p:spPr>
           <a:xfrm>
-            <a:off x="6257769" y="4722935"/>
-            <a:ext cx="968174" cy="504230"/>
-          </a:xfrm>
-          <a:prstGeom prst="rect">
-            <a:avLst/>
-          </a:prstGeom>
-          <a:noFill/>
-          <a:ln/>
-        </p:spPr>
-        <p:txBody>
-          <a:bodyPr wrap="square" lIns="38100" tIns="114300" rIns="114300" bIns="38100" rtlCol="0" anchor="ctr"/>
+            <a:off x="6257769" y="4922639"/>
+            <a:ext cx="968174" cy="133350"/>
+          </a:xfrm>
+          <a:prstGeom prst="rect">
+            <a:avLst/>
+          </a:prstGeom>
+          <a:noFill/>
+          <a:ln/>
+        </p:spPr>
+        <p:txBody>
+          <a:bodyPr wrap="square" lIns="0" tIns="114300" rIns="114300" bIns="0" rtlCol="0" anchor="ctr"/>
           <a:lstStyle/>
           <a:p>
             <a:pPr algn="l" indent="0" marL="0">
@@ -11654,17 +12005,17 @@
         </p:nvSpPr>
         <p:spPr>
           <a:xfrm>
-            <a:off x="8245686" y="4722935"/>
-            <a:ext cx="1157486" cy="504230"/>
-          </a:xfrm>
-          <a:prstGeom prst="rect">
-            <a:avLst/>
-          </a:prstGeom>
-          <a:noFill/>
-          <a:ln/>
-        </p:spPr>
-        <p:txBody>
-          <a:bodyPr wrap="square" lIns="38100" tIns="114300" rIns="114300" bIns="38100" rtlCol="0" anchor="ctr"/>
+            <a:off x="8245686" y="4922639"/>
+            <a:ext cx="1157486" cy="133350"/>
+          </a:xfrm>
+          <a:prstGeom prst="rect">
+            <a:avLst/>
+          </a:prstGeom>
+          <a:noFill/>
+          <a:ln/>
+        </p:spPr>
+        <p:txBody>
+          <a:bodyPr wrap="square" lIns="0" tIns="114300" rIns="114300" bIns="0" rtlCol="0" anchor="ctr"/>
           <a:lstStyle/>
           <a:p>
             <a:pPr algn="r" indent="0" marL="0">
@@ -11693,17 +12044,17 @@
         </p:nvSpPr>
         <p:spPr>
           <a:xfrm>
-            <a:off x="8245686" y="5227164"/>
-            <a:ext cx="1157486" cy="459879"/>
-          </a:xfrm>
-          <a:prstGeom prst="rect">
-            <a:avLst/>
-          </a:prstGeom>
-          <a:noFill/>
-          <a:ln/>
-        </p:spPr>
-        <p:txBody>
-          <a:bodyPr wrap="square" lIns="38100" tIns="114300" rIns="114300" bIns="38100" rtlCol="0" anchor="ctr"/>
+            <a:off x="8245686" y="5407075"/>
+            <a:ext cx="1157486" cy="133350"/>
+          </a:xfrm>
+          <a:prstGeom prst="rect">
+            <a:avLst/>
+          </a:prstGeom>
+          <a:noFill/>
+          <a:ln/>
+        </p:spPr>
+        <p:txBody>
+          <a:bodyPr wrap="square" lIns="0" tIns="114300" rIns="114300" bIns="0" rtlCol="0" anchor="ctr"/>
           <a:lstStyle/>
           <a:p>
             <a:pPr algn="r" indent="0" marL="0">
@@ -11732,17 +12083,17 @@
         </p:nvSpPr>
         <p:spPr>
           <a:xfrm>
-            <a:off x="9370044" y="5227164"/>
-            <a:ext cx="1137405" cy="459879"/>
-          </a:xfrm>
-          <a:prstGeom prst="rect">
-            <a:avLst/>
-          </a:prstGeom>
-          <a:noFill/>
-          <a:ln/>
-        </p:spPr>
-        <p:txBody>
-          <a:bodyPr wrap="square" lIns="38100" tIns="114300" rIns="114300" bIns="38100" rtlCol="0" anchor="ctr"/>
+            <a:off x="9370044" y="5407075"/>
+            <a:ext cx="1137405" cy="133350"/>
+          </a:xfrm>
+          <a:prstGeom prst="rect">
+            <a:avLst/>
+          </a:prstGeom>
+          <a:noFill/>
+          <a:ln/>
+        </p:spPr>
+        <p:txBody>
+          <a:bodyPr wrap="square" lIns="0" tIns="114300" rIns="114300" bIns="0" rtlCol="0" anchor="ctr"/>
           <a:lstStyle/>
           <a:p>
             <a:pPr algn="r" indent="0" marL="0">
@@ -11810,17 +12161,17 @@
         </p:nvSpPr>
         <p:spPr>
           <a:xfrm>
-            <a:off x="2460041" y="2210716"/>
-            <a:ext cx="614076" cy="495300"/>
-          </a:xfrm>
-          <a:prstGeom prst="rect">
-            <a:avLst/>
-          </a:prstGeom>
-          <a:noFill/>
-          <a:ln/>
-        </p:spPr>
-        <p:txBody>
-          <a:bodyPr wrap="square" lIns="38100" tIns="114300" rIns="114300" bIns="38100" rtlCol="0" anchor="ctr"/>
+            <a:off x="2460041" y="2403574"/>
+            <a:ext cx="614076" cy="133350"/>
+          </a:xfrm>
+          <a:prstGeom prst="rect">
+            <a:avLst/>
+          </a:prstGeom>
+          <a:noFill/>
+          <a:ln/>
+        </p:spPr>
+        <p:txBody>
+          <a:bodyPr wrap="square" lIns="0" tIns="114300" rIns="114300" bIns="0" rtlCol="0" anchor="ctr"/>
           <a:lstStyle/>
           <a:p>
             <a:pPr algn="r" indent="0" marL="0">
@@ -11849,17 +12200,17 @@
         </p:nvSpPr>
         <p:spPr>
           <a:xfrm>
-            <a:off x="2460041" y="2706016"/>
-            <a:ext cx="614076" cy="504230"/>
-          </a:xfrm>
-          <a:prstGeom prst="rect">
-            <a:avLst/>
-          </a:prstGeom>
-          <a:noFill/>
-          <a:ln/>
-        </p:spPr>
-        <p:txBody>
-          <a:bodyPr wrap="square" lIns="38100" tIns="114300" rIns="114300" bIns="38100" rtlCol="0" anchor="ctr"/>
+            <a:off x="2460041" y="2905720"/>
+            <a:ext cx="614076" cy="133350"/>
+          </a:xfrm>
+          <a:prstGeom prst="rect">
+            <a:avLst/>
+          </a:prstGeom>
+          <a:noFill/>
+          <a:ln/>
+        </p:spPr>
+        <p:txBody>
+          <a:bodyPr wrap="square" lIns="0" tIns="114300" rIns="114300" bIns="0" rtlCol="0" anchor="ctr"/>
           <a:lstStyle/>
           <a:p>
             <a:pPr algn="r" indent="0" marL="0">
@@ -11888,17 +12239,17 @@
         </p:nvSpPr>
         <p:spPr>
           <a:xfrm>
-            <a:off x="2460041" y="3210246"/>
-            <a:ext cx="614076" cy="504230"/>
-          </a:xfrm>
-          <a:prstGeom prst="rect">
-            <a:avLst/>
-          </a:prstGeom>
-          <a:noFill/>
-          <a:ln/>
-        </p:spPr>
-        <p:txBody>
-          <a:bodyPr wrap="square" lIns="38100" tIns="114300" rIns="114300" bIns="38100" rtlCol="0" anchor="ctr"/>
+            <a:off x="2460041" y="3409950"/>
+            <a:ext cx="614076" cy="133350"/>
+          </a:xfrm>
+          <a:prstGeom prst="rect">
+            <a:avLst/>
+          </a:prstGeom>
+          <a:noFill/>
+          <a:ln/>
+        </p:spPr>
+        <p:txBody>
+          <a:bodyPr wrap="square" lIns="0" tIns="114300" rIns="114300" bIns="0" rtlCol="0" anchor="ctr"/>
           <a:lstStyle/>
           <a:p>
             <a:pPr algn="r" indent="0" marL="0">
@@ -11927,17 +12278,17 @@
         </p:nvSpPr>
         <p:spPr>
           <a:xfrm>
-            <a:off x="2460041" y="3714475"/>
-            <a:ext cx="614076" cy="504230"/>
-          </a:xfrm>
-          <a:prstGeom prst="rect">
-            <a:avLst/>
-          </a:prstGeom>
-          <a:noFill/>
-          <a:ln/>
-        </p:spPr>
-        <p:txBody>
-          <a:bodyPr wrap="square" lIns="38100" tIns="114300" rIns="114300" bIns="38100" rtlCol="0" anchor="ctr"/>
+            <a:off x="2460041" y="3914180"/>
+            <a:ext cx="614076" cy="133350"/>
+          </a:xfrm>
+          <a:prstGeom prst="rect">
+            <a:avLst/>
+          </a:prstGeom>
+          <a:noFill/>
+          <a:ln/>
+        </p:spPr>
+        <p:txBody>
+          <a:bodyPr wrap="square" lIns="0" tIns="114300" rIns="114300" bIns="0" rtlCol="0" anchor="ctr"/>
           <a:lstStyle/>
           <a:p>
             <a:pPr algn="r" indent="0" marL="0">
@@ -11966,17 +12317,17 @@
         </p:nvSpPr>
         <p:spPr>
           <a:xfrm>
-            <a:off x="1490284" y="4218705"/>
-            <a:ext cx="987642" cy="504230"/>
-          </a:xfrm>
-          <a:prstGeom prst="rect">
-            <a:avLst/>
-          </a:prstGeom>
-          <a:noFill/>
-          <a:ln/>
-        </p:spPr>
-        <p:txBody>
-          <a:bodyPr wrap="square" lIns="38100" tIns="114300" rIns="114300" bIns="38100" rtlCol="0" anchor="ctr"/>
+            <a:off x="1490284" y="4418409"/>
+            <a:ext cx="987642" cy="133350"/>
+          </a:xfrm>
+          <a:prstGeom prst="rect">
+            <a:avLst/>
+          </a:prstGeom>
+          <a:noFill/>
+          <a:ln/>
+        </p:spPr>
+        <p:txBody>
+          <a:bodyPr wrap="square" lIns="0" tIns="114300" rIns="114300" bIns="0" rtlCol="0" anchor="ctr"/>
           <a:lstStyle/>
           <a:p>
             <a:pPr algn="r" indent="0" marL="0">
@@ -12005,17 +12356,17 @@
         </p:nvSpPr>
         <p:spPr>
           <a:xfrm>
-            <a:off x="2460041" y="4218705"/>
-            <a:ext cx="614076" cy="504230"/>
-          </a:xfrm>
-          <a:prstGeom prst="rect">
-            <a:avLst/>
-          </a:prstGeom>
-          <a:noFill/>
-          <a:ln/>
-        </p:spPr>
-        <p:txBody>
-          <a:bodyPr wrap="square" lIns="38100" tIns="114300" rIns="114300" bIns="38100" rtlCol="0" anchor="ctr"/>
+            <a:off x="2460041" y="4418409"/>
+            <a:ext cx="614076" cy="133350"/>
+          </a:xfrm>
+          <a:prstGeom prst="rect">
+            <a:avLst/>
+          </a:prstGeom>
+          <a:noFill/>
+          <a:ln/>
+        </p:spPr>
+        <p:txBody>
+          <a:bodyPr wrap="square" lIns="0" tIns="114300" rIns="114300" bIns="0" rtlCol="0" anchor="ctr"/>
           <a:lstStyle/>
           <a:p>
             <a:pPr algn="r" indent="0" marL="0">
@@ -12044,17 +12395,17 @@
         </p:nvSpPr>
         <p:spPr>
           <a:xfrm>
-            <a:off x="1490284" y="4722935"/>
-            <a:ext cx="987642" cy="504230"/>
-          </a:xfrm>
-          <a:prstGeom prst="rect">
-            <a:avLst/>
-          </a:prstGeom>
-          <a:noFill/>
-          <a:ln/>
-        </p:spPr>
-        <p:txBody>
-          <a:bodyPr wrap="square" lIns="38100" tIns="114300" rIns="114300" bIns="38100" rtlCol="0" anchor="ctr"/>
+            <a:off x="1490284" y="4922639"/>
+            <a:ext cx="987642" cy="133350"/>
+          </a:xfrm>
+          <a:prstGeom prst="rect">
+            <a:avLst/>
+          </a:prstGeom>
+          <a:noFill/>
+          <a:ln/>
+        </p:spPr>
+        <p:txBody>
+          <a:bodyPr wrap="square" lIns="0" tIns="114300" rIns="114300" bIns="0" rtlCol="0" anchor="ctr"/>
           <a:lstStyle/>
           <a:p>
             <a:pPr algn="r" indent="0" marL="0">
@@ -12083,17 +12434,17 @@
         </p:nvSpPr>
         <p:spPr>
           <a:xfrm>
-            <a:off x="2460041" y="4722935"/>
-            <a:ext cx="614076" cy="504230"/>
-          </a:xfrm>
-          <a:prstGeom prst="rect">
-            <a:avLst/>
-          </a:prstGeom>
-          <a:noFill/>
-          <a:ln/>
-        </p:spPr>
-        <p:txBody>
-          <a:bodyPr wrap="square" lIns="38100" tIns="114300" rIns="114300" bIns="38100" rtlCol="0" anchor="ctr"/>
+            <a:off x="2460041" y="4922639"/>
+            <a:ext cx="614076" cy="133350"/>
+          </a:xfrm>
+          <a:prstGeom prst="rect">
+            <a:avLst/>
+          </a:prstGeom>
+          <a:noFill/>
+          <a:ln/>
+        </p:spPr>
+        <p:txBody>
+          <a:bodyPr wrap="square" lIns="0" tIns="114300" rIns="114300" bIns="0" rtlCol="0" anchor="ctr"/>
           <a:lstStyle/>
           <a:p>
             <a:pPr algn="r" indent="0" marL="0">
@@ -12122,17 +12473,17 @@
         </p:nvSpPr>
         <p:spPr>
           <a:xfrm>
-            <a:off x="8245686" y="2210716"/>
-            <a:ext cx="1157486" cy="495300"/>
-          </a:xfrm>
-          <a:prstGeom prst="rect">
-            <a:avLst/>
-          </a:prstGeom>
-          <a:noFill/>
-          <a:ln/>
-        </p:spPr>
-        <p:txBody>
-          <a:bodyPr wrap="square" lIns="38100" tIns="114300" rIns="114300" bIns="38100" rtlCol="0" anchor="ctr"/>
+            <a:off x="8245686" y="2403574"/>
+            <a:ext cx="1157486" cy="133350"/>
+          </a:xfrm>
+          <a:prstGeom prst="rect">
+            <a:avLst/>
+          </a:prstGeom>
+          <a:noFill/>
+          <a:ln/>
+        </p:spPr>
+        <p:txBody>
+          <a:bodyPr wrap="square" lIns="0" tIns="114300" rIns="114300" bIns="0" rtlCol="0" anchor="ctr"/>
           <a:lstStyle/>
           <a:p>
             <a:pPr algn="r" indent="0" marL="0">
@@ -12161,17 +12512,17 @@
         </p:nvSpPr>
         <p:spPr>
           <a:xfrm>
-            <a:off x="9370044" y="2210716"/>
-            <a:ext cx="1137405" cy="495300"/>
-          </a:xfrm>
-          <a:prstGeom prst="rect">
-            <a:avLst/>
-          </a:prstGeom>
-          <a:noFill/>
-          <a:ln/>
-        </p:spPr>
-        <p:txBody>
-          <a:bodyPr wrap="square" lIns="38100" tIns="114300" rIns="114300" bIns="38100" rtlCol="0" anchor="ctr"/>
+            <a:off x="9370044" y="2379762"/>
+            <a:ext cx="1137405" cy="133350"/>
+          </a:xfrm>
+          <a:prstGeom prst="rect">
+            <a:avLst/>
+          </a:prstGeom>
+          <a:noFill/>
+          <a:ln/>
+        </p:spPr>
+        <p:txBody>
+          <a:bodyPr wrap="square" lIns="0" tIns="114300" rIns="114300" bIns="0" rtlCol="0" anchor="ctr"/>
           <a:lstStyle/>
           <a:p>
             <a:pPr algn="r" indent="0" marL="0">
@@ -12200,17 +12551,17 @@
         </p:nvSpPr>
         <p:spPr>
           <a:xfrm>
-            <a:off x="9370044" y="2706016"/>
-            <a:ext cx="1137405" cy="504230"/>
-          </a:xfrm>
-          <a:prstGeom prst="rect">
-            <a:avLst/>
-          </a:prstGeom>
-          <a:noFill/>
-          <a:ln/>
-        </p:spPr>
-        <p:txBody>
-          <a:bodyPr wrap="square" lIns="38100" tIns="114300" rIns="114300" bIns="38100" rtlCol="0" anchor="ctr"/>
+            <a:off x="9370044" y="2881908"/>
+            <a:ext cx="1137405" cy="133350"/>
+          </a:xfrm>
+          <a:prstGeom prst="rect">
+            <a:avLst/>
+          </a:prstGeom>
+          <a:noFill/>
+          <a:ln/>
+        </p:spPr>
+        <p:txBody>
+          <a:bodyPr wrap="square" lIns="0" tIns="114300" rIns="114300" bIns="0" rtlCol="0" anchor="ctr"/>
           <a:lstStyle/>
           <a:p>
             <a:pPr algn="r" indent="0" marL="0">
@@ -12239,17 +12590,17 @@
         </p:nvSpPr>
         <p:spPr>
           <a:xfrm>
-            <a:off x="9370044" y="3714475"/>
-            <a:ext cx="1137405" cy="504230"/>
-          </a:xfrm>
-          <a:prstGeom prst="rect">
-            <a:avLst/>
-          </a:prstGeom>
-          <a:noFill/>
-          <a:ln/>
-        </p:spPr>
-        <p:txBody>
-          <a:bodyPr wrap="square" lIns="38100" tIns="114300" rIns="114300" bIns="38100" rtlCol="0" anchor="ctr"/>
+            <a:off x="9370044" y="3890367"/>
+            <a:ext cx="1137405" cy="133350"/>
+          </a:xfrm>
+          <a:prstGeom prst="rect">
+            <a:avLst/>
+          </a:prstGeom>
+          <a:noFill/>
+          <a:ln/>
+        </p:spPr>
+        <p:txBody>
+          <a:bodyPr wrap="square" lIns="0" tIns="114300" rIns="114300" bIns="0" rtlCol="0" anchor="ctr"/>
           <a:lstStyle/>
           <a:p>
             <a:pPr algn="r" indent="0" marL="0">
@@ -12278,17 +12629,17 @@
         </p:nvSpPr>
         <p:spPr>
           <a:xfrm>
-            <a:off x="7165294" y="4218705"/>
-            <a:ext cx="1114105" cy="504230"/>
-          </a:xfrm>
-          <a:prstGeom prst="rect">
-            <a:avLst/>
-          </a:prstGeom>
-          <a:noFill/>
-          <a:ln/>
-        </p:spPr>
-        <p:txBody>
-          <a:bodyPr wrap="square" lIns="38100" tIns="114300" rIns="114300" bIns="38100" rtlCol="0" anchor="ctr"/>
+            <a:off x="7165294" y="4418409"/>
+            <a:ext cx="1114105" cy="133350"/>
+          </a:xfrm>
+          <a:prstGeom prst="rect">
+            <a:avLst/>
+          </a:prstGeom>
+          <a:noFill/>
+          <a:ln/>
+        </p:spPr>
+        <p:txBody>
+          <a:bodyPr wrap="square" lIns="0" tIns="114300" rIns="114300" bIns="0" rtlCol="0" anchor="ctr"/>
           <a:lstStyle/>
           <a:p>
             <a:pPr algn="r" indent="0" marL="0">
@@ -12317,17 +12668,17 @@
         </p:nvSpPr>
         <p:spPr>
           <a:xfrm>
-            <a:off x="9370044" y="4218705"/>
-            <a:ext cx="1137405" cy="504230"/>
-          </a:xfrm>
-          <a:prstGeom prst="rect">
-            <a:avLst/>
-          </a:prstGeom>
-          <a:noFill/>
-          <a:ln/>
-        </p:spPr>
-        <p:txBody>
-          <a:bodyPr wrap="square" lIns="38100" tIns="114300" rIns="114300" bIns="38100" rtlCol="0" anchor="ctr"/>
+            <a:off x="9370044" y="4394597"/>
+            <a:ext cx="1137405" cy="133350"/>
+          </a:xfrm>
+          <a:prstGeom prst="rect">
+            <a:avLst/>
+          </a:prstGeom>
+          <a:noFill/>
+          <a:ln/>
+        </p:spPr>
+        <p:txBody>
+          <a:bodyPr wrap="square" lIns="0" tIns="114300" rIns="114300" bIns="0" rtlCol="0" anchor="ctr"/>
           <a:lstStyle/>
           <a:p>
             <a:pPr algn="r" indent="0" marL="0">
@@ -12356,17 +12707,17 @@
         </p:nvSpPr>
         <p:spPr>
           <a:xfrm>
-            <a:off x="7165294" y="4722935"/>
-            <a:ext cx="1114105" cy="504230"/>
-          </a:xfrm>
-          <a:prstGeom prst="rect">
-            <a:avLst/>
-          </a:prstGeom>
-          <a:noFill/>
-          <a:ln/>
-        </p:spPr>
-        <p:txBody>
-          <a:bodyPr wrap="square" lIns="38100" tIns="114300" rIns="114300" bIns="38100" rtlCol="0" anchor="ctr"/>
+            <a:off x="7165294" y="4922639"/>
+            <a:ext cx="1114105" cy="133350"/>
+          </a:xfrm>
+          <a:prstGeom prst="rect">
+            <a:avLst/>
+          </a:prstGeom>
+          <a:noFill/>
+          <a:ln/>
+        </p:spPr>
+        <p:txBody>
+          <a:bodyPr wrap="square" lIns="0" tIns="114300" rIns="114300" bIns="0" rtlCol="0" anchor="ctr"/>
           <a:lstStyle/>
           <a:p>
             <a:pPr algn="r" indent="0" marL="0">
@@ -12395,17 +12746,17 @@
         </p:nvSpPr>
         <p:spPr>
           <a:xfrm>
-            <a:off x="9370044" y="4722935"/>
-            <a:ext cx="1137405" cy="504230"/>
-          </a:xfrm>
-          <a:prstGeom prst="rect">
-            <a:avLst/>
-          </a:prstGeom>
-          <a:noFill/>
-          <a:ln/>
-        </p:spPr>
-        <p:txBody>
-          <a:bodyPr wrap="square" lIns="38100" tIns="114300" rIns="114300" bIns="38100" rtlCol="0" anchor="ctr"/>
+            <a:off x="9370044" y="4898827"/>
+            <a:ext cx="1137405" cy="133350"/>
+          </a:xfrm>
+          <a:prstGeom prst="rect">
+            <a:avLst/>
+          </a:prstGeom>
+          <a:noFill/>
+          <a:ln/>
+        </p:spPr>
+        <p:txBody>
+          <a:bodyPr wrap="square" lIns="0" tIns="114300" rIns="114300" bIns="0" rtlCol="0" anchor="ctr"/>
           <a:lstStyle/>
           <a:p>
             <a:pPr algn="r" indent="0" marL="0">
